--- a/documents/aliaksei_malashonak_sbs_thesis_defence.pptx
+++ b/documents/aliaksei_malashonak_sbs_thesis_defence.pptx
@@ -6,35 +6,37 @@
     <p:sldMasterId id="2147483660" r:id="rId2"/>
   </p:sldMasterIdLst>
   <p:notesMasterIdLst>
-    <p:notesMasterId r:id="rId29"/>
+    <p:notesMasterId r:id="rId31"/>
   </p:notesMasterIdLst>
   <p:sldIdLst>
     <p:sldId id="256" r:id="rId3"/>
-    <p:sldId id="257" r:id="rId4"/>
+    <p:sldId id="331" r:id="rId4"/>
     <p:sldId id="295" r:id="rId5"/>
-    <p:sldId id="283" r:id="rId6"/>
+    <p:sldId id="337" r:id="rId6"/>
     <p:sldId id="306" r:id="rId7"/>
-    <p:sldId id="293" r:id="rId8"/>
-    <p:sldId id="285" r:id="rId9"/>
-    <p:sldId id="286" r:id="rId10"/>
-    <p:sldId id="287" r:id="rId11"/>
-    <p:sldId id="319" r:id="rId12"/>
-    <p:sldId id="320" r:id="rId13"/>
-    <p:sldId id="289" r:id="rId14"/>
-    <p:sldId id="290" r:id="rId15"/>
-    <p:sldId id="291" r:id="rId16"/>
-    <p:sldId id="292" r:id="rId17"/>
-    <p:sldId id="307" r:id="rId18"/>
-    <p:sldId id="308" r:id="rId19"/>
-    <p:sldId id="312" r:id="rId20"/>
-    <p:sldId id="296" r:id="rId21"/>
-    <p:sldId id="297" r:id="rId22"/>
-    <p:sldId id="298" r:id="rId23"/>
-    <p:sldId id="299" r:id="rId24"/>
-    <p:sldId id="300" r:id="rId25"/>
-    <p:sldId id="258" r:id="rId26"/>
-    <p:sldId id="259" r:id="rId27"/>
-    <p:sldId id="301" r:id="rId28"/>
+    <p:sldId id="258" r:id="rId8"/>
+    <p:sldId id="259" r:id="rId9"/>
+    <p:sldId id="293" r:id="rId10"/>
+    <p:sldId id="285" r:id="rId11"/>
+    <p:sldId id="286" r:id="rId12"/>
+    <p:sldId id="287" r:id="rId13"/>
+    <p:sldId id="326" r:id="rId14"/>
+    <p:sldId id="319" r:id="rId15"/>
+    <p:sldId id="320" r:id="rId16"/>
+    <p:sldId id="290" r:id="rId17"/>
+    <p:sldId id="291" r:id="rId18"/>
+    <p:sldId id="292" r:id="rId19"/>
+    <p:sldId id="307" r:id="rId20"/>
+    <p:sldId id="327" r:id="rId21"/>
+    <p:sldId id="308" r:id="rId22"/>
+    <p:sldId id="312" r:id="rId23"/>
+    <p:sldId id="296" r:id="rId24"/>
+    <p:sldId id="297" r:id="rId25"/>
+    <p:sldId id="299" r:id="rId26"/>
+    <p:sldId id="298" r:id="rId27"/>
+    <p:sldId id="300" r:id="rId28"/>
+    <p:sldId id="301" r:id="rId29"/>
+    <p:sldId id="289" r:id="rId30"/>
   </p:sldIdLst>
   <p:sldSz cx="12192000" cy="6858000"/>
   <p:notesSz cx="6858000" cy="9144000"/>
@@ -139,17 +141,19 @@
         <p14:section name="Presentation" id="{26A4F00B-8F60-4812-A353-35E7FF8B4CAD}">
           <p14:sldIdLst>
             <p14:sldId id="256"/>
-            <p14:sldId id="257"/>
+            <p14:sldId id="331"/>
             <p14:sldId id="295"/>
-            <p14:sldId id="283"/>
+            <p14:sldId id="337"/>
             <p14:sldId id="306"/>
+            <p14:sldId id="258"/>
+            <p14:sldId id="259"/>
             <p14:sldId id="293"/>
             <p14:sldId id="285"/>
             <p14:sldId id="286"/>
             <p14:sldId id="287"/>
+            <p14:sldId id="326"/>
             <p14:sldId id="319"/>
             <p14:sldId id="320"/>
-            <p14:sldId id="289"/>
             <p14:sldId id="290"/>
             <p14:sldId id="291"/>
             <p14:sldId id="292"/>
@@ -158,16 +162,16 @@
         <p14:section name="Appendix" id="{804BA528-8A9E-42B5-823B-31D6B4ED8C94}">
           <p14:sldIdLst>
             <p14:sldId id="307"/>
+            <p14:sldId id="327"/>
             <p14:sldId id="308"/>
             <p14:sldId id="312"/>
             <p14:sldId id="296"/>
             <p14:sldId id="297"/>
+            <p14:sldId id="299"/>
             <p14:sldId id="298"/>
-            <p14:sldId id="299"/>
             <p14:sldId id="300"/>
-            <p14:sldId id="258"/>
-            <p14:sldId id="259"/>
             <p14:sldId id="301"/>
+            <p14:sldId id="289"/>
           </p14:sldIdLst>
         </p14:section>
       </p14:sectionLst>
@@ -184,18 +188,26 @@
   <pc:docChgLst>
     <pc:chgData name="Alexey Malashonak" userId="52025583bffa8bdb" providerId="LiveId" clId="{11C5FCC3-8D8A-4B24-8FB4-6BCED8BE98B1}"/>
     <pc:docChg chg="undo custSel addSld delSld modSld sldOrd addMainMaster addSection modSection">
-      <pc:chgData name="Alexey Malashonak" userId="52025583bffa8bdb" providerId="LiveId" clId="{11C5FCC3-8D8A-4B24-8FB4-6BCED8BE98B1}" dt="2026-08-31T09:56:29.943" v="1394" actId="1076"/>
+      <pc:chgData name="Alexey Malashonak" userId="52025583bffa8bdb" providerId="LiveId" clId="{11C5FCC3-8D8A-4B24-8FB4-6BCED8BE98B1}" dt="2026-09-01T22:01:13.949" v="2464" actId="207"/>
       <pc:docMkLst>
         <pc:docMk/>
       </pc:docMkLst>
       <pc:sldChg chg="modSp mod">
-        <pc:chgData name="Alexey Malashonak" userId="52025583bffa8bdb" providerId="LiveId" clId="{11C5FCC3-8D8A-4B24-8FB4-6BCED8BE98B1}" dt="2026-08-31T09:55:22.253" v="1390" actId="20577"/>
+        <pc:chgData name="Alexey Malashonak" userId="52025583bffa8bdb" providerId="LiveId" clId="{11C5FCC3-8D8A-4B24-8FB4-6BCED8BE98B1}" dt="2026-09-01T19:11:33.304" v="1564" actId="27636"/>
         <pc:sldMkLst>
           <pc:docMk/>
           <pc:sldMk cId="3087419212" sldId="256"/>
         </pc:sldMkLst>
         <pc:spChg chg="mod">
-          <ac:chgData name="Alexey Malashonak" userId="52025583bffa8bdb" providerId="LiveId" clId="{11C5FCC3-8D8A-4B24-8FB4-6BCED8BE98B1}" dt="2026-08-31T09:54:58.970" v="1384" actId="14100"/>
+          <ac:chgData name="Alexey Malashonak" userId="52025583bffa8bdb" providerId="LiveId" clId="{11C5FCC3-8D8A-4B24-8FB4-6BCED8BE98B1}" dt="2026-09-01T19:11:31.641" v="1562" actId="14100"/>
+          <ac:spMkLst>
+            <pc:docMk/>
+            <pc:sldMk cId="3087419212" sldId="256"/>
+            <ac:spMk id="2" creationId="{CC63AAD0-4F22-964B-836B-9424F41DB0A3}"/>
+          </ac:spMkLst>
+        </pc:spChg>
+        <pc:spChg chg="mod">
+          <ac:chgData name="Alexey Malashonak" userId="52025583bffa8bdb" providerId="LiveId" clId="{11C5FCC3-8D8A-4B24-8FB4-6BCED8BE98B1}" dt="2026-09-01T19:11:33.304" v="1564" actId="27636"/>
           <ac:spMkLst>
             <pc:docMk/>
             <pc:sldMk cId="3087419212" sldId="256"/>
@@ -203,7 +215,7 @@
           </ac:spMkLst>
         </pc:spChg>
         <pc:spChg chg="mod">
-          <ac:chgData name="Alexey Malashonak" userId="52025583bffa8bdb" providerId="LiveId" clId="{11C5FCC3-8D8A-4B24-8FB4-6BCED8BE98B1}" dt="2026-08-31T09:55:22.253" v="1390" actId="20577"/>
+          <ac:chgData name="Alexey Malashonak" userId="52025583bffa8bdb" providerId="LiveId" clId="{11C5FCC3-8D8A-4B24-8FB4-6BCED8BE98B1}" dt="2026-09-01T19:11:22.527" v="1560" actId="255"/>
           <ac:spMkLst>
             <pc:docMk/>
             <pc:sldMk cId="3087419212" sldId="256"/>
@@ -211,18 +223,26 @@
           </ac:spMkLst>
         </pc:spChg>
       </pc:sldChg>
-      <pc:sldChg chg="addSp delSp modSp mod">
-        <pc:chgData name="Alexey Malashonak" userId="52025583bffa8bdb" providerId="LiveId" clId="{11C5FCC3-8D8A-4B24-8FB4-6BCED8BE98B1}" dt="2026-08-31T09:55:50.824" v="1391" actId="14100"/>
+      <pc:sldChg chg="addSp delSp modSp del mod">
+        <pc:chgData name="Alexey Malashonak" userId="52025583bffa8bdb" providerId="LiveId" clId="{11C5FCC3-8D8A-4B24-8FB4-6BCED8BE98B1}" dt="2026-09-01T20:50:18.866" v="2095" actId="47"/>
         <pc:sldMkLst>
           <pc:docMk/>
           <pc:sldMk cId="3410717024" sldId="257"/>
         </pc:sldMkLst>
         <pc:spChg chg="mod">
-          <ac:chgData name="Alexey Malashonak" userId="52025583bffa8bdb" providerId="LiveId" clId="{11C5FCC3-8D8A-4B24-8FB4-6BCED8BE98B1}" dt="2026-08-31T09:55:50.824" v="1391" actId="14100"/>
+          <ac:chgData name="Alexey Malashonak" userId="52025583bffa8bdb" providerId="LiveId" clId="{11C5FCC3-8D8A-4B24-8FB4-6BCED8BE98B1}" dt="2026-09-01T19:03:25.617" v="1396" actId="113"/>
           <ac:spMkLst>
             <pc:docMk/>
             <pc:sldMk cId="3410717024" sldId="257"/>
             <ac:spMk id="3" creationId="{395D3EC4-46A1-A411-92FC-D6D6575EFB2C}"/>
+          </ac:spMkLst>
+        </pc:spChg>
+        <pc:spChg chg="mod">
+          <ac:chgData name="Alexey Malashonak" userId="52025583bffa8bdb" providerId="LiveId" clId="{11C5FCC3-8D8A-4B24-8FB4-6BCED8BE98B1}" dt="2026-09-01T19:03:20.735" v="1395" actId="207"/>
+          <ac:spMkLst>
+            <pc:docMk/>
+            <pc:sldMk cId="3410717024" sldId="257"/>
+            <ac:spMk id="7" creationId="{0A9D9A38-4DD4-29BF-C7E2-E1F48C541DC3}"/>
           </ac:spMkLst>
         </pc:spChg>
         <pc:spChg chg="add del mod">
@@ -234,18 +254,26 @@
           </ac:spMkLst>
         </pc:spChg>
       </pc:sldChg>
-      <pc:sldChg chg="modSp mod">
-        <pc:chgData name="Alexey Malashonak" userId="52025583bffa8bdb" providerId="LiveId" clId="{11C5FCC3-8D8A-4B24-8FB4-6BCED8BE98B1}" dt="2026-08-31T09:52:21.645" v="1359" actId="20577"/>
+      <pc:sldChg chg="addSp modSp mod ord">
+        <pc:chgData name="Alexey Malashonak" userId="52025583bffa8bdb" providerId="LiveId" clId="{11C5FCC3-8D8A-4B24-8FB4-6BCED8BE98B1}" dt="2026-09-01T21:37:06.365" v="2190" actId="13926"/>
         <pc:sldMkLst>
           <pc:docMk/>
           <pc:sldMk cId="0" sldId="258"/>
         </pc:sldMkLst>
         <pc:spChg chg="mod">
-          <ac:chgData name="Alexey Malashonak" userId="52025583bffa8bdb" providerId="LiveId" clId="{11C5FCC3-8D8A-4B24-8FB4-6BCED8BE98B1}" dt="2026-08-31T09:52:21.645" v="1359" actId="20577"/>
+          <ac:chgData name="Alexey Malashonak" userId="52025583bffa8bdb" providerId="LiveId" clId="{11C5FCC3-8D8A-4B24-8FB4-6BCED8BE98B1}" dt="2026-09-01T21:37:06.365" v="2190" actId="13926"/>
           <ac:spMkLst>
             <pc:docMk/>
             <pc:sldMk cId="0" sldId="258"/>
             <ac:spMk id="2" creationId="{00000000-0000-0000-0000-000000000000}"/>
+          </ac:spMkLst>
+        </pc:spChg>
+        <pc:spChg chg="add mod">
+          <ac:chgData name="Alexey Malashonak" userId="52025583bffa8bdb" providerId="LiveId" clId="{11C5FCC3-8D8A-4B24-8FB4-6BCED8BE98B1}" dt="2026-09-01T20:50:07.099" v="2092" actId="1076"/>
+          <ac:spMkLst>
+            <pc:docMk/>
+            <pc:sldMk cId="0" sldId="258"/>
+            <ac:spMk id="4" creationId="{33EC0955-2D58-12B5-09B4-68172D090EF8}"/>
           </ac:spMkLst>
         </pc:spChg>
         <pc:picChg chg="mod">
@@ -257,29 +285,45 @@
           </ac:picMkLst>
         </pc:picChg>
       </pc:sldChg>
-      <pc:sldChg chg="modSp mod">
-        <pc:chgData name="Alexey Malashonak" userId="52025583bffa8bdb" providerId="LiveId" clId="{11C5FCC3-8D8A-4B24-8FB4-6BCED8BE98B1}" dt="2026-08-31T09:52:18.647" v="1355" actId="20577"/>
+      <pc:sldChg chg="addSp modSp mod ord">
+        <pc:chgData name="Alexey Malashonak" userId="52025583bffa8bdb" providerId="LiveId" clId="{11C5FCC3-8D8A-4B24-8FB4-6BCED8BE98B1}" dt="2026-09-01T21:37:19.774" v="2194" actId="13926"/>
         <pc:sldMkLst>
           <pc:docMk/>
           <pc:sldMk cId="0" sldId="259"/>
         </pc:sldMkLst>
         <pc:spChg chg="mod">
-          <ac:chgData name="Alexey Malashonak" userId="52025583bffa8bdb" providerId="LiveId" clId="{11C5FCC3-8D8A-4B24-8FB4-6BCED8BE98B1}" dt="2026-08-31T09:52:18.647" v="1355" actId="20577"/>
+          <ac:chgData name="Alexey Malashonak" userId="52025583bffa8bdb" providerId="LiveId" clId="{11C5FCC3-8D8A-4B24-8FB4-6BCED8BE98B1}" dt="2026-09-01T21:37:19.774" v="2194" actId="13926"/>
           <ac:spMkLst>
             <pc:docMk/>
             <pc:sldMk cId="0" sldId="259"/>
             <ac:spMk id="2" creationId="{00000000-0000-0000-0000-000000000000}"/>
           </ac:spMkLst>
         </pc:spChg>
+        <pc:spChg chg="add mod">
+          <ac:chgData name="Alexey Malashonak" userId="52025583bffa8bdb" providerId="LiveId" clId="{11C5FCC3-8D8A-4B24-8FB4-6BCED8BE98B1}" dt="2026-09-01T20:50:11.260" v="2094" actId="1076"/>
+          <ac:spMkLst>
+            <pc:docMk/>
+            <pc:sldMk cId="0" sldId="259"/>
+            <ac:spMk id="4" creationId="{1E82E37A-D89F-D190-864B-30C9A7D60878}"/>
+          </ac:spMkLst>
+        </pc:spChg>
       </pc:sldChg>
-      <pc:sldChg chg="modSp mod">
-        <pc:chgData name="Alexey Malashonak" userId="52025583bffa8bdb" providerId="LiveId" clId="{11C5FCC3-8D8A-4B24-8FB4-6BCED8BE98B1}" dt="2026-08-31T09:45:25.581" v="1228" actId="27636"/>
+      <pc:sldChg chg="modSp del mod">
+        <pc:chgData name="Alexey Malashonak" userId="52025583bffa8bdb" providerId="LiveId" clId="{11C5FCC3-8D8A-4B24-8FB4-6BCED8BE98B1}" dt="2026-09-01T21:55:33.273" v="2429"/>
         <pc:sldMkLst>
           <pc:docMk/>
           <pc:sldMk cId="3410717024" sldId="283"/>
         </pc:sldMkLst>
         <pc:spChg chg="mod">
-          <ac:chgData name="Alexey Malashonak" userId="52025583bffa8bdb" providerId="LiveId" clId="{11C5FCC3-8D8A-4B24-8FB4-6BCED8BE98B1}" dt="2026-08-31T09:45:25.581" v="1228" actId="27636"/>
+          <ac:chgData name="Alexey Malashonak" userId="52025583bffa8bdb" providerId="LiveId" clId="{11C5FCC3-8D8A-4B24-8FB4-6BCED8BE98B1}" dt="2026-09-01T21:41:07.111" v="2284" actId="20577"/>
+          <ac:spMkLst>
+            <pc:docMk/>
+            <pc:sldMk cId="3410717024" sldId="283"/>
+            <ac:spMk id="2" creationId="{090EAC2A-5706-C65F-88DE-7DA698789FBD}"/>
+          </ac:spMkLst>
+        </pc:spChg>
+        <pc:spChg chg="mod">
+          <ac:chgData name="Alexey Malashonak" userId="52025583bffa8bdb" providerId="LiveId" clId="{11C5FCC3-8D8A-4B24-8FB4-6BCED8BE98B1}" dt="2026-09-01T21:40:35.831" v="2280" actId="20577"/>
           <ac:spMkLst>
             <pc:docMk/>
             <pc:sldMk cId="3410717024" sldId="283"/>
@@ -287,6 +331,14 @@
           </ac:spMkLst>
         </pc:spChg>
         <pc:spChg chg="mod">
+          <ac:chgData name="Alexey Malashonak" userId="52025583bffa8bdb" providerId="LiveId" clId="{11C5FCC3-8D8A-4B24-8FB4-6BCED8BE98B1}" dt="2026-09-01T20:01:25.645" v="1791" actId="20577"/>
+          <ac:spMkLst>
+            <pc:docMk/>
+            <pc:sldMk cId="3410717024" sldId="283"/>
+            <ac:spMk id="6" creationId="{B0544AEE-8DFD-4FAA-A35A-0C032055A60E}"/>
+          </ac:spMkLst>
+        </pc:spChg>
+        <pc:spChg chg="mod">
           <ac:chgData name="Alexey Malashonak" userId="52025583bffa8bdb" providerId="LiveId" clId="{11C5FCC3-8D8A-4B24-8FB4-6BCED8BE98B1}" dt="2026-08-31T09:08:51.740" v="759" actId="1076"/>
           <ac:spMkLst>
             <pc:docMk/>
@@ -295,11 +347,19 @@
           </ac:spMkLst>
         </pc:spChg>
         <pc:spChg chg="mod">
-          <ac:chgData name="Alexey Malashonak" userId="52025583bffa8bdb" providerId="LiveId" clId="{11C5FCC3-8D8A-4B24-8FB4-6BCED8BE98B1}" dt="2026-08-31T09:08:47.427" v="758" actId="20577"/>
+          <ac:chgData name="Alexey Malashonak" userId="52025583bffa8bdb" providerId="LiveId" clId="{11C5FCC3-8D8A-4B24-8FB4-6BCED8BE98B1}" dt="2026-09-01T20:00:50.881" v="1780" actId="1076"/>
           <ac:spMkLst>
             <pc:docMk/>
             <pc:sldMk cId="3410717024" sldId="283"/>
             <ac:spMk id="11" creationId="{D98E9595-2CBD-A7A9-F151-70E3F46C619D}"/>
+          </ac:spMkLst>
+        </pc:spChg>
+        <pc:spChg chg="mod">
+          <ac:chgData name="Alexey Malashonak" userId="52025583bffa8bdb" providerId="LiveId" clId="{11C5FCC3-8D8A-4B24-8FB4-6BCED8BE98B1}" dt="2026-09-01T20:01:10.967" v="1783" actId="14100"/>
+          <ac:spMkLst>
+            <pc:docMk/>
+            <pc:sldMk cId="3410717024" sldId="283"/>
+            <ac:spMk id="12" creationId="{1000E2C5-E8DB-6610-5F60-23D8159BA5DD}"/>
           </ac:spMkLst>
         </pc:spChg>
       </pc:sldChg>
@@ -310,8 +370,8 @@
           <pc:sldMk cId="3410717024" sldId="284"/>
         </pc:sldMkLst>
       </pc:sldChg>
-      <pc:sldChg chg="addSp modSp mod setBg">
-        <pc:chgData name="Alexey Malashonak" userId="52025583bffa8bdb" providerId="LiveId" clId="{11C5FCC3-8D8A-4B24-8FB4-6BCED8BE98B1}" dt="2026-08-31T09:56:29.943" v="1394" actId="1076"/>
+      <pc:sldChg chg="addSp delSp modSp mod setBg">
+        <pc:chgData name="Alexey Malashonak" userId="52025583bffa8bdb" providerId="LiveId" clId="{11C5FCC3-8D8A-4B24-8FB4-6BCED8BE98B1}" dt="2026-09-01T21:39:58.728" v="2276" actId="1076"/>
         <pc:sldMkLst>
           <pc:docMk/>
           <pc:sldMk cId="3410717024" sldId="285"/>
@@ -325,7 +385,7 @@
           </ac:spMkLst>
         </pc:spChg>
         <pc:spChg chg="add mod">
-          <ac:chgData name="Alexey Malashonak" userId="52025583bffa8bdb" providerId="LiveId" clId="{11C5FCC3-8D8A-4B24-8FB4-6BCED8BE98B1}" dt="2026-08-31T09:46:29.983" v="1238" actId="27636"/>
+          <ac:chgData name="Alexey Malashonak" userId="52025583bffa8bdb" providerId="LiveId" clId="{11C5FCC3-8D8A-4B24-8FB4-6BCED8BE98B1}" dt="2026-09-01T21:39:53.898" v="2274" actId="1076"/>
           <ac:spMkLst>
             <pc:docMk/>
             <pc:sldMk cId="3410717024" sldId="285"/>
@@ -333,30 +393,62 @@
           </ac:spMkLst>
         </pc:spChg>
         <pc:spChg chg="add mod">
-          <ac:chgData name="Alexey Malashonak" userId="52025583bffa8bdb" providerId="LiveId" clId="{11C5FCC3-8D8A-4B24-8FB4-6BCED8BE98B1}" dt="2026-08-31T09:46:37.030" v="1240" actId="14100"/>
+          <ac:chgData name="Alexey Malashonak" userId="52025583bffa8bdb" providerId="LiveId" clId="{11C5FCC3-8D8A-4B24-8FB4-6BCED8BE98B1}" dt="2026-09-01T21:39:56.122" v="2275" actId="1076"/>
           <ac:spMkLst>
             <pc:docMk/>
             <pc:sldMk cId="3410717024" sldId="285"/>
             <ac:spMk id="4" creationId="{EFBB0AF2-1B43-A915-BB0C-5C5CD8EB40F9}"/>
           </ac:spMkLst>
         </pc:spChg>
-        <pc:picChg chg="mod">
-          <ac:chgData name="Alexey Malashonak" userId="52025583bffa8bdb" providerId="LiveId" clId="{11C5FCC3-8D8A-4B24-8FB4-6BCED8BE98B1}" dt="2026-08-31T09:56:29.943" v="1394" actId="1076"/>
+        <pc:spChg chg="add del mod">
+          <ac:chgData name="Alexey Malashonak" userId="52025583bffa8bdb" providerId="LiveId" clId="{11C5FCC3-8D8A-4B24-8FB4-6BCED8BE98B1}" dt="2026-09-01T21:39:47.394" v="2271" actId="22"/>
+          <ac:spMkLst>
+            <pc:docMk/>
+            <pc:sldMk cId="3410717024" sldId="285"/>
+            <ac:spMk id="6" creationId="{6DD17146-8300-8104-F5C1-134AF31AD336}"/>
+          </ac:spMkLst>
+        </pc:spChg>
+        <pc:spChg chg="add mod">
+          <ac:chgData name="Alexey Malashonak" userId="52025583bffa8bdb" providerId="LiveId" clId="{11C5FCC3-8D8A-4B24-8FB4-6BCED8BE98B1}" dt="2026-09-01T21:39:58.728" v="2276" actId="1076"/>
+          <ac:spMkLst>
+            <pc:docMk/>
+            <pc:sldMk cId="3410717024" sldId="285"/>
+            <ac:spMk id="7" creationId="{75F87BF3-6194-F21B-AFD3-1046D24CFB3E}"/>
+          </ac:spMkLst>
+        </pc:spChg>
+        <pc:picChg chg="del">
+          <ac:chgData name="Alexey Malashonak" userId="52025583bffa8bdb" providerId="LiveId" clId="{11C5FCC3-8D8A-4B24-8FB4-6BCED8BE98B1}" dt="2026-09-01T21:37:28.832" v="2195" actId="478"/>
+          <ac:picMkLst>
+            <pc:docMk/>
+            <pc:sldMk cId="3410717024" sldId="285"/>
+            <ac:picMk id="9" creationId="{5BB514F8-B97E-94B9-136B-BFB4CAFC9A8E}"/>
+          </ac:picMkLst>
+        </pc:picChg>
+        <pc:picChg chg="del mod">
+          <ac:chgData name="Alexey Malashonak" userId="52025583bffa8bdb" providerId="LiveId" clId="{11C5FCC3-8D8A-4B24-8FB4-6BCED8BE98B1}" dt="2026-09-01T21:37:31.757" v="2197" actId="478"/>
           <ac:picMkLst>
             <pc:docMk/>
             <pc:sldMk cId="3410717024" sldId="285"/>
             <ac:picMk id="10" creationId="{007F835B-730E-57B2-EC0A-3172FF98220A}"/>
           </ac:picMkLst>
         </pc:picChg>
+        <pc:picChg chg="add mod ord">
+          <ac:chgData name="Alexey Malashonak" userId="52025583bffa8bdb" providerId="LiveId" clId="{11C5FCC3-8D8A-4B24-8FB4-6BCED8BE98B1}" dt="2026-09-01T21:39:51.768" v="2273" actId="1076"/>
+          <ac:picMkLst>
+            <pc:docMk/>
+            <pc:sldMk cId="3410717024" sldId="285"/>
+            <ac:picMk id="11" creationId="{05FAD41C-F53F-E150-3D29-2598295F5D6E}"/>
+          </ac:picMkLst>
+        </pc:picChg>
       </pc:sldChg>
       <pc:sldChg chg="modSp mod">
-        <pc:chgData name="Alexey Malashonak" userId="52025583bffa8bdb" providerId="LiveId" clId="{11C5FCC3-8D8A-4B24-8FB4-6BCED8BE98B1}" dt="2026-08-31T09:45:15.658" v="1224" actId="27636"/>
+        <pc:chgData name="Alexey Malashonak" userId="52025583bffa8bdb" providerId="LiveId" clId="{11C5FCC3-8D8A-4B24-8FB4-6BCED8BE98B1}" dt="2026-09-01T21:53:00.201" v="2423" actId="20577"/>
         <pc:sldMkLst>
           <pc:docMk/>
           <pc:sldMk cId="3410717024" sldId="286"/>
         </pc:sldMkLst>
         <pc:spChg chg="mod">
-          <ac:chgData name="Alexey Malashonak" userId="52025583bffa8bdb" providerId="LiveId" clId="{11C5FCC3-8D8A-4B24-8FB4-6BCED8BE98B1}" dt="2026-08-31T08:59:53.656" v="546" actId="20577"/>
+          <ac:chgData name="Alexey Malashonak" userId="52025583bffa8bdb" providerId="LiveId" clId="{11C5FCC3-8D8A-4B24-8FB4-6BCED8BE98B1}" dt="2026-09-01T20:00:12.933" v="1748" actId="20577"/>
           <ac:spMkLst>
             <pc:docMk/>
             <pc:sldMk cId="3410717024" sldId="286"/>
@@ -364,7 +456,7 @@
           </ac:spMkLst>
         </pc:spChg>
         <pc:spChg chg="mod">
-          <ac:chgData name="Alexey Malashonak" userId="52025583bffa8bdb" providerId="LiveId" clId="{11C5FCC3-8D8A-4B24-8FB4-6BCED8BE98B1}" dt="2026-08-31T09:45:15.658" v="1224" actId="27636"/>
+          <ac:chgData name="Alexey Malashonak" userId="52025583bffa8bdb" providerId="LiveId" clId="{11C5FCC3-8D8A-4B24-8FB4-6BCED8BE98B1}" dt="2026-09-01T21:53:00.201" v="2423" actId="20577"/>
           <ac:spMkLst>
             <pc:docMk/>
             <pc:sldMk cId="3410717024" sldId="286"/>
@@ -373,13 +465,21 @@
         </pc:spChg>
       </pc:sldChg>
       <pc:sldChg chg="modSp mod">
-        <pc:chgData name="Alexey Malashonak" userId="52025583bffa8bdb" providerId="LiveId" clId="{11C5FCC3-8D8A-4B24-8FB4-6BCED8BE98B1}" dt="2026-08-31T09:45:17.981" v="1226" actId="27636"/>
+        <pc:chgData name="Alexey Malashonak" userId="52025583bffa8bdb" providerId="LiveId" clId="{11C5FCC3-8D8A-4B24-8FB4-6BCED8BE98B1}" dt="2026-09-01T21:52:44.585" v="2420" actId="108"/>
         <pc:sldMkLst>
           <pc:docMk/>
           <pc:sldMk cId="3410717024" sldId="287"/>
         </pc:sldMkLst>
         <pc:spChg chg="mod">
-          <ac:chgData name="Alexey Malashonak" userId="52025583bffa8bdb" providerId="LiveId" clId="{11C5FCC3-8D8A-4B24-8FB4-6BCED8BE98B1}" dt="2026-08-31T09:45:17.981" v="1226" actId="27636"/>
+          <ac:chgData name="Alexey Malashonak" userId="52025583bffa8bdb" providerId="LiveId" clId="{11C5FCC3-8D8A-4B24-8FB4-6BCED8BE98B1}" dt="2026-09-01T20:00:37.598" v="1779" actId="20577"/>
+          <ac:spMkLst>
+            <pc:docMk/>
+            <pc:sldMk cId="3410717024" sldId="287"/>
+            <ac:spMk id="2" creationId="{090EAC2A-5706-C65F-88DE-7DA698789FBD}"/>
+          </ac:spMkLst>
+        </pc:spChg>
+        <pc:spChg chg="mod">
+          <ac:chgData name="Alexey Malashonak" userId="52025583bffa8bdb" providerId="LiveId" clId="{11C5FCC3-8D8A-4B24-8FB4-6BCED8BE98B1}" dt="2026-09-01T21:52:44.585" v="2420" actId="108"/>
           <ac:spMkLst>
             <pc:docMk/>
             <pc:sldMk cId="3410717024" sldId="287"/>
@@ -394,14 +494,14 @@
           <pc:sldMk cId="3410717024" sldId="288"/>
         </pc:sldMkLst>
       </pc:sldChg>
-      <pc:sldChg chg="addSp delSp modSp mod">
-        <pc:chgData name="Alexey Malashonak" userId="52025583bffa8bdb" providerId="LiveId" clId="{11C5FCC3-8D8A-4B24-8FB4-6BCED8BE98B1}" dt="2026-08-31T09:44:47.191" v="1216" actId="20577"/>
+      <pc:sldChg chg="addSp delSp modSp mod ord">
+        <pc:chgData name="Alexey Malashonak" userId="52025583bffa8bdb" providerId="LiveId" clId="{11C5FCC3-8D8A-4B24-8FB4-6BCED8BE98B1}" dt="2026-09-01T21:56:00.149" v="2438" actId="20577"/>
         <pc:sldMkLst>
           <pc:docMk/>
           <pc:sldMk cId="3410717024" sldId="289"/>
         </pc:sldMkLst>
         <pc:spChg chg="mod">
-          <ac:chgData name="Alexey Malashonak" userId="52025583bffa8bdb" providerId="LiveId" clId="{11C5FCC3-8D8A-4B24-8FB4-6BCED8BE98B1}" dt="2026-08-31T09:42:26.282" v="1173" actId="20577"/>
+          <ac:chgData name="Alexey Malashonak" userId="52025583bffa8bdb" providerId="LiveId" clId="{11C5FCC3-8D8A-4B24-8FB4-6BCED8BE98B1}" dt="2026-09-01T21:56:00.149" v="2438" actId="20577"/>
           <ac:spMkLst>
             <pc:docMk/>
             <pc:sldMk cId="3410717024" sldId="289"/>
@@ -441,8 +541,8 @@
           </ac:spMkLst>
         </pc:spChg>
       </pc:sldChg>
-      <pc:sldChg chg="modSp mod">
-        <pc:chgData name="Alexey Malashonak" userId="52025583bffa8bdb" providerId="LiveId" clId="{11C5FCC3-8D8A-4B24-8FB4-6BCED8BE98B1}" dt="2026-08-31T09:45:05.683" v="1221" actId="27636"/>
+      <pc:sldChg chg="modSp mod ord">
+        <pc:chgData name="Alexey Malashonak" userId="52025583bffa8bdb" providerId="LiveId" clId="{11C5FCC3-8D8A-4B24-8FB4-6BCED8BE98B1}" dt="2026-09-01T20:26:40.476" v="1872"/>
         <pc:sldMkLst>
           <pc:docMk/>
           <pc:sldMk cId="3410717024" sldId="290"/>
@@ -456,12 +556,90 @@
           </ac:spMkLst>
         </pc:spChg>
       </pc:sldChg>
-      <pc:sldChg chg="modSp mod">
-        <pc:chgData name="Alexey Malashonak" userId="52025583bffa8bdb" providerId="LiveId" clId="{11C5FCC3-8D8A-4B24-8FB4-6BCED8BE98B1}" dt="2026-08-31T09:56:03.579" v="1392" actId="14100"/>
+      <pc:sldChg chg="addSp delSp modSp mod ord">
+        <pc:chgData name="Alexey Malashonak" userId="52025583bffa8bdb" providerId="LiveId" clId="{11C5FCC3-8D8A-4B24-8FB4-6BCED8BE98B1}" dt="2026-09-01T21:46:16.180" v="2355" actId="21"/>
+        <pc:sldMkLst>
+          <pc:docMk/>
+          <pc:sldMk cId="3410717024" sldId="291"/>
+        </pc:sldMkLst>
+        <pc:spChg chg="mod">
+          <ac:chgData name="Alexey Malashonak" userId="52025583bffa8bdb" providerId="LiveId" clId="{11C5FCC3-8D8A-4B24-8FB4-6BCED8BE98B1}" dt="2026-09-01T21:45:48.384" v="2351" actId="13926"/>
+          <ac:spMkLst>
+            <pc:docMk/>
+            <pc:sldMk cId="3410717024" sldId="291"/>
+            <ac:spMk id="3" creationId="{395D3EC4-46A1-A411-92FC-D6D6575EFB2C}"/>
+          </ac:spMkLst>
+        </pc:spChg>
+        <pc:spChg chg="add del">
+          <ac:chgData name="Alexey Malashonak" userId="52025583bffa8bdb" providerId="LiveId" clId="{11C5FCC3-8D8A-4B24-8FB4-6BCED8BE98B1}" dt="2026-09-01T21:06:38.055" v="2142" actId="22"/>
+          <ac:spMkLst>
+            <pc:docMk/>
+            <pc:sldMk cId="3410717024" sldId="291"/>
+            <ac:spMk id="5" creationId="{E7038B3B-6E2C-4121-376A-5CE413AD380F}"/>
+          </ac:spMkLst>
+        </pc:spChg>
+        <pc:spChg chg="add del mod">
+          <ac:chgData name="Alexey Malashonak" userId="52025583bffa8bdb" providerId="LiveId" clId="{11C5FCC3-8D8A-4B24-8FB4-6BCED8BE98B1}" dt="2026-09-01T21:46:16.180" v="2355" actId="21"/>
+          <ac:spMkLst>
+            <pc:docMk/>
+            <pc:sldMk cId="3410717024" sldId="291"/>
+            <ac:spMk id="7" creationId="{2D3496BB-C427-4BBE-1C07-51B4527EDC22}"/>
+          </ac:spMkLst>
+        </pc:spChg>
+        <pc:picChg chg="add del mod">
+          <ac:chgData name="Alexey Malashonak" userId="52025583bffa8bdb" providerId="LiveId" clId="{11C5FCC3-8D8A-4B24-8FB4-6BCED8BE98B1}" dt="2026-09-01T21:46:16.180" v="2355" actId="21"/>
+          <ac:picMkLst>
+            <pc:docMk/>
+            <pc:sldMk cId="3410717024" sldId="291"/>
+            <ac:picMk id="9" creationId="{EA63192B-95C8-7C90-17F0-192A2CEA3218}"/>
+          </ac:picMkLst>
+        </pc:picChg>
+      </pc:sldChg>
+      <pc:sldChg chg="addSp modSp mod">
+        <pc:chgData name="Alexey Malashonak" userId="52025583bffa8bdb" providerId="LiveId" clId="{11C5FCC3-8D8A-4B24-8FB4-6BCED8BE98B1}" dt="2026-09-01T21:46:23.901" v="2358" actId="14100"/>
+        <pc:sldMkLst>
+          <pc:docMk/>
+          <pc:sldMk cId="3410717024" sldId="292"/>
+        </pc:sldMkLst>
+        <pc:spChg chg="add mod">
+          <ac:chgData name="Alexey Malashonak" userId="52025583bffa8bdb" providerId="LiveId" clId="{11C5FCC3-8D8A-4B24-8FB4-6BCED8BE98B1}" dt="2026-09-01T21:46:23.901" v="2358" actId="14100"/>
+          <ac:spMkLst>
+            <pc:docMk/>
+            <pc:sldMk cId="3410717024" sldId="292"/>
+            <ac:spMk id="7" creationId="{2D3496BB-C427-4BBE-1C07-51B4527EDC22}"/>
+          </ac:spMkLst>
+        </pc:spChg>
+        <pc:picChg chg="add mod">
+          <ac:chgData name="Alexey Malashonak" userId="52025583bffa8bdb" providerId="LiveId" clId="{11C5FCC3-8D8A-4B24-8FB4-6BCED8BE98B1}" dt="2026-09-01T21:46:23.901" v="2358" actId="14100"/>
+          <ac:picMkLst>
+            <pc:docMk/>
+            <pc:sldMk cId="3410717024" sldId="292"/>
+            <ac:picMk id="9" creationId="{EA63192B-95C8-7C90-17F0-192A2CEA3218}"/>
+          </ac:picMkLst>
+        </pc:picChg>
+      </pc:sldChg>
+      <pc:sldChg chg="addSp delSp modSp mod">
+        <pc:chgData name="Alexey Malashonak" userId="52025583bffa8bdb" providerId="LiveId" clId="{11C5FCC3-8D8A-4B24-8FB4-6BCED8BE98B1}" dt="2026-09-01T20:49:55.051" v="2090" actId="478"/>
         <pc:sldMkLst>
           <pc:docMk/>
           <pc:sldMk cId="2991031542" sldId="293"/>
         </pc:sldMkLst>
+        <pc:spChg chg="add del mod">
+          <ac:chgData name="Alexey Malashonak" userId="52025583bffa8bdb" providerId="LiveId" clId="{11C5FCC3-8D8A-4B24-8FB4-6BCED8BE98B1}" dt="2026-09-01T20:49:55.051" v="2090" actId="478"/>
+          <ac:spMkLst>
+            <pc:docMk/>
+            <pc:sldMk cId="2991031542" sldId="293"/>
+            <ac:spMk id="3" creationId="{DC385FB4-E385-280A-6FE5-603C66639534}"/>
+          </ac:spMkLst>
+        </pc:spChg>
+        <pc:spChg chg="add mod">
+          <ac:chgData name="Alexey Malashonak" userId="52025583bffa8bdb" providerId="LiveId" clId="{11C5FCC3-8D8A-4B24-8FB4-6BCED8BE98B1}" dt="2026-09-01T20:49:51.613" v="2089" actId="1076"/>
+          <ac:spMkLst>
+            <pc:docMk/>
+            <pc:sldMk cId="2991031542" sldId="293"/>
+            <ac:spMk id="4" creationId="{0EE7BF99-EDD1-1E6A-3B82-249C3FC7D16A}"/>
+          </ac:spMkLst>
+        </pc:spChg>
         <pc:picChg chg="mod">
           <ac:chgData name="Alexey Malashonak" userId="52025583bffa8bdb" providerId="LiveId" clId="{11C5FCC3-8D8A-4B24-8FB4-6BCED8BE98B1}" dt="2026-08-31T09:56:03.579" v="1392" actId="14100"/>
           <ac:picMkLst>
@@ -502,8 +680,8 @@
           </ac:picMkLst>
         </pc:picChg>
       </pc:sldChg>
-      <pc:sldChg chg="modSp mod">
-        <pc:chgData name="Alexey Malashonak" userId="52025583bffa8bdb" providerId="LiveId" clId="{11C5FCC3-8D8A-4B24-8FB4-6BCED8BE98B1}" dt="2026-08-31T09:49:44.444" v="1274" actId="20577"/>
+      <pc:sldChg chg="addSp modSp mod">
+        <pc:chgData name="Alexey Malashonak" userId="52025583bffa8bdb" providerId="LiveId" clId="{11C5FCC3-8D8A-4B24-8FB4-6BCED8BE98B1}" dt="2026-09-01T20:49:41.988" v="2087" actId="1076"/>
         <pc:sldMkLst>
           <pc:docMk/>
           <pc:sldMk cId="2104700431" sldId="296"/>
@@ -516,6 +694,14 @@
             <ac:spMk id="2" creationId="{F8602237-DAD9-E594-3E62-B1A9ABD4ABEE}"/>
           </ac:spMkLst>
         </pc:spChg>
+        <pc:spChg chg="add mod">
+          <ac:chgData name="Alexey Malashonak" userId="52025583bffa8bdb" providerId="LiveId" clId="{11C5FCC3-8D8A-4B24-8FB4-6BCED8BE98B1}" dt="2026-09-01T20:49:41.988" v="2087" actId="1076"/>
+          <ac:spMkLst>
+            <pc:docMk/>
+            <pc:sldMk cId="2104700431" sldId="296"/>
+            <ac:spMk id="4" creationId="{6E16EFE2-CDB2-46C8-3C9F-85F4A4C2B238}"/>
+          </ac:spMkLst>
+        </pc:spChg>
         <pc:spChg chg="mod">
           <ac:chgData name="Alexey Malashonak" userId="52025583bffa8bdb" providerId="LiveId" clId="{11C5FCC3-8D8A-4B24-8FB4-6BCED8BE98B1}" dt="2026-08-31T09:48:08.272" v="1248" actId="2710"/>
           <ac:spMkLst>
@@ -533,7 +719,7 @@
           </ac:spMkLst>
         </pc:spChg>
         <pc:spChg chg="mod">
-          <ac:chgData name="Alexey Malashonak" userId="52025583bffa8bdb" providerId="LiveId" clId="{11C5FCC3-8D8A-4B24-8FB4-6BCED8BE98B1}" dt="2026-08-31T09:49:17.857" v="1260" actId="20577"/>
+          <ac:chgData name="Alexey Malashonak" userId="52025583bffa8bdb" providerId="LiveId" clId="{11C5FCC3-8D8A-4B24-8FB4-6BCED8BE98B1}" dt="2026-09-01T20:39:09.902" v="1980" actId="255"/>
           <ac:spMkLst>
             <pc:docMk/>
             <pc:sldMk cId="2104700431" sldId="296"/>
@@ -549,7 +735,7 @@
           </ac:picMkLst>
         </pc:picChg>
         <pc:picChg chg="mod">
-          <ac:chgData name="Alexey Malashonak" userId="52025583bffa8bdb" providerId="LiveId" clId="{11C5FCC3-8D8A-4B24-8FB4-6BCED8BE98B1}" dt="2026-08-31T09:48:22.461" v="1252" actId="14100"/>
+          <ac:chgData name="Alexey Malashonak" userId="52025583bffa8bdb" providerId="LiveId" clId="{11C5FCC3-8D8A-4B24-8FB4-6BCED8BE98B1}" dt="2026-09-01T20:48:45.185" v="2078" actId="1076"/>
           <ac:picMkLst>
             <pc:docMk/>
             <pc:sldMk cId="2104700431" sldId="296"/>
@@ -557,8 +743,8 @@
           </ac:picMkLst>
         </pc:picChg>
       </pc:sldChg>
-      <pc:sldChg chg="modSp mod">
-        <pc:chgData name="Alexey Malashonak" userId="52025583bffa8bdb" providerId="LiveId" clId="{11C5FCC3-8D8A-4B24-8FB4-6BCED8BE98B1}" dt="2026-08-31T09:49:50.642" v="1277" actId="20577"/>
+      <pc:sldChg chg="addSp delSp modSp mod">
+        <pc:chgData name="Alexey Malashonak" userId="52025583bffa8bdb" providerId="LiveId" clId="{11C5FCC3-8D8A-4B24-8FB4-6BCED8BE98B1}" dt="2026-09-01T20:49:32.876" v="2086" actId="1076"/>
         <pc:sldMkLst>
           <pc:docMk/>
           <pc:sldMk cId="204907885" sldId="297"/>
@@ -571,30 +757,62 @@
             <ac:spMk id="2" creationId="{70913560-5D50-E845-AFB4-EB74F0894A87}"/>
           </ac:spMkLst>
         </pc:spChg>
+        <pc:spChg chg="add del mod">
+          <ac:chgData name="Alexey Malashonak" userId="52025583bffa8bdb" providerId="LiveId" clId="{11C5FCC3-8D8A-4B24-8FB4-6BCED8BE98B1}" dt="2026-09-01T20:48:59.670" v="2082" actId="478"/>
+          <ac:spMkLst>
+            <pc:docMk/>
+            <pc:sldMk cId="204907885" sldId="297"/>
+            <ac:spMk id="4" creationId="{F458F3E6-5FC5-87A6-8F54-3DF824EA417F}"/>
+          </ac:spMkLst>
+        </pc:spChg>
+        <pc:spChg chg="add mod">
+          <ac:chgData name="Alexey Malashonak" userId="52025583bffa8bdb" providerId="LiveId" clId="{11C5FCC3-8D8A-4B24-8FB4-6BCED8BE98B1}" dt="2026-09-01T20:49:32.876" v="2086" actId="1076"/>
+          <ac:spMkLst>
+            <pc:docMk/>
+            <pc:sldMk cId="204907885" sldId="297"/>
+            <ac:spMk id="6" creationId="{CDD10683-8E10-BF22-2624-58B0D3149A7F}"/>
+          </ac:spMkLst>
+        </pc:spChg>
       </pc:sldChg>
-      <pc:sldChg chg="modSp mod">
-        <pc:chgData name="Alexey Malashonak" userId="52025583bffa8bdb" providerId="LiveId" clId="{11C5FCC3-8D8A-4B24-8FB4-6BCED8BE98B1}" dt="2026-08-31T09:50:04.181" v="1280" actId="20577"/>
+      <pc:sldChg chg="addSp delSp modSp mod">
+        <pc:chgData name="Alexey Malashonak" userId="52025583bffa8bdb" providerId="LiveId" clId="{11C5FCC3-8D8A-4B24-8FB4-6BCED8BE98B1}" dt="2026-09-01T21:55:43.636" v="2435" actId="20577"/>
         <pc:sldMkLst>
           <pc:docMk/>
           <pc:sldMk cId="145048705" sldId="298"/>
         </pc:sldMkLst>
         <pc:spChg chg="mod">
-          <ac:chgData name="Alexey Malashonak" userId="52025583bffa8bdb" providerId="LiveId" clId="{11C5FCC3-8D8A-4B24-8FB4-6BCED8BE98B1}" dt="2026-08-31T09:50:04.181" v="1280" actId="20577"/>
+          <ac:chgData name="Alexey Malashonak" userId="52025583bffa8bdb" providerId="LiveId" clId="{11C5FCC3-8D8A-4B24-8FB4-6BCED8BE98B1}" dt="2026-09-01T21:55:43.636" v="2435" actId="20577"/>
           <ac:spMkLst>
             <pc:docMk/>
             <pc:sldMk cId="145048705" sldId="298"/>
             <ac:spMk id="2" creationId="{A3074B05-256B-C455-1B9C-2B6D09A24EE1}"/>
           </ac:spMkLst>
         </pc:spChg>
+        <pc:spChg chg="add del mod">
+          <ac:chgData name="Alexey Malashonak" userId="52025583bffa8bdb" providerId="LiveId" clId="{11C5FCC3-8D8A-4B24-8FB4-6BCED8BE98B1}" dt="2026-09-01T20:49:09.565" v="2085" actId="478"/>
+          <ac:spMkLst>
+            <pc:docMk/>
+            <pc:sldMk cId="145048705" sldId="298"/>
+            <ac:spMk id="4" creationId="{36CB4A2A-74AF-DE2C-4417-505586B33861}"/>
+          </ac:spMkLst>
+        </pc:spChg>
+        <pc:spChg chg="add mod">
+          <ac:chgData name="Alexey Malashonak" userId="52025583bffa8bdb" providerId="LiveId" clId="{11C5FCC3-8D8A-4B24-8FB4-6BCED8BE98B1}" dt="2026-09-01T20:49:06.941" v="2084" actId="1076"/>
+          <ac:spMkLst>
+            <pc:docMk/>
+            <pc:sldMk cId="145048705" sldId="298"/>
+            <ac:spMk id="5" creationId="{0F5BFC0D-1266-BAED-BA2C-E32BD1766F29}"/>
+          </ac:spMkLst>
+        </pc:spChg>
       </pc:sldChg>
-      <pc:sldChg chg="modSp mod">
-        <pc:chgData name="Alexey Malashonak" userId="52025583bffa8bdb" providerId="LiveId" clId="{11C5FCC3-8D8A-4B24-8FB4-6BCED8BE98B1}" dt="2026-08-31T09:51:16.946" v="1299" actId="17032"/>
+      <pc:sldChg chg="modSp mod ord">
+        <pc:chgData name="Alexey Malashonak" userId="52025583bffa8bdb" providerId="LiveId" clId="{11C5FCC3-8D8A-4B24-8FB4-6BCED8BE98B1}" dt="2026-09-01T21:55:34.653" v="2434" actId="20577"/>
         <pc:sldMkLst>
           <pc:docMk/>
           <pc:sldMk cId="0" sldId="299"/>
         </pc:sldMkLst>
         <pc:spChg chg="mod">
-          <ac:chgData name="Alexey Malashonak" userId="52025583bffa8bdb" providerId="LiveId" clId="{11C5FCC3-8D8A-4B24-8FB4-6BCED8BE98B1}" dt="2026-08-31T09:50:08.775" v="1283" actId="20577"/>
+          <ac:chgData name="Alexey Malashonak" userId="52025583bffa8bdb" providerId="LiveId" clId="{11C5FCC3-8D8A-4B24-8FB4-6BCED8BE98B1}" dt="2026-09-01T21:55:34.653" v="2434" actId="20577"/>
           <ac:spMkLst>
             <pc:docMk/>
             <pc:sldMk cId="0" sldId="299"/>
@@ -634,7 +852,7 @@
           </ac:spMkLst>
         </pc:spChg>
         <pc:spChg chg="mod">
-          <ac:chgData name="Alexey Malashonak" userId="52025583bffa8bdb" providerId="LiveId" clId="{11C5FCC3-8D8A-4B24-8FB4-6BCED8BE98B1}" dt="2026-08-31T09:51:12.538" v="1298" actId="17032"/>
+          <ac:chgData name="Alexey Malashonak" userId="52025583bffa8bdb" providerId="LiveId" clId="{11C5FCC3-8D8A-4B24-8FB4-6BCED8BE98B1}" dt="2026-09-01T20:31:09.448" v="1952" actId="1076"/>
           <ac:spMkLst>
             <pc:docMk/>
             <pc:sldMk cId="0" sldId="299"/>
@@ -642,7 +860,7 @@
           </ac:spMkLst>
         </pc:spChg>
         <pc:spChg chg="mod">
-          <ac:chgData name="Alexey Malashonak" userId="52025583bffa8bdb" providerId="LiveId" clId="{11C5FCC3-8D8A-4B24-8FB4-6BCED8BE98B1}" dt="2026-08-31T09:51:12.538" v="1298" actId="17032"/>
+          <ac:chgData name="Alexey Malashonak" userId="52025583bffa8bdb" providerId="LiveId" clId="{11C5FCC3-8D8A-4B24-8FB4-6BCED8BE98B1}" dt="2026-09-01T20:30:56.257" v="1947" actId="1076"/>
           <ac:spMkLst>
             <pc:docMk/>
             <pc:sldMk cId="0" sldId="299"/>
@@ -650,7 +868,7 @@
           </ac:spMkLst>
         </pc:spChg>
         <pc:spChg chg="mod">
-          <ac:chgData name="Alexey Malashonak" userId="52025583bffa8bdb" providerId="LiveId" clId="{11C5FCC3-8D8A-4B24-8FB4-6BCED8BE98B1}" dt="2026-08-31T09:51:12.538" v="1298" actId="17032"/>
+          <ac:chgData name="Alexey Malashonak" userId="52025583bffa8bdb" providerId="LiveId" clId="{11C5FCC3-8D8A-4B24-8FB4-6BCED8BE98B1}" dt="2026-09-01T20:31:03.896" v="1950" actId="1076"/>
           <ac:spMkLst>
             <pc:docMk/>
             <pc:sldMk cId="0" sldId="299"/>
@@ -667,22 +885,94 @@
         </pc:spChg>
       </pc:sldChg>
       <pc:sldChg chg="modSp mod">
-        <pc:chgData name="Alexey Malashonak" userId="52025583bffa8bdb" providerId="LiveId" clId="{11C5FCC3-8D8A-4B24-8FB4-6BCED8BE98B1}" dt="2026-08-31T09:51:51.414" v="1329" actId="20577"/>
+        <pc:chgData name="Alexey Malashonak" userId="52025583bffa8bdb" providerId="LiveId" clId="{11C5FCC3-8D8A-4B24-8FB4-6BCED8BE98B1}" dt="2026-09-01T21:55:06.755" v="2425" actId="20577"/>
         <pc:sldMkLst>
           <pc:docMk/>
           <pc:sldMk cId="0" sldId="300"/>
         </pc:sldMkLst>
         <pc:spChg chg="mod">
-          <ac:chgData name="Alexey Malashonak" userId="52025583bffa8bdb" providerId="LiveId" clId="{11C5FCC3-8D8A-4B24-8FB4-6BCED8BE98B1}" dt="2026-08-31T09:51:51.414" v="1329" actId="20577"/>
+          <ac:chgData name="Alexey Malashonak" userId="52025583bffa8bdb" providerId="LiveId" clId="{11C5FCC3-8D8A-4B24-8FB4-6BCED8BE98B1}" dt="2026-09-01T21:55:06.755" v="2425" actId="20577"/>
           <ac:spMkLst>
             <pc:docMk/>
             <pc:sldMk cId="0" sldId="300"/>
             <ac:spMk id="2" creationId="{00000000-0000-0000-0000-000000000000}"/>
           </ac:spMkLst>
         </pc:spChg>
+        <pc:spChg chg="mod">
+          <ac:chgData name="Alexey Malashonak" userId="52025583bffa8bdb" providerId="LiveId" clId="{11C5FCC3-8D8A-4B24-8FB4-6BCED8BE98B1}" dt="2026-09-01T20:45:17.693" v="2030" actId="1076"/>
+          <ac:spMkLst>
+            <pc:docMk/>
+            <pc:sldMk cId="0" sldId="300"/>
+            <ac:spMk id="3" creationId="{00000000-0000-0000-0000-000000000000}"/>
+          </ac:spMkLst>
+        </pc:spChg>
+        <pc:spChg chg="mod">
+          <ac:chgData name="Alexey Malashonak" userId="52025583bffa8bdb" providerId="LiveId" clId="{11C5FCC3-8D8A-4B24-8FB4-6BCED8BE98B1}" dt="2026-09-01T20:45:17.693" v="2030" actId="1076"/>
+          <ac:spMkLst>
+            <pc:docMk/>
+            <pc:sldMk cId="0" sldId="300"/>
+            <ac:spMk id="4" creationId="{00000000-0000-0000-0000-000000000000}"/>
+          </ac:spMkLst>
+        </pc:spChg>
+        <pc:spChg chg="mod">
+          <ac:chgData name="Alexey Malashonak" userId="52025583bffa8bdb" providerId="LiveId" clId="{11C5FCC3-8D8A-4B24-8FB4-6BCED8BE98B1}" dt="2026-09-01T20:45:22.762" v="2031" actId="1076"/>
+          <ac:spMkLst>
+            <pc:docMk/>
+            <pc:sldMk cId="0" sldId="300"/>
+            <ac:spMk id="5" creationId="{00000000-0000-0000-0000-000000000000}"/>
+          </ac:spMkLst>
+        </pc:spChg>
+        <pc:spChg chg="mod">
+          <ac:chgData name="Alexey Malashonak" userId="52025583bffa8bdb" providerId="LiveId" clId="{11C5FCC3-8D8A-4B24-8FB4-6BCED8BE98B1}" dt="2026-09-01T20:45:17.693" v="2030" actId="1076"/>
+          <ac:spMkLst>
+            <pc:docMk/>
+            <pc:sldMk cId="0" sldId="300"/>
+            <ac:spMk id="6" creationId="{00000000-0000-0000-0000-000000000000}"/>
+          </ac:spMkLst>
+        </pc:spChg>
+        <pc:spChg chg="mod">
+          <ac:chgData name="Alexey Malashonak" userId="52025583bffa8bdb" providerId="LiveId" clId="{11C5FCC3-8D8A-4B24-8FB4-6BCED8BE98B1}" dt="2026-09-01T20:45:17.693" v="2030" actId="1076"/>
+          <ac:spMkLst>
+            <pc:docMk/>
+            <pc:sldMk cId="0" sldId="300"/>
+            <ac:spMk id="7" creationId="{00000000-0000-0000-0000-000000000000}"/>
+          </ac:spMkLst>
+        </pc:spChg>
+        <pc:spChg chg="mod">
+          <ac:chgData name="Alexey Malashonak" userId="52025583bffa8bdb" providerId="LiveId" clId="{11C5FCC3-8D8A-4B24-8FB4-6BCED8BE98B1}" dt="2026-09-01T20:45:26.070" v="2032" actId="1076"/>
+          <ac:spMkLst>
+            <pc:docMk/>
+            <pc:sldMk cId="0" sldId="300"/>
+            <ac:spMk id="8" creationId="{00000000-0000-0000-0000-000000000000}"/>
+          </ac:spMkLst>
+        </pc:spChg>
+        <pc:spChg chg="mod">
+          <ac:chgData name="Alexey Malashonak" userId="52025583bffa8bdb" providerId="LiveId" clId="{11C5FCC3-8D8A-4B24-8FB4-6BCED8BE98B1}" dt="2026-09-01T20:45:17.693" v="2030" actId="1076"/>
+          <ac:spMkLst>
+            <pc:docMk/>
+            <pc:sldMk cId="0" sldId="300"/>
+            <ac:spMk id="9" creationId="{00000000-0000-0000-0000-000000000000}"/>
+          </ac:spMkLst>
+        </pc:spChg>
+        <pc:spChg chg="mod">
+          <ac:chgData name="Alexey Malashonak" userId="52025583bffa8bdb" providerId="LiveId" clId="{11C5FCC3-8D8A-4B24-8FB4-6BCED8BE98B1}" dt="2026-09-01T20:45:17.693" v="2030" actId="1076"/>
+          <ac:spMkLst>
+            <pc:docMk/>
+            <pc:sldMk cId="0" sldId="300"/>
+            <ac:spMk id="10" creationId="{00000000-0000-0000-0000-000000000000}"/>
+          </ac:spMkLst>
+        </pc:spChg>
+        <pc:spChg chg="mod">
+          <ac:chgData name="Alexey Malashonak" userId="52025583bffa8bdb" providerId="LiveId" clId="{11C5FCC3-8D8A-4B24-8FB4-6BCED8BE98B1}" dt="2026-09-01T20:45:34.552" v="2033" actId="1076"/>
+          <ac:spMkLst>
+            <pc:docMk/>
+            <pc:sldMk cId="0" sldId="300"/>
+            <ac:spMk id="11" creationId="{00000000-0000-0000-0000-000000000000}"/>
+          </ac:spMkLst>
+        </pc:spChg>
       </pc:sldChg>
-      <pc:sldChg chg="modSp mod">
-        <pc:chgData name="Alexey Malashonak" userId="52025583bffa8bdb" providerId="LiveId" clId="{11C5FCC3-8D8A-4B24-8FB4-6BCED8BE98B1}" dt="2026-08-31T09:54:04.822" v="1379" actId="113"/>
+      <pc:sldChg chg="addSp delSp modSp mod">
+        <pc:chgData name="Alexey Malashonak" userId="52025583bffa8bdb" providerId="LiveId" clId="{11C5FCC3-8D8A-4B24-8FB4-6BCED8BE98B1}" dt="2026-09-01T21:48:06.686" v="2382" actId="478"/>
         <pc:sldMkLst>
           <pc:docMk/>
           <pc:sldMk cId="730449677" sldId="301"/>
@@ -711,8 +1001,8 @@
             <ac:spMk id="7" creationId="{24323253-08C3-996B-CE7D-5FE2DF8B1AD5}"/>
           </ac:spMkLst>
         </pc:spChg>
-        <pc:picChg chg="mod">
-          <ac:chgData name="Alexey Malashonak" userId="52025583bffa8bdb" providerId="LiveId" clId="{11C5FCC3-8D8A-4B24-8FB4-6BCED8BE98B1}" dt="2026-08-31T09:52:36.324" v="1362" actId="14100"/>
+        <pc:picChg chg="add del mod">
+          <ac:chgData name="Alexey Malashonak" userId="52025583bffa8bdb" providerId="LiveId" clId="{11C5FCC3-8D8A-4B24-8FB4-6BCED8BE98B1}" dt="2026-09-01T21:48:06.686" v="2382" actId="478"/>
           <ac:picMkLst>
             <pc:docMk/>
             <pc:sldMk cId="730449677" sldId="301"/>
@@ -756,14 +1046,14 @@
           <pc:sldMk cId="1885672780" sldId="305"/>
         </pc:sldMkLst>
       </pc:sldChg>
-      <pc:sldChg chg="modSp add mod">
-        <pc:chgData name="Alexey Malashonak" userId="52025583bffa8bdb" providerId="LiveId" clId="{11C5FCC3-8D8A-4B24-8FB4-6BCED8BE98B1}" dt="2026-08-31T09:46:57.226" v="1241" actId="207"/>
+      <pc:sldChg chg="addSp delSp modSp add mod">
+        <pc:chgData name="Alexey Malashonak" userId="52025583bffa8bdb" providerId="LiveId" clId="{11C5FCC3-8D8A-4B24-8FB4-6BCED8BE98B1}" dt="2026-09-01T20:29:05.818" v="1911" actId="1076"/>
         <pc:sldMkLst>
           <pc:docMk/>
           <pc:sldMk cId="1396353151" sldId="306"/>
         </pc:sldMkLst>
         <pc:spChg chg="mod">
-          <ac:chgData name="Alexey Malashonak" userId="52025583bffa8bdb" providerId="LiveId" clId="{11C5FCC3-8D8A-4B24-8FB4-6BCED8BE98B1}" dt="2026-08-31T09:46:57.226" v="1241" actId="207"/>
+          <ac:chgData name="Alexey Malashonak" userId="52025583bffa8bdb" providerId="LiveId" clId="{11C5FCC3-8D8A-4B24-8FB4-6BCED8BE98B1}" dt="2026-09-01T19:40:28.547" v="1629" actId="1076"/>
           <ac:spMkLst>
             <pc:docMk/>
             <pc:sldMk cId="1396353151" sldId="306"/>
@@ -779,7 +1069,7 @@
           </ac:spMkLst>
         </pc:spChg>
         <pc:spChg chg="mod">
-          <ac:chgData name="Alexey Malashonak" userId="52025583bffa8bdb" providerId="LiveId" clId="{11C5FCC3-8D8A-4B24-8FB4-6BCED8BE98B1}" dt="2026-08-31T09:46:57.226" v="1241" actId="207"/>
+          <ac:chgData name="Alexey Malashonak" userId="52025583bffa8bdb" providerId="LiveId" clId="{11C5FCC3-8D8A-4B24-8FB4-6BCED8BE98B1}" dt="2026-09-01T20:02:32.664" v="1792" actId="20577"/>
           <ac:spMkLst>
             <pc:docMk/>
             <pc:sldMk cId="1396353151" sldId="306"/>
@@ -787,7 +1077,7 @@
           </ac:spMkLst>
         </pc:spChg>
         <pc:spChg chg="mod">
-          <ac:chgData name="Alexey Malashonak" userId="52025583bffa8bdb" providerId="LiveId" clId="{11C5FCC3-8D8A-4B24-8FB4-6BCED8BE98B1}" dt="2026-08-31T09:46:57.226" v="1241" actId="207"/>
+          <ac:chgData name="Alexey Malashonak" userId="52025583bffa8bdb" providerId="LiveId" clId="{11C5FCC3-8D8A-4B24-8FB4-6BCED8BE98B1}" dt="2026-09-01T20:29:04.078" v="1910" actId="1076"/>
           <ac:spMkLst>
             <pc:docMk/>
             <pc:sldMk cId="1396353151" sldId="306"/>
@@ -802,30 +1092,38 @@
             <ac:spMk id="103" creationId="{00000000-0000-0000-0000-000000000000}"/>
           </ac:spMkLst>
         </pc:spChg>
-        <pc:spChg chg="mod">
-          <ac:chgData name="Alexey Malashonak" userId="52025583bffa8bdb" providerId="LiveId" clId="{11C5FCC3-8D8A-4B24-8FB4-6BCED8BE98B1}" dt="2026-08-31T09:06:27.020" v="698" actId="207"/>
+        <pc:spChg chg="add del mod">
+          <ac:chgData name="Alexey Malashonak" userId="52025583bffa8bdb" providerId="LiveId" clId="{11C5FCC3-8D8A-4B24-8FB4-6BCED8BE98B1}" dt="2026-09-01T19:40:29.906" v="1632" actId="478"/>
           <ac:spMkLst>
             <pc:docMk/>
             <pc:sldMk cId="1396353151" sldId="306"/>
             <ac:spMk id="110" creationId="{00000000-0000-0000-0000-000000000000}"/>
           </ac:spMkLst>
         </pc:spChg>
-        <pc:spChg chg="mod">
-          <ac:chgData name="Alexey Malashonak" userId="52025583bffa8bdb" providerId="LiveId" clId="{11C5FCC3-8D8A-4B24-8FB4-6BCED8BE98B1}" dt="2026-08-31T09:06:27.020" v="698" actId="207"/>
+        <pc:spChg chg="add del mod">
+          <ac:chgData name="Alexey Malashonak" userId="52025583bffa8bdb" providerId="LiveId" clId="{11C5FCC3-8D8A-4B24-8FB4-6BCED8BE98B1}" dt="2026-09-01T19:40:29.612" v="1631" actId="478"/>
           <ac:spMkLst>
             <pc:docMk/>
             <pc:sldMk cId="1396353151" sldId="306"/>
             <ac:spMk id="111" creationId="{00000000-0000-0000-0000-000000000000}"/>
           </ac:spMkLst>
         </pc:spChg>
-        <pc:spChg chg="mod">
-          <ac:chgData name="Alexey Malashonak" userId="52025583bffa8bdb" providerId="LiveId" clId="{11C5FCC3-8D8A-4B24-8FB4-6BCED8BE98B1}" dt="2026-08-31T09:06:27.020" v="698" actId="207"/>
+        <pc:spChg chg="add del mod">
+          <ac:chgData name="Alexey Malashonak" userId="52025583bffa8bdb" providerId="LiveId" clId="{11C5FCC3-8D8A-4B24-8FB4-6BCED8BE98B1}" dt="2026-09-01T19:40:28.706" v="1630" actId="478"/>
           <ac:spMkLst>
             <pc:docMk/>
             <pc:sldMk cId="1396353151" sldId="306"/>
             <ac:spMk id="112" creationId="{00000000-0000-0000-0000-000000000000}"/>
           </ac:spMkLst>
         </pc:spChg>
+        <pc:picChg chg="add del">
+          <ac:chgData name="Alexey Malashonak" userId="52025583bffa8bdb" providerId="LiveId" clId="{11C5FCC3-8D8A-4B24-8FB4-6BCED8BE98B1}" dt="2026-09-01T19:38:04.165" v="1572" actId="22"/>
+          <ac:picMkLst>
+            <pc:docMk/>
+            <pc:sldMk cId="1396353151" sldId="306"/>
+            <ac:picMk id="5" creationId="{C8D4F29D-4198-9AB8-1FEA-B533CDBE0919}"/>
+          </ac:picMkLst>
+        </pc:picChg>
         <pc:picChg chg="mod">
           <ac:chgData name="Alexey Malashonak" userId="52025583bffa8bdb" providerId="LiveId" clId="{11C5FCC3-8D8A-4B24-8FB4-6BCED8BE98B1}" dt="2026-08-31T09:07:05.107" v="708" actId="1076"/>
           <ac:picMkLst>
@@ -843,7 +1141,7 @@
           </ac:picMkLst>
         </pc:picChg>
         <pc:picChg chg="mod">
-          <ac:chgData name="Alexey Malashonak" userId="52025583bffa8bdb" providerId="LiveId" clId="{11C5FCC3-8D8A-4B24-8FB4-6BCED8BE98B1}" dt="2026-08-31T09:07:07.059" v="709" actId="1076"/>
+          <ac:chgData name="Alexey Malashonak" userId="52025583bffa8bdb" providerId="LiveId" clId="{11C5FCC3-8D8A-4B24-8FB4-6BCED8BE98B1}" dt="2026-09-01T20:29:05.818" v="1911" actId="1076"/>
           <ac:picMkLst>
             <pc:docMk/>
             <pc:sldMk cId="1396353151" sldId="306"/>
@@ -860,7 +1158,7 @@
         </pc:picChg>
       </pc:sldChg>
       <pc:sldChg chg="addSp delSp modSp new mod">
-        <pc:chgData name="Alexey Malashonak" userId="52025583bffa8bdb" providerId="LiveId" clId="{11C5FCC3-8D8A-4B24-8FB4-6BCED8BE98B1}" dt="2026-08-31T09:49:28.209" v="1262" actId="20577"/>
+        <pc:chgData name="Alexey Malashonak" userId="52025583bffa8bdb" providerId="LiveId" clId="{11C5FCC3-8D8A-4B24-8FB4-6BCED8BE98B1}" dt="2026-09-01T21:47:01.859" v="2365" actId="1076"/>
         <pc:sldMkLst>
           <pc:docMk/>
           <pc:sldMk cId="214505872" sldId="307"/>
@@ -882,7 +1180,7 @@
           </ac:spMkLst>
         </pc:spChg>
         <pc:spChg chg="add mod">
-          <ac:chgData name="Alexey Malashonak" userId="52025583bffa8bdb" providerId="LiveId" clId="{11C5FCC3-8D8A-4B24-8FB4-6BCED8BE98B1}" dt="2026-08-31T09:03:34.798" v="630" actId="1076"/>
+          <ac:chgData name="Alexey Malashonak" userId="52025583bffa8bdb" providerId="LiveId" clId="{11C5FCC3-8D8A-4B24-8FB4-6BCED8BE98B1}" dt="2026-09-01T21:46:59.615" v="2364" actId="27636"/>
           <ac:spMkLst>
             <pc:docMk/>
             <pc:sldMk cId="214505872" sldId="307"/>
@@ -890,7 +1188,7 @@
           </ac:spMkLst>
         </pc:spChg>
         <pc:picChg chg="add mod ord">
-          <ac:chgData name="Alexey Malashonak" userId="52025583bffa8bdb" providerId="LiveId" clId="{11C5FCC3-8D8A-4B24-8FB4-6BCED8BE98B1}" dt="2026-08-31T09:03:26.760" v="626" actId="1076"/>
+          <ac:chgData name="Alexey Malashonak" userId="52025583bffa8bdb" providerId="LiveId" clId="{11C5FCC3-8D8A-4B24-8FB4-6BCED8BE98B1}" dt="2026-09-01T21:47:01.859" v="2365" actId="1076"/>
           <ac:picMkLst>
             <pc:docMk/>
             <pc:sldMk cId="214505872" sldId="307"/>
@@ -899,7 +1197,7 @@
         </pc:picChg>
       </pc:sldChg>
       <pc:sldChg chg="addSp delSp modSp add mod">
-        <pc:chgData name="Alexey Malashonak" userId="52025583bffa8bdb" providerId="LiveId" clId="{11C5FCC3-8D8A-4B24-8FB4-6BCED8BE98B1}" dt="2026-08-31T09:49:32.392" v="1264" actId="20577"/>
+        <pc:chgData name="Alexey Malashonak" userId="52025583bffa8bdb" providerId="LiveId" clId="{11C5FCC3-8D8A-4B24-8FB4-6BCED8BE98B1}" dt="2026-09-01T21:47:31.587" v="2378" actId="1076"/>
         <pc:sldMkLst>
           <pc:docMk/>
           <pc:sldMk cId="935496711" sldId="308"/>
@@ -913,7 +1211,7 @@
           </ac:spMkLst>
         </pc:spChg>
         <pc:spChg chg="add mod">
-          <ac:chgData name="Alexey Malashonak" userId="52025583bffa8bdb" providerId="LiveId" clId="{11C5FCC3-8D8A-4B24-8FB4-6BCED8BE98B1}" dt="2026-08-31T09:04:41.861" v="676" actId="27636"/>
+          <ac:chgData name="Alexey Malashonak" userId="52025583bffa8bdb" providerId="LiveId" clId="{11C5FCC3-8D8A-4B24-8FB4-6BCED8BE98B1}" dt="2026-09-01T21:47:29.842" v="2377" actId="27636"/>
           <ac:spMkLst>
             <pc:docMk/>
             <pc:sldMk cId="935496711" sldId="308"/>
@@ -945,7 +1243,7 @@
           </ac:picMkLst>
         </pc:picChg>
         <pc:picChg chg="add mod">
-          <ac:chgData name="Alexey Malashonak" userId="52025583bffa8bdb" providerId="LiveId" clId="{11C5FCC3-8D8A-4B24-8FB4-6BCED8BE98B1}" dt="2026-08-31T09:04:28.754" v="642" actId="1076"/>
+          <ac:chgData name="Alexey Malashonak" userId="52025583bffa8bdb" providerId="LiveId" clId="{11C5FCC3-8D8A-4B24-8FB4-6BCED8BE98B1}" dt="2026-09-01T21:47:31.587" v="2378" actId="1076"/>
           <ac:picMkLst>
             <pc:docMk/>
             <pc:sldMk cId="935496711" sldId="308"/>
@@ -1197,6 +1495,755 @@
           </ac:spMkLst>
         </pc:spChg>
       </pc:sldChg>
+      <pc:sldChg chg="addSp modSp add del mod">
+        <pc:chgData name="Alexey Malashonak" userId="52025583bffa8bdb" providerId="LiveId" clId="{11C5FCC3-8D8A-4B24-8FB4-6BCED8BE98B1}" dt="2026-09-01T19:06:16.887" v="1415"/>
+        <pc:sldMkLst>
+          <pc:docMk/>
+          <pc:sldMk cId="3965617058" sldId="321"/>
+        </pc:sldMkLst>
+        <pc:spChg chg="add mod">
+          <ac:chgData name="Alexey Malashonak" userId="52025583bffa8bdb" providerId="LiveId" clId="{11C5FCC3-8D8A-4B24-8FB4-6BCED8BE98B1}" dt="2026-09-01T19:05:41.496" v="1400"/>
+          <ac:spMkLst>
+            <pc:docMk/>
+            <pc:sldMk cId="3965617058" sldId="321"/>
+            <ac:spMk id="5" creationId="{4A7B2470-6023-40BC-9DD2-781BD59390CF}"/>
+          </ac:spMkLst>
+        </pc:spChg>
+        <pc:spChg chg="add mod">
+          <ac:chgData name="Alexey Malashonak" userId="52025583bffa8bdb" providerId="LiveId" clId="{11C5FCC3-8D8A-4B24-8FB4-6BCED8BE98B1}" dt="2026-09-01T19:05:41.496" v="1403"/>
+          <ac:spMkLst>
+            <pc:docMk/>
+            <pc:sldMk cId="3965617058" sldId="321"/>
+            <ac:spMk id="6" creationId="{FA9F8EE0-9544-4042-8BF1-7A6535E0940D}"/>
+          </ac:spMkLst>
+        </pc:spChg>
+        <pc:spChg chg="add mod">
+          <ac:chgData name="Alexey Malashonak" userId="52025583bffa8bdb" providerId="LiveId" clId="{11C5FCC3-8D8A-4B24-8FB4-6BCED8BE98B1}" dt="2026-09-01T19:05:41.497" v="1406"/>
+          <ac:spMkLst>
+            <pc:docMk/>
+            <pc:sldMk cId="3965617058" sldId="321"/>
+            <ac:spMk id="7" creationId="{BA41B9D4-AD72-420B-AFBC-27B9CA8D2F57}"/>
+          </ac:spMkLst>
+        </pc:spChg>
+        <pc:spChg chg="add mod">
+          <ac:chgData name="Alexey Malashonak" userId="52025583bffa8bdb" providerId="LiveId" clId="{11C5FCC3-8D8A-4B24-8FB4-6BCED8BE98B1}" dt="2026-09-01T19:05:41.497" v="1410"/>
+          <ac:spMkLst>
+            <pc:docMk/>
+            <pc:sldMk cId="3965617058" sldId="321"/>
+            <ac:spMk id="8" creationId="{A69802F5-2E61-44E6-9636-FFC3F711C0EB}"/>
+          </ac:spMkLst>
+        </pc:spChg>
+        <pc:spChg chg="add mod">
+          <ac:chgData name="Alexey Malashonak" userId="52025583bffa8bdb" providerId="LiveId" clId="{11C5FCC3-8D8A-4B24-8FB4-6BCED8BE98B1}" dt="2026-09-01T19:05:41.498" v="1413"/>
+          <ac:spMkLst>
+            <pc:docMk/>
+            <pc:sldMk cId="3965617058" sldId="321"/>
+            <ac:spMk id="9" creationId="{D6C9D001-6FE9-4E04-B2C4-AA38849099FF}"/>
+          </ac:spMkLst>
+        </pc:spChg>
+      </pc:sldChg>
+      <pc:sldChg chg="delSp modSp add del mod">
+        <pc:chgData name="Alexey Malashonak" userId="52025583bffa8bdb" providerId="LiveId" clId="{11C5FCC3-8D8A-4B24-8FB4-6BCED8BE98B1}" dt="2026-09-01T19:11:06.725" v="1553" actId="47"/>
+        <pc:sldMkLst>
+          <pc:docMk/>
+          <pc:sldMk cId="4152699741" sldId="322"/>
+        </pc:sldMkLst>
+        <pc:spChg chg="mod">
+          <ac:chgData name="Alexey Malashonak" userId="52025583bffa8bdb" providerId="LiveId" clId="{11C5FCC3-8D8A-4B24-8FB4-6BCED8BE98B1}" dt="2026-09-01T19:06:16.895" v="1416" actId="27636"/>
+          <ac:spMkLst>
+            <pc:docMk/>
+            <pc:sldMk cId="4152699741" sldId="322"/>
+            <ac:spMk id="2" creationId="{CC63AAD0-4F22-964B-836B-9424F41DB0A3}"/>
+          </ac:spMkLst>
+        </pc:spChg>
+        <pc:spChg chg="mod">
+          <ac:chgData name="Alexey Malashonak" userId="52025583bffa8bdb" providerId="LiveId" clId="{11C5FCC3-8D8A-4B24-8FB4-6BCED8BE98B1}" dt="2026-09-01T19:06:16.904" v="1418"/>
+          <ac:spMkLst>
+            <pc:docMk/>
+            <pc:sldMk cId="4152699741" sldId="322"/>
+            <ac:spMk id="4" creationId="{9AB1290F-CD9E-AA45-01C4-12B2F42319C5}"/>
+          </ac:spMkLst>
+        </pc:spChg>
+        <pc:spChg chg="del">
+          <ac:chgData name="Alexey Malashonak" userId="52025583bffa8bdb" providerId="LiveId" clId="{11C5FCC3-8D8A-4B24-8FB4-6BCED8BE98B1}" dt="2026-09-01T19:06:35.838" v="1419"/>
+          <ac:spMkLst>
+            <pc:docMk/>
+            <pc:sldMk cId="4152699741" sldId="322"/>
+            <ac:spMk id="5" creationId="{4A7B2470-6023-40BC-9DD2-781BD59390CF}"/>
+          </ac:spMkLst>
+        </pc:spChg>
+        <pc:spChg chg="mod">
+          <ac:chgData name="Alexey Malashonak" userId="52025583bffa8bdb" providerId="LiveId" clId="{11C5FCC3-8D8A-4B24-8FB4-6BCED8BE98B1}" dt="2026-09-01T19:06:35.839" v="1421"/>
+          <ac:spMkLst>
+            <pc:docMk/>
+            <pc:sldMk cId="4152699741" sldId="322"/>
+            <ac:spMk id="8" creationId="{A69802F5-2E61-44E6-9636-FFC3F711C0EB}"/>
+          </ac:spMkLst>
+        </pc:spChg>
+      </pc:sldChg>
+      <pc:sldChg chg="addSp delSp modSp add del mod">
+        <pc:chgData name="Alexey Malashonak" userId="52025583bffa8bdb" providerId="LiveId" clId="{11C5FCC3-8D8A-4B24-8FB4-6BCED8BE98B1}" dt="2026-09-01T19:08:46.964" v="1494"/>
+        <pc:sldMkLst>
+          <pc:docMk/>
+          <pc:sldMk cId="1697941948" sldId="323"/>
+        </pc:sldMkLst>
+        <pc:spChg chg="del">
+          <ac:chgData name="Alexey Malashonak" userId="52025583bffa8bdb" providerId="LiveId" clId="{11C5FCC3-8D8A-4B24-8FB4-6BCED8BE98B1}" dt="2026-09-01T19:08:18.430" v="1474"/>
+          <ac:spMkLst>
+            <pc:docMk/>
+            <pc:sldMk cId="1697941948" sldId="323"/>
+            <ac:spMk id="3" creationId="{395D3EC4-46A1-A411-92FC-D6D6575EFB2C}"/>
+          </ac:spMkLst>
+        </pc:spChg>
+        <pc:spChg chg="mod">
+          <ac:chgData name="Alexey Malashonak" userId="52025583bffa8bdb" providerId="LiveId" clId="{11C5FCC3-8D8A-4B24-8FB4-6BCED8BE98B1}" dt="2026-09-01T19:08:18.425" v="1441"/>
+          <ac:spMkLst>
+            <pc:docMk/>
+            <pc:sldMk cId="1697941948" sldId="323"/>
+            <ac:spMk id="4" creationId="{B915B92B-3473-1AA9-73A4-58F0B9686EBE}"/>
+          </ac:spMkLst>
+        </pc:spChg>
+        <pc:spChg chg="mod">
+          <ac:chgData name="Alexey Malashonak" userId="52025583bffa8bdb" providerId="LiveId" clId="{11C5FCC3-8D8A-4B24-8FB4-6BCED8BE98B1}" dt="2026-09-01T19:08:18.425" v="1446"/>
+          <ac:spMkLst>
+            <pc:docMk/>
+            <pc:sldMk cId="1697941948" sldId="323"/>
+            <ac:spMk id="5" creationId="{7ABAEB0A-8391-566D-E1BD-B30A59223C66}"/>
+          </ac:spMkLst>
+        </pc:spChg>
+        <pc:spChg chg="mod">
+          <ac:chgData name="Alexey Malashonak" userId="52025583bffa8bdb" providerId="LiveId" clId="{11C5FCC3-8D8A-4B24-8FB4-6BCED8BE98B1}" dt="2026-09-01T19:08:18.425" v="1444"/>
+          <ac:spMkLst>
+            <pc:docMk/>
+            <pc:sldMk cId="1697941948" sldId="323"/>
+            <ac:spMk id="6" creationId="{7F4C67F2-65A6-BA91-D3F2-F88026957648}"/>
+          </ac:spMkLst>
+        </pc:spChg>
+        <pc:spChg chg="mod">
+          <ac:chgData name="Alexey Malashonak" userId="52025583bffa8bdb" providerId="LiveId" clId="{11C5FCC3-8D8A-4B24-8FB4-6BCED8BE98B1}" dt="2026-09-01T19:08:18.426" v="1449"/>
+          <ac:spMkLst>
+            <pc:docMk/>
+            <pc:sldMk cId="1697941948" sldId="323"/>
+            <ac:spMk id="7" creationId="{0A9D9A38-4DD4-29BF-C7E2-E1F48C541DC3}"/>
+          </ac:spMkLst>
+        </pc:spChg>
+        <pc:spChg chg="add mod">
+          <ac:chgData name="Alexey Malashonak" userId="52025583bffa8bdb" providerId="LiveId" clId="{11C5FCC3-8D8A-4B24-8FB4-6BCED8BE98B1}" dt="2026-09-01T19:08:18.435" v="1478"/>
+          <ac:spMkLst>
+            <pc:docMk/>
+            <pc:sldMk cId="1697941948" sldId="323"/>
+            <ac:spMk id="8" creationId="{98AF008D-36C2-4BB7-9A9A-96A0AA1295EF}"/>
+          </ac:spMkLst>
+        </pc:spChg>
+        <pc:spChg chg="add mod">
+          <ac:chgData name="Alexey Malashonak" userId="52025583bffa8bdb" providerId="LiveId" clId="{11C5FCC3-8D8A-4B24-8FB4-6BCED8BE98B1}" dt="2026-09-01T19:08:18.438" v="1480"/>
+          <ac:spMkLst>
+            <pc:docMk/>
+            <pc:sldMk cId="1697941948" sldId="323"/>
+            <ac:spMk id="12" creationId="{71D20191-A4EA-4F9B-BBCB-BDEC896C8D7E}"/>
+          </ac:spMkLst>
+        </pc:spChg>
+        <pc:spChg chg="add mod">
+          <ac:chgData name="Alexey Malashonak" userId="52025583bffa8bdb" providerId="LiveId" clId="{11C5FCC3-8D8A-4B24-8FB4-6BCED8BE98B1}" dt="2026-09-01T19:08:18.439" v="1484"/>
+          <ac:spMkLst>
+            <pc:docMk/>
+            <pc:sldMk cId="1697941948" sldId="323"/>
+            <ac:spMk id="13" creationId="{A204B59D-DAD8-44CA-824F-27201ACD59E3}"/>
+          </ac:spMkLst>
+        </pc:spChg>
+        <pc:spChg chg="add mod">
+          <ac:chgData name="Alexey Malashonak" userId="52025583bffa8bdb" providerId="LiveId" clId="{11C5FCC3-8D8A-4B24-8FB4-6BCED8BE98B1}" dt="2026-09-01T19:08:18.440" v="1486"/>
+          <ac:spMkLst>
+            <pc:docMk/>
+            <pc:sldMk cId="1697941948" sldId="323"/>
+            <ac:spMk id="14" creationId="{E3F04DBC-F971-4473-8ABC-FE0056123306}"/>
+          </ac:spMkLst>
+        </pc:spChg>
+        <pc:spChg chg="add mod">
+          <ac:chgData name="Alexey Malashonak" userId="52025583bffa8bdb" providerId="LiveId" clId="{11C5FCC3-8D8A-4B24-8FB4-6BCED8BE98B1}" dt="2026-09-01T19:08:18.440" v="1490"/>
+          <ac:spMkLst>
+            <pc:docMk/>
+            <pc:sldMk cId="1697941948" sldId="323"/>
+            <ac:spMk id="15" creationId="{D12A68D5-DE33-4A5D-9581-2A1AB56471E2}"/>
+          </ac:spMkLst>
+        </pc:spChg>
+        <pc:spChg chg="add mod">
+          <ac:chgData name="Alexey Malashonak" userId="52025583bffa8bdb" providerId="LiveId" clId="{11C5FCC3-8D8A-4B24-8FB4-6BCED8BE98B1}" dt="2026-09-01T19:08:18.441" v="1492"/>
+          <ac:spMkLst>
+            <pc:docMk/>
+            <pc:sldMk cId="1697941948" sldId="323"/>
+            <ac:spMk id="16" creationId="{5C1B0AFA-DDBE-4FDC-9214-FF634117A6C0}"/>
+          </ac:spMkLst>
+        </pc:spChg>
+        <pc:spChg chg="mod">
+          <ac:chgData name="Alexey Malashonak" userId="52025583bffa8bdb" providerId="LiveId" clId="{11C5FCC3-8D8A-4B24-8FB4-6BCED8BE98B1}" dt="2026-09-01T19:08:18.429" v="1469"/>
+          <ac:spMkLst>
+            <pc:docMk/>
+            <pc:sldMk cId="1697941948" sldId="323"/>
+            <ac:spMk id="18" creationId="{BD00024F-0DB4-32E1-AA6E-F598B1674106}"/>
+          </ac:spMkLst>
+        </pc:spChg>
+        <pc:spChg chg="mod">
+          <ac:chgData name="Alexey Malashonak" userId="52025583bffa8bdb" providerId="LiveId" clId="{11C5FCC3-8D8A-4B24-8FB4-6BCED8BE98B1}" dt="2026-09-01T19:08:18.429" v="1473"/>
+          <ac:spMkLst>
+            <pc:docMk/>
+            <pc:sldMk cId="1697941948" sldId="323"/>
+            <ac:spMk id="19" creationId="{F6CF1537-554C-C1F0-1C41-3C8C2B18B242}"/>
+          </ac:spMkLst>
+        </pc:spChg>
+        <pc:cxnChg chg="mod">
+          <ac:chgData name="Alexey Malashonak" userId="52025583bffa8bdb" providerId="LiveId" clId="{11C5FCC3-8D8A-4B24-8FB4-6BCED8BE98B1}" dt="2026-09-01T19:08:18.427" v="1453"/>
+          <ac:cxnSpMkLst>
+            <pc:docMk/>
+            <pc:sldMk cId="1697941948" sldId="323"/>
+            <ac:cxnSpMk id="9" creationId="{827EB041-A3BE-CDED-FBBE-A8AD37CCA105}"/>
+          </ac:cxnSpMkLst>
+        </pc:cxnChg>
+        <pc:cxnChg chg="mod">
+          <ac:chgData name="Alexey Malashonak" userId="52025583bffa8bdb" providerId="LiveId" clId="{11C5FCC3-8D8A-4B24-8FB4-6BCED8BE98B1}" dt="2026-09-01T19:08:18.428" v="1461"/>
+          <ac:cxnSpMkLst>
+            <pc:docMk/>
+            <pc:sldMk cId="1697941948" sldId="323"/>
+            <ac:cxnSpMk id="10" creationId="{76ED4E98-765A-1AFE-0F73-428BFD773F81}"/>
+          </ac:cxnSpMkLst>
+        </pc:cxnChg>
+        <pc:cxnChg chg="mod">
+          <ac:chgData name="Alexey Malashonak" userId="52025583bffa8bdb" providerId="LiveId" clId="{11C5FCC3-8D8A-4B24-8FB4-6BCED8BE98B1}" dt="2026-09-01T19:08:18.427" v="1457"/>
+          <ac:cxnSpMkLst>
+            <pc:docMk/>
+            <pc:sldMk cId="1697941948" sldId="323"/>
+            <ac:cxnSpMk id="11" creationId="{86B77E62-139B-7478-1CAA-99FB4CE45115}"/>
+          </ac:cxnSpMkLst>
+        </pc:cxnChg>
+        <pc:cxnChg chg="mod">
+          <ac:chgData name="Alexey Malashonak" userId="52025583bffa8bdb" providerId="LiveId" clId="{11C5FCC3-8D8A-4B24-8FB4-6BCED8BE98B1}" dt="2026-09-01T19:08:18.428" v="1465"/>
+          <ac:cxnSpMkLst>
+            <pc:docMk/>
+            <pc:sldMk cId="1697941948" sldId="323"/>
+            <ac:cxnSpMk id="17" creationId="{17391B1F-634C-470E-A677-49B172CCEB2C}"/>
+          </ac:cxnSpMkLst>
+        </pc:cxnChg>
+      </pc:sldChg>
+      <pc:sldChg chg="modSp add del mod">
+        <pc:chgData name="Alexey Malashonak" userId="52025583bffa8bdb" providerId="LiveId" clId="{11C5FCC3-8D8A-4B24-8FB4-6BCED8BE98B1}" dt="2026-09-01T19:10:27.520" v="1548"/>
+        <pc:sldMkLst>
+          <pc:docMk/>
+          <pc:sldMk cId="2390463539" sldId="324"/>
+        </pc:sldMkLst>
+        <pc:spChg chg="mod">
+          <ac:chgData name="Alexey Malashonak" userId="52025583bffa8bdb" providerId="LiveId" clId="{11C5FCC3-8D8A-4B24-8FB4-6BCED8BE98B1}" dt="2026-09-01T19:09:29.495" v="1523"/>
+          <ac:spMkLst>
+            <pc:docMk/>
+            <pc:sldMk cId="2390463539" sldId="324"/>
+            <ac:spMk id="8" creationId="{98AF008D-36C2-4BB7-9A9A-96A0AA1295EF}"/>
+          </ac:spMkLst>
+        </pc:spChg>
+        <pc:spChg chg="mod">
+          <ac:chgData name="Alexey Malashonak" userId="52025583bffa8bdb" providerId="LiveId" clId="{11C5FCC3-8D8A-4B24-8FB4-6BCED8BE98B1}" dt="2026-09-01T19:09:29.495" v="1528"/>
+          <ac:spMkLst>
+            <pc:docMk/>
+            <pc:sldMk cId="2390463539" sldId="324"/>
+            <ac:spMk id="12" creationId="{71D20191-A4EA-4F9B-BBCB-BDEC896C8D7E}"/>
+          </ac:spMkLst>
+        </pc:spChg>
+        <pc:spChg chg="mod">
+          <ac:chgData name="Alexey Malashonak" userId="52025583bffa8bdb" providerId="LiveId" clId="{11C5FCC3-8D8A-4B24-8FB4-6BCED8BE98B1}" dt="2026-09-01T19:09:29.495" v="1525"/>
+          <ac:spMkLst>
+            <pc:docMk/>
+            <pc:sldMk cId="2390463539" sldId="324"/>
+            <ac:spMk id="13" creationId="{A204B59D-DAD8-44CA-824F-27201ACD59E3}"/>
+          </ac:spMkLst>
+        </pc:spChg>
+        <pc:spChg chg="mod">
+          <ac:chgData name="Alexey Malashonak" userId="52025583bffa8bdb" providerId="LiveId" clId="{11C5FCC3-8D8A-4B24-8FB4-6BCED8BE98B1}" dt="2026-09-01T19:09:29.496" v="1529"/>
+          <ac:spMkLst>
+            <pc:docMk/>
+            <pc:sldMk cId="2390463539" sldId="324"/>
+            <ac:spMk id="14" creationId="{E3F04DBC-F971-4473-8ABC-FE0056123306}"/>
+          </ac:spMkLst>
+        </pc:spChg>
+        <pc:spChg chg="mod">
+          <ac:chgData name="Alexey Malashonak" userId="52025583bffa8bdb" providerId="LiveId" clId="{11C5FCC3-8D8A-4B24-8FB4-6BCED8BE98B1}" dt="2026-09-01T19:09:29.495" v="1527"/>
+          <ac:spMkLst>
+            <pc:docMk/>
+            <pc:sldMk cId="2390463539" sldId="324"/>
+            <ac:spMk id="15" creationId="{D12A68D5-DE33-4A5D-9581-2A1AB56471E2}"/>
+          </ac:spMkLst>
+        </pc:spChg>
+        <pc:spChg chg="mod">
+          <ac:chgData name="Alexey Malashonak" userId="52025583bffa8bdb" providerId="LiveId" clId="{11C5FCC3-8D8A-4B24-8FB4-6BCED8BE98B1}" dt="2026-09-01T19:09:29.496" v="1530"/>
+          <ac:spMkLst>
+            <pc:docMk/>
+            <pc:sldMk cId="2390463539" sldId="324"/>
+            <ac:spMk id="16" creationId="{5C1B0AFA-DDBE-4FDC-9214-FF634117A6C0}"/>
+          </ac:spMkLst>
+        </pc:spChg>
+        <pc:spChg chg="mod">
+          <ac:chgData name="Alexey Malashonak" userId="52025583bffa8bdb" providerId="LiveId" clId="{11C5FCC3-8D8A-4B24-8FB4-6BCED8BE98B1}" dt="2026-09-01T19:10:17.154" v="1546"/>
+          <ac:spMkLst>
+            <pc:docMk/>
+            <pc:sldMk cId="2390463539" sldId="324"/>
+            <ac:spMk id="18" creationId="{BD00024F-0DB4-32E1-AA6E-F598B1674106}"/>
+          </ac:spMkLst>
+        </pc:spChg>
+        <pc:spChg chg="mod">
+          <ac:chgData name="Alexey Malashonak" userId="52025583bffa8bdb" providerId="LiveId" clId="{11C5FCC3-8D8A-4B24-8FB4-6BCED8BE98B1}" dt="2026-09-01T19:10:17.153" v="1542"/>
+          <ac:spMkLst>
+            <pc:docMk/>
+            <pc:sldMk cId="2390463539" sldId="324"/>
+            <ac:spMk id="19" creationId="{F6CF1537-554C-C1F0-1C41-3C8C2B18B242}"/>
+          </ac:spMkLst>
+        </pc:spChg>
+      </pc:sldChg>
+      <pc:sldChg chg="delSp modSp add del mod">
+        <pc:chgData name="Alexey Malashonak" userId="52025583bffa8bdb" providerId="LiveId" clId="{11C5FCC3-8D8A-4B24-8FB4-6BCED8BE98B1}" dt="2026-09-01T21:06:45.034" v="2147"/>
+        <pc:sldMkLst>
+          <pc:docMk/>
+          <pc:sldMk cId="431883503" sldId="325"/>
+        </pc:sldMkLst>
+        <pc:spChg chg="mod">
+          <ac:chgData name="Alexey Malashonak" userId="52025583bffa8bdb" providerId="LiveId" clId="{11C5FCC3-8D8A-4B24-8FB4-6BCED8BE98B1}" dt="2026-09-01T21:06:26.564" v="2107"/>
+          <ac:spMkLst>
+            <pc:docMk/>
+            <pc:sldMk cId="431883503" sldId="325"/>
+            <ac:spMk id="4" creationId="{B915B92B-3473-1AA9-73A4-58F0B9686EBE}"/>
+          </ac:spMkLst>
+        </pc:spChg>
+        <pc:spChg chg="mod">
+          <ac:chgData name="Alexey Malashonak" userId="52025583bffa8bdb" providerId="LiveId" clId="{11C5FCC3-8D8A-4B24-8FB4-6BCED8BE98B1}" dt="2026-09-01T21:06:26.565" v="2111"/>
+          <ac:spMkLst>
+            <pc:docMk/>
+            <pc:sldMk cId="431883503" sldId="325"/>
+            <ac:spMk id="5" creationId="{7ABAEB0A-8391-566D-E1BD-B30A59223C66}"/>
+          </ac:spMkLst>
+        </pc:spChg>
+        <pc:spChg chg="mod">
+          <ac:chgData name="Alexey Malashonak" userId="52025583bffa8bdb" providerId="LiveId" clId="{11C5FCC3-8D8A-4B24-8FB4-6BCED8BE98B1}" dt="2026-09-01T21:06:26.567" v="2115"/>
+          <ac:spMkLst>
+            <pc:docMk/>
+            <pc:sldMk cId="431883503" sldId="325"/>
+            <ac:spMk id="6" creationId="{7F4C67F2-65A6-BA91-D3F2-F88026957648}"/>
+          </ac:spMkLst>
+        </pc:spChg>
+        <pc:spChg chg="mod">
+          <ac:chgData name="Alexey Malashonak" userId="52025583bffa8bdb" providerId="LiveId" clId="{11C5FCC3-8D8A-4B24-8FB4-6BCED8BE98B1}" dt="2026-09-01T21:06:26.568" v="2119"/>
+          <ac:spMkLst>
+            <pc:docMk/>
+            <pc:sldMk cId="431883503" sldId="325"/>
+            <ac:spMk id="7" creationId="{0A9D9A38-4DD4-29BF-C7E2-E1F48C541DC3}"/>
+          </ac:spMkLst>
+        </pc:spChg>
+        <pc:spChg chg="mod">
+          <ac:chgData name="Alexey Malashonak" userId="52025583bffa8bdb" providerId="LiveId" clId="{11C5FCC3-8D8A-4B24-8FB4-6BCED8BE98B1}" dt="2026-09-01T21:00:45.414" v="2098" actId="14100"/>
+          <ac:spMkLst>
+            <pc:docMk/>
+            <pc:sldMk cId="431883503" sldId="325"/>
+            <ac:spMk id="8" creationId="{98AF008D-36C2-4BB7-9A9A-96A0AA1295EF}"/>
+          </ac:spMkLst>
+        </pc:spChg>
+        <pc:spChg chg="mod">
+          <ac:chgData name="Alexey Malashonak" userId="52025583bffa8bdb" providerId="LiveId" clId="{11C5FCC3-8D8A-4B24-8FB4-6BCED8BE98B1}" dt="2026-09-01T21:00:45.414" v="2098" actId="14100"/>
+          <ac:spMkLst>
+            <pc:docMk/>
+            <pc:sldMk cId="431883503" sldId="325"/>
+            <ac:spMk id="13" creationId="{A204B59D-DAD8-44CA-824F-27201ACD59E3}"/>
+          </ac:spMkLst>
+        </pc:spChg>
+        <pc:spChg chg="mod">
+          <ac:chgData name="Alexey Malashonak" userId="52025583bffa8bdb" providerId="LiveId" clId="{11C5FCC3-8D8A-4B24-8FB4-6BCED8BE98B1}" dt="2026-09-01T21:00:45.414" v="2098" actId="14100"/>
+          <ac:spMkLst>
+            <pc:docMk/>
+            <pc:sldMk cId="431883503" sldId="325"/>
+            <ac:spMk id="15" creationId="{D12A68D5-DE33-4A5D-9581-2A1AB56471E2}"/>
+          </ac:spMkLst>
+        </pc:spChg>
+        <pc:spChg chg="mod">
+          <ac:chgData name="Alexey Malashonak" userId="52025583bffa8bdb" providerId="LiveId" clId="{11C5FCC3-8D8A-4B24-8FB4-6BCED8BE98B1}" dt="2026-09-01T21:06:26.570" v="2139"/>
+          <ac:spMkLst>
+            <pc:docMk/>
+            <pc:sldMk cId="431883503" sldId="325"/>
+            <ac:spMk id="18" creationId="{BD00024F-0DB4-32E1-AA6E-F598B1674106}"/>
+          </ac:spMkLst>
+        </pc:spChg>
+        <pc:spChg chg="mod">
+          <ac:chgData name="Alexey Malashonak" userId="52025583bffa8bdb" providerId="LiveId" clId="{11C5FCC3-8D8A-4B24-8FB4-6BCED8BE98B1}" dt="2026-09-01T21:06:26.569" v="2135"/>
+          <ac:spMkLst>
+            <pc:docMk/>
+            <pc:sldMk cId="431883503" sldId="325"/>
+            <ac:spMk id="19" creationId="{F6CF1537-554C-C1F0-1C41-3C8C2B18B242}"/>
+          </ac:spMkLst>
+        </pc:spChg>
+        <pc:cxnChg chg="mod">
+          <ac:chgData name="Alexey Malashonak" userId="52025583bffa8bdb" providerId="LiveId" clId="{11C5FCC3-8D8A-4B24-8FB4-6BCED8BE98B1}" dt="2026-09-01T21:06:26.568" v="2123"/>
+          <ac:cxnSpMkLst>
+            <pc:docMk/>
+            <pc:sldMk cId="431883503" sldId="325"/>
+            <ac:cxnSpMk id="9" creationId="{827EB041-A3BE-CDED-FBBE-A8AD37CCA105}"/>
+          </ac:cxnSpMkLst>
+        </pc:cxnChg>
+        <pc:cxnChg chg="mod">
+          <ac:chgData name="Alexey Malashonak" userId="52025583bffa8bdb" providerId="LiveId" clId="{11C5FCC3-8D8A-4B24-8FB4-6BCED8BE98B1}" dt="2026-09-01T21:06:26.569" v="2131"/>
+          <ac:cxnSpMkLst>
+            <pc:docMk/>
+            <pc:sldMk cId="431883503" sldId="325"/>
+            <ac:cxnSpMk id="10" creationId="{76ED4E98-765A-1AFE-0F73-428BFD773F81}"/>
+          </ac:cxnSpMkLst>
+        </pc:cxnChg>
+        <pc:cxnChg chg="mod">
+          <ac:chgData name="Alexey Malashonak" userId="52025583bffa8bdb" providerId="LiveId" clId="{11C5FCC3-8D8A-4B24-8FB4-6BCED8BE98B1}" dt="2026-09-01T21:06:26.568" v="2127"/>
+          <ac:cxnSpMkLst>
+            <pc:docMk/>
+            <pc:sldMk cId="431883503" sldId="325"/>
+            <ac:cxnSpMk id="11" creationId="{86B77E62-139B-7478-1CAA-99FB4CE45115}"/>
+          </ac:cxnSpMkLst>
+        </pc:cxnChg>
+        <pc:cxnChg chg="del mod">
+          <ac:chgData name="Alexey Malashonak" userId="52025583bffa8bdb" providerId="LiveId" clId="{11C5FCC3-8D8A-4B24-8FB4-6BCED8BE98B1}" dt="2026-09-01T21:06:26.570" v="2140"/>
+          <ac:cxnSpMkLst>
+            <pc:docMk/>
+            <pc:sldMk cId="431883503" sldId="325"/>
+            <ac:cxnSpMk id="17" creationId="{17391B1F-634C-470E-A677-49B172CCEB2C}"/>
+          </ac:cxnSpMkLst>
+        </pc:cxnChg>
+      </pc:sldChg>
+      <pc:sldChg chg="add ord setBg">
+        <pc:chgData name="Alexey Malashonak" userId="52025583bffa8bdb" providerId="LiveId" clId="{11C5FCC3-8D8A-4B24-8FB4-6BCED8BE98B1}" dt="2026-09-01T19:40:56.827" v="1636"/>
+        <pc:sldMkLst>
+          <pc:docMk/>
+          <pc:sldMk cId="1385245630" sldId="326"/>
+        </pc:sldMkLst>
+      </pc:sldChg>
+      <pc:sldChg chg="addSp delSp modSp add del mod setBg">
+        <pc:chgData name="Alexey Malashonak" userId="52025583bffa8bdb" providerId="LiveId" clId="{11C5FCC3-8D8A-4B24-8FB4-6BCED8BE98B1}" dt="2026-09-01T19:40:28.410" v="1628" actId="2890"/>
+        <pc:sldMkLst>
+          <pc:docMk/>
+          <pc:sldMk cId="1738210385" sldId="326"/>
+        </pc:sldMkLst>
+        <pc:spChg chg="mod">
+          <ac:chgData name="Alexey Malashonak" userId="52025583bffa8bdb" providerId="LiveId" clId="{11C5FCC3-8D8A-4B24-8FB4-6BCED8BE98B1}" dt="2026-09-01T19:40:27.881" v="1625" actId="20577"/>
+          <ac:spMkLst>
+            <pc:docMk/>
+            <pc:sldMk cId="1738210385" sldId="326"/>
+            <ac:spMk id="2" creationId="{090EAC2A-5706-C65F-88DE-7DA698789FBD}"/>
+          </ac:spMkLst>
+        </pc:spChg>
+        <pc:spChg chg="add del">
+          <ac:chgData name="Alexey Malashonak" userId="52025583bffa8bdb" providerId="LiveId" clId="{11C5FCC3-8D8A-4B24-8FB4-6BCED8BE98B1}" dt="2026-09-01T19:40:28.234" v="1627" actId="478"/>
+          <ac:spMkLst>
+            <pc:docMk/>
+            <pc:sldMk cId="1738210385" sldId="326"/>
+            <ac:spMk id="3" creationId="{395D3EC4-46A1-A411-92FC-D6D6575EFB2C}"/>
+          </ac:spMkLst>
+        </pc:spChg>
+        <pc:spChg chg="add del mod">
+          <ac:chgData name="Alexey Malashonak" userId="52025583bffa8bdb" providerId="LiveId" clId="{11C5FCC3-8D8A-4B24-8FB4-6BCED8BE98B1}" dt="2026-09-01T19:40:28.234" v="1627" actId="478"/>
+          <ac:spMkLst>
+            <pc:docMk/>
+            <pc:sldMk cId="1738210385" sldId="326"/>
+            <ac:spMk id="5" creationId="{EA865297-1AD2-BA1A-BE10-71A833859C61}"/>
+          </ac:spMkLst>
+        </pc:spChg>
+        <pc:spChg chg="add del mod">
+          <ac:chgData name="Alexey Malashonak" userId="52025583bffa8bdb" providerId="LiveId" clId="{11C5FCC3-8D8A-4B24-8FB4-6BCED8BE98B1}" dt="2026-09-01T19:40:27.045" v="1620" actId="478"/>
+          <ac:spMkLst>
+            <pc:docMk/>
+            <pc:sldMk cId="1738210385" sldId="326"/>
+            <ac:spMk id="9" creationId="{C102DBCC-825F-A55C-A493-46E0D0564A69}"/>
+          </ac:spMkLst>
+        </pc:spChg>
+        <pc:spChg chg="add del">
+          <ac:chgData name="Alexey Malashonak" userId="52025583bffa8bdb" providerId="LiveId" clId="{11C5FCC3-8D8A-4B24-8FB4-6BCED8BE98B1}" dt="2026-09-01T19:40:28.234" v="1627" actId="478"/>
+          <ac:spMkLst>
+            <pc:docMk/>
+            <pc:sldMk cId="1738210385" sldId="326"/>
+            <ac:spMk id="100" creationId="{00000000-0000-0000-0000-000000000000}"/>
+          </ac:spMkLst>
+        </pc:spChg>
+        <pc:spChg chg="add del">
+          <ac:chgData name="Alexey Malashonak" userId="52025583bffa8bdb" providerId="LiveId" clId="{11C5FCC3-8D8A-4B24-8FB4-6BCED8BE98B1}" dt="2026-09-01T19:40:28.234" v="1627" actId="478"/>
+          <ac:spMkLst>
+            <pc:docMk/>
+            <pc:sldMk cId="1738210385" sldId="326"/>
+            <ac:spMk id="101" creationId="{00000000-0000-0000-0000-000000000000}"/>
+          </ac:spMkLst>
+        </pc:spChg>
+        <pc:spChg chg="add del">
+          <ac:chgData name="Alexey Malashonak" userId="52025583bffa8bdb" providerId="LiveId" clId="{11C5FCC3-8D8A-4B24-8FB4-6BCED8BE98B1}" dt="2026-09-01T19:40:28.234" v="1627" actId="478"/>
+          <ac:spMkLst>
+            <pc:docMk/>
+            <pc:sldMk cId="1738210385" sldId="326"/>
+            <ac:spMk id="102" creationId="{00000000-0000-0000-0000-000000000000}"/>
+          </ac:spMkLst>
+        </pc:spChg>
+        <pc:spChg chg="add del">
+          <ac:chgData name="Alexey Malashonak" userId="52025583bffa8bdb" providerId="LiveId" clId="{11C5FCC3-8D8A-4B24-8FB4-6BCED8BE98B1}" dt="2026-09-01T19:40:28.234" v="1627" actId="478"/>
+          <ac:spMkLst>
+            <pc:docMk/>
+            <pc:sldMk cId="1738210385" sldId="326"/>
+            <ac:spMk id="103" creationId="{00000000-0000-0000-0000-000000000000}"/>
+          </ac:spMkLst>
+        </pc:spChg>
+        <pc:picChg chg="add del mod ord">
+          <ac:chgData name="Alexey Malashonak" userId="52025583bffa8bdb" providerId="LiveId" clId="{11C5FCC3-8D8A-4B24-8FB4-6BCED8BE98B1}" dt="2026-09-01T19:40:28.061" v="1626" actId="22"/>
+          <ac:picMkLst>
+            <pc:docMk/>
+            <pc:sldMk cId="1738210385" sldId="326"/>
+            <ac:picMk id="7" creationId="{8A5488E7-BCCD-BA3E-E7C8-DBC44D0EAE39}"/>
+          </ac:picMkLst>
+        </pc:picChg>
+        <pc:picChg chg="add del mod ord">
+          <ac:chgData name="Alexey Malashonak" userId="52025583bffa8bdb" providerId="LiveId" clId="{11C5FCC3-8D8A-4B24-8FB4-6BCED8BE98B1}" dt="2026-09-01T19:40:26.875" v="1619" actId="22"/>
+          <ac:picMkLst>
+            <pc:docMk/>
+            <pc:sldMk cId="1738210385" sldId="326"/>
+            <ac:picMk id="11" creationId="{2B06CC90-25E1-3154-E214-08AF3110EC8F}"/>
+          </ac:picMkLst>
+        </pc:picChg>
+        <pc:picChg chg="add del">
+          <ac:chgData name="Alexey Malashonak" userId="52025583bffa8bdb" providerId="LiveId" clId="{11C5FCC3-8D8A-4B24-8FB4-6BCED8BE98B1}" dt="2026-09-01T19:40:28.234" v="1627" actId="478"/>
+          <ac:picMkLst>
+            <pc:docMk/>
+            <pc:sldMk cId="1738210385" sldId="326"/>
+            <ac:picMk id="113" creationId="{00000000-0000-0000-0000-000000000000}"/>
+          </ac:picMkLst>
+        </pc:picChg>
+        <pc:picChg chg="add del">
+          <ac:chgData name="Alexey Malashonak" userId="52025583bffa8bdb" providerId="LiveId" clId="{11C5FCC3-8D8A-4B24-8FB4-6BCED8BE98B1}" dt="2026-09-01T19:40:28.234" v="1627" actId="478"/>
+          <ac:picMkLst>
+            <pc:docMk/>
+            <pc:sldMk cId="1738210385" sldId="326"/>
+            <ac:picMk id="114" creationId="{00000000-0000-0000-0000-000000000000}"/>
+          </ac:picMkLst>
+        </pc:picChg>
+        <pc:picChg chg="add del">
+          <ac:chgData name="Alexey Malashonak" userId="52025583bffa8bdb" providerId="LiveId" clId="{11C5FCC3-8D8A-4B24-8FB4-6BCED8BE98B1}" dt="2026-09-01T19:40:28.234" v="1627" actId="478"/>
+          <ac:picMkLst>
+            <pc:docMk/>
+            <pc:sldMk cId="1738210385" sldId="326"/>
+            <ac:picMk id="115" creationId="{00000000-0000-0000-0000-000000000000}"/>
+          </ac:picMkLst>
+        </pc:picChg>
+        <pc:picChg chg="add del">
+          <ac:chgData name="Alexey Malashonak" userId="52025583bffa8bdb" providerId="LiveId" clId="{11C5FCC3-8D8A-4B24-8FB4-6BCED8BE98B1}" dt="2026-09-01T19:40:28.234" v="1627" actId="478"/>
+          <ac:picMkLst>
+            <pc:docMk/>
+            <pc:sldMk cId="1738210385" sldId="326"/>
+            <ac:picMk id="116" creationId="{00000000-0000-0000-0000-000000000000}"/>
+          </ac:picMkLst>
+        </pc:picChg>
+      </pc:sldChg>
+      <pc:sldChg chg="addSp delSp modSp new mod">
+        <pc:chgData name="Alexey Malashonak" userId="52025583bffa8bdb" providerId="LiveId" clId="{11C5FCC3-8D8A-4B24-8FB4-6BCED8BE98B1}" dt="2026-09-01T19:45:48.341" v="1681" actId="313"/>
+        <pc:sldMkLst>
+          <pc:docMk/>
+          <pc:sldMk cId="3957797320" sldId="327"/>
+        </pc:sldMkLst>
+        <pc:spChg chg="mod">
+          <ac:chgData name="Alexey Malashonak" userId="52025583bffa8bdb" providerId="LiveId" clId="{11C5FCC3-8D8A-4B24-8FB4-6BCED8BE98B1}" dt="2026-09-01T19:45:48.341" v="1681" actId="313"/>
+          <ac:spMkLst>
+            <pc:docMk/>
+            <pc:sldMk cId="3957797320" sldId="327"/>
+            <ac:spMk id="2" creationId="{51565620-9C4D-33AE-02D9-2007D19ECB49}"/>
+          </ac:spMkLst>
+        </pc:spChg>
+        <pc:spChg chg="del">
+          <ac:chgData name="Alexey Malashonak" userId="52025583bffa8bdb" providerId="LiveId" clId="{11C5FCC3-8D8A-4B24-8FB4-6BCED8BE98B1}" dt="2026-09-01T19:45:35.621" v="1660" actId="22"/>
+          <ac:spMkLst>
+            <pc:docMk/>
+            <pc:sldMk cId="3957797320" sldId="327"/>
+            <ac:spMk id="3" creationId="{4C08BCA0-163F-C5B9-BA92-A79CF8B42E51}"/>
+          </ac:spMkLst>
+        </pc:spChg>
+        <pc:picChg chg="add mod ord">
+          <ac:chgData name="Alexey Malashonak" userId="52025583bffa8bdb" providerId="LiveId" clId="{11C5FCC3-8D8A-4B24-8FB4-6BCED8BE98B1}" dt="2026-09-01T19:45:38.260" v="1662" actId="14100"/>
+          <ac:picMkLst>
+            <pc:docMk/>
+            <pc:sldMk cId="3957797320" sldId="327"/>
+            <ac:picMk id="5" creationId="{5491BCEE-AF19-FFDC-3178-C7C627D96DBC}"/>
+          </ac:picMkLst>
+        </pc:picChg>
+      </pc:sldChg>
+      <pc:sldChg chg="modSp add del mod">
+        <pc:chgData name="Alexey Malashonak" userId="52025583bffa8bdb" providerId="LiveId" clId="{11C5FCC3-8D8A-4B24-8FB4-6BCED8BE98B1}" dt="2026-09-01T21:07:19.784" v="2169"/>
+        <pc:sldMkLst>
+          <pc:docMk/>
+          <pc:sldMk cId="2601562344" sldId="328"/>
+        </pc:sldMkLst>
+        <pc:spChg chg="mod">
+          <ac:chgData name="Alexey Malashonak" userId="52025583bffa8bdb" providerId="LiveId" clId="{11C5FCC3-8D8A-4B24-8FB4-6BCED8BE98B1}" dt="2026-09-01T21:07:14.605" v="2163"/>
+          <ac:spMkLst>
+            <pc:docMk/>
+            <pc:sldMk cId="2601562344" sldId="328"/>
+            <ac:spMk id="18" creationId="{BD00024F-0DB4-32E1-AA6E-F598B1674106}"/>
+          </ac:spMkLst>
+        </pc:spChg>
+        <pc:spChg chg="mod">
+          <ac:chgData name="Alexey Malashonak" userId="52025583bffa8bdb" providerId="LiveId" clId="{11C5FCC3-8D8A-4B24-8FB4-6BCED8BE98B1}" dt="2026-09-01T21:07:14.605" v="2167"/>
+          <ac:spMkLst>
+            <pc:docMk/>
+            <pc:sldMk cId="2601562344" sldId="328"/>
+            <ac:spMk id="19" creationId="{F6CF1537-554C-C1F0-1C41-3C8C2B18B242}"/>
+          </ac:spMkLst>
+        </pc:spChg>
+      </pc:sldChg>
+      <pc:sldChg chg="modSp new del mod">
+        <pc:chgData name="Alexey Malashonak" userId="52025583bffa8bdb" providerId="LiveId" clId="{11C5FCC3-8D8A-4B24-8FB4-6BCED8BE98B1}" dt="2026-09-01T20:30:08.337" v="1939" actId="47"/>
+        <pc:sldMkLst>
+          <pc:docMk/>
+          <pc:sldMk cId="3496595445" sldId="328"/>
+        </pc:sldMkLst>
+        <pc:spChg chg="mod">
+          <ac:chgData name="Alexey Malashonak" userId="52025583bffa8bdb" providerId="LiveId" clId="{11C5FCC3-8D8A-4B24-8FB4-6BCED8BE98B1}" dt="2026-09-01T20:29:17.972" v="1936" actId="20577"/>
+          <ac:spMkLst>
+            <pc:docMk/>
+            <pc:sldMk cId="3496595445" sldId="328"/>
+            <ac:spMk id="3" creationId="{568C5A8F-D8B4-7B18-CC56-486E91C63A11}"/>
+          </ac:spMkLst>
+        </pc:spChg>
+      </pc:sldChg>
+      <pc:sldChg chg="add del">
+        <pc:chgData name="Alexey Malashonak" userId="52025583bffa8bdb" providerId="LiveId" clId="{11C5FCC3-8D8A-4B24-8FB4-6BCED8BE98B1}" dt="2026-09-01T21:07:41.199" v="2171"/>
+        <pc:sldMkLst>
+          <pc:docMk/>
+          <pc:sldMk cId="1625578737" sldId="329"/>
+        </pc:sldMkLst>
+      </pc:sldChg>
+      <pc:sldChg chg="modSp add del mod">
+        <pc:chgData name="Alexey Malashonak" userId="52025583bffa8bdb" providerId="LiveId" clId="{11C5FCC3-8D8A-4B24-8FB4-6BCED8BE98B1}" dt="2026-09-01T21:08:11.356" v="2174"/>
+        <pc:sldMkLst>
+          <pc:docMk/>
+          <pc:sldMk cId="1142066978" sldId="330"/>
+        </pc:sldMkLst>
+        <pc:spChg chg="mod">
+          <ac:chgData name="Alexey Malashonak" userId="52025583bffa8bdb" providerId="LiveId" clId="{11C5FCC3-8D8A-4B24-8FB4-6BCED8BE98B1}" dt="2026-09-01T21:07:44.885" v="2172"/>
+          <ac:spMkLst>
+            <pc:docMk/>
+            <pc:sldMk cId="1142066978" sldId="330"/>
+            <ac:spMk id="19" creationId="{F6CF1537-554C-C1F0-1C41-3C8C2B18B242}"/>
+          </ac:spMkLst>
+        </pc:spChg>
+      </pc:sldChg>
+      <pc:sldChg chg="modSp add mod">
+        <pc:chgData name="Alexey Malashonak" userId="52025583bffa8bdb" providerId="LiveId" clId="{11C5FCC3-8D8A-4B24-8FB4-6BCED8BE98B1}" dt="2026-09-01T21:12:32.929" v="2188" actId="1076"/>
+        <pc:sldMkLst>
+          <pc:docMk/>
+          <pc:sldMk cId="2256120068" sldId="331"/>
+        </pc:sldMkLst>
+        <pc:spChg chg="mod">
+          <ac:chgData name="Alexey Malashonak" userId="52025583bffa8bdb" providerId="LiveId" clId="{11C5FCC3-8D8A-4B24-8FB4-6BCED8BE98B1}" dt="2026-09-01T21:12:32.929" v="2188" actId="1076"/>
+          <ac:spMkLst>
+            <pc:docMk/>
+            <pc:sldMk cId="2256120068" sldId="331"/>
+            <ac:spMk id="18" creationId="{BD00024F-0DB4-32E1-AA6E-F598B1674106}"/>
+          </ac:spMkLst>
+        </pc:spChg>
+        <pc:spChg chg="mod">
+          <ac:chgData name="Alexey Malashonak" userId="52025583bffa8bdb" providerId="LiveId" clId="{11C5FCC3-8D8A-4B24-8FB4-6BCED8BE98B1}" dt="2026-09-01T21:12:29.377" v="2187" actId="1076"/>
+          <ac:spMkLst>
+            <pc:docMk/>
+            <pc:sldMk cId="2256120068" sldId="331"/>
+            <ac:spMk id="19" creationId="{F6CF1537-554C-C1F0-1C41-3C8C2B18B242}"/>
+          </ac:spMkLst>
+        </pc:spChg>
+      </pc:sldChg>
+      <pc:sldChg chg="modSp add del mod">
+        <pc:chgData name="Alexey Malashonak" userId="52025583bffa8bdb" providerId="LiveId" clId="{11C5FCC3-8D8A-4B24-8FB4-6BCED8BE98B1}" dt="2026-09-01T21:56:13.481" v="2440"/>
+        <pc:sldMkLst>
+          <pc:docMk/>
+          <pc:sldMk cId="962631114" sldId="332"/>
+        </pc:sldMkLst>
+        <pc:spChg chg="mod">
+          <ac:chgData name="Alexey Malashonak" userId="52025583bffa8bdb" providerId="LiveId" clId="{11C5FCC3-8D8A-4B24-8FB4-6BCED8BE98B1}" dt="2026-09-01T21:55:33.288" v="2431"/>
+          <ac:spMkLst>
+            <pc:docMk/>
+            <pc:sldMk cId="962631114" sldId="332"/>
+            <ac:spMk id="10" creationId="{EE59A311-1788-51B4-8857-130C2D983308}"/>
+          </ac:spMkLst>
+        </pc:spChg>
+        <pc:spChg chg="mod">
+          <ac:chgData name="Alexey Malashonak" userId="52025583bffa8bdb" providerId="LiveId" clId="{11C5FCC3-8D8A-4B24-8FB4-6BCED8BE98B1}" dt="2026-09-01T21:55:33.288" v="2433"/>
+          <ac:spMkLst>
+            <pc:docMk/>
+            <pc:sldMk cId="962631114" sldId="332"/>
+            <ac:spMk id="11" creationId="{D98E9595-2CBD-A7A9-F151-70E3F46C619D}"/>
+          </ac:spMkLst>
+        </pc:spChg>
+      </pc:sldChg>
+      <pc:sldChg chg="add del">
+        <pc:chgData name="Alexey Malashonak" userId="52025583bffa8bdb" providerId="LiveId" clId="{11C5FCC3-8D8A-4B24-8FB4-6BCED8BE98B1}" dt="2026-09-01T21:56:53.546" v="2442"/>
+        <pc:sldMkLst>
+          <pc:docMk/>
+          <pc:sldMk cId="4091634660" sldId="333"/>
+        </pc:sldMkLst>
+      </pc:sldChg>
+      <pc:sldChg chg="add del">
+        <pc:chgData name="Alexey Malashonak" userId="52025583bffa8bdb" providerId="LiveId" clId="{11C5FCC3-8D8A-4B24-8FB4-6BCED8BE98B1}" dt="2026-09-01T21:57:35.683" v="2444"/>
+        <pc:sldMkLst>
+          <pc:docMk/>
+          <pc:sldMk cId="665617868" sldId="334"/>
+        </pc:sldMkLst>
+      </pc:sldChg>
+      <pc:sldChg chg="add del">
+        <pc:chgData name="Alexey Malashonak" userId="52025583bffa8bdb" providerId="LiveId" clId="{11C5FCC3-8D8A-4B24-8FB4-6BCED8BE98B1}" dt="2026-09-01T21:58:01.788" v="2446"/>
+        <pc:sldMkLst>
+          <pc:docMk/>
+          <pc:sldMk cId="2074582312" sldId="335"/>
+        </pc:sldMkLst>
+      </pc:sldChg>
+      <pc:sldChg chg="add del">
+        <pc:chgData name="Alexey Malashonak" userId="52025583bffa8bdb" providerId="LiveId" clId="{11C5FCC3-8D8A-4B24-8FB4-6BCED8BE98B1}" dt="2026-09-01T21:58:30.707" v="2448"/>
+        <pc:sldMkLst>
+          <pc:docMk/>
+          <pc:sldMk cId="3788180881" sldId="336"/>
+        </pc:sldMkLst>
+      </pc:sldChg>
+      <pc:sldChg chg="modSp add mod">
+        <pc:chgData name="Alexey Malashonak" userId="52025583bffa8bdb" providerId="LiveId" clId="{11C5FCC3-8D8A-4B24-8FB4-6BCED8BE98B1}" dt="2026-09-01T22:01:13.949" v="2464" actId="207"/>
+        <pc:sldMkLst>
+          <pc:docMk/>
+          <pc:sldMk cId="1003491513" sldId="337"/>
+        </pc:sldMkLst>
+        <pc:spChg chg="mod">
+          <ac:chgData name="Alexey Malashonak" userId="52025583bffa8bdb" providerId="LiveId" clId="{11C5FCC3-8D8A-4B24-8FB4-6BCED8BE98B1}" dt="2026-09-01T22:01:11.181" v="2463" actId="207"/>
+          <ac:spMkLst>
+            <pc:docMk/>
+            <pc:sldMk cId="1003491513" sldId="337"/>
+            <ac:spMk id="3" creationId="{395D3EC4-46A1-A411-92FC-D6D6575EFB2C}"/>
+          </ac:spMkLst>
+        </pc:spChg>
+        <pc:spChg chg="mod">
+          <ac:chgData name="Alexey Malashonak" userId="52025583bffa8bdb" providerId="LiveId" clId="{11C5FCC3-8D8A-4B24-8FB4-6BCED8BE98B1}" dt="2026-09-01T22:00:44.081" v="2458" actId="1076"/>
+          <ac:spMkLst>
+            <pc:docMk/>
+            <pc:sldMk cId="1003491513" sldId="337"/>
+            <ac:spMk id="11" creationId="{D98E9595-2CBD-A7A9-F151-70E3F46C619D}"/>
+          </ac:spMkLst>
+        </pc:spChg>
+        <pc:spChg chg="mod">
+          <ac:chgData name="Alexey Malashonak" userId="52025583bffa8bdb" providerId="LiveId" clId="{11C5FCC3-8D8A-4B24-8FB4-6BCED8BE98B1}" dt="2026-09-01T22:00:50.449" v="2459" actId="2085"/>
+          <ac:spMkLst>
+            <pc:docMk/>
+            <pc:sldMk cId="1003491513" sldId="337"/>
+            <ac:spMk id="150" creationId="{00000000-0000-0000-0000-000000000000}"/>
+          </ac:spMkLst>
+        </pc:spChg>
+        <pc:spChg chg="mod">
+          <ac:chgData name="Alexey Malashonak" userId="52025583bffa8bdb" providerId="LiveId" clId="{11C5FCC3-8D8A-4B24-8FB4-6BCED8BE98B1}" dt="2026-09-01T22:00:53.517" v="2460" actId="2085"/>
+          <ac:spMkLst>
+            <pc:docMk/>
+            <pc:sldMk cId="1003491513" sldId="337"/>
+            <ac:spMk id="151" creationId="{00000000-0000-0000-0000-000000000000}"/>
+          </ac:spMkLst>
+        </pc:spChg>
+        <pc:spChg chg="mod">
+          <ac:chgData name="Alexey Malashonak" userId="52025583bffa8bdb" providerId="LiveId" clId="{11C5FCC3-8D8A-4B24-8FB4-6BCED8BE98B1}" dt="2026-09-01T22:01:13.949" v="2464" actId="207"/>
+          <ac:spMkLst>
+            <pc:docMk/>
+            <pc:sldMk cId="1003491513" sldId="337"/>
+            <ac:spMk id="200" creationId="{00000000-0000-0000-0000-000000000000}"/>
+          </ac:spMkLst>
+        </pc:spChg>
+      </pc:sldChg>
       <pc:sldMasterChg chg="add addSldLayout">
         <pc:chgData name="Alexey Malashonak" userId="52025583bffa8bdb" providerId="LiveId" clId="{11C5FCC3-8D8A-4B24-8FB4-6BCED8BE98B1}" dt="2026-08-31T09:28:19.847" v="917"/>
         <pc:sldMasterMkLst>
@@ -1379,7 +2426,7 @@
           <a:p>
             <a:fld id="{C787C5DD-31E8-425B-8277-3B63D7A4890D}" type="datetimeFigureOut">
               <a:rPr lang="LID4096" smtClean="0"/>
-              <a:t>08/31/2026</a:t>
+              <a:t>09/01/2026</a:t>
             </a:fld>
             <a:endParaRPr lang="LID4096"/>
           </a:p>
@@ -1804,7 +2851,7 @@
           <a:p>
             <a:fld id="{C755201B-FE87-4C81-8881-6AFECB6428EF}" type="slidenum">
               <a:rPr lang="LID4096" smtClean="0"/>
-              <a:t>26</a:t>
+              <a:t>27</a:t>
             </a:fld>
             <a:endParaRPr lang="LID4096"/>
           </a:p>
@@ -1972,7 +3019,7 @@
           <a:p>
             <a:fld id="{BF804998-35F7-CD4D-ACDB-621DC46062D1}" type="datetimeFigureOut">
               <a:rPr lang="en-US" smtClean="0"/>
-              <a:t>8/31/2026</a:t>
+              <a:t>9/1/2026</a:t>
             </a:fld>
             <a:endParaRPr lang="en-US"/>
           </a:p>
@@ -2172,7 +3219,7 @@
           <a:p>
             <a:fld id="{BF804998-35F7-CD4D-ACDB-621DC46062D1}" type="datetimeFigureOut">
               <a:rPr lang="en-US" smtClean="0"/>
-              <a:t>8/31/2026</a:t>
+              <a:t>9/1/2026</a:t>
             </a:fld>
             <a:endParaRPr lang="en-US"/>
           </a:p>
@@ -2382,7 +3429,7 @@
           <a:p>
             <a:fld id="{BF804998-35F7-CD4D-ACDB-621DC46062D1}" type="datetimeFigureOut">
               <a:rPr lang="en-US" smtClean="0"/>
-              <a:t>8/31/2026</a:t>
+              <a:t>9/1/2026</a:t>
             </a:fld>
             <a:endParaRPr lang="en-US"/>
           </a:p>
@@ -2604,7 +3651,7 @@
           <a:p>
             <a:fld id="{BF804998-35F7-CD4D-ACDB-621DC46062D1}" type="datetimeFigureOut">
               <a:rPr lang="en-US" smtClean="0"/>
-              <a:t>8/31/2026</a:t>
+              <a:t>9/1/2026</a:t>
             </a:fld>
             <a:endParaRPr lang="en-US"/>
           </a:p>
@@ -2804,7 +3851,7 @@
           <a:p>
             <a:fld id="{BF804998-35F7-CD4D-ACDB-621DC46062D1}" type="datetimeFigureOut">
               <a:rPr lang="en-US" smtClean="0"/>
-              <a:t>8/31/2026</a:t>
+              <a:t>9/1/2026</a:t>
             </a:fld>
             <a:endParaRPr lang="en-US"/>
           </a:p>
@@ -3080,7 +4127,7 @@
           <a:p>
             <a:fld id="{BF804998-35F7-CD4D-ACDB-621DC46062D1}" type="datetimeFigureOut">
               <a:rPr lang="en-US" smtClean="0"/>
-              <a:t>8/31/2026</a:t>
+              <a:t>9/1/2026</a:t>
             </a:fld>
             <a:endParaRPr lang="en-US"/>
           </a:p>
@@ -3348,7 +4395,7 @@
           <a:p>
             <a:fld id="{BF804998-35F7-CD4D-ACDB-621DC46062D1}" type="datetimeFigureOut">
               <a:rPr lang="en-US" smtClean="0"/>
-              <a:t>8/31/2026</a:t>
+              <a:t>9/1/2026</a:t>
             </a:fld>
             <a:endParaRPr lang="en-US"/>
           </a:p>
@@ -3763,7 +4810,7 @@
           <a:p>
             <a:fld id="{BF804998-35F7-CD4D-ACDB-621DC46062D1}" type="datetimeFigureOut">
               <a:rPr lang="en-US" smtClean="0"/>
-              <a:t>8/31/2026</a:t>
+              <a:t>9/1/2026</a:t>
             </a:fld>
             <a:endParaRPr lang="en-US"/>
           </a:p>
@@ -3905,7 +4952,7 @@
           <a:p>
             <a:fld id="{BF804998-35F7-CD4D-ACDB-621DC46062D1}" type="datetimeFigureOut">
               <a:rPr lang="en-US" smtClean="0"/>
-              <a:t>8/31/2026</a:t>
+              <a:t>9/1/2026</a:t>
             </a:fld>
             <a:endParaRPr lang="en-US"/>
           </a:p>
@@ -4018,7 +5065,7 @@
           <a:p>
             <a:fld id="{BF804998-35F7-CD4D-ACDB-621DC46062D1}" type="datetimeFigureOut">
               <a:rPr lang="en-US" smtClean="0"/>
-              <a:t>8/31/2026</a:t>
+              <a:t>9/1/2026</a:t>
             </a:fld>
             <a:endParaRPr lang="en-US"/>
           </a:p>
@@ -4331,7 +5378,7 @@
           <a:p>
             <a:fld id="{BF804998-35F7-CD4D-ACDB-621DC46062D1}" type="datetimeFigureOut">
               <a:rPr lang="en-US" smtClean="0"/>
-              <a:t>8/31/2026</a:t>
+              <a:t>9/1/2026</a:t>
             </a:fld>
             <a:endParaRPr lang="en-US"/>
           </a:p>
@@ -4531,7 +5578,7 @@
           <a:p>
             <a:fld id="{BF804998-35F7-CD4D-ACDB-621DC46062D1}" type="datetimeFigureOut">
               <a:rPr lang="en-US" smtClean="0"/>
-              <a:t>8/31/2026</a:t>
+              <a:t>9/1/2026</a:t>
             </a:fld>
             <a:endParaRPr lang="en-US"/>
           </a:p>
@@ -4820,7 +5867,7 @@
           <a:p>
             <a:fld id="{BF804998-35F7-CD4D-ACDB-621DC46062D1}" type="datetimeFigureOut">
               <a:rPr lang="en-US" smtClean="0"/>
-              <a:t>8/31/2026</a:t>
+              <a:t>9/1/2026</a:t>
             </a:fld>
             <a:endParaRPr lang="en-US"/>
           </a:p>
@@ -5020,7 +6067,7 @@
           <a:p>
             <a:fld id="{BF804998-35F7-CD4D-ACDB-621DC46062D1}" type="datetimeFigureOut">
               <a:rPr lang="en-US" smtClean="0"/>
-              <a:t>8/31/2026</a:t>
+              <a:t>9/1/2026</a:t>
             </a:fld>
             <a:endParaRPr lang="en-US"/>
           </a:p>
@@ -5230,7 +6277,7 @@
           <a:p>
             <a:fld id="{BF804998-35F7-CD4D-ACDB-621DC46062D1}" type="datetimeFigureOut">
               <a:rPr lang="en-US" smtClean="0"/>
-              <a:t>8/31/2026</a:t>
+              <a:t>9/1/2026</a:t>
             </a:fld>
             <a:endParaRPr lang="en-US"/>
           </a:p>
@@ -5506,7 +6553,7 @@
           <a:p>
             <a:fld id="{BF804998-35F7-CD4D-ACDB-621DC46062D1}" type="datetimeFigureOut">
               <a:rPr lang="en-US" smtClean="0"/>
-              <a:t>8/31/2026</a:t>
+              <a:t>9/1/2026</a:t>
             </a:fld>
             <a:endParaRPr lang="en-US"/>
           </a:p>
@@ -5774,7 +6821,7 @@
           <a:p>
             <a:fld id="{BF804998-35F7-CD4D-ACDB-621DC46062D1}" type="datetimeFigureOut">
               <a:rPr lang="en-US" smtClean="0"/>
-              <a:t>8/31/2026</a:t>
+              <a:t>9/1/2026</a:t>
             </a:fld>
             <a:endParaRPr lang="en-US"/>
           </a:p>
@@ -6189,7 +7236,7 @@
           <a:p>
             <a:fld id="{BF804998-35F7-CD4D-ACDB-621DC46062D1}" type="datetimeFigureOut">
               <a:rPr lang="en-US" smtClean="0"/>
-              <a:t>8/31/2026</a:t>
+              <a:t>9/1/2026</a:t>
             </a:fld>
             <a:endParaRPr lang="en-US"/>
           </a:p>
@@ -6331,7 +7378,7 @@
           <a:p>
             <a:fld id="{BF804998-35F7-CD4D-ACDB-621DC46062D1}" type="datetimeFigureOut">
               <a:rPr lang="en-US" smtClean="0"/>
-              <a:t>8/31/2026</a:t>
+              <a:t>9/1/2026</a:t>
             </a:fld>
             <a:endParaRPr lang="en-US"/>
           </a:p>
@@ -6444,7 +7491,7 @@
           <a:p>
             <a:fld id="{BF804998-35F7-CD4D-ACDB-621DC46062D1}" type="datetimeFigureOut">
               <a:rPr lang="en-US" smtClean="0"/>
-              <a:t>8/31/2026</a:t>
+              <a:t>9/1/2026</a:t>
             </a:fld>
             <a:endParaRPr lang="en-US"/>
           </a:p>
@@ -6757,7 +7804,7 @@
           <a:p>
             <a:fld id="{BF804998-35F7-CD4D-ACDB-621DC46062D1}" type="datetimeFigureOut">
               <a:rPr lang="en-US" smtClean="0"/>
-              <a:t>8/31/2026</a:t>
+              <a:t>9/1/2026</a:t>
             </a:fld>
             <a:endParaRPr lang="en-US"/>
           </a:p>
@@ -7046,7 +8093,7 @@
           <a:p>
             <a:fld id="{BF804998-35F7-CD4D-ACDB-621DC46062D1}" type="datetimeFigureOut">
               <a:rPr lang="en-US" smtClean="0"/>
-              <a:t>8/31/2026</a:t>
+              <a:t>9/1/2026</a:t>
             </a:fld>
             <a:endParaRPr lang="en-US"/>
           </a:p>
@@ -7290,7 +8337,7 @@
             <a:fld id="{BF804998-35F7-CD4D-ACDB-621DC46062D1}" type="datetimeFigureOut">
               <a:rPr lang="en-US" smtClean="0"/>
               <a:pPr/>
-              <a:t>8/31/2026</a:t>
+              <a:t>9/1/2026</a:t>
             </a:fld>
             <a:endParaRPr lang="en-US"/>
           </a:p>
@@ -7895,7 +8942,7 @@
             <a:fld id="{BF804998-35F7-CD4D-ACDB-621DC46062D1}" type="datetimeFigureOut">
               <a:rPr lang="en-US" smtClean="0"/>
               <a:pPr/>
-              <a:t>8/31/2026</a:t>
+              <a:t>9/1/2026</a:t>
             </a:fld>
             <a:endParaRPr lang="en-US"/>
           </a:p>
@@ -8362,7 +9409,12 @@
             <p:ph type="ctrTitle"/>
           </p:nvPr>
         </p:nvSpPr>
-        <p:spPr/>
+        <p:spPr>
+          <a:xfrm>
+            <a:off x="2123767" y="1500121"/>
+            <a:ext cx="7944465" cy="2043706"/>
+          </a:xfrm>
+        </p:spPr>
         <p:txBody>
           <a:bodyPr>
             <a:normAutofit fontScale="90000"/>
@@ -8394,12 +9446,14 @@
         </p:nvSpPr>
         <p:spPr>
           <a:xfrm>
-            <a:off x="1524000" y="3810000"/>
-            <a:ext cx="9144000" cy="1254760"/>
+            <a:off x="2258610" y="3885147"/>
+            <a:ext cx="7674780" cy="859620"/>
           </a:xfrm>
         </p:spPr>
         <p:txBody>
-          <a:bodyPr/>
+          <a:bodyPr>
+            <a:normAutofit fontScale="77500" lnSpcReduction="20000"/>
+          </a:bodyPr>
           <a:lstStyle/>
           <a:p>
             <a:r>
@@ -8429,8 +9483,8 @@
         </p:nvSpPr>
         <p:spPr>
           <a:xfrm>
-            <a:off x="6990735" y="5141055"/>
-            <a:ext cx="4611330" cy="1323439"/>
+            <a:off x="7846141" y="5659167"/>
+            <a:ext cx="3755923" cy="1077218"/>
           </a:xfrm>
           <a:prstGeom prst="rect">
             <a:avLst/>
@@ -8444,25 +9498,25 @@
           <a:lstStyle/>
           <a:p>
             <a:r>
-              <a:rPr lang="en-US" sz="2000" dirty="0"/>
+              <a:rPr lang="en-US" sz="1600" dirty="0"/>
               <a:t>Aliaksei Malashonak</a:t>
             </a:r>
           </a:p>
           <a:p>
             <a:r>
-              <a:rPr lang="en-US" sz="2000" dirty="0"/>
+              <a:rPr lang="en-US" sz="1600" dirty="0"/>
               <a:t>Student ID 19795, Matriculation 24891798</a:t>
             </a:r>
           </a:p>
           <a:p>
             <a:r>
-              <a:rPr lang="en-US" sz="2000" dirty="0"/>
+              <a:rPr lang="en-US" sz="1600" dirty="0"/>
               <a:t>Mentor: Dr. Stefano Canossa</a:t>
             </a:r>
           </a:p>
           <a:p>
             <a:r>
-              <a:rPr lang="en-US" sz="2000" dirty="0"/>
+              <a:rPr lang="en-US" sz="1600" dirty="0"/>
               <a:t>September 2, 2026</a:t>
             </a:r>
           </a:p>
@@ -8526,6 +9580,614 @@
           <a:p>
             <a:r>
               <a:rPr lang="en-US" dirty="0"/>
+              <a:t>Hypothesis H1 Null: Rejected</a:t>
+            </a:r>
+          </a:p>
+        </p:txBody>
+      </p:sp>
+      <p:sp>
+        <p:nvSpPr>
+          <p:cNvPr id="3" name="Inhaltsplatzhalter 2">
+            <a:extLst>
+              <a:ext uri="{FF2B5EF4-FFF2-40B4-BE49-F238E27FC236}">
+                <a16:creationId xmlns:a16="http://schemas.microsoft.com/office/drawing/2014/main" id="{395D3EC4-46A1-A411-92FC-D6D6575EFB2C}"/>
+              </a:ext>
+            </a:extLst>
+          </p:cNvPr>
+          <p:cNvSpPr>
+            <a:spLocks noGrp="1"/>
+          </p:cNvSpPr>
+          <p:nvPr>
+            <p:ph idx="1"/>
+          </p:nvPr>
+        </p:nvSpPr>
+        <p:spPr>
+          <a:xfrm>
+            <a:off x="838200" y="1691639"/>
+            <a:ext cx="10515600" cy="4652794"/>
+          </a:xfrm>
+        </p:spPr>
+        <p:txBody>
+          <a:bodyPr>
+            <a:normAutofit fontScale="85000" lnSpcReduction="20000"/>
+          </a:bodyPr>
+          <a:lstStyle/>
+          <a:p>
+            <a:pPr marL="0" indent="0">
+              <a:buNone/>
+            </a:pPr>
+            <a:r>
+              <a:rPr lang="en-US" sz="1800" b="1" i="1" u="none" strike="noStrike" baseline="0" dirty="0">
+                <a:solidFill>
+                  <a:srgbClr val="000000"/>
+                </a:solidFill>
+                <a:latin typeface="AAAAAM+Calibri-BoldItalic"/>
+              </a:rPr>
+              <a:t>Hypothesis H1</a:t>
+            </a:r>
+            <a:r>
+              <a:rPr lang="en-US" sz="1800" b="1" i="1" u="none" strike="noStrike" baseline="0" dirty="0">
+                <a:solidFill>
+                  <a:srgbClr val="000000"/>
+                </a:solidFill>
+                <a:latin typeface="Calibri" panose="020F0502020204030204" pitchFamily="34" charset="0"/>
+              </a:rPr>
+              <a:t>—</a:t>
+            </a:r>
+            <a:r>
+              <a:rPr lang="en-US" sz="1800" b="1" i="1" u="none" strike="noStrike" baseline="0" dirty="0">
+                <a:solidFill>
+                  <a:srgbClr val="000000"/>
+                </a:solidFill>
+                <a:latin typeface="AAAAAM+Calibri-BoldItalic"/>
+              </a:rPr>
+              <a:t>Influence of Information Shocks on Decisions </a:t>
+            </a:r>
+            <a:endParaRPr lang="en-US" sz="1800" b="0" i="0" u="none" strike="noStrike" baseline="0" dirty="0">
+              <a:solidFill>
+                <a:srgbClr val="000000"/>
+              </a:solidFill>
+              <a:latin typeface="AAAAAM+Calibri-BoldItalic"/>
+            </a:endParaRPr>
+          </a:p>
+          <a:p>
+            <a:r>
+              <a:rPr lang="en-US" sz="1800" b="1" i="0" u="none" strike="noStrike" baseline="0" dirty="0">
+                <a:solidFill>
+                  <a:srgbClr val="000000"/>
+                </a:solidFill>
+                <a:latin typeface="Calibri" panose="020F0502020204030204" pitchFamily="34" charset="0"/>
+              </a:rPr>
+              <a:t>H1₀: </a:t>
+            </a:r>
+            <a:r>
+              <a:rPr lang="en-US" sz="1800" b="0" i="0" u="none" strike="noStrike" baseline="0" dirty="0">
+                <a:solidFill>
+                  <a:srgbClr val="000000"/>
+                </a:solidFill>
+                <a:latin typeface="AAAAAG+Calibri"/>
+              </a:rPr>
+              <a:t>The intensity of external financial information shocks has no statistically significant effect </a:t>
+            </a:r>
+            <a:r>
+              <a:rPr lang="en-US" sz="1800" b="0" i="0" u="none" strike="noStrike" baseline="0" dirty="0">
+                <a:solidFill>
+                  <a:srgbClr val="000000"/>
+                </a:solidFill>
+                <a:latin typeface="Calibri" panose="020F0502020204030204" pitchFamily="34" charset="0"/>
+              </a:rPr>
+              <a:t>on managers’ Net Risk Stance responses. </a:t>
+            </a:r>
+          </a:p>
+          <a:p>
+            <a:r>
+              <a:rPr lang="en-US" sz="1800" b="1" i="0" u="none" strike="noStrike" baseline="0" dirty="0">
+                <a:solidFill>
+                  <a:srgbClr val="000000"/>
+                </a:solidFill>
+                <a:latin typeface="Calibri" panose="020F0502020204030204" pitchFamily="34" charset="0"/>
+              </a:rPr>
+              <a:t>H1ₐ: </a:t>
+            </a:r>
+            <a:r>
+              <a:rPr lang="en-US" sz="1800" b="0" i="0" u="none" strike="noStrike" baseline="0" dirty="0">
+                <a:solidFill>
+                  <a:srgbClr val="000000"/>
+                </a:solidFill>
+                <a:latin typeface="AAAAAG+Calibri"/>
+              </a:rPr>
+              <a:t>The intensity of external financial information shocks has a statistically significant effect on </a:t>
+            </a:r>
+            <a:r>
+              <a:rPr lang="en-US" sz="1800" b="0" i="0" u="none" strike="noStrike" baseline="0" dirty="0">
+                <a:solidFill>
+                  <a:srgbClr val="000000"/>
+                </a:solidFill>
+                <a:latin typeface="Calibri" panose="020F0502020204030204" pitchFamily="34" charset="0"/>
+              </a:rPr>
+              <a:t>managers’ Net Risk Stance responses. </a:t>
+            </a:r>
+          </a:p>
+          <a:p>
+            <a:endParaRPr lang="en-US" sz="2600" dirty="0"/>
+          </a:p>
+          <a:p>
+            <a:pPr marL="0" indent="0">
+              <a:lnSpc>
+                <a:spcPct val="150000"/>
+              </a:lnSpc>
+              <a:buNone/>
+            </a:pPr>
+            <a:r>
+              <a:rPr lang="en-US" sz="2600" dirty="0"/>
+              <a:t>The Null H1 is rejected at the 5 percent significance level.</a:t>
+            </a:r>
+          </a:p>
+          <a:p>
+            <a:pPr>
+              <a:lnSpc>
+                <a:spcPct val="150000"/>
+              </a:lnSpc>
+            </a:pPr>
+            <a:r>
+              <a:rPr lang="en-US" sz="2600" dirty="0"/>
+              <a:t>Shock Score coefficient = -0.4874 (p = 0.0015), a statistically significant negative effect.</a:t>
+            </a:r>
+          </a:p>
+          <a:p>
+            <a:pPr>
+              <a:lnSpc>
+                <a:spcPct val="150000"/>
+              </a:lnSpc>
+            </a:pPr>
+            <a:r>
+              <a:rPr lang="en-US" sz="2600" dirty="0"/>
+              <a:t>Higher shock intensity is systematically associated with a risk-reducing shift in Net Risk Stance.</a:t>
+            </a:r>
+          </a:p>
+          <a:p>
+            <a:pPr>
+              <a:lnSpc>
+                <a:spcPct val="150000"/>
+              </a:lnSpc>
+            </a:pPr>
+            <a:r>
+              <a:rPr lang="en-US" sz="2600" dirty="0"/>
+              <a:t>The result is consistent with behavioral finance theory (Huber et al., 2021; March &amp; Shapira, 1987</a:t>
+            </a:r>
+            <a:r>
+              <a:rPr lang="en-US" sz="1800" b="0" i="0" u="none" strike="noStrike" baseline="0" dirty="0">
+                <a:solidFill>
+                  <a:srgbClr val="000000"/>
+                </a:solidFill>
+                <a:latin typeface="AAAAAG+Calibri"/>
+              </a:rPr>
+              <a:t>).</a:t>
+            </a:r>
+            <a:endParaRPr lang="en-US" sz="2600" dirty="0">
+              <a:highlight>
+                <a:srgbClr val="FFFF00"/>
+              </a:highlight>
+            </a:endParaRPr>
+          </a:p>
+        </p:txBody>
+      </p:sp>
+    </p:spTree>
+    <p:extLst>
+      <p:ext uri="{BB962C8B-B14F-4D97-AF65-F5344CB8AC3E}">
+        <p14:creationId xmlns:p14="http://schemas.microsoft.com/office/powerpoint/2010/main" val="3410717024"/>
+      </p:ext>
+    </p:extLst>
+  </p:cSld>
+  <p:clrMapOvr>
+    <a:masterClrMapping/>
+  </p:clrMapOvr>
+</p:sld>
+</file>
+
+<file path=ppt/slides/slide11.xml><?xml version="1.0" encoding="utf-8"?>
+<p:sld xmlns:a="http://schemas.openxmlformats.org/drawingml/2006/main" xmlns:r="http://schemas.openxmlformats.org/officeDocument/2006/relationships" xmlns:p="http://schemas.openxmlformats.org/presentationml/2006/main">
+  <p:cSld>
+    <p:spTree>
+      <p:nvGrpSpPr>
+        <p:cNvPr id="1" name=""/>
+        <p:cNvGrpSpPr/>
+        <p:nvPr/>
+      </p:nvGrpSpPr>
+      <p:grpSpPr>
+        <a:xfrm>
+          <a:off x="0" y="0"/>
+          <a:ext cx="0" cy="0"/>
+          <a:chOff x="0" y="0"/>
+          <a:chExt cx="0" cy="0"/>
+        </a:xfrm>
+      </p:grpSpPr>
+      <p:sp>
+        <p:nvSpPr>
+          <p:cNvPr id="2" name="Titel 1">
+            <a:extLst>
+              <a:ext uri="{FF2B5EF4-FFF2-40B4-BE49-F238E27FC236}">
+                <a16:creationId xmlns:a16="http://schemas.microsoft.com/office/drawing/2014/main" id="{090EAC2A-5706-C65F-88DE-7DA698789FBD}"/>
+              </a:ext>
+            </a:extLst>
+          </p:cNvPr>
+          <p:cNvSpPr>
+            <a:spLocks noGrp="1"/>
+          </p:cNvSpPr>
+          <p:nvPr>
+            <p:ph type="title"/>
+          </p:nvPr>
+        </p:nvSpPr>
+        <p:spPr>
+          <a:xfrm>
+            <a:off x="838200" y="365125"/>
+            <a:ext cx="8161800" cy="823595"/>
+          </a:xfrm>
+        </p:spPr>
+        <p:txBody>
+          <a:bodyPr/>
+          <a:lstStyle/>
+          <a:p>
+            <a:r>
+              <a:rPr lang="en-US" dirty="0"/>
+              <a:t>Finding 2 H2 Null: Fail to Reject</a:t>
+            </a:r>
+          </a:p>
+        </p:txBody>
+      </p:sp>
+      <p:sp>
+        <p:nvSpPr>
+          <p:cNvPr id="3" name="Inhaltsplatzhalter 2">
+            <a:extLst>
+              <a:ext uri="{FF2B5EF4-FFF2-40B4-BE49-F238E27FC236}">
+                <a16:creationId xmlns:a16="http://schemas.microsoft.com/office/drawing/2014/main" id="{395D3EC4-46A1-A411-92FC-D6D6575EFB2C}"/>
+              </a:ext>
+            </a:extLst>
+          </p:cNvPr>
+          <p:cNvSpPr>
+            <a:spLocks noGrp="1"/>
+          </p:cNvSpPr>
+          <p:nvPr>
+            <p:ph idx="1"/>
+          </p:nvPr>
+        </p:nvSpPr>
+        <p:spPr>
+          <a:xfrm>
+            <a:off x="838200" y="1722120"/>
+            <a:ext cx="10515600" cy="4565946"/>
+          </a:xfrm>
+        </p:spPr>
+        <p:txBody>
+          <a:bodyPr>
+            <a:normAutofit fontScale="77500" lnSpcReduction="20000"/>
+          </a:bodyPr>
+          <a:lstStyle/>
+          <a:p>
+            <a:pPr marL="0" indent="0">
+              <a:buNone/>
+            </a:pPr>
+            <a:r>
+              <a:rPr lang="en-US" sz="1800" b="1" i="1" u="none" strike="noStrike" baseline="0" dirty="0">
+                <a:solidFill>
+                  <a:srgbClr val="000000"/>
+                </a:solidFill>
+                <a:latin typeface="AAAAAM+Calibri-BoldItalic"/>
+              </a:rPr>
+              <a:t>Hypothesis H2</a:t>
+            </a:r>
+            <a:r>
+              <a:rPr lang="en-US" sz="1800" b="1" i="1" u="none" strike="noStrike" baseline="0" dirty="0">
+                <a:solidFill>
+                  <a:srgbClr val="000000"/>
+                </a:solidFill>
+                <a:latin typeface="Calibri" panose="020F0502020204030204" pitchFamily="34" charset="0"/>
+              </a:rPr>
+              <a:t>—</a:t>
+            </a:r>
+            <a:r>
+              <a:rPr lang="en-US" sz="1800" b="1" i="1" u="none" strike="noStrike" baseline="0" dirty="0">
+                <a:solidFill>
+                  <a:srgbClr val="000000"/>
+                </a:solidFill>
+                <a:latin typeface="AAAAAM+Calibri-BoldItalic"/>
+              </a:rPr>
+              <a:t>Value Added of the Shock Score </a:t>
+            </a:r>
+            <a:endParaRPr lang="en-US" sz="1800" b="0" i="0" u="none" strike="noStrike" baseline="0" dirty="0">
+              <a:solidFill>
+                <a:srgbClr val="000000"/>
+              </a:solidFill>
+              <a:latin typeface="AAAAAM+Calibri-BoldItalic"/>
+            </a:endParaRPr>
+          </a:p>
+          <a:p>
+            <a:r>
+              <a:rPr lang="en-US" sz="1800" b="1" i="0" u="none" strike="noStrike" baseline="0" dirty="0">
+                <a:solidFill>
+                  <a:srgbClr val="000000"/>
+                </a:solidFill>
+                <a:latin typeface="Calibri" panose="020F0502020204030204" pitchFamily="34" charset="0"/>
+              </a:rPr>
+              <a:t>H2₀: </a:t>
+            </a:r>
+            <a:r>
+              <a:rPr lang="en-US" sz="1800" b="0" i="0" u="none" strike="noStrike" baseline="0" dirty="0">
+                <a:solidFill>
+                  <a:srgbClr val="000000"/>
+                </a:solidFill>
+                <a:latin typeface="AAAAAG+Calibri"/>
+              </a:rPr>
+              <a:t>Introducing the Shock Score for investment decision-making has no statistically significant effect on the risk</a:t>
+            </a:r>
+            <a:r>
+              <a:rPr lang="en-US" sz="1800" b="0" i="0" u="none" strike="noStrike" baseline="0" dirty="0">
+                <a:solidFill>
+                  <a:srgbClr val="000000"/>
+                </a:solidFill>
+                <a:latin typeface="Calibri" panose="020F0502020204030204" pitchFamily="34" charset="0"/>
+              </a:rPr>
+              <a:t>–</a:t>
+            </a:r>
+            <a:r>
+              <a:rPr lang="en-US" sz="1800" b="0" i="0" u="none" strike="noStrike" baseline="0" dirty="0">
+                <a:solidFill>
+                  <a:srgbClr val="000000"/>
+                </a:solidFill>
+                <a:latin typeface="AAAAAG+Calibri"/>
+              </a:rPr>
+              <a:t>return ratio of the portfolio. </a:t>
+            </a:r>
+          </a:p>
+          <a:p>
+            <a:r>
+              <a:rPr lang="en-US" sz="1800" b="1" i="0" u="none" strike="noStrike" baseline="0" dirty="0">
+                <a:solidFill>
+                  <a:srgbClr val="000000"/>
+                </a:solidFill>
+                <a:latin typeface="Calibri" panose="020F0502020204030204" pitchFamily="34" charset="0"/>
+              </a:rPr>
+              <a:t>H2ₐ: </a:t>
+            </a:r>
+            <a:r>
+              <a:rPr lang="en-US" sz="1800" b="0" i="0" u="none" strike="noStrike" baseline="0" dirty="0">
+                <a:solidFill>
+                  <a:srgbClr val="000000"/>
+                </a:solidFill>
+                <a:latin typeface="AAAAAG+Calibri"/>
+              </a:rPr>
+              <a:t>Introducing the Shock Score for investment decision-making has a statistically significant effect on the risk</a:t>
+            </a:r>
+            <a:r>
+              <a:rPr lang="en-US" sz="1800" b="0" i="0" u="none" strike="noStrike" baseline="0" dirty="0">
+                <a:solidFill>
+                  <a:srgbClr val="000000"/>
+                </a:solidFill>
+                <a:latin typeface="Calibri" panose="020F0502020204030204" pitchFamily="34" charset="0"/>
+              </a:rPr>
+              <a:t>–</a:t>
+            </a:r>
+            <a:r>
+              <a:rPr lang="en-US" sz="1800" b="0" i="0" u="none" strike="noStrike" baseline="0" dirty="0">
+                <a:solidFill>
+                  <a:srgbClr val="000000"/>
+                </a:solidFill>
+                <a:latin typeface="AAAAAG+Calibri"/>
+              </a:rPr>
+              <a:t>return ratio of the portfolio. </a:t>
+            </a:r>
+          </a:p>
+          <a:p>
+            <a:endParaRPr lang="en-US" sz="2600" dirty="0"/>
+          </a:p>
+          <a:p>
+            <a:pPr marL="0" indent="0">
+              <a:lnSpc>
+                <a:spcPct val="150000"/>
+              </a:lnSpc>
+              <a:buNone/>
+            </a:pPr>
+            <a:r>
+              <a:rPr lang="en-US" sz="2600" dirty="0"/>
+              <a:t>The null H2 is not rejected:</a:t>
+            </a:r>
+          </a:p>
+          <a:p>
+            <a:pPr>
+              <a:lnSpc>
+                <a:spcPct val="150000"/>
+              </a:lnSpc>
+            </a:pPr>
+            <a:r>
+              <a:rPr lang="en-US" sz="2600" dirty="0"/>
+              <a:t>Dashboard treatment effect = -0.1584 (p = 0.7428), not statistically significant.</a:t>
+            </a:r>
+          </a:p>
+          <a:p>
+            <a:pPr>
+              <a:lnSpc>
+                <a:spcPct val="150000"/>
+              </a:lnSpc>
+            </a:pPr>
+            <a:r>
+              <a:rPr lang="en-US" sz="2600" dirty="0"/>
+              <a:t>The estimate is directionally consistent with the expected moderation mechanism (Bianchi &amp; Briere, 2021; Lim, 2026; Statman, 2019).</a:t>
+            </a:r>
+          </a:p>
+          <a:p>
+            <a:pPr>
+              <a:lnSpc>
+                <a:spcPct val="150000"/>
+              </a:lnSpc>
+            </a:pPr>
+            <a:r>
+              <a:rPr lang="en-US" sz="2600" dirty="0"/>
+              <a:t>The non-significant result is attributed primarily to limited statistical power, not to an absence of effect.</a:t>
+            </a:r>
+          </a:p>
+        </p:txBody>
+      </p:sp>
+    </p:spTree>
+    <p:extLst>
+      <p:ext uri="{BB962C8B-B14F-4D97-AF65-F5344CB8AC3E}">
+        <p14:creationId xmlns:p14="http://schemas.microsoft.com/office/powerpoint/2010/main" val="3410717024"/>
+      </p:ext>
+    </p:extLst>
+  </p:cSld>
+  <p:clrMapOvr>
+    <a:masterClrMapping/>
+  </p:clrMapOvr>
+</p:sld>
+</file>
+
+<file path=ppt/slides/slide12.xml><?xml version="1.0" encoding="utf-8"?>
+<p:sld xmlns:a="http://schemas.openxmlformats.org/drawingml/2006/main" xmlns:r="http://schemas.openxmlformats.org/officeDocument/2006/relationships" xmlns:p="http://schemas.openxmlformats.org/presentationml/2006/main">
+  <p:cSld>
+    <p:bg>
+      <p:bgPr>
+        <a:solidFill>
+          <a:srgbClr val="161C24"/>
+        </a:solidFill>
+        <a:effectLst/>
+      </p:bgPr>
+    </p:bg>
+    <p:spTree>
+      <p:nvGrpSpPr>
+        <p:cNvPr id="1" name=""/>
+        <p:cNvGrpSpPr/>
+        <p:nvPr/>
+      </p:nvGrpSpPr>
+      <p:grpSpPr>
+        <a:xfrm>
+          <a:off x="0" y="0"/>
+          <a:ext cx="0" cy="0"/>
+          <a:chOff x="0" y="0"/>
+          <a:chExt cx="0" cy="0"/>
+        </a:xfrm>
+      </p:grpSpPr>
+      <p:sp>
+        <p:nvSpPr>
+          <p:cNvPr id="2" name="Titel 1">
+            <a:extLst>
+              <a:ext uri="{FF2B5EF4-FFF2-40B4-BE49-F238E27FC236}">
+                <a16:creationId xmlns:a16="http://schemas.microsoft.com/office/drawing/2014/main" id="{090EAC2A-5706-C65F-88DE-7DA698789FBD}"/>
+              </a:ext>
+            </a:extLst>
+          </p:cNvPr>
+          <p:cNvSpPr>
+            <a:spLocks noGrp="1"/>
+          </p:cNvSpPr>
+          <p:nvPr>
+            <p:ph type="title"/>
+          </p:nvPr>
+        </p:nvSpPr>
+        <p:spPr>
+          <a:xfrm>
+            <a:off x="838200" y="365125"/>
+            <a:ext cx="8161800" cy="823595"/>
+          </a:xfrm>
+        </p:spPr>
+        <p:txBody>
+          <a:bodyPr/>
+          <a:lstStyle/>
+          <a:p>
+            <a:r>
+              <a:rPr lang="en-US" dirty="0">
+                <a:solidFill>
+                  <a:schemeClr val="bg1"/>
+                </a:solidFill>
+              </a:rPr>
+              <a:t>Key Figures</a:t>
+            </a:r>
+          </a:p>
+        </p:txBody>
+      </p:sp>
+      <p:pic>
+        <p:nvPicPr>
+          <p:cNvPr id="11" name="Content Placeholder 10">
+            <a:extLst>
+              <a:ext uri="{FF2B5EF4-FFF2-40B4-BE49-F238E27FC236}">
+                <a16:creationId xmlns:a16="http://schemas.microsoft.com/office/drawing/2014/main" id="{2B06CC90-25E1-3154-E214-08AF3110EC8F}"/>
+              </a:ext>
+            </a:extLst>
+          </p:cNvPr>
+          <p:cNvPicPr>
+            <a:picLocks noGrp="1" noChangeAspect="1"/>
+          </p:cNvPicPr>
+          <p:nvPr>
+            <p:ph idx="1"/>
+          </p:nvPr>
+        </p:nvPicPr>
+        <p:blipFill>
+          <a:blip r:embed="rId2"/>
+          <a:stretch>
+            <a:fillRect/>
+          </a:stretch>
+        </p:blipFill>
+        <p:spPr>
+          <a:xfrm>
+            <a:off x="1485500" y="2141718"/>
+            <a:ext cx="9220999" cy="3177815"/>
+          </a:xfrm>
+        </p:spPr>
+      </p:pic>
+    </p:spTree>
+    <p:extLst>
+      <p:ext uri="{BB962C8B-B14F-4D97-AF65-F5344CB8AC3E}">
+        <p14:creationId xmlns:p14="http://schemas.microsoft.com/office/powerpoint/2010/main" val="1385245630"/>
+      </p:ext>
+    </p:extLst>
+  </p:cSld>
+  <p:clrMapOvr>
+    <a:masterClrMapping/>
+  </p:clrMapOvr>
+</p:sld>
+</file>
+
+<file path=ppt/slides/slide13.xml><?xml version="1.0" encoding="utf-8"?>
+<p:sld xmlns:a="http://schemas.openxmlformats.org/drawingml/2006/main" xmlns:r="http://schemas.openxmlformats.org/officeDocument/2006/relationships" xmlns:p="http://schemas.openxmlformats.org/presentationml/2006/main">
+  <p:cSld>
+    <p:spTree>
+      <p:nvGrpSpPr>
+        <p:cNvPr id="1" name=""/>
+        <p:cNvGrpSpPr/>
+        <p:nvPr/>
+      </p:nvGrpSpPr>
+      <p:grpSpPr>
+        <a:xfrm>
+          <a:off x="0" y="0"/>
+          <a:ext cx="0" cy="0"/>
+          <a:chOff x="0" y="0"/>
+          <a:chExt cx="0" cy="0"/>
+        </a:xfrm>
+      </p:grpSpPr>
+      <p:sp>
+        <p:nvSpPr>
+          <p:cNvPr id="2" name="Titel 1">
+            <a:extLst>
+              <a:ext uri="{FF2B5EF4-FFF2-40B4-BE49-F238E27FC236}">
+                <a16:creationId xmlns:a16="http://schemas.microsoft.com/office/drawing/2014/main" id="{090EAC2A-5706-C65F-88DE-7DA698789FBD}"/>
+              </a:ext>
+            </a:extLst>
+          </p:cNvPr>
+          <p:cNvSpPr>
+            <a:spLocks noGrp="1"/>
+          </p:cNvSpPr>
+          <p:nvPr>
+            <p:ph type="title"/>
+          </p:nvPr>
+        </p:nvSpPr>
+        <p:spPr>
+          <a:xfrm>
+            <a:off x="838200" y="365125"/>
+            <a:ext cx="8161800" cy="823595"/>
+          </a:xfrm>
+        </p:spPr>
+        <p:txBody>
+          <a:bodyPr/>
+          <a:lstStyle/>
+          <a:p>
+            <a:r>
+              <a:rPr lang="en-US" dirty="0"/>
               <a:t>Conclusions and Recommendations</a:t>
             </a:r>
           </a:p>
@@ -9000,688 +10662,6 @@
 </p:sld>
 </file>
 
-<file path=ppt/slides/slide11.xml><?xml version="1.0" encoding="utf-8"?>
-<p:sld xmlns:a="http://schemas.openxmlformats.org/drawingml/2006/main" xmlns:r="http://schemas.openxmlformats.org/officeDocument/2006/relationships" xmlns:p="http://schemas.openxmlformats.org/presentationml/2006/main">
-  <p:cSld>
-    <p:spTree>
-      <p:nvGrpSpPr>
-        <p:cNvPr id="1" name=""/>
-        <p:cNvGrpSpPr/>
-        <p:nvPr/>
-      </p:nvGrpSpPr>
-      <p:grpSpPr>
-        <a:xfrm>
-          <a:off x="0" y="0"/>
-          <a:ext cx="0" cy="0"/>
-          <a:chOff x="0" y="0"/>
-          <a:chExt cx="0" cy="0"/>
-        </a:xfrm>
-      </p:grpSpPr>
-      <p:sp>
-        <p:nvSpPr>
-          <p:cNvPr id="2" name="Titel 1">
-            <a:extLst>
-              <a:ext uri="{FF2B5EF4-FFF2-40B4-BE49-F238E27FC236}">
-                <a16:creationId xmlns:a16="http://schemas.microsoft.com/office/drawing/2014/main" id="{090EAC2A-5706-C65F-88DE-7DA698789FBD}"/>
-              </a:ext>
-            </a:extLst>
-          </p:cNvPr>
-          <p:cNvSpPr>
-            <a:spLocks noGrp="1"/>
-          </p:cNvSpPr>
-          <p:nvPr>
-            <p:ph type="title"/>
-          </p:nvPr>
-        </p:nvSpPr>
-        <p:spPr>
-          <a:xfrm>
-            <a:off x="838200" y="365125"/>
-            <a:ext cx="8161800" cy="823595"/>
-          </a:xfrm>
-        </p:spPr>
-        <p:txBody>
-          <a:bodyPr/>
-          <a:lstStyle/>
-          <a:p>
-            <a:r>
-              <a:rPr lang="en-US" dirty="0"/>
-              <a:t>Ethical and legal Implications</a:t>
-            </a:r>
-          </a:p>
-        </p:txBody>
-      </p:sp>
-      <p:sp>
-        <p:nvSpPr>
-          <p:cNvPr id="3" name="Inhaltsplatzhalter 2">
-            <a:extLst>
-              <a:ext uri="{FF2B5EF4-FFF2-40B4-BE49-F238E27FC236}">
-                <a16:creationId xmlns:a16="http://schemas.microsoft.com/office/drawing/2014/main" id="{395D3EC4-46A1-A411-92FC-D6D6575EFB2C}"/>
-              </a:ext>
-            </a:extLst>
-          </p:cNvPr>
-          <p:cNvSpPr>
-            <a:spLocks noGrp="1"/>
-          </p:cNvSpPr>
-          <p:nvPr>
-            <p:ph idx="1"/>
-          </p:nvPr>
-        </p:nvSpPr>
-        <p:spPr>
-          <a:xfrm>
-            <a:off x="838200" y="1691639"/>
-            <a:ext cx="10093960" cy="3779521"/>
-          </a:xfrm>
-        </p:spPr>
-        <p:txBody>
-          <a:bodyPr>
-            <a:normAutofit fontScale="62500" lnSpcReduction="20000"/>
-          </a:bodyPr>
-          <a:lstStyle/>
-          <a:p>
-            <a:pPr>
-              <a:lnSpc>
-                <a:spcPct val="170000"/>
-              </a:lnSpc>
-            </a:pPr>
-            <a:r>
-              <a:rPr lang="en-US" dirty="0"/>
-              <a:t>Decision-support indicators should augment, not replace, professional judgment and accountability.</a:t>
-            </a:r>
-          </a:p>
-          <a:p>
-            <a:pPr>
-              <a:lnSpc>
-                <a:spcPct val="170000"/>
-              </a:lnSpc>
-            </a:pPr>
-            <a:r>
-              <a:rPr lang="en-US" dirty="0"/>
-              <a:t>Over-reliance on a single composite score risks automation bias and a false sense of precision.</a:t>
-            </a:r>
-          </a:p>
-          <a:p>
-            <a:pPr>
-              <a:lnSpc>
-                <a:spcPct val="170000"/>
-              </a:lnSpc>
-            </a:pPr>
-            <a:r>
-              <a:rPr lang="en-US" dirty="0"/>
-              <a:t>Transparency and interpretability of the indicator are prerequisites for responsible deployment.</a:t>
-            </a:r>
-          </a:p>
-          <a:p>
-            <a:pPr>
-              <a:lnSpc>
-                <a:spcPct val="170000"/>
-              </a:lnSpc>
-            </a:pPr>
-            <a:r>
-              <a:rPr lang="en-US" dirty="0"/>
-              <a:t>Behavioral monitoring must respect the professional autonomy and discretion of portfolio managers.</a:t>
-            </a:r>
-          </a:p>
-          <a:p>
-            <a:pPr>
-              <a:lnSpc>
-                <a:spcPct val="170000"/>
-              </a:lnSpc>
-            </a:pPr>
-            <a:r>
-              <a:rPr lang="en-US" dirty="0"/>
-              <a:t>Legal implication – the line is not crossed (see Annex)</a:t>
-            </a:r>
-          </a:p>
-        </p:txBody>
-      </p:sp>
-    </p:spTree>
-    <p:extLst>
-      <p:ext uri="{BB962C8B-B14F-4D97-AF65-F5344CB8AC3E}">
-        <p14:creationId xmlns:p14="http://schemas.microsoft.com/office/powerpoint/2010/main" val="2524467379"/>
-      </p:ext>
-    </p:extLst>
-  </p:cSld>
-  <p:clrMapOvr>
-    <a:masterClrMapping/>
-  </p:clrMapOvr>
-</p:sld>
-</file>
-
-<file path=ppt/slides/slide12.xml><?xml version="1.0" encoding="utf-8"?>
-<p:sld xmlns:a="http://schemas.openxmlformats.org/drawingml/2006/main" xmlns:r="http://schemas.openxmlformats.org/officeDocument/2006/relationships" xmlns:p="http://schemas.openxmlformats.org/presentationml/2006/main">
-  <p:cSld>
-    <p:spTree>
-      <p:nvGrpSpPr>
-        <p:cNvPr id="1" name=""/>
-        <p:cNvGrpSpPr/>
-        <p:nvPr/>
-      </p:nvGrpSpPr>
-      <p:grpSpPr>
-        <a:xfrm>
-          <a:off x="0" y="0"/>
-          <a:ext cx="0" cy="0"/>
-          <a:chOff x="0" y="0"/>
-          <a:chExt cx="0" cy="0"/>
-        </a:xfrm>
-      </p:grpSpPr>
-      <p:sp>
-        <p:nvSpPr>
-          <p:cNvPr id="2" name="Titel 1">
-            <a:extLst>
-              <a:ext uri="{FF2B5EF4-FFF2-40B4-BE49-F238E27FC236}">
-                <a16:creationId xmlns:a16="http://schemas.microsoft.com/office/drawing/2014/main" id="{090EAC2A-5706-C65F-88DE-7DA698789FBD}"/>
-              </a:ext>
-            </a:extLst>
-          </p:cNvPr>
-          <p:cNvSpPr>
-            <a:spLocks noGrp="1"/>
-          </p:cNvSpPr>
-          <p:nvPr>
-            <p:ph type="title"/>
-          </p:nvPr>
-        </p:nvSpPr>
-        <p:spPr>
-          <a:xfrm>
-            <a:off x="838200" y="365125"/>
-            <a:ext cx="8161800" cy="823595"/>
-          </a:xfrm>
-        </p:spPr>
-        <p:txBody>
-          <a:bodyPr/>
-          <a:lstStyle/>
-          <a:p>
-            <a:r>
-              <a:rPr lang="en-US" dirty="0"/>
-              <a:t>Appendix: Regulatory Context</a:t>
-            </a:r>
-          </a:p>
-        </p:txBody>
-      </p:sp>
-      <p:sp>
-        <p:nvSpPr>
-          <p:cNvPr id="5" name="TextBox 4">
-            <a:extLst>
-              <a:ext uri="{FF2B5EF4-FFF2-40B4-BE49-F238E27FC236}">
-                <a16:creationId xmlns:a16="http://schemas.microsoft.com/office/drawing/2014/main" id="{B5AF9FCE-1C4D-E903-5D85-78D2A28C319D}"/>
-              </a:ext>
-            </a:extLst>
-          </p:cNvPr>
-          <p:cNvSpPr txBox="1"/>
-          <p:nvPr/>
-        </p:nvSpPr>
-        <p:spPr>
-          <a:xfrm>
-            <a:off x="787400" y="1240554"/>
-            <a:ext cx="10246360" cy="4202497"/>
-          </a:xfrm>
-          <a:prstGeom prst="rect">
-            <a:avLst/>
-          </a:prstGeom>
-          <a:noFill/>
-        </p:spPr>
-        <p:txBody>
-          <a:bodyPr wrap="square">
-            <a:spAutoFit/>
-          </a:bodyPr>
-          <a:lstStyle/>
-          <a:p>
-            <a:pPr>
-              <a:lnSpc>
-                <a:spcPct val="150000"/>
-              </a:lnSpc>
-            </a:pPr>
-            <a:r>
-              <a:rPr lang="LID4096" dirty="0"/>
-              <a:t>Regulatory position</a:t>
-            </a:r>
-            <a:r>
-              <a:rPr lang="en-US" dirty="0"/>
-              <a:t>:</a:t>
-            </a:r>
-          </a:p>
-          <a:p>
-            <a:pPr marL="285750" indent="-285750">
-              <a:lnSpc>
-                <a:spcPct val="150000"/>
-              </a:lnSpc>
-              <a:buFont typeface="Arial" panose="020B0604020202020204" pitchFamily="34" charset="0"/>
-              <a:buChar char="•"/>
-            </a:pPr>
-            <a:r>
-              <a:rPr lang="LID4096" sz="1600" dirty="0"/>
-              <a:t>EU AI Act emotion-recognition ban (Art. 5(1)(f)) — </a:t>
-            </a:r>
-            <a:r>
-              <a:rPr lang="LID4096" sz="1600" dirty="0">
-                <a:solidFill>
-                  <a:schemeClr val="accent6">
-                    <a:lumMod val="75000"/>
-                  </a:schemeClr>
-                </a:solidFill>
-              </a:rPr>
-              <a:t>not applicable</a:t>
-            </a:r>
-            <a:r>
-              <a:rPr lang="LID4096" sz="1600" dirty="0"/>
-              <a:t>: requires biometric data on natural persons; SC</a:t>
-            </a:r>
-            <a:r>
-              <a:rPr lang="en-US" sz="1600" dirty="0"/>
-              <a:t> </a:t>
-            </a:r>
-            <a:r>
-              <a:rPr lang="LID4096" sz="1600" dirty="0"/>
-              <a:t>scores events from news text and volume</a:t>
-            </a:r>
-            <a:endParaRPr lang="en-US" sz="1600" dirty="0"/>
-          </a:p>
-          <a:p>
-            <a:pPr marL="285750" indent="-285750">
-              <a:lnSpc>
-                <a:spcPct val="150000"/>
-              </a:lnSpc>
-              <a:buFont typeface="Arial" panose="020B0604020202020204" pitchFamily="34" charset="0"/>
-              <a:buChar char="•"/>
-            </a:pPr>
-            <a:r>
-              <a:rPr lang="LID4096" sz="1600" dirty="0"/>
-              <a:t>Social scoring (Art. 5(1)(c)) — </a:t>
-            </a:r>
-            <a:r>
-              <a:rPr lang="LID4096" sz="1600" dirty="0">
-                <a:solidFill>
-                  <a:schemeClr val="accent6">
-                    <a:lumMod val="75000"/>
-                  </a:schemeClr>
-                </a:solidFill>
-              </a:rPr>
-              <a:t>not applicable</a:t>
-            </a:r>
-            <a:r>
-              <a:rPr lang="LID4096" sz="1600" dirty="0"/>
-              <a:t>: no person is classified or ranked</a:t>
-            </a:r>
-            <a:endParaRPr lang="en-US" sz="1600" dirty="0"/>
-          </a:p>
-          <a:p>
-            <a:pPr marL="285750" indent="-285750">
-              <a:lnSpc>
-                <a:spcPct val="150000"/>
-              </a:lnSpc>
-              <a:buFont typeface="Arial" panose="020B0604020202020204" pitchFamily="34" charset="0"/>
-              <a:buChar char="•"/>
-            </a:pPr>
-            <a:r>
-              <a:rPr lang="LID4096" sz="1600" dirty="0"/>
-              <a:t>Research artefact </a:t>
-            </a:r>
-            <a:r>
-              <a:rPr lang="LID4096" sz="1600" dirty="0">
-                <a:solidFill>
-                  <a:schemeClr val="accent6">
-                    <a:lumMod val="75000"/>
-                  </a:schemeClr>
-                </a:solidFill>
-              </a:rPr>
-              <a:t>exempt</a:t>
-            </a:r>
-            <a:r>
-              <a:rPr lang="LID4096" sz="1600" dirty="0"/>
-              <a:t> under Art. 2(6) (scientific R&amp;D) </a:t>
-            </a:r>
-            <a:endParaRPr lang="en-US" sz="1600" dirty="0"/>
-          </a:p>
-          <a:p>
-            <a:pPr marL="285750" indent="-285750">
-              <a:lnSpc>
-                <a:spcPct val="150000"/>
-              </a:lnSpc>
-              <a:buFont typeface="Arial" panose="020B0604020202020204" pitchFamily="34" charset="0"/>
-              <a:buChar char="•"/>
-            </a:pPr>
-            <a:r>
-              <a:rPr lang="LID4096" sz="1600" dirty="0"/>
-              <a:t>If </a:t>
-            </a:r>
-            <a:r>
-              <a:rPr lang="en-US" sz="1600" dirty="0"/>
-              <a:t>method is </a:t>
-            </a:r>
-            <a:r>
-              <a:rPr lang="LID4096" sz="1600" dirty="0"/>
-              <a:t>deployed: </a:t>
-            </a:r>
-            <a:r>
-              <a:rPr lang="LID4096" sz="1600" dirty="0">
-                <a:solidFill>
-                  <a:schemeClr val="accent6">
-                    <a:lumMod val="75000"/>
-                  </a:schemeClr>
-                </a:solidFill>
-              </a:rPr>
-              <a:t>minimal-risk tier </a:t>
-            </a:r>
-            <a:r>
-              <a:rPr lang="LID4096" sz="1600" dirty="0"/>
-              <a:t>(not Annex III); Art. 4 AI-literacy duty applies</a:t>
-            </a:r>
-            <a:br>
-              <a:rPr lang="en-US" sz="1600" dirty="0"/>
-            </a:br>
-            <a:r>
-              <a:rPr lang="LID4096" sz="1600" dirty="0"/>
-              <a:t>GDPR / revFADP (2023) govern survey data — consent, minimisation, anonymised reporting</a:t>
-            </a:r>
-            <a:endParaRPr lang="en-US" sz="1600" dirty="0"/>
-          </a:p>
-          <a:p>
-            <a:pPr marL="285750" indent="-285750">
-              <a:lnSpc>
-                <a:spcPct val="150000"/>
-              </a:lnSpc>
-              <a:buFont typeface="Arial" panose="020B0604020202020204" pitchFamily="34" charset="0"/>
-              <a:buChar char="•"/>
-            </a:pPr>
-            <a:r>
-              <a:rPr lang="LID4096" sz="1600" dirty="0"/>
-              <a:t>Switzerland has </a:t>
-            </a:r>
-            <a:r>
-              <a:rPr lang="LID4096" sz="1600" dirty="0">
-                <a:solidFill>
-                  <a:schemeClr val="accent6">
-                    <a:lumMod val="75000"/>
-                  </a:schemeClr>
-                </a:solidFill>
-              </a:rPr>
-              <a:t>no AI act</a:t>
-            </a:r>
-            <a:r>
-              <a:rPr lang="LID4096" sz="1600" dirty="0"/>
-              <a:t>: sector-specific approach confirmed 12 Feb 2025; CoE Framework Convention ratification, consultation bill due end-2026 → FINMA Guidance 08/2024 is the operative standard</a:t>
-            </a:r>
-            <a:endParaRPr lang="en-US" sz="1600" dirty="0"/>
-          </a:p>
-          <a:p>
-            <a:pPr marL="285750" indent="-285750">
-              <a:lnSpc>
-                <a:spcPct val="150000"/>
-              </a:lnSpc>
-              <a:buFont typeface="Arial" panose="020B0604020202020204" pitchFamily="34" charset="0"/>
-              <a:buChar char="•"/>
-            </a:pPr>
-            <a:r>
-              <a:rPr lang="LID4096" sz="1600" dirty="0"/>
-              <a:t>Human-in-the-loop by design keeps the tool </a:t>
-            </a:r>
-            <a:r>
-              <a:rPr lang="LID4096" sz="1600" dirty="0">
-                <a:solidFill>
-                  <a:schemeClr val="accent6">
-                    <a:lumMod val="75000"/>
-                  </a:schemeClr>
-                </a:solidFill>
-              </a:rPr>
-              <a:t>outside MiFID </a:t>
-            </a:r>
-            <a:r>
-              <a:rPr lang="LID4096" sz="1600" dirty="0"/>
-              <a:t>II Art. 17 algorithmic trading</a:t>
-            </a:r>
-            <a:endParaRPr lang="en-US" sz="1400" dirty="0"/>
-          </a:p>
-          <a:p>
-            <a:pPr>
-              <a:lnSpc>
-                <a:spcPct val="150000"/>
-              </a:lnSpc>
-            </a:pPr>
-            <a:r>
-              <a:rPr lang="LID4096" dirty="0"/>
-              <a:t>⚠️ Line not crossed: profiling individual managers would trigger Annex III(4) high-risk</a:t>
-            </a:r>
-          </a:p>
-        </p:txBody>
-      </p:sp>
-      <p:sp>
-        <p:nvSpPr>
-          <p:cNvPr id="9" name="TextBox 8">
-            <a:extLst>
-              <a:ext uri="{FF2B5EF4-FFF2-40B4-BE49-F238E27FC236}">
-                <a16:creationId xmlns:a16="http://schemas.microsoft.com/office/drawing/2014/main" id="{E66968E0-6D96-2329-3E0E-278000D6E020}"/>
-              </a:ext>
-            </a:extLst>
-          </p:cNvPr>
-          <p:cNvSpPr txBox="1"/>
-          <p:nvPr/>
-        </p:nvSpPr>
-        <p:spPr>
-          <a:xfrm>
-            <a:off x="787400" y="5479614"/>
-            <a:ext cx="8397240" cy="1015663"/>
-          </a:xfrm>
-          <a:prstGeom prst="rect">
-            <a:avLst/>
-          </a:prstGeom>
-          <a:noFill/>
-        </p:spPr>
-        <p:txBody>
-          <a:bodyPr wrap="square">
-            <a:spAutoFit/>
-          </a:bodyPr>
-          <a:lstStyle/>
-          <a:p>
-            <a:r>
-              <a:rPr lang="LID4096" sz="1000" dirty="0"/>
-              <a:t>Sources:</a:t>
-            </a:r>
-            <a:endParaRPr lang="en-US" sz="1000" dirty="0"/>
-          </a:p>
-          <a:p>
-            <a:pPr marL="342900" indent="-342900">
-              <a:buFont typeface="+mj-lt"/>
-              <a:buAutoNum type="arabicPeriod"/>
-            </a:pPr>
-            <a:r>
-              <a:rPr lang="LID4096" sz="1000" dirty="0"/>
-              <a:t>Article 3: Definitions | EU Artificial Intelligence Act</a:t>
-            </a:r>
-            <a:endParaRPr lang="en-US" sz="1000" dirty="0"/>
-          </a:p>
-          <a:p>
-            <a:pPr marL="342900" indent="-342900">
-              <a:buFont typeface="+mj-lt"/>
-              <a:buAutoNum type="arabicPeriod"/>
-            </a:pPr>
-            <a:r>
-              <a:rPr lang="LID4096" sz="1000" dirty="0"/>
-              <a:t>Article 5: Prohibited AI Practices | EU Artificial Intelligence Act</a:t>
-            </a:r>
-            <a:endParaRPr lang="en-US" sz="1000" dirty="0"/>
-          </a:p>
-          <a:p>
-            <a:pPr marL="342900" indent="-342900">
-              <a:buFont typeface="+mj-lt"/>
-              <a:buAutoNum type="arabicPeriod"/>
-            </a:pPr>
-            <a:r>
-              <a:rPr lang="LID4096" sz="1000" dirty="0"/>
-              <a:t>Red Lines under EU AI Act: Unpacking the prohibition of emotion recognition in the workplace and education institutions (FPF)</a:t>
-            </a:r>
-            <a:endParaRPr lang="en-US" sz="1000" dirty="0"/>
-          </a:p>
-          <a:p>
-            <a:pPr marL="342900" indent="-342900">
-              <a:buFont typeface="+mj-lt"/>
-              <a:buAutoNum type="arabicPeriod"/>
-            </a:pPr>
-            <a:r>
-              <a:rPr lang="LID4096" sz="1000" dirty="0"/>
-              <a:t>AI regulation: Federal Council to ratify Council of Europe Convention (admin.ch)- Switzerland Sets Its Course on AI Legislation (Pestalozzi)</a:t>
-            </a:r>
-            <a:endParaRPr lang="en-US" sz="1000" dirty="0"/>
-          </a:p>
-          <a:p>
-            <a:pPr marL="342900" indent="-342900">
-              <a:buFont typeface="+mj-lt"/>
-              <a:buAutoNum type="arabicPeriod"/>
-            </a:pPr>
-            <a:r>
-              <a:rPr lang="LID4096" sz="1000" dirty="0"/>
-              <a:t>FINMA guidance on governance and risk management when using artificial intelligence</a:t>
-            </a:r>
-          </a:p>
-        </p:txBody>
-      </p:sp>
-    </p:spTree>
-    <p:extLst>
-      <p:ext uri="{BB962C8B-B14F-4D97-AF65-F5344CB8AC3E}">
-        <p14:creationId xmlns:p14="http://schemas.microsoft.com/office/powerpoint/2010/main" val="3410717024"/>
-      </p:ext>
-    </p:extLst>
-  </p:cSld>
-  <p:clrMapOvr>
-    <a:masterClrMapping/>
-  </p:clrMapOvr>
-</p:sld>
-</file>
-
-<file path=ppt/slides/slide13.xml><?xml version="1.0" encoding="utf-8"?>
-<p:sld xmlns:a="http://schemas.openxmlformats.org/drawingml/2006/main" xmlns:r="http://schemas.openxmlformats.org/officeDocument/2006/relationships" xmlns:p="http://schemas.openxmlformats.org/presentationml/2006/main">
-  <p:cSld>
-    <p:spTree>
-      <p:nvGrpSpPr>
-        <p:cNvPr id="1" name=""/>
-        <p:cNvGrpSpPr/>
-        <p:nvPr/>
-      </p:nvGrpSpPr>
-      <p:grpSpPr>
-        <a:xfrm>
-          <a:off x="0" y="0"/>
-          <a:ext cx="0" cy="0"/>
-          <a:chOff x="0" y="0"/>
-          <a:chExt cx="0" cy="0"/>
-        </a:xfrm>
-      </p:grpSpPr>
-      <p:sp>
-        <p:nvSpPr>
-          <p:cNvPr id="2" name="Titel 1">
-            <a:extLst>
-              <a:ext uri="{FF2B5EF4-FFF2-40B4-BE49-F238E27FC236}">
-                <a16:creationId xmlns:a16="http://schemas.microsoft.com/office/drawing/2014/main" id="{090EAC2A-5706-C65F-88DE-7DA698789FBD}"/>
-              </a:ext>
-            </a:extLst>
-          </p:cNvPr>
-          <p:cNvSpPr>
-            <a:spLocks noGrp="1"/>
-          </p:cNvSpPr>
-          <p:nvPr>
-            <p:ph type="title"/>
-          </p:nvPr>
-        </p:nvSpPr>
-        <p:spPr>
-          <a:xfrm>
-            <a:off x="838200" y="365125"/>
-            <a:ext cx="8161800" cy="823595"/>
-          </a:xfrm>
-        </p:spPr>
-        <p:txBody>
-          <a:bodyPr/>
-          <a:lstStyle/>
-          <a:p>
-            <a:r>
-              <a:rPr lang="en-US" dirty="0"/>
-              <a:t>Personal Lessons Learned</a:t>
-            </a:r>
-          </a:p>
-        </p:txBody>
-      </p:sp>
-      <p:sp>
-        <p:nvSpPr>
-          <p:cNvPr id="3" name="Inhaltsplatzhalter 2">
-            <a:extLst>
-              <a:ext uri="{FF2B5EF4-FFF2-40B4-BE49-F238E27FC236}">
-                <a16:creationId xmlns:a16="http://schemas.microsoft.com/office/drawing/2014/main" id="{395D3EC4-46A1-A411-92FC-D6D6575EFB2C}"/>
-              </a:ext>
-            </a:extLst>
-          </p:cNvPr>
-          <p:cNvSpPr>
-            <a:spLocks noGrp="1"/>
-          </p:cNvSpPr>
-          <p:nvPr>
-            <p:ph idx="1"/>
-          </p:nvPr>
-        </p:nvSpPr>
-        <p:spPr>
-          <a:xfrm>
-            <a:off x="838200" y="1691639"/>
-            <a:ext cx="10515600" cy="4485323"/>
-          </a:xfrm>
-        </p:spPr>
-        <p:txBody>
-          <a:bodyPr>
-            <a:normAutofit fontScale="85000" lnSpcReduction="10000"/>
-          </a:bodyPr>
-          <a:lstStyle/>
-          <a:p>
-            <a:pPr>
-              <a:lnSpc>
-                <a:spcPct val="150000"/>
-              </a:lnSpc>
-            </a:pPr>
-            <a:r>
-              <a:rPr lang="en-US" dirty="0"/>
-              <a:t>A rigorous, pre-specified design protects the credibility of findings more than any single result.</a:t>
-            </a:r>
-          </a:p>
-          <a:p>
-            <a:pPr>
-              <a:lnSpc>
-                <a:spcPct val="150000"/>
-              </a:lnSpc>
-            </a:pPr>
-            <a:r>
-              <a:rPr lang="en-US" dirty="0"/>
-              <a:t>A non-significant result is a legitimate and informative scientific contribution.</a:t>
-            </a:r>
-          </a:p>
-          <a:p>
-            <a:pPr>
-              <a:lnSpc>
-                <a:spcPct val="150000"/>
-              </a:lnSpc>
-            </a:pPr>
-            <a:r>
-              <a:rPr lang="en-US" dirty="0"/>
-              <a:t>Statistical power must be planned at the design stage, not diagnosed afterwards.</a:t>
-            </a:r>
-          </a:p>
-          <a:p>
-            <a:pPr>
-              <a:lnSpc>
-                <a:spcPct val="150000"/>
-              </a:lnSpc>
-            </a:pPr>
-            <a:r>
-              <a:rPr lang="en-US" dirty="0"/>
-              <a:t>Translating behavioral theory into a practitioner tool requires disciplined simplification.</a:t>
-            </a:r>
-          </a:p>
-        </p:txBody>
-      </p:sp>
-    </p:spTree>
-    <p:extLst>
-      <p:ext uri="{BB962C8B-B14F-4D97-AF65-F5344CB8AC3E}">
-        <p14:creationId xmlns:p14="http://schemas.microsoft.com/office/powerpoint/2010/main" val="3410717024"/>
-      </p:ext>
-    </p:extLst>
-  </p:cSld>
-  <p:clrMapOvr>
-    <a:masterClrMapping/>
-  </p:clrMapOvr>
-</p:sld>
-</file>
-
 <file path=ppt/slides/slide14.xml><?xml version="1.0" encoding="utf-8"?>
 <p:sld xmlns:a="http://schemas.openxmlformats.org/drawingml/2006/main" xmlns:r="http://schemas.openxmlformats.org/officeDocument/2006/relationships" xmlns:p="http://schemas.openxmlformats.org/presentationml/2006/main">
   <p:cSld>
@@ -9727,7 +10707,7 @@
           <a:p>
             <a:r>
               <a:rPr lang="en-US" dirty="0"/>
-              <a:t>References</a:t>
+              <a:t>Ethical and legal Implications</a:t>
             </a:r>
           </a:p>
         </p:txBody>
@@ -9751,27 +10731,67 @@
         <p:spPr>
           <a:xfrm>
             <a:off x="838200" y="1691639"/>
-            <a:ext cx="10515600" cy="4485323"/>
+            <a:ext cx="10093960" cy="3779521"/>
           </a:xfrm>
         </p:spPr>
         <p:txBody>
-          <a:bodyPr/>
-          <a:lstStyle/>
-          <a:p>
-            <a:pPr marL="457200" indent="-457200">
-              <a:buNone/>
+          <a:bodyPr>
+            <a:normAutofit fontScale="62500" lnSpcReduction="20000"/>
+          </a:bodyPr>
+          <a:lstStyle/>
+          <a:p>
+            <a:pPr>
+              <a:lnSpc>
+                <a:spcPct val="170000"/>
+              </a:lnSpc>
             </a:pPr>
             <a:r>
               <a:rPr lang="en-US" dirty="0"/>
-              <a:t>Yang, Y., UY, M. C. S., &amp; Huang, A. (2020). </a:t>
-            </a:r>
-            <a:r>
-              <a:rPr lang="en-US" i="1" dirty="0"/>
-              <a:t>FinBERT: A pretrained language model for financial communications</a:t>
-            </a:r>
+              <a:t>Decision-support indicators should augment, not replace, professional judgment and accountability.</a:t>
+            </a:r>
+          </a:p>
+          <a:p>
+            <a:pPr>
+              <a:lnSpc>
+                <a:spcPct val="170000"/>
+              </a:lnSpc>
+            </a:pPr>
             <a:r>
               <a:rPr lang="en-US" dirty="0"/>
-              <a:t> [Preprint]. arXiv. https://doi.org/10.48550/arXiv.2006.08097</a:t>
+              <a:t>Over-reliance on a single composite score risks automation bias and a false sense of precision.</a:t>
+            </a:r>
+          </a:p>
+          <a:p>
+            <a:pPr>
+              <a:lnSpc>
+                <a:spcPct val="170000"/>
+              </a:lnSpc>
+            </a:pPr>
+            <a:r>
+              <a:rPr lang="en-US" dirty="0"/>
+              <a:t>Transparency and interpretability of the indicator are prerequisites for responsible deployment.</a:t>
+            </a:r>
+          </a:p>
+          <a:p>
+            <a:pPr>
+              <a:lnSpc>
+                <a:spcPct val="170000"/>
+              </a:lnSpc>
+            </a:pPr>
+            <a:r>
+              <a:rPr lang="en-US" dirty="0"/>
+              <a:t>Behavioral monitoring must respect the professional autonomy and discretion of portfolio managers.</a:t>
+            </a:r>
+          </a:p>
+          <a:p>
+            <a:pPr>
+              <a:lnSpc>
+                <a:spcPct val="170000"/>
+              </a:lnSpc>
+            </a:pPr>
+            <a:r>
+              <a:rPr lang="en-US" dirty="0"/>
+              <a:t>Legal implication – the line is not crossed (see Annex)</a:t>
             </a:r>
           </a:p>
         </p:txBody>
@@ -9779,7 +10799,7 @@
     </p:spTree>
     <p:extLst>
       <p:ext uri="{BB962C8B-B14F-4D97-AF65-F5344CB8AC3E}">
-        <p14:creationId xmlns:p14="http://schemas.microsoft.com/office/powerpoint/2010/main" val="3410717024"/>
+        <p14:creationId xmlns:p14="http://schemas.microsoft.com/office/powerpoint/2010/main" val="2524467379"/>
       </p:ext>
     </p:extLst>
   </p:cSld>
@@ -9834,7 +10854,7 @@
           <a:p>
             <a:r>
               <a:rPr lang="en-US" dirty="0"/>
-              <a:t>Thank You</a:t>
+              <a:t>Personal Lessons Learned</a:t>
             </a:r>
           </a:p>
         </p:txBody>
@@ -9862,24 +10882,52 @@
           </a:xfrm>
         </p:spPr>
         <p:txBody>
-          <a:bodyPr/>
-          <a:lstStyle/>
-          <a:p>
+          <a:bodyPr>
+            <a:normAutofit fontScale="85000" lnSpcReduction="10000"/>
+          </a:bodyPr>
+          <a:lstStyle/>
+          <a:p>
+            <a:pPr>
+              <a:lnSpc>
+                <a:spcPct val="150000"/>
+              </a:lnSpc>
+            </a:pPr>
             <a:r>
               <a:rPr lang="en-US" dirty="0"/>
-              <a:t>Aliaksei Malashonak – Executive Master of Business Administration.</a:t>
-            </a:r>
-          </a:p>
-          <a:p>
+              <a:t>A rigorous, pre-specified design protects the credibility of findings more than any single result.</a:t>
+            </a:r>
+          </a:p>
+          <a:p>
+            <a:pPr>
+              <a:lnSpc>
+                <a:spcPct val="150000"/>
+              </a:lnSpc>
+            </a:pPr>
             <a:r>
               <a:rPr lang="en-US" dirty="0"/>
-              <a:t>SBS Swiss Business School.</a:t>
-            </a:r>
-          </a:p>
-          <a:p>
+              <a:t>A non-significant result is a legitimate and informative scientific contribution.</a:t>
+            </a:r>
+          </a:p>
+          <a:p>
+            <a:pPr>
+              <a:lnSpc>
+                <a:spcPct val="150000"/>
+              </a:lnSpc>
+            </a:pPr>
             <a:r>
               <a:rPr lang="en-US" dirty="0"/>
-              <a:t>Questions and discussion are welcome.</a:t>
+              <a:t>Statistical power must be planned at the design stage, not diagnosed afterwards.</a:t>
+            </a:r>
+          </a:p>
+          <a:p>
+            <a:pPr>
+              <a:lnSpc>
+                <a:spcPct val="150000"/>
+              </a:lnSpc>
+            </a:pPr>
+            <a:r>
+              <a:rPr lang="en-US" dirty="0"/>
+              <a:t>Translating behavioral theory into a practitioner tool requires disciplined simplification.</a:t>
             </a:r>
           </a:p>
         </p:txBody>
@@ -9916,10 +10964,10 @@
       </p:grpSpPr>
       <p:sp>
         <p:nvSpPr>
-          <p:cNvPr id="2" name="Title 1">
-            <a:extLst>
-              <a:ext uri="{FF2B5EF4-FFF2-40B4-BE49-F238E27FC236}">
-                <a16:creationId xmlns:a16="http://schemas.microsoft.com/office/drawing/2014/main" id="{8AADB9FC-9460-23E7-F132-F3695D174898}"/>
+          <p:cNvPr id="2" name="Titel 1">
+            <a:extLst>
+              <a:ext uri="{FF2B5EF4-FFF2-40B4-BE49-F238E27FC236}">
+                <a16:creationId xmlns:a16="http://schemas.microsoft.com/office/drawing/2014/main" id="{090EAC2A-5706-C65F-88DE-7DA698789FBD}"/>
               </a:ext>
             </a:extLst>
           </p:cNvPr>
@@ -9930,246 +10978,118 @@
             <p:ph type="title"/>
           </p:nvPr>
         </p:nvSpPr>
-        <p:spPr/>
+        <p:spPr>
+          <a:xfrm>
+            <a:off x="838200" y="365125"/>
+            <a:ext cx="8161800" cy="823595"/>
+          </a:xfrm>
+        </p:spPr>
         <p:txBody>
           <a:bodyPr/>
           <a:lstStyle/>
           <a:p>
             <a:r>
               <a:rPr lang="en-US" dirty="0"/>
-              <a:t>Appendix 1: H1 regression results</a:t>
-            </a:r>
-            <a:endParaRPr lang="LID4096" dirty="0"/>
-          </a:p>
-        </p:txBody>
-      </p:sp>
-      <p:pic>
-        <p:nvPicPr>
-          <p:cNvPr id="5" name="Content Placeholder 4">
-            <a:extLst>
-              <a:ext uri="{FF2B5EF4-FFF2-40B4-BE49-F238E27FC236}">
-                <a16:creationId xmlns:a16="http://schemas.microsoft.com/office/drawing/2014/main" id="{83F816A7-F137-4A09-338C-704C22508C38}"/>
-              </a:ext>
-            </a:extLst>
-          </p:cNvPr>
-          <p:cNvPicPr>
-            <a:picLocks noGrp="1" noChangeAspect="1"/>
-          </p:cNvPicPr>
+              <a:t>References</a:t>
+            </a:r>
+          </a:p>
+        </p:txBody>
+      </p:sp>
+      <p:sp>
+        <p:nvSpPr>
+          <p:cNvPr id="3" name="Inhaltsplatzhalter 2">
+            <a:extLst>
+              <a:ext uri="{FF2B5EF4-FFF2-40B4-BE49-F238E27FC236}">
+                <a16:creationId xmlns:a16="http://schemas.microsoft.com/office/drawing/2014/main" id="{395D3EC4-46A1-A411-92FC-D6D6575EFB2C}"/>
+              </a:ext>
+            </a:extLst>
+          </p:cNvPr>
+          <p:cNvSpPr>
+            <a:spLocks noGrp="1"/>
+          </p:cNvSpPr>
           <p:nvPr>
             <p:ph idx="1"/>
           </p:nvPr>
-        </p:nvPicPr>
-        <p:blipFill>
-          <a:blip r:embed="rId2"/>
-          <a:stretch>
-            <a:fillRect/>
-          </a:stretch>
-        </p:blipFill>
+        </p:nvSpPr>
         <p:spPr>
           <a:xfrm>
-            <a:off x="1881703" y="2253350"/>
-            <a:ext cx="7592497" cy="3600980"/>
+            <a:off x="838200" y="1691639"/>
+            <a:ext cx="10515600" cy="4485323"/>
           </a:xfrm>
         </p:spPr>
-      </p:pic>
-      <p:sp>
-        <p:nvSpPr>
-          <p:cNvPr id="6" name="Inhaltsplatzhalter 2">
-            <a:extLst>
-              <a:ext uri="{FF2B5EF4-FFF2-40B4-BE49-F238E27FC236}">
-                <a16:creationId xmlns:a16="http://schemas.microsoft.com/office/drawing/2014/main" id="{DD5A7C2A-338A-3141-3B78-2BF00429FACD}"/>
-              </a:ext>
-            </a:extLst>
-          </p:cNvPr>
-          <p:cNvSpPr txBox="1">
-            <a:spLocks/>
-          </p:cNvSpPr>
-          <p:nvPr/>
-        </p:nvSpPr>
-        <p:spPr>
-          <a:xfrm>
-            <a:off x="3571240" y="1554479"/>
-            <a:ext cx="4505960" cy="599441"/>
-          </a:xfrm>
-          <a:prstGeom prst="rect">
-            <a:avLst/>
-          </a:prstGeom>
-        </p:spPr>
-        <p:txBody>
-          <a:bodyPr vert="horz" lIns="91440" tIns="45720" rIns="91440" bIns="45720" rtlCol="0">
-            <a:normAutofit fontScale="92500"/>
+        <p:txBody>
+          <a:bodyPr>
+            <a:normAutofit/>
           </a:bodyPr>
-          <a:lstStyle>
-            <a:lvl1pPr marL="228600" indent="-228600" algn="l" defTabSz="914400" rtl="0" eaLnBrk="1" latinLnBrk="0" hangingPunct="1">
-              <a:lnSpc>
-                <a:spcPct val="90000"/>
-              </a:lnSpc>
-              <a:spcBef>
-                <a:spcPts val="1000"/>
-              </a:spcBef>
-              <a:buFont typeface="Arial" panose="020B0604020202020204" pitchFamily="34" charset="0"/>
-              <a:buChar char="•"/>
-              <a:defRPr sz="2800" kern="1200">
-                <a:solidFill>
-                  <a:schemeClr val="tx1"/>
-                </a:solidFill>
-                <a:latin typeface="+mn-lt"/>
-                <a:ea typeface="+mn-ea"/>
-                <a:cs typeface="+mn-cs"/>
-              </a:defRPr>
-            </a:lvl1pPr>
-            <a:lvl2pPr marL="685800" indent="-228600" algn="l" defTabSz="914400" rtl="0" eaLnBrk="1" latinLnBrk="0" hangingPunct="1">
-              <a:lnSpc>
-                <a:spcPct val="90000"/>
-              </a:lnSpc>
-              <a:spcBef>
-                <a:spcPts val="500"/>
-              </a:spcBef>
-              <a:buFont typeface="Arial" panose="020B0604020202020204" pitchFamily="34" charset="0"/>
-              <a:buChar char="•"/>
-              <a:defRPr sz="2400" kern="1200">
-                <a:solidFill>
-                  <a:schemeClr val="tx1"/>
-                </a:solidFill>
-                <a:latin typeface="+mn-lt"/>
-                <a:ea typeface="+mn-ea"/>
-                <a:cs typeface="+mn-cs"/>
-              </a:defRPr>
-            </a:lvl2pPr>
-            <a:lvl3pPr marL="1143000" indent="-228600" algn="l" defTabSz="914400" rtl="0" eaLnBrk="1" latinLnBrk="0" hangingPunct="1">
-              <a:lnSpc>
-                <a:spcPct val="90000"/>
-              </a:lnSpc>
-              <a:spcBef>
-                <a:spcPts val="500"/>
-              </a:spcBef>
-              <a:buFont typeface="Arial" panose="020B0604020202020204" pitchFamily="34" charset="0"/>
-              <a:buChar char="•"/>
-              <a:defRPr sz="2000" kern="1200">
-                <a:solidFill>
-                  <a:schemeClr val="tx1"/>
-                </a:solidFill>
-                <a:latin typeface="+mn-lt"/>
-                <a:ea typeface="+mn-ea"/>
-                <a:cs typeface="+mn-cs"/>
-              </a:defRPr>
-            </a:lvl3pPr>
-            <a:lvl4pPr marL="1600200" indent="-228600" algn="l" defTabSz="914400" rtl="0" eaLnBrk="1" latinLnBrk="0" hangingPunct="1">
-              <a:lnSpc>
-                <a:spcPct val="90000"/>
-              </a:lnSpc>
-              <a:spcBef>
-                <a:spcPts val="500"/>
-              </a:spcBef>
-              <a:buFont typeface="Arial" panose="020B0604020202020204" pitchFamily="34" charset="0"/>
-              <a:buChar char="•"/>
-              <a:defRPr sz="1800" kern="1200">
-                <a:solidFill>
-                  <a:schemeClr val="tx1"/>
-                </a:solidFill>
-                <a:latin typeface="+mn-lt"/>
-                <a:ea typeface="+mn-ea"/>
-                <a:cs typeface="+mn-cs"/>
-              </a:defRPr>
-            </a:lvl4pPr>
-            <a:lvl5pPr marL="2057400" indent="-228600" algn="l" defTabSz="914400" rtl="0" eaLnBrk="1" latinLnBrk="0" hangingPunct="1">
-              <a:lnSpc>
-                <a:spcPct val="90000"/>
-              </a:lnSpc>
-              <a:spcBef>
-                <a:spcPts val="500"/>
-              </a:spcBef>
-              <a:buFont typeface="Arial" panose="020B0604020202020204" pitchFamily="34" charset="0"/>
-              <a:buChar char="•"/>
-              <a:defRPr sz="1800" kern="1200">
-                <a:solidFill>
-                  <a:schemeClr val="tx1"/>
-                </a:solidFill>
-                <a:latin typeface="+mn-lt"/>
-                <a:ea typeface="+mn-ea"/>
-                <a:cs typeface="+mn-cs"/>
-              </a:defRPr>
-            </a:lvl5pPr>
-            <a:lvl6pPr marL="2514600" indent="-228600" algn="l" defTabSz="914400" rtl="0" eaLnBrk="1" latinLnBrk="0" hangingPunct="1">
-              <a:lnSpc>
-                <a:spcPct val="90000"/>
-              </a:lnSpc>
-              <a:spcBef>
-                <a:spcPts val="500"/>
-              </a:spcBef>
-              <a:buFont typeface="Arial" panose="020B0604020202020204" pitchFamily="34" charset="0"/>
-              <a:buChar char="•"/>
-              <a:defRPr sz="1800" kern="1200">
-                <a:solidFill>
-                  <a:schemeClr val="tx1"/>
-                </a:solidFill>
-                <a:latin typeface="+mn-lt"/>
-                <a:ea typeface="+mn-ea"/>
-                <a:cs typeface="+mn-cs"/>
-              </a:defRPr>
-            </a:lvl6pPr>
-            <a:lvl7pPr marL="2971800" indent="-228600" algn="l" defTabSz="914400" rtl="0" eaLnBrk="1" latinLnBrk="0" hangingPunct="1">
-              <a:lnSpc>
-                <a:spcPct val="90000"/>
-              </a:lnSpc>
-              <a:spcBef>
-                <a:spcPts val="500"/>
-              </a:spcBef>
-              <a:buFont typeface="Arial" panose="020B0604020202020204" pitchFamily="34" charset="0"/>
-              <a:buChar char="•"/>
-              <a:defRPr sz="1800" kern="1200">
-                <a:solidFill>
-                  <a:schemeClr val="tx1"/>
-                </a:solidFill>
-                <a:latin typeface="+mn-lt"/>
-                <a:ea typeface="+mn-ea"/>
-                <a:cs typeface="+mn-cs"/>
-              </a:defRPr>
-            </a:lvl7pPr>
-            <a:lvl8pPr marL="3429000" indent="-228600" algn="l" defTabSz="914400" rtl="0" eaLnBrk="1" latinLnBrk="0" hangingPunct="1">
-              <a:lnSpc>
-                <a:spcPct val="90000"/>
-              </a:lnSpc>
-              <a:spcBef>
-                <a:spcPts val="500"/>
-              </a:spcBef>
-              <a:buFont typeface="Arial" panose="020B0604020202020204" pitchFamily="34" charset="0"/>
-              <a:buChar char="•"/>
-              <a:defRPr sz="1800" kern="1200">
-                <a:solidFill>
-                  <a:schemeClr val="tx1"/>
-                </a:solidFill>
-                <a:latin typeface="+mn-lt"/>
-                <a:ea typeface="+mn-ea"/>
-                <a:cs typeface="+mn-cs"/>
-              </a:defRPr>
-            </a:lvl8pPr>
-            <a:lvl9pPr marL="3886200" indent="-228600" algn="l" defTabSz="914400" rtl="0" eaLnBrk="1" latinLnBrk="0" hangingPunct="1">
-              <a:lnSpc>
-                <a:spcPct val="90000"/>
-              </a:lnSpc>
-              <a:spcBef>
-                <a:spcPts val="500"/>
-              </a:spcBef>
-              <a:buFont typeface="Arial" panose="020B0604020202020204" pitchFamily="34" charset="0"/>
-              <a:buChar char="•"/>
-              <a:defRPr sz="1800" kern="1200">
-                <a:solidFill>
-                  <a:schemeClr val="tx1"/>
-                </a:solidFill>
-                <a:latin typeface="+mn-lt"/>
-                <a:ea typeface="+mn-ea"/>
-                <a:cs typeface="+mn-cs"/>
-              </a:defRPr>
-            </a:lvl9pPr>
-          </a:lstStyle>
-          <a:p>
-            <a:pPr marL="0" indent="0">
+          <a:lstStyle/>
+          <a:p>
+            <a:pPr marL="457200" indent="-457200">
               <a:buNone/>
             </a:pPr>
             <a:r>
-              <a:rPr lang="en-US" dirty="0"/>
-              <a:t>Shock Score -&gt; Net Risk Stance</a:t>
+              <a:rPr lang="en-US" sz="1400" dirty="0"/>
+              <a:t>Bianchi, M., &amp; </a:t>
+            </a:r>
+            <a:r>
+              <a:rPr lang="en-US" sz="1400" dirty="0" err="1"/>
+              <a:t>Brière</a:t>
+            </a:r>
+            <a:r>
+              <a:rPr lang="en-US" sz="1400" dirty="0"/>
+              <a:t>, M. (2021). Robo-advising: Less AI and more XAI? SSRN Electronic Journal.</a:t>
+            </a:r>
+          </a:p>
+          <a:p>
+            <a:pPr marL="457200" indent="-457200">
+              <a:buNone/>
+            </a:pPr>
+            <a:r>
+              <a:rPr lang="en-US" sz="1400" dirty="0"/>
+              <a:t>Huber, C., Huber, J., &amp; Kirchler, M. (2021). Market shocks and professionals' investment behavior: Evidence from the COVID-19 crash. Journal of Banking &amp; Finance, 133, Article 106247.</a:t>
+            </a:r>
+          </a:p>
+          <a:p>
+            <a:pPr marL="457200" indent="-457200">
+              <a:buNone/>
+            </a:pPr>
+            <a:r>
+              <a:rPr lang="en-US" sz="1400" dirty="0"/>
+              <a:t>Lim, T. (2026). Emotion-aware decision support system for real-time financial sentiment and behavior-based trading risk advisory. Journal of Behavioral Finance, 1–24.</a:t>
+            </a:r>
+          </a:p>
+          <a:p>
+            <a:pPr marL="457200" indent="-457200">
+              <a:buNone/>
+            </a:pPr>
+            <a:r>
+              <a:rPr lang="en-US" sz="1400" dirty="0"/>
+              <a:t>March, J. G., &amp; Shapira, Z. (1987). Managerial perspectives on risk and risk taking. Management Science, 33(11), 1404–1418</a:t>
+            </a:r>
+          </a:p>
+          <a:p>
+            <a:pPr marL="457200" indent="-457200">
+              <a:buNone/>
+            </a:pPr>
+            <a:r>
+              <a:rPr lang="en-US" sz="1400" dirty="0"/>
+              <a:t>Statman, M. (2019). Behavioral finance: The second generation. SSRN Electronic Journal.</a:t>
+            </a:r>
+          </a:p>
+          <a:p>
+            <a:pPr marL="457200" indent="-457200">
+              <a:buNone/>
+            </a:pPr>
+            <a:r>
+              <a:rPr lang="en-US" sz="1400" dirty="0"/>
+              <a:t>Yang, Y., UY, M. C. S., &amp; Huang, A. (2020). </a:t>
+            </a:r>
+            <a:r>
+              <a:rPr lang="en-US" sz="1400" i="1" dirty="0"/>
+              <a:t>FinBERT: A pretrained language model for financial communications</a:t>
+            </a:r>
+            <a:r>
+              <a:rPr lang="en-US" sz="1400" dirty="0"/>
+              <a:t> [Preprint]. arXiv. </a:t>
             </a:r>
           </a:p>
         </p:txBody>
@@ -10177,7 +11097,7 @@
     </p:spTree>
     <p:extLst>
       <p:ext uri="{BB962C8B-B14F-4D97-AF65-F5344CB8AC3E}">
-        <p14:creationId xmlns:p14="http://schemas.microsoft.com/office/powerpoint/2010/main" val="214505872"/>
+        <p14:creationId xmlns:p14="http://schemas.microsoft.com/office/powerpoint/2010/main" val="3410717024"/>
       </p:ext>
     </p:extLst>
   </p:cSld>
@@ -10206,10 +11126,10 @@
       </p:grpSpPr>
       <p:sp>
         <p:nvSpPr>
-          <p:cNvPr id="2" name="Title 1">
-            <a:extLst>
-              <a:ext uri="{FF2B5EF4-FFF2-40B4-BE49-F238E27FC236}">
-                <a16:creationId xmlns:a16="http://schemas.microsoft.com/office/drawing/2014/main" id="{8AADB9FC-9460-23E7-F132-F3695D174898}"/>
+          <p:cNvPr id="2" name="Titel 1">
+            <a:extLst>
+              <a:ext uri="{FF2B5EF4-FFF2-40B4-BE49-F238E27FC236}">
+                <a16:creationId xmlns:a16="http://schemas.microsoft.com/office/drawing/2014/main" id="{090EAC2A-5706-C65F-88DE-7DA698789FBD}"/>
               </a:ext>
             </a:extLst>
           </p:cNvPr>
@@ -10220,45 +11140,259 @@
             <p:ph type="title"/>
           </p:nvPr>
         </p:nvSpPr>
-        <p:spPr/>
-        <p:txBody>
-          <a:bodyPr/>
-          <a:lstStyle/>
-          <a:p>
-            <a:r>
-              <a:rPr lang="en-US" dirty="0"/>
-              <a:t>Appendix 2: H2 regression results</a:t>
-            </a:r>
-            <a:endParaRPr lang="LID4096" dirty="0"/>
-          </a:p>
-        </p:txBody>
-      </p:sp>
-      <p:sp>
-        <p:nvSpPr>
-          <p:cNvPr id="3" name="Inhaltsplatzhalter 2">
-            <a:extLst>
-              <a:ext uri="{FF2B5EF4-FFF2-40B4-BE49-F238E27FC236}">
-                <a16:creationId xmlns:a16="http://schemas.microsoft.com/office/drawing/2014/main" id="{E5760F00-D52B-4105-F882-398308458061}"/>
-              </a:ext>
-            </a:extLst>
-          </p:cNvPr>
-          <p:cNvSpPr txBox="1">
-            <a:spLocks/>
-          </p:cNvSpPr>
-          <p:nvPr/>
-        </p:nvSpPr>
         <p:spPr>
           <a:xfrm>
-            <a:off x="3571240" y="1554479"/>
-            <a:ext cx="4505960" cy="599441"/>
+            <a:off x="838200" y="365125"/>
+            <a:ext cx="8161800" cy="823595"/>
+          </a:xfrm>
+        </p:spPr>
+        <p:txBody>
+          <a:bodyPr/>
+          <a:lstStyle/>
+          <a:p>
+            <a:r>
+              <a:rPr lang="en-US" dirty="0"/>
+              <a:t>Thank You</a:t>
+            </a:r>
+          </a:p>
+        </p:txBody>
+      </p:sp>
+      <p:sp>
+        <p:nvSpPr>
+          <p:cNvPr id="3" name="Inhaltsplatzhalter 2">
+            <a:extLst>
+              <a:ext uri="{FF2B5EF4-FFF2-40B4-BE49-F238E27FC236}">
+                <a16:creationId xmlns:a16="http://schemas.microsoft.com/office/drawing/2014/main" id="{395D3EC4-46A1-A411-92FC-D6D6575EFB2C}"/>
+              </a:ext>
+            </a:extLst>
+          </p:cNvPr>
+          <p:cNvSpPr>
+            <a:spLocks noGrp="1"/>
+          </p:cNvSpPr>
+          <p:nvPr>
+            <p:ph idx="1"/>
+          </p:nvPr>
+        </p:nvSpPr>
+        <p:spPr>
+          <a:xfrm>
+            <a:off x="838200" y="1691639"/>
+            <a:ext cx="10515600" cy="4485323"/>
+          </a:xfrm>
+        </p:spPr>
+        <p:txBody>
+          <a:bodyPr/>
+          <a:lstStyle/>
+          <a:p>
+            <a:r>
+              <a:rPr lang="en-US" dirty="0"/>
+              <a:t>Aliaksei Malashonak – Executive Master of Business Administration.</a:t>
+            </a:r>
+          </a:p>
+          <a:p>
+            <a:r>
+              <a:rPr lang="en-US" dirty="0"/>
+              <a:t>SBS Swiss Business School.</a:t>
+            </a:r>
+          </a:p>
+          <a:p>
+            <a:r>
+              <a:rPr lang="en-US" dirty="0"/>
+              <a:t>Questions and discussion are welcome.</a:t>
+            </a:r>
+          </a:p>
+        </p:txBody>
+      </p:sp>
+      <p:sp>
+        <p:nvSpPr>
+          <p:cNvPr id="7" name="TextBox 6">
+            <a:extLst>
+              <a:ext uri="{FF2B5EF4-FFF2-40B4-BE49-F238E27FC236}">
+                <a16:creationId xmlns:a16="http://schemas.microsoft.com/office/drawing/2014/main" id="{2D3496BB-C427-4BBE-1C07-51B4527EDC22}"/>
+              </a:ext>
+            </a:extLst>
+          </p:cNvPr>
+          <p:cNvSpPr txBox="1"/>
+          <p:nvPr/>
+        </p:nvSpPr>
+        <p:spPr>
+          <a:xfrm>
+            <a:off x="838199" y="3549758"/>
+            <a:ext cx="6359831" cy="646331"/>
+          </a:xfrm>
+          <a:prstGeom prst="rect">
+            <a:avLst/>
+          </a:prstGeom>
+          <a:noFill/>
+        </p:spPr>
+        <p:txBody>
+          <a:bodyPr wrap="square">
+            <a:spAutoFit/>
+          </a:bodyPr>
+          <a:lstStyle/>
+          <a:p>
+            <a:r>
+              <a:rPr lang="en-US" dirty="0">
+                <a:hlinkClick r:id="rId2"/>
+              </a:rPr>
+              <a:t>Repo: </a:t>
+            </a:r>
+            <a:r>
+              <a:rPr lang="LID4096" dirty="0">
+                <a:hlinkClick r:id="rId2"/>
+              </a:rPr>
+              <a:t>https://github.com/Amarows/thesis</a:t>
+            </a:r>
+            <a:endParaRPr lang="en-US" dirty="0"/>
+          </a:p>
+          <a:p>
+            <a:endParaRPr lang="LID4096" dirty="0"/>
+          </a:p>
+        </p:txBody>
+      </p:sp>
+      <p:pic>
+        <p:nvPicPr>
+          <p:cNvPr id="9" name="Picture 8">
+            <a:extLst>
+              <a:ext uri="{FF2B5EF4-FFF2-40B4-BE49-F238E27FC236}">
+                <a16:creationId xmlns:a16="http://schemas.microsoft.com/office/drawing/2014/main" id="{EA63192B-95C8-7C90-17F0-192A2CEA3218}"/>
+              </a:ext>
+            </a:extLst>
+          </p:cNvPr>
+          <p:cNvPicPr>
+            <a:picLocks noChangeAspect="1"/>
+          </p:cNvPicPr>
+          <p:nvPr/>
+        </p:nvPicPr>
+        <p:blipFill>
+          <a:blip r:embed="rId3"/>
+          <a:stretch>
+            <a:fillRect/>
+          </a:stretch>
+        </p:blipFill>
+        <p:spPr>
+          <a:xfrm>
+            <a:off x="919137" y="3942248"/>
+            <a:ext cx="6111453" cy="1519100"/>
           </a:xfrm>
           <a:prstGeom prst="rect">
             <a:avLst/>
           </a:prstGeom>
         </p:spPr>
+      </p:pic>
+    </p:spTree>
+    <p:extLst>
+      <p:ext uri="{BB962C8B-B14F-4D97-AF65-F5344CB8AC3E}">
+        <p14:creationId xmlns:p14="http://schemas.microsoft.com/office/powerpoint/2010/main" val="3410717024"/>
+      </p:ext>
+    </p:extLst>
+  </p:cSld>
+  <p:clrMapOvr>
+    <a:masterClrMapping/>
+  </p:clrMapOvr>
+</p:sld>
+</file>
+
+<file path=ppt/slides/slide18.xml><?xml version="1.0" encoding="utf-8"?>
+<p:sld xmlns:a="http://schemas.openxmlformats.org/drawingml/2006/main" xmlns:r="http://schemas.openxmlformats.org/officeDocument/2006/relationships" xmlns:p="http://schemas.openxmlformats.org/presentationml/2006/main">
+  <p:cSld>
+    <p:spTree>
+      <p:nvGrpSpPr>
+        <p:cNvPr id="1" name=""/>
+        <p:cNvGrpSpPr/>
+        <p:nvPr/>
+      </p:nvGrpSpPr>
+      <p:grpSpPr>
+        <a:xfrm>
+          <a:off x="0" y="0"/>
+          <a:ext cx="0" cy="0"/>
+          <a:chOff x="0" y="0"/>
+          <a:chExt cx="0" cy="0"/>
+        </a:xfrm>
+      </p:grpSpPr>
+      <p:sp>
+        <p:nvSpPr>
+          <p:cNvPr id="2" name="Title 1">
+            <a:extLst>
+              <a:ext uri="{FF2B5EF4-FFF2-40B4-BE49-F238E27FC236}">
+                <a16:creationId xmlns:a16="http://schemas.microsoft.com/office/drawing/2014/main" id="{8AADB9FC-9460-23E7-F132-F3695D174898}"/>
+              </a:ext>
+            </a:extLst>
+          </p:cNvPr>
+          <p:cNvSpPr>
+            <a:spLocks noGrp="1"/>
+          </p:cNvSpPr>
+          <p:nvPr>
+            <p:ph type="title"/>
+          </p:nvPr>
+        </p:nvSpPr>
+        <p:spPr/>
+        <p:txBody>
+          <a:bodyPr/>
+          <a:lstStyle/>
+          <a:p>
+            <a:r>
+              <a:rPr lang="en-US" dirty="0"/>
+              <a:t>Appendix 1: H1 regression results</a:t>
+            </a:r>
+            <a:endParaRPr lang="LID4096" dirty="0"/>
+          </a:p>
+        </p:txBody>
+      </p:sp>
+      <p:pic>
+        <p:nvPicPr>
+          <p:cNvPr id="5" name="Content Placeholder 4">
+            <a:extLst>
+              <a:ext uri="{FF2B5EF4-FFF2-40B4-BE49-F238E27FC236}">
+                <a16:creationId xmlns:a16="http://schemas.microsoft.com/office/drawing/2014/main" id="{83F816A7-F137-4A09-338C-704C22508C38}"/>
+              </a:ext>
+            </a:extLst>
+          </p:cNvPr>
+          <p:cNvPicPr>
+            <a:picLocks noGrp="1" noChangeAspect="1"/>
+          </p:cNvPicPr>
+          <p:nvPr>
+            <p:ph idx="1"/>
+          </p:nvPr>
+        </p:nvPicPr>
+        <p:blipFill>
+          <a:blip r:embed="rId2"/>
+          <a:stretch>
+            <a:fillRect/>
+          </a:stretch>
+        </p:blipFill>
+        <p:spPr>
+          <a:xfrm>
+            <a:off x="838200" y="2660446"/>
+            <a:ext cx="7592497" cy="3600980"/>
+          </a:xfrm>
+        </p:spPr>
+      </p:pic>
+      <p:sp>
+        <p:nvSpPr>
+          <p:cNvPr id="6" name="Inhaltsplatzhalter 2">
+            <a:extLst>
+              <a:ext uri="{FF2B5EF4-FFF2-40B4-BE49-F238E27FC236}">
+                <a16:creationId xmlns:a16="http://schemas.microsoft.com/office/drawing/2014/main" id="{DD5A7C2A-338A-3141-3B78-2BF00429FACD}"/>
+              </a:ext>
+            </a:extLst>
+          </p:cNvPr>
+          <p:cNvSpPr txBox="1">
+            <a:spLocks/>
+          </p:cNvSpPr>
+          <p:nvPr/>
+        </p:nvSpPr>
+        <p:spPr>
+          <a:xfrm>
+            <a:off x="838200" y="1491849"/>
+            <a:ext cx="7400795" cy="1000830"/>
+          </a:xfrm>
+          <a:prstGeom prst="rect">
+            <a:avLst/>
+          </a:prstGeom>
+        </p:spPr>
         <p:txBody>
           <a:bodyPr vert="horz" lIns="91440" tIns="45720" rIns="91440" bIns="45720" rtlCol="0">
-            <a:normAutofit/>
+            <a:normAutofit fontScale="40000" lnSpcReduction="20000"/>
           </a:bodyPr>
           <a:lstStyle>
             <a:lvl1pPr marL="228600" indent="-228600" algn="l" defTabSz="914400" rtl="0" eaLnBrk="1" latinLnBrk="0" hangingPunct="1">
@@ -10429,18 +11563,164 @@
               <a:buNone/>
             </a:pPr>
             <a:r>
+              <a:rPr lang="en-US" sz="2800" b="1" i="1" u="none" strike="noStrike" baseline="0" dirty="0">
+                <a:solidFill>
+                  <a:srgbClr val="000000"/>
+                </a:solidFill>
+                <a:latin typeface="AAAAAM+Calibri-BoldItalic"/>
+              </a:rPr>
+              <a:t>Hypothesis H1</a:t>
+            </a:r>
+            <a:r>
+              <a:rPr lang="en-US" sz="2800" b="1" i="1" u="none" strike="noStrike" baseline="0" dirty="0">
+                <a:solidFill>
+                  <a:srgbClr val="000000"/>
+                </a:solidFill>
+                <a:latin typeface="Calibri" panose="020F0502020204030204" pitchFamily="34" charset="0"/>
+              </a:rPr>
+              <a:t>—</a:t>
+            </a:r>
+            <a:r>
+              <a:rPr lang="en-US" sz="2800" b="1" i="1" u="none" strike="noStrike" baseline="0" dirty="0">
+                <a:solidFill>
+                  <a:srgbClr val="000000"/>
+                </a:solidFill>
+                <a:latin typeface="AAAAAM+Calibri-BoldItalic"/>
+              </a:rPr>
+              <a:t>Influence of Information Shocks on Decisions </a:t>
+            </a:r>
+            <a:endParaRPr lang="en-US" sz="2800" b="0" i="0" u="none" strike="noStrike" baseline="0" dirty="0">
+              <a:solidFill>
+                <a:srgbClr val="000000"/>
+              </a:solidFill>
+              <a:latin typeface="AAAAAM+Calibri-BoldItalic"/>
+            </a:endParaRPr>
+          </a:p>
+          <a:p>
+            <a:r>
+              <a:rPr lang="en-US" sz="2800" b="1" i="0" u="none" strike="noStrike" baseline="0" dirty="0">
+                <a:solidFill>
+                  <a:srgbClr val="000000"/>
+                </a:solidFill>
+                <a:latin typeface="Calibri" panose="020F0502020204030204" pitchFamily="34" charset="0"/>
+              </a:rPr>
+              <a:t>H1₀: </a:t>
+            </a:r>
+            <a:r>
+              <a:rPr lang="en-US" sz="2800" b="0" i="0" u="none" strike="noStrike" baseline="0" dirty="0">
+                <a:solidFill>
+                  <a:srgbClr val="000000"/>
+                </a:solidFill>
+                <a:latin typeface="AAAAAG+Calibri"/>
+              </a:rPr>
+              <a:t>The intensity of external financial information shocks has no statistically significant effect </a:t>
+            </a:r>
+            <a:r>
+              <a:rPr lang="en-US" sz="2800" b="0" i="0" u="none" strike="noStrike" baseline="0" dirty="0">
+                <a:solidFill>
+                  <a:srgbClr val="000000"/>
+                </a:solidFill>
+                <a:latin typeface="Calibri" panose="020F0502020204030204" pitchFamily="34" charset="0"/>
+              </a:rPr>
+              <a:t>on managers’ Net Risk Stance responses. </a:t>
+            </a:r>
+          </a:p>
+          <a:p>
+            <a:r>
+              <a:rPr lang="en-US" sz="2800" b="1" i="0" u="none" strike="noStrike" baseline="0" dirty="0">
+                <a:solidFill>
+                  <a:srgbClr val="000000"/>
+                </a:solidFill>
+                <a:latin typeface="Calibri" panose="020F0502020204030204" pitchFamily="34" charset="0"/>
+              </a:rPr>
+              <a:t>H1ₐ: </a:t>
+            </a:r>
+            <a:r>
+              <a:rPr lang="en-US" sz="2800" b="0" i="0" u="none" strike="noStrike" baseline="0" dirty="0">
+                <a:solidFill>
+                  <a:srgbClr val="000000"/>
+                </a:solidFill>
+                <a:latin typeface="AAAAAG+Calibri"/>
+              </a:rPr>
+              <a:t>The intensity of external financial information shocks has a statistically significant effect on </a:t>
+            </a:r>
+            <a:r>
+              <a:rPr lang="en-US" sz="2800" b="0" i="0" u="none" strike="noStrike" baseline="0" dirty="0">
+                <a:solidFill>
+                  <a:srgbClr val="000000"/>
+                </a:solidFill>
+                <a:latin typeface="Calibri" panose="020F0502020204030204" pitchFamily="34" charset="0"/>
+              </a:rPr>
+              <a:t>managers’ Net Risk Stance responses. </a:t>
+            </a:r>
+          </a:p>
+        </p:txBody>
+      </p:sp>
+    </p:spTree>
+    <p:extLst>
+      <p:ext uri="{BB962C8B-B14F-4D97-AF65-F5344CB8AC3E}">
+        <p14:creationId xmlns:p14="http://schemas.microsoft.com/office/powerpoint/2010/main" val="214505872"/>
+      </p:ext>
+    </p:extLst>
+  </p:cSld>
+  <p:clrMapOvr>
+    <a:masterClrMapping/>
+  </p:clrMapOvr>
+</p:sld>
+</file>
+
+<file path=ppt/slides/slide19.xml><?xml version="1.0" encoding="utf-8"?>
+<p:sld xmlns:a="http://schemas.openxmlformats.org/drawingml/2006/main" xmlns:r="http://schemas.openxmlformats.org/officeDocument/2006/relationships" xmlns:p="http://schemas.openxmlformats.org/presentationml/2006/main">
+  <p:cSld>
+    <p:spTree>
+      <p:nvGrpSpPr>
+        <p:cNvPr id="1" name=""/>
+        <p:cNvGrpSpPr/>
+        <p:nvPr/>
+      </p:nvGrpSpPr>
+      <p:grpSpPr>
+        <a:xfrm>
+          <a:off x="0" y="0"/>
+          <a:ext cx="0" cy="0"/>
+          <a:chOff x="0" y="0"/>
+          <a:chExt cx="0" cy="0"/>
+        </a:xfrm>
+      </p:grpSpPr>
+      <p:sp>
+        <p:nvSpPr>
+          <p:cNvPr id="2" name="Title 1">
+            <a:extLst>
+              <a:ext uri="{FF2B5EF4-FFF2-40B4-BE49-F238E27FC236}">
+                <a16:creationId xmlns:a16="http://schemas.microsoft.com/office/drawing/2014/main" id="{51565620-9C4D-33AE-02D9-2007D19ECB49}"/>
+              </a:ext>
+            </a:extLst>
+          </p:cNvPr>
+          <p:cNvSpPr>
+            <a:spLocks noGrp="1"/>
+          </p:cNvSpPr>
+          <p:nvPr>
+            <p:ph type="title"/>
+          </p:nvPr>
+        </p:nvSpPr>
+        <p:spPr/>
+        <p:txBody>
+          <a:bodyPr/>
+          <a:lstStyle/>
+          <a:p>
+            <a:r>
               <a:rPr lang="en-US" dirty="0"/>
-              <a:t>Treatment -&gt; Portfolio Return</a:t>
-            </a:r>
+              <a:t>Appendix 1 (cont.): Robustness Spec</a:t>
+            </a:r>
+            <a:endParaRPr lang="LID4096" dirty="0"/>
           </a:p>
         </p:txBody>
       </p:sp>
       <p:pic>
         <p:nvPicPr>
-          <p:cNvPr id="9" name="Content Placeholder 8">
-            <a:extLst>
-              <a:ext uri="{FF2B5EF4-FFF2-40B4-BE49-F238E27FC236}">
-                <a16:creationId xmlns:a16="http://schemas.microsoft.com/office/drawing/2014/main" id="{AF206C88-A4E7-FB40-1ED6-A4C61DC8AF26}"/>
+          <p:cNvPr id="5" name="Content Placeholder 4">
+            <a:extLst>
+              <a:ext uri="{FF2B5EF4-FFF2-40B4-BE49-F238E27FC236}">
+                <a16:creationId xmlns:a16="http://schemas.microsoft.com/office/drawing/2014/main" id="{5491BCEE-AF19-FFDC-3178-C7C627D96DBC}"/>
               </a:ext>
             </a:extLst>
           </p:cNvPr>
@@ -10459,7 +11739,1422 @@
         </p:blipFill>
         <p:spPr>
           <a:xfrm>
-            <a:off x="1092200" y="2473958"/>
+            <a:off x="1554986" y="1284288"/>
+            <a:ext cx="9082028" cy="4892675"/>
+          </a:xfrm>
+        </p:spPr>
+      </p:pic>
+    </p:spTree>
+    <p:extLst>
+      <p:ext uri="{BB962C8B-B14F-4D97-AF65-F5344CB8AC3E}">
+        <p14:creationId xmlns:p14="http://schemas.microsoft.com/office/powerpoint/2010/main" val="3957797320"/>
+      </p:ext>
+    </p:extLst>
+  </p:cSld>
+  <p:clrMapOvr>
+    <a:masterClrMapping/>
+  </p:clrMapOvr>
+</p:sld>
+</file>
+
+<file path=ppt/slides/slide2.xml><?xml version="1.0" encoding="utf-8"?>
+<p:sld xmlns:a="http://schemas.openxmlformats.org/drawingml/2006/main" xmlns:r="http://schemas.openxmlformats.org/officeDocument/2006/relationships" xmlns:p="http://schemas.openxmlformats.org/presentationml/2006/main">
+  <p:cSld>
+    <p:spTree>
+      <p:nvGrpSpPr>
+        <p:cNvPr id="1" name=""/>
+        <p:cNvGrpSpPr/>
+        <p:nvPr/>
+      </p:nvGrpSpPr>
+      <p:grpSpPr>
+        <a:xfrm>
+          <a:off x="0" y="0"/>
+          <a:ext cx="0" cy="0"/>
+          <a:chOff x="0" y="0"/>
+          <a:chExt cx="0" cy="0"/>
+        </a:xfrm>
+      </p:grpSpPr>
+      <p:sp>
+        <p:nvSpPr>
+          <p:cNvPr id="2" name="Titel 1">
+            <a:extLst>
+              <a:ext uri="{FF2B5EF4-FFF2-40B4-BE49-F238E27FC236}">
+                <a16:creationId xmlns:a16="http://schemas.microsoft.com/office/drawing/2014/main" id="{090EAC2A-5706-C65F-88DE-7DA698789FBD}"/>
+              </a:ext>
+            </a:extLst>
+          </p:cNvPr>
+          <p:cNvSpPr>
+            <a:spLocks noGrp="1"/>
+          </p:cNvSpPr>
+          <p:nvPr>
+            <p:ph type="title"/>
+          </p:nvPr>
+        </p:nvSpPr>
+        <p:spPr>
+          <a:xfrm>
+            <a:off x="838200" y="365125"/>
+            <a:ext cx="8161800" cy="823595"/>
+          </a:xfrm>
+        </p:spPr>
+        <p:txBody>
+          <a:bodyPr/>
+          <a:lstStyle/>
+          <a:p>
+            <a:r>
+              <a:rPr lang="en-US" dirty="0"/>
+              <a:t>Topic and Motivation</a:t>
+            </a:r>
+          </a:p>
+        </p:txBody>
+      </p:sp>
+      <p:sp>
+        <p:nvSpPr>
+          <p:cNvPr id="4" name="Rectangle 3">
+            <a:extLst>
+              <a:ext uri="{FF2B5EF4-FFF2-40B4-BE49-F238E27FC236}">
+                <a16:creationId xmlns:a16="http://schemas.microsoft.com/office/drawing/2014/main" id="{B915B92B-3473-1AA9-73A4-58F0B9686EBE}"/>
+              </a:ext>
+            </a:extLst>
+          </p:cNvPr>
+          <p:cNvSpPr/>
+          <p:nvPr/>
+        </p:nvSpPr>
+        <p:spPr>
+          <a:xfrm>
+            <a:off x="838200" y="1397000"/>
+            <a:ext cx="3048000" cy="736600"/>
+          </a:xfrm>
+          <a:prstGeom prst="roundRect">
+            <a:avLst/>
+          </a:prstGeom>
+          <a:solidFill>
+            <a:srgbClr val="E8EEF8">
+              <a:alpha val="49804"/>
+            </a:srgbClr>
+          </a:solidFill>
+          <a:ln w="12700">
+            <a:solidFill>
+              <a:srgbClr val="FFFFFF"/>
+            </a:solidFill>
+          </a:ln>
+        </p:spPr>
+        <p:style>
+          <a:lnRef idx="0">
+            <a:scrgbClr r="0" g="0" b="0"/>
+          </a:lnRef>
+          <a:fillRef idx="0">
+            <a:scrgbClr r="0" g="0" b="0"/>
+          </a:fillRef>
+          <a:effectRef idx="0">
+            <a:scrgbClr r="0" g="0" b="0"/>
+          </a:effectRef>
+          <a:fontRef idx="minor">
+            <a:schemeClr val="lt1"/>
+          </a:fontRef>
+        </p:style>
+        <p:txBody>
+          <a:bodyPr rtlCol="0" anchor="ctr"/>
+          <a:lstStyle/>
+          <a:p>
+            <a:pPr algn="ctr">
+              <a:buNone/>
+            </a:pPr>
+            <a:r>
+              <a:rPr lang="en-US" sz="1600" dirty="0">
+                <a:solidFill>
+                  <a:srgbClr val="1B3A6B"/>
+                </a:solidFill>
+              </a:rPr>
+              <a:t>Information shock</a:t>
+            </a:r>
+          </a:p>
+          <a:p>
+            <a:pPr algn="ctr">
+              <a:buNone/>
+            </a:pPr>
+            <a:r>
+              <a:rPr lang="en-US" sz="1400" dirty="0">
+                <a:solidFill>
+                  <a:srgbClr val="5B6B85"/>
+                </a:solidFill>
+              </a:rPr>
+              <a:t>news, events, attention</a:t>
+            </a:r>
+          </a:p>
+        </p:txBody>
+      </p:sp>
+      <p:sp>
+        <p:nvSpPr>
+          <p:cNvPr id="5" name="Rectangle 4">
+            <a:extLst>
+              <a:ext uri="{FF2B5EF4-FFF2-40B4-BE49-F238E27FC236}">
+                <a16:creationId xmlns:a16="http://schemas.microsoft.com/office/drawing/2014/main" id="{7ABAEB0A-8391-566D-E1BD-B30A59223C66}"/>
+              </a:ext>
+            </a:extLst>
+          </p:cNvPr>
+          <p:cNvSpPr/>
+          <p:nvPr/>
+        </p:nvSpPr>
+        <p:spPr>
+          <a:xfrm>
+            <a:off x="4597400" y="1397000"/>
+            <a:ext cx="3048000" cy="736600"/>
+          </a:xfrm>
+          <a:prstGeom prst="roundRect">
+            <a:avLst/>
+          </a:prstGeom>
+          <a:solidFill>
+            <a:srgbClr val="1B3A6B">
+              <a:alpha val="49804"/>
+            </a:srgbClr>
+          </a:solidFill>
+          <a:ln>
+            <a:noFill/>
+          </a:ln>
+        </p:spPr>
+        <p:style>
+          <a:lnRef idx="0">
+            <a:scrgbClr r="0" g="0" b="0"/>
+          </a:lnRef>
+          <a:fillRef idx="0">
+            <a:scrgbClr r="0" g="0" b="0"/>
+          </a:fillRef>
+          <a:effectRef idx="0">
+            <a:scrgbClr r="0" g="0" b="0"/>
+          </a:effectRef>
+          <a:fontRef idx="minor">
+            <a:schemeClr val="lt1"/>
+          </a:fontRef>
+        </p:style>
+        <p:txBody>
+          <a:bodyPr rtlCol="0" anchor="ctr"/>
+          <a:lstStyle/>
+          <a:p>
+            <a:pPr algn="ctr">
+              <a:buNone/>
+            </a:pPr>
+            <a:r>
+              <a:rPr lang="en-US" sz="1600" dirty="0">
+                <a:solidFill>
+                  <a:srgbClr val="FFFFFF"/>
+                </a:solidFill>
+              </a:rPr>
+              <a:t>Manager’s decision</a:t>
+            </a:r>
+          </a:p>
+          <a:p>
+            <a:pPr algn="ctr">
+              <a:buNone/>
+            </a:pPr>
+            <a:r>
+              <a:rPr lang="en-US" sz="1400" dirty="0">
+                <a:solidFill>
+                  <a:srgbClr val="FFFFFF"/>
+                </a:solidFill>
+              </a:rPr>
+              <a:t>Net Risk Stance</a:t>
+            </a:r>
+          </a:p>
+        </p:txBody>
+      </p:sp>
+      <p:sp>
+        <p:nvSpPr>
+          <p:cNvPr id="6" name="Rectangle 5">
+            <a:extLst>
+              <a:ext uri="{FF2B5EF4-FFF2-40B4-BE49-F238E27FC236}">
+                <a16:creationId xmlns:a16="http://schemas.microsoft.com/office/drawing/2014/main" id="{7F4C67F2-65A6-BA91-D3F2-F88026957648}"/>
+              </a:ext>
+            </a:extLst>
+          </p:cNvPr>
+          <p:cNvSpPr/>
+          <p:nvPr/>
+        </p:nvSpPr>
+        <p:spPr>
+          <a:xfrm>
+            <a:off x="8356600" y="1397000"/>
+            <a:ext cx="3048000" cy="736600"/>
+          </a:xfrm>
+          <a:prstGeom prst="roundRect">
+            <a:avLst/>
+          </a:prstGeom>
+          <a:solidFill>
+            <a:srgbClr val="E8EEF8">
+              <a:alpha val="49804"/>
+            </a:srgbClr>
+          </a:solidFill>
+          <a:ln w="12700">
+            <a:solidFill>
+              <a:srgbClr val="FFFFFF"/>
+            </a:solidFill>
+          </a:ln>
+        </p:spPr>
+        <p:style>
+          <a:lnRef idx="0">
+            <a:scrgbClr r="0" g="0" b="0"/>
+          </a:lnRef>
+          <a:fillRef idx="0">
+            <a:scrgbClr r="0" g="0" b="0"/>
+          </a:fillRef>
+          <a:effectRef idx="0">
+            <a:scrgbClr r="0" g="0" b="0"/>
+          </a:effectRef>
+          <a:fontRef idx="minor">
+            <a:schemeClr val="lt1"/>
+          </a:fontRef>
+        </p:style>
+        <p:txBody>
+          <a:bodyPr rtlCol="0" anchor="ctr"/>
+          <a:lstStyle/>
+          <a:p>
+            <a:pPr algn="ctr">
+              <a:buNone/>
+            </a:pPr>
+            <a:r>
+              <a:rPr lang="en-US" sz="1600" dirty="0">
+                <a:solidFill>
+                  <a:srgbClr val="1B3A6B"/>
+                </a:solidFill>
+              </a:rPr>
+              <a:t>Portfolio outcome</a:t>
+            </a:r>
+          </a:p>
+          <a:p>
+            <a:pPr algn="ctr">
+              <a:buNone/>
+            </a:pPr>
+            <a:r>
+              <a:rPr lang="en-US" sz="1400" dirty="0">
+                <a:solidFill>
+                  <a:srgbClr val="5B6B85"/>
+                </a:solidFill>
+              </a:rPr>
+              <a:t>risk–return ratio</a:t>
+            </a:r>
+          </a:p>
+        </p:txBody>
+      </p:sp>
+      <p:sp>
+        <p:nvSpPr>
+          <p:cNvPr id="7" name="Rectangle 6">
+            <a:extLst>
+              <a:ext uri="{FF2B5EF4-FFF2-40B4-BE49-F238E27FC236}">
+                <a16:creationId xmlns:a16="http://schemas.microsoft.com/office/drawing/2014/main" id="{0A9D9A38-4DD4-29BF-C7E2-E1F48C541DC3}"/>
+              </a:ext>
+            </a:extLst>
+          </p:cNvPr>
+          <p:cNvSpPr/>
+          <p:nvPr/>
+        </p:nvSpPr>
+        <p:spPr>
+          <a:xfrm>
+            <a:off x="4597400" y="2844800"/>
+            <a:ext cx="3048000" cy="584200"/>
+          </a:xfrm>
+          <a:prstGeom prst="roundRect">
+            <a:avLst/>
+          </a:prstGeom>
+          <a:solidFill>
+            <a:srgbClr val="F7DDE2">
+              <a:alpha val="49804"/>
+            </a:srgbClr>
+          </a:solidFill>
+          <a:ln w="12700">
+            <a:solidFill>
+              <a:srgbClr val="E7B6C0"/>
+            </a:solidFill>
+          </a:ln>
+        </p:spPr>
+        <p:style>
+          <a:lnRef idx="0">
+            <a:scrgbClr r="0" g="0" b="0"/>
+          </a:lnRef>
+          <a:fillRef idx="0">
+            <a:scrgbClr r="0" g="0" b="0"/>
+          </a:fillRef>
+          <a:effectRef idx="0">
+            <a:scrgbClr r="0" g="0" b="0"/>
+          </a:effectRef>
+          <a:fontRef idx="minor">
+            <a:schemeClr val="lt1"/>
+          </a:fontRef>
+        </p:style>
+        <p:txBody>
+          <a:bodyPr rtlCol="0" anchor="ctr"/>
+          <a:lstStyle/>
+          <a:p>
+            <a:pPr algn="ctr">
+              <a:buNone/>
+            </a:pPr>
+            <a:r>
+              <a:rPr lang="en-US" sz="1600" dirty="0">
+                <a:solidFill>
+                  <a:srgbClr val="8C1B2F"/>
+                </a:solidFill>
+              </a:rPr>
+              <a:t>Shock Score dashboard</a:t>
+            </a:r>
+          </a:p>
+        </p:txBody>
+      </p:sp>
+      <p:cxnSp>
+        <p:nvCxnSpPr>
+          <p:cNvPr id="9" name="Straight Arrow Connector 8">
+            <a:extLst>
+              <a:ext uri="{FF2B5EF4-FFF2-40B4-BE49-F238E27FC236}">
+                <a16:creationId xmlns:a16="http://schemas.microsoft.com/office/drawing/2014/main" id="{827EB041-A3BE-CDED-FBBE-A8AD37CCA105}"/>
+              </a:ext>
+            </a:extLst>
+          </p:cNvPr>
+          <p:cNvCxnSpPr>
+            <a:endCxn id="5" idx="1"/>
+          </p:cNvCxnSpPr>
+          <p:nvPr/>
+        </p:nvCxnSpPr>
+        <p:spPr>
+          <a:xfrm flipV="1">
+            <a:off x="3886200" y="1765300"/>
+            <a:ext cx="711200" cy="0"/>
+          </a:xfrm>
+          <a:prstGeom prst="straightConnector1">
+            <a:avLst/>
+          </a:prstGeom>
+          <a:ln>
+            <a:tailEnd type="triangle"/>
+          </a:ln>
+        </p:spPr>
+        <p:style>
+          <a:lnRef idx="1">
+            <a:schemeClr val="dk1"/>
+          </a:lnRef>
+          <a:fillRef idx="0">
+            <a:schemeClr val="dk1"/>
+          </a:fillRef>
+          <a:effectRef idx="0">
+            <a:schemeClr val="dk1"/>
+          </a:effectRef>
+          <a:fontRef idx="minor">
+            <a:schemeClr val="tx1"/>
+          </a:fontRef>
+        </p:style>
+      </p:cxnSp>
+      <p:cxnSp>
+        <p:nvCxnSpPr>
+          <p:cNvPr id="10" name="Straight Arrow Connector 9">
+            <a:extLst>
+              <a:ext uri="{FF2B5EF4-FFF2-40B4-BE49-F238E27FC236}">
+                <a16:creationId xmlns:a16="http://schemas.microsoft.com/office/drawing/2014/main" id="{76ED4E98-765A-1AFE-0F73-428BFD773F81}"/>
+              </a:ext>
+            </a:extLst>
+          </p:cNvPr>
+          <p:cNvCxnSpPr>
+            <a:cxnSpLocks/>
+            <a:stCxn id="7" idx="0"/>
+            <a:endCxn id="5" idx="2"/>
+          </p:cNvCxnSpPr>
+          <p:nvPr/>
+        </p:nvCxnSpPr>
+        <p:spPr>
+          <a:xfrm flipV="1">
+            <a:off x="6121400" y="2133600"/>
+            <a:ext cx="0" cy="711200"/>
+          </a:xfrm>
+          <a:prstGeom prst="straightConnector1">
+            <a:avLst/>
+          </a:prstGeom>
+          <a:ln>
+            <a:tailEnd type="triangle"/>
+          </a:ln>
+        </p:spPr>
+        <p:style>
+          <a:lnRef idx="1">
+            <a:schemeClr val="dk1"/>
+          </a:lnRef>
+          <a:fillRef idx="0">
+            <a:schemeClr val="dk1"/>
+          </a:fillRef>
+          <a:effectRef idx="0">
+            <a:schemeClr val="dk1"/>
+          </a:effectRef>
+          <a:fontRef idx="minor">
+            <a:schemeClr val="tx1"/>
+          </a:fontRef>
+        </p:style>
+      </p:cxnSp>
+      <p:cxnSp>
+        <p:nvCxnSpPr>
+          <p:cNvPr id="11" name="Straight Arrow Connector 10">
+            <a:extLst>
+              <a:ext uri="{FF2B5EF4-FFF2-40B4-BE49-F238E27FC236}">
+                <a16:creationId xmlns:a16="http://schemas.microsoft.com/office/drawing/2014/main" id="{86B77E62-139B-7478-1CAA-99FB4CE45115}"/>
+              </a:ext>
+            </a:extLst>
+          </p:cNvPr>
+          <p:cNvCxnSpPr>
+            <a:cxnSpLocks/>
+            <a:stCxn id="5" idx="3"/>
+            <a:endCxn id="6" idx="1"/>
+          </p:cNvCxnSpPr>
+          <p:nvPr/>
+        </p:nvCxnSpPr>
+        <p:spPr>
+          <a:xfrm>
+            <a:off x="7645400" y="1765300"/>
+            <a:ext cx="711200" cy="0"/>
+          </a:xfrm>
+          <a:prstGeom prst="straightConnector1">
+            <a:avLst/>
+          </a:prstGeom>
+          <a:ln>
+            <a:tailEnd type="triangle"/>
+          </a:ln>
+        </p:spPr>
+        <p:style>
+          <a:lnRef idx="1">
+            <a:schemeClr val="dk1"/>
+          </a:lnRef>
+          <a:fillRef idx="0">
+            <a:schemeClr val="dk1"/>
+          </a:fillRef>
+          <a:effectRef idx="0">
+            <a:schemeClr val="dk1"/>
+          </a:effectRef>
+          <a:fontRef idx="minor">
+            <a:schemeClr val="tx1"/>
+          </a:fontRef>
+        </p:style>
+      </p:cxnSp>
+      <p:sp>
+        <p:nvSpPr>
+          <p:cNvPr id="18" name="TextBox 17">
+            <a:extLst>
+              <a:ext uri="{FF2B5EF4-FFF2-40B4-BE49-F238E27FC236}">
+                <a16:creationId xmlns:a16="http://schemas.microsoft.com/office/drawing/2014/main" id="{BD00024F-0DB4-32E1-AA6E-F598B1674106}"/>
+              </a:ext>
+            </a:extLst>
+          </p:cNvPr>
+          <p:cNvSpPr txBox="1"/>
+          <p:nvPr/>
+        </p:nvSpPr>
+        <p:spPr>
+          <a:xfrm>
+            <a:off x="6825929" y="2186960"/>
+            <a:ext cx="2874296" cy="523220"/>
+          </a:xfrm>
+          <a:prstGeom prst="rect">
+            <a:avLst/>
+          </a:prstGeom>
+          <a:noFill/>
+        </p:spPr>
+        <p:txBody>
+          <a:bodyPr wrap="square" rtlCol="0">
+            <a:spAutoFit/>
+          </a:bodyPr>
+          <a:lstStyle/>
+          <a:p>
+            <a:pPr algn="l">
+              <a:buNone/>
+            </a:pPr>
+            <a:r>
+              <a:rPr lang="en-US" sz="1400" dirty="0">
+                <a:solidFill>
+                  <a:srgbClr val="C8102E"/>
+                </a:solidFill>
+              </a:rPr>
+              <a:t>H2 – </a:t>
+            </a:r>
+            <a:r>
+              <a:rPr lang="en-US" sz="1400" dirty="0">
+                <a:solidFill>
+                  <a:srgbClr val="4A5568"/>
+                </a:solidFill>
+              </a:rPr>
+              <a:t>showing the Shock Score affects the portfolio risk–return ratio</a:t>
+            </a:r>
+          </a:p>
+        </p:txBody>
+      </p:sp>
+      <p:sp>
+        <p:nvSpPr>
+          <p:cNvPr id="19" name="TextBox 18">
+            <a:extLst>
+              <a:ext uri="{FF2B5EF4-FFF2-40B4-BE49-F238E27FC236}">
+                <a16:creationId xmlns:a16="http://schemas.microsoft.com/office/drawing/2014/main" id="{F6CF1537-554C-C1F0-1C41-3C8C2B18B242}"/>
+              </a:ext>
+            </a:extLst>
+          </p:cNvPr>
+          <p:cNvSpPr txBox="1"/>
+          <p:nvPr/>
+        </p:nvSpPr>
+        <p:spPr>
+          <a:xfrm>
+            <a:off x="3257053" y="2164090"/>
+            <a:ext cx="2376948" cy="523220"/>
+          </a:xfrm>
+          <a:prstGeom prst="rect">
+            <a:avLst/>
+          </a:prstGeom>
+          <a:noFill/>
+        </p:spPr>
+        <p:txBody>
+          <a:bodyPr wrap="square" rtlCol="0">
+            <a:spAutoFit/>
+          </a:bodyPr>
+          <a:lstStyle/>
+          <a:p>
+            <a:pPr algn="l">
+              <a:buNone/>
+            </a:pPr>
+            <a:r>
+              <a:rPr lang="en-US" sz="1400" dirty="0">
+                <a:solidFill>
+                  <a:srgbClr val="C8102E"/>
+                </a:solidFill>
+              </a:rPr>
+              <a:t>H1 – </a:t>
+            </a:r>
+            <a:r>
+              <a:rPr lang="en-US" sz="1400" dirty="0">
+                <a:solidFill>
+                  <a:srgbClr val="4A5568"/>
+                </a:solidFill>
+              </a:rPr>
+              <a:t>shock intensity affects</a:t>
+            </a:r>
+          </a:p>
+          <a:p>
+            <a:pPr algn="l">
+              <a:buNone/>
+            </a:pPr>
+            <a:r>
+              <a:rPr lang="en-US" sz="1400" dirty="0">
+                <a:solidFill>
+                  <a:srgbClr val="4A5568"/>
+                </a:solidFill>
+              </a:rPr>
+              <a:t>managers’ Net Risk Stance</a:t>
+            </a:r>
+          </a:p>
+        </p:txBody>
+      </p:sp>
+      <p:sp>
+        <p:nvSpPr>
+          <p:cNvPr id="8" name="Rectangle: Rounded Corners 7">
+            <a:extLst>
+              <a:ext uri="{FF2B5EF4-FFF2-40B4-BE49-F238E27FC236}">
+                <a16:creationId xmlns:a16="http://schemas.microsoft.com/office/drawing/2014/main" id="{98AF008D-36C2-4BB7-9A9A-96A0AA1295EF}"/>
+              </a:ext>
+            </a:extLst>
+          </p:cNvPr>
+          <p:cNvSpPr/>
+          <p:nvPr/>
+        </p:nvSpPr>
+        <p:spPr>
+          <a:xfrm>
+            <a:off x="838200" y="4013200"/>
+            <a:ext cx="3403600" cy="2187947"/>
+          </a:xfrm>
+          <a:prstGeom prst="roundRect">
+            <a:avLst/>
+          </a:prstGeom>
+          <a:solidFill>
+            <a:srgbClr val="F4F7FC"/>
+          </a:solidFill>
+          <a:ln w="12700" cap="flat" cmpd="sng" algn="ctr">
+            <a:noFill/>
+            <a:prstDash val="solid"/>
+            <a:miter lim="800000"/>
+          </a:ln>
+        </p:spPr>
+        <p:style>
+          <a:lnRef idx="2">
+            <a:schemeClr val="accent1">
+              <a:shade val="15000"/>
+            </a:schemeClr>
+          </a:lnRef>
+          <a:fillRef idx="1">
+            <a:schemeClr val="accent1"/>
+          </a:fillRef>
+          <a:effectRef idx="0">
+            <a:schemeClr val="accent1"/>
+          </a:effectRef>
+          <a:fontRef idx="minor">
+            <a:schemeClr val="lt1"/>
+          </a:fontRef>
+        </p:style>
+        <p:txBody>
+          <a:bodyPr vertOverflow="clip" horzOverflow="clip" rtlCol="0" anchor="t"/>
+          <a:lstStyle/>
+          <a:p>
+            <a:pPr algn="l"/>
+            <a:endParaRPr lang="LID4096"/>
+          </a:p>
+        </p:txBody>
+      </p:sp>
+      <p:sp>
+        <p:nvSpPr>
+          <p:cNvPr id="12" name="TextBox 11">
+            <a:extLst>
+              <a:ext uri="{FF2B5EF4-FFF2-40B4-BE49-F238E27FC236}">
+                <a16:creationId xmlns:a16="http://schemas.microsoft.com/office/drawing/2014/main" id="{71D20191-A4EA-4F9B-BBCB-BDEC896C8D7E}"/>
+              </a:ext>
+            </a:extLst>
+          </p:cNvPr>
+          <p:cNvSpPr txBox="1"/>
+          <p:nvPr/>
+        </p:nvSpPr>
+        <p:spPr>
+          <a:xfrm>
+            <a:off x="1041400" y="4191000"/>
+            <a:ext cx="2997200" cy="1544012"/>
+          </a:xfrm>
+          <a:prstGeom prst="rect">
+            <a:avLst/>
+          </a:prstGeom>
+          <a:noFill/>
+        </p:spPr>
+        <p:txBody>
+          <a:bodyPr vertOverflow="overflow" vert="horz" wrap="square" rtlCol="0" anchor="t">
+            <a:spAutoFit/>
+          </a:bodyPr>
+          <a:lstStyle/>
+          <a:p>
+            <a:pPr algn="l">
+              <a:buNone/>
+            </a:pPr>
+            <a:r>
+              <a:rPr lang="en-US" sz="1600" dirty="0">
+                <a:solidFill>
+                  <a:srgbClr val="1B3A6B"/>
+                </a:solidFill>
+              </a:rPr>
+              <a:t>Why it matters</a:t>
+            </a:r>
+          </a:p>
+          <a:p>
+            <a:pPr marL="171450" indent="-171450">
+              <a:lnSpc>
+                <a:spcPct val="100000"/>
+              </a:lnSpc>
+              <a:spcBef>
+                <a:spcPts val="500"/>
+              </a:spcBef>
+              <a:buFont typeface="Arial"/>
+              <a:buChar char="•"/>
+            </a:pPr>
+            <a:r>
+              <a:rPr lang="en-US" sz="1400" dirty="0">
+                <a:solidFill>
+                  <a:srgbClr val="3A3F4A"/>
+                </a:solidFill>
+              </a:rPr>
+              <a:t>Information shocks – news, events, publications – trigger emotional biases.</a:t>
+            </a:r>
+          </a:p>
+          <a:p>
+            <a:pPr marL="171450" indent="-171450">
+              <a:lnSpc>
+                <a:spcPct val="100000"/>
+              </a:lnSpc>
+              <a:spcBef>
+                <a:spcPts val="500"/>
+              </a:spcBef>
+              <a:buFont typeface="Arial"/>
+              <a:buChar char="•"/>
+            </a:pPr>
+            <a:r>
+              <a:rPr lang="en-US" sz="1400" dirty="0">
+                <a:solidFill>
+                  <a:srgbClr val="3A3F4A"/>
+                </a:solidFill>
+              </a:rPr>
+              <a:t>Those biases sit outside the strategy and add risk and cost.</a:t>
+            </a:r>
+          </a:p>
+        </p:txBody>
+      </p:sp>
+      <p:sp>
+        <p:nvSpPr>
+          <p:cNvPr id="13" name="Rectangle: Rounded Corners 12">
+            <a:extLst>
+              <a:ext uri="{FF2B5EF4-FFF2-40B4-BE49-F238E27FC236}">
+                <a16:creationId xmlns:a16="http://schemas.microsoft.com/office/drawing/2014/main" id="{A204B59D-DAD8-44CA-824F-27201ACD59E3}"/>
+              </a:ext>
+            </a:extLst>
+          </p:cNvPr>
+          <p:cNvSpPr/>
+          <p:nvPr/>
+        </p:nvSpPr>
+        <p:spPr>
+          <a:xfrm>
+            <a:off x="4597400" y="4013200"/>
+            <a:ext cx="3403600" cy="2187947"/>
+          </a:xfrm>
+          <a:prstGeom prst="roundRect">
+            <a:avLst/>
+          </a:prstGeom>
+          <a:solidFill>
+            <a:srgbClr val="F4F7FC"/>
+          </a:solidFill>
+          <a:ln w="12700" cap="flat" cmpd="sng" algn="ctr">
+            <a:noFill/>
+            <a:prstDash val="solid"/>
+            <a:miter lim="800000"/>
+          </a:ln>
+        </p:spPr>
+        <p:style>
+          <a:lnRef idx="2">
+            <a:schemeClr val="accent1">
+              <a:shade val="15000"/>
+            </a:schemeClr>
+          </a:lnRef>
+          <a:fillRef idx="1">
+            <a:schemeClr val="accent1"/>
+          </a:fillRef>
+          <a:effectRef idx="0">
+            <a:schemeClr val="accent1"/>
+          </a:effectRef>
+          <a:fontRef idx="minor">
+            <a:schemeClr val="lt1"/>
+          </a:fontRef>
+        </p:style>
+        <p:txBody>
+          <a:bodyPr vertOverflow="clip" horzOverflow="clip" rtlCol="0" anchor="t"/>
+          <a:lstStyle/>
+          <a:p>
+            <a:pPr algn="l"/>
+            <a:endParaRPr lang="LID4096"/>
+          </a:p>
+        </p:txBody>
+      </p:sp>
+      <p:sp>
+        <p:nvSpPr>
+          <p:cNvPr id="14" name="TextBox 13">
+            <a:extLst>
+              <a:ext uri="{FF2B5EF4-FFF2-40B4-BE49-F238E27FC236}">
+                <a16:creationId xmlns:a16="http://schemas.microsoft.com/office/drawing/2014/main" id="{E3F04DBC-F971-4473-8ABC-FE0056123306}"/>
+              </a:ext>
+            </a:extLst>
+          </p:cNvPr>
+          <p:cNvSpPr txBox="1"/>
+          <p:nvPr/>
+        </p:nvSpPr>
+        <p:spPr>
+          <a:xfrm>
+            <a:off x="4800600" y="4191000"/>
+            <a:ext cx="2997200" cy="1544012"/>
+          </a:xfrm>
+          <a:prstGeom prst="rect">
+            <a:avLst/>
+          </a:prstGeom>
+          <a:noFill/>
+        </p:spPr>
+        <p:txBody>
+          <a:bodyPr vertOverflow="overflow" vert="horz" wrap="square" rtlCol="0" anchor="t">
+            <a:spAutoFit/>
+          </a:bodyPr>
+          <a:lstStyle/>
+          <a:p>
+            <a:pPr algn="l">
+              <a:buNone/>
+            </a:pPr>
+            <a:r>
+              <a:rPr lang="en-US" sz="1600" dirty="0">
+                <a:solidFill>
+                  <a:srgbClr val="1B3A6B"/>
+                </a:solidFill>
+              </a:rPr>
+              <a:t>What this study asks</a:t>
+            </a:r>
+          </a:p>
+          <a:p>
+            <a:pPr marL="171450" indent="-171450">
+              <a:lnSpc>
+                <a:spcPct val="100000"/>
+              </a:lnSpc>
+              <a:spcBef>
+                <a:spcPts val="500"/>
+              </a:spcBef>
+              <a:buFont typeface="Arial"/>
+              <a:buChar char="•"/>
+            </a:pPr>
+            <a:r>
+              <a:rPr lang="en-US" sz="1400" dirty="0">
+                <a:solidFill>
+                  <a:srgbClr val="3A3F4A"/>
+                </a:solidFill>
+              </a:rPr>
+              <a:t>Can a Shock Score indicator approximate systematic emotional biases?</a:t>
+            </a:r>
+          </a:p>
+          <a:p>
+            <a:pPr marL="171450" indent="-171450">
+              <a:lnSpc>
+                <a:spcPct val="100000"/>
+              </a:lnSpc>
+              <a:spcBef>
+                <a:spcPts val="500"/>
+              </a:spcBef>
+              <a:buFont typeface="Arial"/>
+              <a:buChar char="•"/>
+            </a:pPr>
+            <a:r>
+              <a:rPr lang="en-US" sz="1400" dirty="0">
+                <a:solidFill>
+                  <a:srgbClr val="3A3F4A"/>
+                </a:solidFill>
+              </a:rPr>
+              <a:t>Can a decision-support tool reduce those biases in practice?</a:t>
+            </a:r>
+          </a:p>
+        </p:txBody>
+      </p:sp>
+      <p:sp>
+        <p:nvSpPr>
+          <p:cNvPr id="15" name="Rectangle: Rounded Corners 14">
+            <a:extLst>
+              <a:ext uri="{FF2B5EF4-FFF2-40B4-BE49-F238E27FC236}">
+                <a16:creationId xmlns:a16="http://schemas.microsoft.com/office/drawing/2014/main" id="{D12A68D5-DE33-4A5D-9581-2A1AB56471E2}"/>
+              </a:ext>
+            </a:extLst>
+          </p:cNvPr>
+          <p:cNvSpPr/>
+          <p:nvPr/>
+        </p:nvSpPr>
+        <p:spPr>
+          <a:xfrm>
+            <a:off x="8356600" y="4013200"/>
+            <a:ext cx="3403600" cy="2187947"/>
+          </a:xfrm>
+          <a:prstGeom prst="roundRect">
+            <a:avLst/>
+          </a:prstGeom>
+          <a:solidFill>
+            <a:srgbClr val="F4F7FC"/>
+          </a:solidFill>
+          <a:ln w="12700" cap="flat" cmpd="sng" algn="ctr">
+            <a:noFill/>
+            <a:prstDash val="solid"/>
+            <a:miter lim="800000"/>
+          </a:ln>
+        </p:spPr>
+        <p:style>
+          <a:lnRef idx="2">
+            <a:schemeClr val="accent1">
+              <a:shade val="15000"/>
+            </a:schemeClr>
+          </a:lnRef>
+          <a:fillRef idx="1">
+            <a:schemeClr val="accent1"/>
+          </a:fillRef>
+          <a:effectRef idx="0">
+            <a:schemeClr val="accent1"/>
+          </a:effectRef>
+          <a:fontRef idx="minor">
+            <a:schemeClr val="lt1"/>
+          </a:fontRef>
+        </p:style>
+        <p:txBody>
+          <a:bodyPr vertOverflow="clip" horzOverflow="clip" rtlCol="0" anchor="t"/>
+          <a:lstStyle/>
+          <a:p>
+            <a:pPr algn="l"/>
+            <a:endParaRPr lang="LID4096"/>
+          </a:p>
+        </p:txBody>
+      </p:sp>
+      <p:sp>
+        <p:nvSpPr>
+          <p:cNvPr id="16" name="TextBox 15">
+            <a:extLst>
+              <a:ext uri="{FF2B5EF4-FFF2-40B4-BE49-F238E27FC236}">
+                <a16:creationId xmlns:a16="http://schemas.microsoft.com/office/drawing/2014/main" id="{5C1B0AFA-DDBE-4FDC-9214-FF634117A6C0}"/>
+              </a:ext>
+            </a:extLst>
+          </p:cNvPr>
+          <p:cNvSpPr txBox="1"/>
+          <p:nvPr/>
+        </p:nvSpPr>
+        <p:spPr>
+          <a:xfrm>
+            <a:off x="8559800" y="4191000"/>
+            <a:ext cx="2997200" cy="1823576"/>
+          </a:xfrm>
+          <a:prstGeom prst="rect">
+            <a:avLst/>
+          </a:prstGeom>
+          <a:noFill/>
+        </p:spPr>
+        <p:txBody>
+          <a:bodyPr vertOverflow="overflow" vert="horz" wrap="square" rtlCol="0" anchor="t">
+            <a:spAutoFit/>
+          </a:bodyPr>
+          <a:lstStyle/>
+          <a:p>
+            <a:pPr algn="l">
+              <a:buNone/>
+            </a:pPr>
+            <a:r>
+              <a:rPr lang="en-US" sz="1600" dirty="0">
+                <a:solidFill>
+                  <a:srgbClr val="1B3A6B"/>
+                </a:solidFill>
+              </a:rPr>
+              <a:t>What we already know</a:t>
+            </a:r>
+          </a:p>
+          <a:p>
+            <a:pPr marL="171450" indent="-171450">
+              <a:lnSpc>
+                <a:spcPct val="100000"/>
+              </a:lnSpc>
+              <a:spcBef>
+                <a:spcPts val="500"/>
+              </a:spcBef>
+              <a:buFont typeface="Arial"/>
+              <a:buChar char="•"/>
+            </a:pPr>
+            <a:r>
+              <a:rPr lang="en-US" sz="1400" dirty="0">
+                <a:solidFill>
+                  <a:srgbClr val="3A3F4A"/>
+                </a:solidFill>
+              </a:rPr>
+              <a:t>Behavioural finance: errors cluster around information shocks.</a:t>
+            </a:r>
+          </a:p>
+          <a:p>
+            <a:pPr marL="171450" indent="-171450">
+              <a:lnSpc>
+                <a:spcPct val="100000"/>
+              </a:lnSpc>
+              <a:spcBef>
+                <a:spcPts val="500"/>
+              </a:spcBef>
+              <a:buFont typeface="Arial"/>
+              <a:buChar char="•"/>
+            </a:pPr>
+            <a:r>
+              <a:rPr lang="en-US" sz="1400" dirty="0">
+                <a:solidFill>
+                  <a:srgbClr val="3A3F4A"/>
+                </a:solidFill>
+              </a:rPr>
+              <a:t>Analytics work; ex-ante bias mitigation does not.</a:t>
+            </a:r>
+          </a:p>
+          <a:p>
+            <a:pPr marL="171450" indent="-171450">
+              <a:lnSpc>
+                <a:spcPct val="100000"/>
+              </a:lnSpc>
+              <a:spcBef>
+                <a:spcPts val="500"/>
+              </a:spcBef>
+              <a:buFont typeface="Arial"/>
+              <a:buChar char="•"/>
+            </a:pPr>
+            <a:r>
+              <a:rPr lang="en-US" sz="1400" dirty="0">
+                <a:solidFill>
+                  <a:srgbClr val="3A3F4A"/>
+                </a:solidFill>
+              </a:rPr>
+              <a:t>The gap persists in professional risk management.</a:t>
+            </a:r>
+          </a:p>
+        </p:txBody>
+      </p:sp>
+    </p:spTree>
+    <p:extLst>
+      <p:ext uri="{BB962C8B-B14F-4D97-AF65-F5344CB8AC3E}">
+        <p14:creationId xmlns:p14="http://schemas.microsoft.com/office/powerpoint/2010/main" val="2256120068"/>
+      </p:ext>
+    </p:extLst>
+  </p:cSld>
+  <p:clrMapOvr>
+    <a:masterClrMapping/>
+  </p:clrMapOvr>
+</p:sld>
+</file>
+
+<file path=ppt/slides/slide20.xml><?xml version="1.0" encoding="utf-8"?>
+<p:sld xmlns:a="http://schemas.openxmlformats.org/drawingml/2006/main" xmlns:r="http://schemas.openxmlformats.org/officeDocument/2006/relationships" xmlns:p="http://schemas.openxmlformats.org/presentationml/2006/main">
+  <p:cSld>
+    <p:spTree>
+      <p:nvGrpSpPr>
+        <p:cNvPr id="1" name=""/>
+        <p:cNvGrpSpPr/>
+        <p:nvPr/>
+      </p:nvGrpSpPr>
+      <p:grpSpPr>
+        <a:xfrm>
+          <a:off x="0" y="0"/>
+          <a:ext cx="0" cy="0"/>
+          <a:chOff x="0" y="0"/>
+          <a:chExt cx="0" cy="0"/>
+        </a:xfrm>
+      </p:grpSpPr>
+      <p:sp>
+        <p:nvSpPr>
+          <p:cNvPr id="2" name="Title 1">
+            <a:extLst>
+              <a:ext uri="{FF2B5EF4-FFF2-40B4-BE49-F238E27FC236}">
+                <a16:creationId xmlns:a16="http://schemas.microsoft.com/office/drawing/2014/main" id="{8AADB9FC-9460-23E7-F132-F3695D174898}"/>
+              </a:ext>
+            </a:extLst>
+          </p:cNvPr>
+          <p:cNvSpPr>
+            <a:spLocks noGrp="1"/>
+          </p:cNvSpPr>
+          <p:nvPr>
+            <p:ph type="title"/>
+          </p:nvPr>
+        </p:nvSpPr>
+        <p:spPr/>
+        <p:txBody>
+          <a:bodyPr/>
+          <a:lstStyle/>
+          <a:p>
+            <a:r>
+              <a:rPr lang="en-US" dirty="0"/>
+              <a:t>Appendix 2: H2 regression results</a:t>
+            </a:r>
+            <a:endParaRPr lang="LID4096" dirty="0"/>
+          </a:p>
+        </p:txBody>
+      </p:sp>
+      <p:sp>
+        <p:nvSpPr>
+          <p:cNvPr id="3" name="Inhaltsplatzhalter 2">
+            <a:extLst>
+              <a:ext uri="{FF2B5EF4-FFF2-40B4-BE49-F238E27FC236}">
+                <a16:creationId xmlns:a16="http://schemas.microsoft.com/office/drawing/2014/main" id="{E5760F00-D52B-4105-F882-398308458061}"/>
+              </a:ext>
+            </a:extLst>
+          </p:cNvPr>
+          <p:cNvSpPr txBox="1">
+            <a:spLocks/>
+          </p:cNvSpPr>
+          <p:nvPr/>
+        </p:nvSpPr>
+        <p:spPr>
+          <a:xfrm>
+            <a:off x="1246340" y="1554478"/>
+            <a:ext cx="8893479" cy="1220037"/>
+          </a:xfrm>
+          <a:prstGeom prst="rect">
+            <a:avLst/>
+          </a:prstGeom>
+        </p:spPr>
+        <p:txBody>
+          <a:bodyPr vert="horz" lIns="91440" tIns="45720" rIns="91440" bIns="45720" rtlCol="0">
+            <a:normAutofit fontScale="55000" lnSpcReduction="20000"/>
+          </a:bodyPr>
+          <a:lstStyle>
+            <a:lvl1pPr marL="228600" indent="-228600" algn="l" defTabSz="914400" rtl="0" eaLnBrk="1" latinLnBrk="0" hangingPunct="1">
+              <a:lnSpc>
+                <a:spcPct val="90000"/>
+              </a:lnSpc>
+              <a:spcBef>
+                <a:spcPts val="1000"/>
+              </a:spcBef>
+              <a:buFont typeface="Arial" panose="020B0604020202020204" pitchFamily="34" charset="0"/>
+              <a:buChar char="•"/>
+              <a:defRPr sz="2800" kern="1200">
+                <a:solidFill>
+                  <a:schemeClr val="tx1"/>
+                </a:solidFill>
+                <a:latin typeface="+mn-lt"/>
+                <a:ea typeface="+mn-ea"/>
+                <a:cs typeface="+mn-cs"/>
+              </a:defRPr>
+            </a:lvl1pPr>
+            <a:lvl2pPr marL="685800" indent="-228600" algn="l" defTabSz="914400" rtl="0" eaLnBrk="1" latinLnBrk="0" hangingPunct="1">
+              <a:lnSpc>
+                <a:spcPct val="90000"/>
+              </a:lnSpc>
+              <a:spcBef>
+                <a:spcPts val="500"/>
+              </a:spcBef>
+              <a:buFont typeface="Arial" panose="020B0604020202020204" pitchFamily="34" charset="0"/>
+              <a:buChar char="•"/>
+              <a:defRPr sz="2400" kern="1200">
+                <a:solidFill>
+                  <a:schemeClr val="tx1"/>
+                </a:solidFill>
+                <a:latin typeface="+mn-lt"/>
+                <a:ea typeface="+mn-ea"/>
+                <a:cs typeface="+mn-cs"/>
+              </a:defRPr>
+            </a:lvl2pPr>
+            <a:lvl3pPr marL="1143000" indent="-228600" algn="l" defTabSz="914400" rtl="0" eaLnBrk="1" latinLnBrk="0" hangingPunct="1">
+              <a:lnSpc>
+                <a:spcPct val="90000"/>
+              </a:lnSpc>
+              <a:spcBef>
+                <a:spcPts val="500"/>
+              </a:spcBef>
+              <a:buFont typeface="Arial" panose="020B0604020202020204" pitchFamily="34" charset="0"/>
+              <a:buChar char="•"/>
+              <a:defRPr sz="2000" kern="1200">
+                <a:solidFill>
+                  <a:schemeClr val="tx1"/>
+                </a:solidFill>
+                <a:latin typeface="+mn-lt"/>
+                <a:ea typeface="+mn-ea"/>
+                <a:cs typeface="+mn-cs"/>
+              </a:defRPr>
+            </a:lvl3pPr>
+            <a:lvl4pPr marL="1600200" indent="-228600" algn="l" defTabSz="914400" rtl="0" eaLnBrk="1" latinLnBrk="0" hangingPunct="1">
+              <a:lnSpc>
+                <a:spcPct val="90000"/>
+              </a:lnSpc>
+              <a:spcBef>
+                <a:spcPts val="500"/>
+              </a:spcBef>
+              <a:buFont typeface="Arial" panose="020B0604020202020204" pitchFamily="34" charset="0"/>
+              <a:buChar char="•"/>
+              <a:defRPr sz="1800" kern="1200">
+                <a:solidFill>
+                  <a:schemeClr val="tx1"/>
+                </a:solidFill>
+                <a:latin typeface="+mn-lt"/>
+                <a:ea typeface="+mn-ea"/>
+                <a:cs typeface="+mn-cs"/>
+              </a:defRPr>
+            </a:lvl4pPr>
+            <a:lvl5pPr marL="2057400" indent="-228600" algn="l" defTabSz="914400" rtl="0" eaLnBrk="1" latinLnBrk="0" hangingPunct="1">
+              <a:lnSpc>
+                <a:spcPct val="90000"/>
+              </a:lnSpc>
+              <a:spcBef>
+                <a:spcPts val="500"/>
+              </a:spcBef>
+              <a:buFont typeface="Arial" panose="020B0604020202020204" pitchFamily="34" charset="0"/>
+              <a:buChar char="•"/>
+              <a:defRPr sz="1800" kern="1200">
+                <a:solidFill>
+                  <a:schemeClr val="tx1"/>
+                </a:solidFill>
+                <a:latin typeface="+mn-lt"/>
+                <a:ea typeface="+mn-ea"/>
+                <a:cs typeface="+mn-cs"/>
+              </a:defRPr>
+            </a:lvl5pPr>
+            <a:lvl6pPr marL="2514600" indent="-228600" algn="l" defTabSz="914400" rtl="0" eaLnBrk="1" latinLnBrk="0" hangingPunct="1">
+              <a:lnSpc>
+                <a:spcPct val="90000"/>
+              </a:lnSpc>
+              <a:spcBef>
+                <a:spcPts val="500"/>
+              </a:spcBef>
+              <a:buFont typeface="Arial" panose="020B0604020202020204" pitchFamily="34" charset="0"/>
+              <a:buChar char="•"/>
+              <a:defRPr sz="1800" kern="1200">
+                <a:solidFill>
+                  <a:schemeClr val="tx1"/>
+                </a:solidFill>
+                <a:latin typeface="+mn-lt"/>
+                <a:ea typeface="+mn-ea"/>
+                <a:cs typeface="+mn-cs"/>
+              </a:defRPr>
+            </a:lvl6pPr>
+            <a:lvl7pPr marL="2971800" indent="-228600" algn="l" defTabSz="914400" rtl="0" eaLnBrk="1" latinLnBrk="0" hangingPunct="1">
+              <a:lnSpc>
+                <a:spcPct val="90000"/>
+              </a:lnSpc>
+              <a:spcBef>
+                <a:spcPts val="500"/>
+              </a:spcBef>
+              <a:buFont typeface="Arial" panose="020B0604020202020204" pitchFamily="34" charset="0"/>
+              <a:buChar char="•"/>
+              <a:defRPr sz="1800" kern="1200">
+                <a:solidFill>
+                  <a:schemeClr val="tx1"/>
+                </a:solidFill>
+                <a:latin typeface="+mn-lt"/>
+                <a:ea typeface="+mn-ea"/>
+                <a:cs typeface="+mn-cs"/>
+              </a:defRPr>
+            </a:lvl7pPr>
+            <a:lvl8pPr marL="3429000" indent="-228600" algn="l" defTabSz="914400" rtl="0" eaLnBrk="1" latinLnBrk="0" hangingPunct="1">
+              <a:lnSpc>
+                <a:spcPct val="90000"/>
+              </a:lnSpc>
+              <a:spcBef>
+                <a:spcPts val="500"/>
+              </a:spcBef>
+              <a:buFont typeface="Arial" panose="020B0604020202020204" pitchFamily="34" charset="0"/>
+              <a:buChar char="•"/>
+              <a:defRPr sz="1800" kern="1200">
+                <a:solidFill>
+                  <a:schemeClr val="tx1"/>
+                </a:solidFill>
+                <a:latin typeface="+mn-lt"/>
+                <a:ea typeface="+mn-ea"/>
+                <a:cs typeface="+mn-cs"/>
+              </a:defRPr>
+            </a:lvl8pPr>
+            <a:lvl9pPr marL="3886200" indent="-228600" algn="l" defTabSz="914400" rtl="0" eaLnBrk="1" latinLnBrk="0" hangingPunct="1">
+              <a:lnSpc>
+                <a:spcPct val="90000"/>
+              </a:lnSpc>
+              <a:spcBef>
+                <a:spcPts val="500"/>
+              </a:spcBef>
+              <a:buFont typeface="Arial" panose="020B0604020202020204" pitchFamily="34" charset="0"/>
+              <a:buChar char="•"/>
+              <a:defRPr sz="1800" kern="1200">
+                <a:solidFill>
+                  <a:schemeClr val="tx1"/>
+                </a:solidFill>
+                <a:latin typeface="+mn-lt"/>
+                <a:ea typeface="+mn-ea"/>
+                <a:cs typeface="+mn-cs"/>
+              </a:defRPr>
+            </a:lvl9pPr>
+          </a:lstStyle>
+          <a:p>
+            <a:pPr marL="0" indent="0">
+              <a:buNone/>
+            </a:pPr>
+            <a:r>
+              <a:rPr lang="en-US" sz="2800" b="1" i="1" u="none" strike="noStrike" baseline="0" dirty="0">
+                <a:solidFill>
+                  <a:srgbClr val="000000"/>
+                </a:solidFill>
+                <a:latin typeface="AAAAAM+Calibri-BoldItalic"/>
+              </a:rPr>
+              <a:t>Hypothesis H2</a:t>
+            </a:r>
+            <a:r>
+              <a:rPr lang="en-US" sz="2800" b="1" i="1" u="none" strike="noStrike" baseline="0" dirty="0">
+                <a:solidFill>
+                  <a:srgbClr val="000000"/>
+                </a:solidFill>
+                <a:latin typeface="Calibri" panose="020F0502020204030204" pitchFamily="34" charset="0"/>
+              </a:rPr>
+              <a:t>—</a:t>
+            </a:r>
+            <a:r>
+              <a:rPr lang="en-US" sz="2800" b="1" i="1" u="none" strike="noStrike" baseline="0" dirty="0">
+                <a:solidFill>
+                  <a:srgbClr val="000000"/>
+                </a:solidFill>
+                <a:latin typeface="AAAAAM+Calibri-BoldItalic"/>
+              </a:rPr>
+              <a:t>Value Added of the Shock Score </a:t>
+            </a:r>
+            <a:endParaRPr lang="en-US" sz="2800" b="0" i="0" u="none" strike="noStrike" baseline="0" dirty="0">
+              <a:solidFill>
+                <a:srgbClr val="000000"/>
+              </a:solidFill>
+              <a:latin typeface="AAAAAM+Calibri-BoldItalic"/>
+            </a:endParaRPr>
+          </a:p>
+          <a:p>
+            <a:r>
+              <a:rPr lang="en-US" sz="2800" b="1" i="0" u="none" strike="noStrike" baseline="0" dirty="0">
+                <a:solidFill>
+                  <a:srgbClr val="000000"/>
+                </a:solidFill>
+                <a:latin typeface="Calibri" panose="020F0502020204030204" pitchFamily="34" charset="0"/>
+              </a:rPr>
+              <a:t>H2₀: </a:t>
+            </a:r>
+            <a:r>
+              <a:rPr lang="en-US" sz="2800" b="0" i="0" u="none" strike="noStrike" baseline="0" dirty="0">
+                <a:solidFill>
+                  <a:srgbClr val="000000"/>
+                </a:solidFill>
+                <a:latin typeface="AAAAAG+Calibri"/>
+              </a:rPr>
+              <a:t>Introducing the Shock Score for investment decision-making has no statistically significant effect on the risk</a:t>
+            </a:r>
+            <a:r>
+              <a:rPr lang="en-US" sz="2800" b="0" i="0" u="none" strike="noStrike" baseline="0" dirty="0">
+                <a:solidFill>
+                  <a:srgbClr val="000000"/>
+                </a:solidFill>
+                <a:latin typeface="Calibri" panose="020F0502020204030204" pitchFamily="34" charset="0"/>
+              </a:rPr>
+              <a:t>–</a:t>
+            </a:r>
+            <a:r>
+              <a:rPr lang="en-US" sz="2800" b="0" i="0" u="none" strike="noStrike" baseline="0" dirty="0">
+                <a:solidFill>
+                  <a:srgbClr val="000000"/>
+                </a:solidFill>
+                <a:latin typeface="AAAAAG+Calibri"/>
+              </a:rPr>
+              <a:t>return ratio of the portfolio. </a:t>
+            </a:r>
+          </a:p>
+          <a:p>
+            <a:r>
+              <a:rPr lang="en-US" sz="2800" b="1" i="0" u="none" strike="noStrike" baseline="0" dirty="0">
+                <a:solidFill>
+                  <a:srgbClr val="000000"/>
+                </a:solidFill>
+                <a:latin typeface="Calibri" panose="020F0502020204030204" pitchFamily="34" charset="0"/>
+              </a:rPr>
+              <a:t>H2ₐ: </a:t>
+            </a:r>
+            <a:r>
+              <a:rPr lang="en-US" sz="2800" b="0" i="0" u="none" strike="noStrike" baseline="0" dirty="0">
+                <a:solidFill>
+                  <a:srgbClr val="000000"/>
+                </a:solidFill>
+                <a:latin typeface="AAAAAG+Calibri"/>
+              </a:rPr>
+              <a:t>Introducing the Shock Score for investment decision-making has a statistically significant effect on the risk</a:t>
+            </a:r>
+            <a:r>
+              <a:rPr lang="en-US" sz="2800" b="0" i="0" u="none" strike="noStrike" baseline="0" dirty="0">
+                <a:solidFill>
+                  <a:srgbClr val="000000"/>
+                </a:solidFill>
+                <a:latin typeface="Calibri" panose="020F0502020204030204" pitchFamily="34" charset="0"/>
+              </a:rPr>
+              <a:t>–</a:t>
+            </a:r>
+            <a:r>
+              <a:rPr lang="en-US" sz="2800" b="0" i="0" u="none" strike="noStrike" baseline="0" dirty="0">
+                <a:solidFill>
+                  <a:srgbClr val="000000"/>
+                </a:solidFill>
+                <a:latin typeface="AAAAAG+Calibri"/>
+              </a:rPr>
+              <a:t>return ratio of the portfolio. </a:t>
+            </a:r>
+          </a:p>
+        </p:txBody>
+      </p:sp>
+      <p:pic>
+        <p:nvPicPr>
+          <p:cNvPr id="9" name="Content Placeholder 8">
+            <a:extLst>
+              <a:ext uri="{FF2B5EF4-FFF2-40B4-BE49-F238E27FC236}">
+                <a16:creationId xmlns:a16="http://schemas.microsoft.com/office/drawing/2014/main" id="{AF206C88-A4E7-FB40-1ED6-A4C61DC8AF26}"/>
+              </a:ext>
+            </a:extLst>
+          </p:cNvPr>
+          <p:cNvPicPr>
+            <a:picLocks noGrp="1" noChangeAspect="1"/>
+          </p:cNvPicPr>
+          <p:nvPr>
+            <p:ph idx="1"/>
+          </p:nvPr>
+        </p:nvPicPr>
+        <p:blipFill>
+          <a:blip r:embed="rId2"/>
+          <a:stretch>
+            <a:fillRect/>
+          </a:stretch>
+        </p:blipFill>
+        <p:spPr>
+          <a:xfrm>
+            <a:off x="1145482" y="3056695"/>
             <a:ext cx="9800178" cy="2489201"/>
           </a:xfrm>
           <a:prstGeom prst="rect">
@@ -10480,7 +13175,7 @@
 </p:sld>
 </file>
 
-<file path=ppt/slides/slide18.xml><?xml version="1.0" encoding="utf-8"?>
+<file path=ppt/slides/slide21.xml><?xml version="1.0" encoding="utf-8"?>
 <p:sld xmlns:a="http://schemas.openxmlformats.org/drawingml/2006/main" xmlns:r="http://schemas.openxmlformats.org/officeDocument/2006/relationships" xmlns:p="http://schemas.openxmlformats.org/presentationml/2006/main">
   <p:cSld>
     <p:spTree>
@@ -10745,7 +13440,7 @@
 </p:sld>
 </file>
 
-<file path=ppt/slides/slide19.xml><?xml version="1.0" encoding="utf-8"?>
+<file path=ppt/slides/slide22.xml><?xml version="1.0" encoding="utf-8"?>
 <p:sld xmlns:a="http://schemas.openxmlformats.org/drawingml/2006/main" xmlns:r="http://schemas.openxmlformats.org/officeDocument/2006/relationships" xmlns:p="http://schemas.openxmlformats.org/presentationml/2006/main">
   <p:cSld>
     <p:spTree>
@@ -10852,7 +13547,7 @@
         </p:blipFill>
         <p:spPr>
           <a:xfrm>
-            <a:off x="5835251" y="4250594"/>
+            <a:off x="5893036" y="3905910"/>
             <a:ext cx="6041789" cy="2475643"/>
           </a:xfrm>
           <a:prstGeom prst="rect">
@@ -10968,8 +13663,8 @@
         </p:nvSpPr>
         <p:spPr>
           <a:xfrm>
-            <a:off x="838200" y="1385888"/>
-            <a:ext cx="4724400" cy="4838699"/>
+            <a:off x="638882" y="1385888"/>
+            <a:ext cx="4923718" cy="5218556"/>
           </a:xfrm>
         </p:spPr>
         <p:txBody>
@@ -11057,6 +13752,60 @@
               <a:t>The H1 conclusion does not depend on a normality assumption.</a:t>
             </a:r>
             <a:endParaRPr lang="LID4096" b="1" dirty="0"/>
+          </a:p>
+        </p:txBody>
+      </p:sp>
+      <p:sp>
+        <p:nvSpPr>
+          <p:cNvPr id="4" name="TextBox 3">
+            <a:extLst>
+              <a:ext uri="{FF2B5EF4-FFF2-40B4-BE49-F238E27FC236}">
+                <a16:creationId xmlns:a16="http://schemas.microsoft.com/office/drawing/2014/main" id="{6E16EFE2-CDB2-46C8-3C9F-85F4A4C2B238}"/>
+              </a:ext>
+            </a:extLst>
+          </p:cNvPr>
+          <p:cNvSpPr txBox="1"/>
+          <p:nvPr/>
+        </p:nvSpPr>
+        <p:spPr>
+          <a:xfrm>
+            <a:off x="8626239" y="6453382"/>
+            <a:ext cx="2926879" cy="246221"/>
+          </a:xfrm>
+          <a:prstGeom prst="rect">
+            <a:avLst/>
+          </a:prstGeom>
+          <a:noFill/>
+        </p:spPr>
+        <p:txBody>
+          <a:bodyPr wrap="square">
+            <a:spAutoFit/>
+          </a:bodyPr>
+          <a:lstStyle/>
+          <a:p>
+            <a:r>
+              <a:rPr lang="en-US" sz="1000" b="0" i="1" u="none" strike="noStrike" baseline="0" dirty="0">
+                <a:solidFill>
+                  <a:srgbClr val="000000"/>
+                </a:solidFill>
+                <a:latin typeface="AAAAAO+Calibri-Italic"/>
+              </a:rPr>
+              <a:t>Note. </a:t>
+            </a:r>
+            <a:r>
+              <a:rPr lang="en-US" sz="1000" b="0" i="0" u="none" strike="noStrike" baseline="0" dirty="0">
+                <a:solidFill>
+                  <a:srgbClr val="000000"/>
+                </a:solidFill>
+                <a:latin typeface="AAAAAG+Calibri"/>
+              </a:rPr>
+              <a:t>Original figures created for this study (2026). </a:t>
+            </a:r>
+            <a:endParaRPr lang="LID4096" sz="1000" dirty="0">
+              <a:highlight>
+                <a:srgbClr val="FFFF00"/>
+              </a:highlight>
+            </a:endParaRPr>
           </a:p>
         </p:txBody>
       </p:sp>
@@ -11073,690 +13822,7 @@
 </p:sld>
 </file>
 
-<file path=ppt/slides/slide2.xml><?xml version="1.0" encoding="utf-8"?>
-<p:sld xmlns:a="http://schemas.openxmlformats.org/drawingml/2006/main" xmlns:r="http://schemas.openxmlformats.org/officeDocument/2006/relationships" xmlns:p="http://schemas.openxmlformats.org/presentationml/2006/main">
-  <p:cSld>
-    <p:spTree>
-      <p:nvGrpSpPr>
-        <p:cNvPr id="1" name=""/>
-        <p:cNvGrpSpPr/>
-        <p:nvPr/>
-      </p:nvGrpSpPr>
-      <p:grpSpPr>
-        <a:xfrm>
-          <a:off x="0" y="0"/>
-          <a:ext cx="0" cy="0"/>
-          <a:chOff x="0" y="0"/>
-          <a:chExt cx="0" cy="0"/>
-        </a:xfrm>
-      </p:grpSpPr>
-      <p:sp>
-        <p:nvSpPr>
-          <p:cNvPr id="2" name="Titel 1">
-            <a:extLst>
-              <a:ext uri="{FF2B5EF4-FFF2-40B4-BE49-F238E27FC236}">
-                <a16:creationId xmlns:a16="http://schemas.microsoft.com/office/drawing/2014/main" id="{090EAC2A-5706-C65F-88DE-7DA698789FBD}"/>
-              </a:ext>
-            </a:extLst>
-          </p:cNvPr>
-          <p:cNvSpPr>
-            <a:spLocks noGrp="1"/>
-          </p:cNvSpPr>
-          <p:nvPr>
-            <p:ph type="title"/>
-          </p:nvPr>
-        </p:nvSpPr>
-        <p:spPr>
-          <a:xfrm>
-            <a:off x="838200" y="365125"/>
-            <a:ext cx="8161800" cy="823595"/>
-          </a:xfrm>
-        </p:spPr>
-        <p:txBody>
-          <a:bodyPr/>
-          <a:lstStyle/>
-          <a:p>
-            <a:r>
-              <a:rPr lang="en-US" dirty="0"/>
-              <a:t>Topic and Motivation</a:t>
-            </a:r>
-          </a:p>
-        </p:txBody>
-      </p:sp>
-      <p:sp>
-        <p:nvSpPr>
-          <p:cNvPr id="3" name="Inhaltsplatzhalter 2">
-            <a:extLst>
-              <a:ext uri="{FF2B5EF4-FFF2-40B4-BE49-F238E27FC236}">
-                <a16:creationId xmlns:a16="http://schemas.microsoft.com/office/drawing/2014/main" id="{395D3EC4-46A1-A411-92FC-D6D6575EFB2C}"/>
-              </a:ext>
-            </a:extLst>
-          </p:cNvPr>
-          <p:cNvSpPr>
-            <a:spLocks noGrp="1"/>
-          </p:cNvSpPr>
-          <p:nvPr>
-            <p:ph idx="1"/>
-          </p:nvPr>
-        </p:nvSpPr>
-        <p:spPr>
-          <a:xfrm>
-            <a:off x="1746019" y="3578722"/>
-            <a:ext cx="8881341" cy="3063240"/>
-          </a:xfrm>
-        </p:spPr>
-        <p:txBody>
-          <a:bodyPr>
-            <a:normAutofit fontScale="40000" lnSpcReduction="20000"/>
-          </a:bodyPr>
-          <a:lstStyle/>
-          <a:p>
-            <a:pPr marL="0" indent="0">
-              <a:lnSpc>
-                <a:spcPct val="120000"/>
-              </a:lnSpc>
-              <a:buNone/>
-            </a:pPr>
-            <a:r>
-              <a:rPr lang="en-US" dirty="0"/>
-              <a:t>In financial portfolio management:</a:t>
-            </a:r>
-          </a:p>
-          <a:p>
-            <a:pPr>
-              <a:lnSpc>
-                <a:spcPct val="120000"/>
-              </a:lnSpc>
-            </a:pPr>
-            <a:r>
-              <a:rPr lang="en-US" b="1" dirty="0"/>
-              <a:t>Unexpected information shocks </a:t>
-            </a:r>
-            <a:r>
-              <a:rPr lang="en-US" dirty="0"/>
-              <a:t>(news, events, publications) lead to </a:t>
-            </a:r>
-            <a:r>
-              <a:rPr lang="en-US" b="1" dirty="0"/>
-              <a:t>emotional biases </a:t>
-            </a:r>
-            <a:r>
-              <a:rPr lang="en-US" dirty="0"/>
-              <a:t>in decision making.</a:t>
-            </a:r>
-          </a:p>
-          <a:p>
-            <a:pPr>
-              <a:lnSpc>
-                <a:spcPct val="120000"/>
-              </a:lnSpc>
-            </a:pPr>
-            <a:r>
-              <a:rPr lang="en-US" dirty="0"/>
-              <a:t>Emotional biases are not part of portfolio strategy – they add risk and costs.</a:t>
-            </a:r>
-          </a:p>
-          <a:p>
-            <a:pPr marL="0" indent="0">
-              <a:lnSpc>
-                <a:spcPct val="120000"/>
-              </a:lnSpc>
-              <a:buNone/>
-            </a:pPr>
-            <a:r>
-              <a:rPr lang="en-US" dirty="0"/>
-              <a:t>This  study evaluates:</a:t>
-            </a:r>
-          </a:p>
-          <a:p>
-            <a:pPr>
-              <a:lnSpc>
-                <a:spcPct val="120000"/>
-              </a:lnSpc>
-            </a:pPr>
-            <a:r>
-              <a:rPr lang="en-US" dirty="0"/>
-              <a:t>Can decision-support indicator (Shock Score) approximate systematic emotional biases in equity portfolio management?</a:t>
-            </a:r>
-          </a:p>
-          <a:p>
-            <a:pPr>
-              <a:lnSpc>
-                <a:spcPct val="120000"/>
-              </a:lnSpc>
-            </a:pPr>
-            <a:r>
-              <a:rPr lang="en-US" dirty="0"/>
-              <a:t>Can decision-support tool reduce emotional biases in decision making?</a:t>
-            </a:r>
-          </a:p>
-          <a:p>
-            <a:pPr marL="0" indent="0">
-              <a:lnSpc>
-                <a:spcPct val="120000"/>
-              </a:lnSpc>
-              <a:buNone/>
-            </a:pPr>
-            <a:r>
-              <a:rPr lang="en-US" dirty="0"/>
-              <a:t>Past studies tell: </a:t>
-            </a:r>
-          </a:p>
-          <a:p>
-            <a:pPr>
-              <a:lnSpc>
-                <a:spcPct val="120000"/>
-              </a:lnSpc>
-            </a:pPr>
-            <a:r>
-              <a:rPr lang="en-US" dirty="0"/>
-              <a:t>Behavioral finance -- there are systematic, emotionally driven decision errors during external information shocks.</a:t>
-            </a:r>
-          </a:p>
-          <a:p>
-            <a:pPr>
-              <a:lnSpc>
-                <a:spcPct val="120000"/>
-              </a:lnSpc>
-            </a:pPr>
-            <a:r>
-              <a:rPr lang="en-US" dirty="0"/>
-              <a:t>Existing decision-support systems -- analytics does work, ex-ante bias mitigation not</a:t>
-            </a:r>
-          </a:p>
-          <a:p>
-            <a:pPr>
-              <a:lnSpc>
-                <a:spcPct val="120000"/>
-              </a:lnSpc>
-            </a:pPr>
-            <a:r>
-              <a:rPr lang="en-US" dirty="0"/>
-              <a:t>The topic is grounded in professional risk-management practice, where this gap is persistently observed.</a:t>
-            </a:r>
-          </a:p>
-        </p:txBody>
-      </p:sp>
-      <p:sp>
-        <p:nvSpPr>
-          <p:cNvPr id="4" name="Rectangle 3">
-            <a:extLst>
-              <a:ext uri="{FF2B5EF4-FFF2-40B4-BE49-F238E27FC236}">
-                <a16:creationId xmlns:a16="http://schemas.microsoft.com/office/drawing/2014/main" id="{B915B92B-3473-1AA9-73A4-58F0B9686EBE}"/>
-              </a:ext>
-            </a:extLst>
-          </p:cNvPr>
-          <p:cNvSpPr/>
-          <p:nvPr/>
-        </p:nvSpPr>
-        <p:spPr>
-          <a:xfrm>
-            <a:off x="1528764" y="1587342"/>
-            <a:ext cx="1843087" cy="751046"/>
-          </a:xfrm>
-          <a:prstGeom prst="rect">
-            <a:avLst/>
-          </a:prstGeom>
-          <a:solidFill>
-            <a:schemeClr val="dk1">
-              <a:alpha val="50000"/>
-            </a:schemeClr>
-          </a:solidFill>
-          <a:ln>
-            <a:noFill/>
-          </a:ln>
-        </p:spPr>
-        <p:style>
-          <a:lnRef idx="0">
-            <a:scrgbClr r="0" g="0" b="0"/>
-          </a:lnRef>
-          <a:fillRef idx="0">
-            <a:scrgbClr r="0" g="0" b="0"/>
-          </a:fillRef>
-          <a:effectRef idx="0">
-            <a:scrgbClr r="0" g="0" b="0"/>
-          </a:effectRef>
-          <a:fontRef idx="minor">
-            <a:schemeClr val="lt1"/>
-          </a:fontRef>
-        </p:style>
-        <p:txBody>
-          <a:bodyPr rtlCol="0" anchor="ctr"/>
-          <a:lstStyle/>
-          <a:p>
-            <a:pPr algn="ctr"/>
-            <a:r>
-              <a:rPr lang="en-US" sz="1600" dirty="0"/>
-              <a:t>Investment Strategy</a:t>
-            </a:r>
-            <a:endParaRPr lang="LID4096" sz="1600" dirty="0"/>
-          </a:p>
-        </p:txBody>
-      </p:sp>
-      <p:sp>
-        <p:nvSpPr>
-          <p:cNvPr id="5" name="Rectangle 4">
-            <a:extLst>
-              <a:ext uri="{FF2B5EF4-FFF2-40B4-BE49-F238E27FC236}">
-                <a16:creationId xmlns:a16="http://schemas.microsoft.com/office/drawing/2014/main" id="{7ABAEB0A-8391-566D-E1BD-B30A59223C66}"/>
-              </a:ext>
-            </a:extLst>
-          </p:cNvPr>
-          <p:cNvSpPr/>
-          <p:nvPr/>
-        </p:nvSpPr>
-        <p:spPr>
-          <a:xfrm>
-            <a:off x="4905375" y="1580198"/>
-            <a:ext cx="1843087" cy="751046"/>
-          </a:xfrm>
-          <a:prstGeom prst="rect">
-            <a:avLst/>
-          </a:prstGeom>
-          <a:solidFill>
-            <a:schemeClr val="dk1">
-              <a:alpha val="50000"/>
-            </a:schemeClr>
-          </a:solidFill>
-          <a:ln>
-            <a:noFill/>
-          </a:ln>
-        </p:spPr>
-        <p:style>
-          <a:lnRef idx="0">
-            <a:scrgbClr r="0" g="0" b="0"/>
-          </a:lnRef>
-          <a:fillRef idx="0">
-            <a:scrgbClr r="0" g="0" b="0"/>
-          </a:fillRef>
-          <a:effectRef idx="0">
-            <a:scrgbClr r="0" g="0" b="0"/>
-          </a:effectRef>
-          <a:fontRef idx="minor">
-            <a:schemeClr val="lt1"/>
-          </a:fontRef>
-        </p:style>
-        <p:txBody>
-          <a:bodyPr rtlCol="0" anchor="ctr"/>
-          <a:lstStyle/>
-          <a:p>
-            <a:pPr algn="ctr"/>
-            <a:r>
-              <a:rPr lang="en-US" sz="1600" dirty="0"/>
-              <a:t>Managerial Decisions</a:t>
-            </a:r>
-            <a:endParaRPr lang="LID4096" sz="1600" dirty="0"/>
-          </a:p>
-        </p:txBody>
-      </p:sp>
-      <p:sp>
-        <p:nvSpPr>
-          <p:cNvPr id="6" name="Rectangle 5">
-            <a:extLst>
-              <a:ext uri="{FF2B5EF4-FFF2-40B4-BE49-F238E27FC236}">
-                <a16:creationId xmlns:a16="http://schemas.microsoft.com/office/drawing/2014/main" id="{7F4C67F2-65A6-BA91-D3F2-F88026957648}"/>
-              </a:ext>
-            </a:extLst>
-          </p:cNvPr>
-          <p:cNvSpPr/>
-          <p:nvPr/>
-        </p:nvSpPr>
-        <p:spPr>
-          <a:xfrm>
-            <a:off x="8220077" y="1587342"/>
-            <a:ext cx="1843087" cy="751046"/>
-          </a:xfrm>
-          <a:prstGeom prst="rect">
-            <a:avLst/>
-          </a:prstGeom>
-          <a:solidFill>
-            <a:schemeClr val="dk1">
-              <a:alpha val="50000"/>
-            </a:schemeClr>
-          </a:solidFill>
-          <a:ln>
-            <a:noFill/>
-          </a:ln>
-        </p:spPr>
-        <p:style>
-          <a:lnRef idx="0">
-            <a:scrgbClr r="0" g="0" b="0"/>
-          </a:lnRef>
-          <a:fillRef idx="0">
-            <a:scrgbClr r="0" g="0" b="0"/>
-          </a:fillRef>
-          <a:effectRef idx="0">
-            <a:scrgbClr r="0" g="0" b="0"/>
-          </a:effectRef>
-          <a:fontRef idx="minor">
-            <a:schemeClr val="lt1"/>
-          </a:fontRef>
-        </p:style>
-        <p:txBody>
-          <a:bodyPr rtlCol="0" anchor="ctr"/>
-          <a:lstStyle/>
-          <a:p>
-            <a:pPr algn="ctr"/>
-            <a:r>
-              <a:rPr lang="en-US" sz="1600" dirty="0"/>
-              <a:t>Portfolio Outcome</a:t>
-            </a:r>
-            <a:endParaRPr lang="LID4096" sz="1600" dirty="0"/>
-          </a:p>
-        </p:txBody>
-      </p:sp>
-      <p:sp>
-        <p:nvSpPr>
-          <p:cNvPr id="7" name="Rectangle 6">
-            <a:extLst>
-              <a:ext uri="{FF2B5EF4-FFF2-40B4-BE49-F238E27FC236}">
-                <a16:creationId xmlns:a16="http://schemas.microsoft.com/office/drawing/2014/main" id="{0A9D9A38-4DD4-29BF-C7E2-E1F48C541DC3}"/>
-              </a:ext>
-            </a:extLst>
-          </p:cNvPr>
-          <p:cNvSpPr/>
-          <p:nvPr/>
-        </p:nvSpPr>
-        <p:spPr>
-          <a:xfrm>
-            <a:off x="4905376" y="2956084"/>
-            <a:ext cx="1843087" cy="620555"/>
-          </a:xfrm>
-          <a:prstGeom prst="rect">
-            <a:avLst/>
-          </a:prstGeom>
-          <a:solidFill>
-            <a:schemeClr val="accent1">
-              <a:alpha val="50000"/>
-            </a:schemeClr>
-          </a:solidFill>
-          <a:ln>
-            <a:noFill/>
-          </a:ln>
-        </p:spPr>
-        <p:style>
-          <a:lnRef idx="0">
-            <a:scrgbClr r="0" g="0" b="0"/>
-          </a:lnRef>
-          <a:fillRef idx="0">
-            <a:scrgbClr r="0" g="0" b="0"/>
-          </a:fillRef>
-          <a:effectRef idx="0">
-            <a:scrgbClr r="0" g="0" b="0"/>
-          </a:effectRef>
-          <a:fontRef idx="minor">
-            <a:schemeClr val="lt1"/>
-          </a:fontRef>
-        </p:style>
-        <p:txBody>
-          <a:bodyPr rtlCol="0" anchor="ctr"/>
-          <a:lstStyle/>
-          <a:p>
-            <a:pPr algn="ctr"/>
-            <a:r>
-              <a:rPr lang="en-US" sz="1600" dirty="0"/>
-              <a:t>Information Shock</a:t>
-            </a:r>
-            <a:endParaRPr lang="LID4096" sz="1600" dirty="0"/>
-          </a:p>
-        </p:txBody>
-      </p:sp>
-      <p:cxnSp>
-        <p:nvCxnSpPr>
-          <p:cNvPr id="9" name="Straight Arrow Connector 8">
-            <a:extLst>
-              <a:ext uri="{FF2B5EF4-FFF2-40B4-BE49-F238E27FC236}">
-                <a16:creationId xmlns:a16="http://schemas.microsoft.com/office/drawing/2014/main" id="{827EB041-A3BE-CDED-FBBE-A8AD37CCA105}"/>
-              </a:ext>
-            </a:extLst>
-          </p:cNvPr>
-          <p:cNvCxnSpPr>
-            <a:endCxn id="5" idx="1"/>
-          </p:cNvCxnSpPr>
-          <p:nvPr/>
-        </p:nvCxnSpPr>
-        <p:spPr>
-          <a:xfrm flipV="1">
-            <a:off x="3414713" y="1955721"/>
-            <a:ext cx="1490662" cy="7144"/>
-          </a:xfrm>
-          <a:prstGeom prst="straightConnector1">
-            <a:avLst/>
-          </a:prstGeom>
-          <a:ln>
-            <a:tailEnd type="triangle"/>
-          </a:ln>
-        </p:spPr>
-        <p:style>
-          <a:lnRef idx="1">
-            <a:schemeClr val="dk1"/>
-          </a:lnRef>
-          <a:fillRef idx="0">
-            <a:schemeClr val="dk1"/>
-          </a:fillRef>
-          <a:effectRef idx="0">
-            <a:schemeClr val="dk1"/>
-          </a:effectRef>
-          <a:fontRef idx="minor">
-            <a:schemeClr val="tx1"/>
-          </a:fontRef>
-        </p:style>
-      </p:cxnSp>
-      <p:cxnSp>
-        <p:nvCxnSpPr>
-          <p:cNvPr id="10" name="Straight Arrow Connector 9">
-            <a:extLst>
-              <a:ext uri="{FF2B5EF4-FFF2-40B4-BE49-F238E27FC236}">
-                <a16:creationId xmlns:a16="http://schemas.microsoft.com/office/drawing/2014/main" id="{76ED4E98-765A-1AFE-0F73-428BFD773F81}"/>
-              </a:ext>
-            </a:extLst>
-          </p:cNvPr>
-          <p:cNvCxnSpPr>
-            <a:cxnSpLocks/>
-            <a:stCxn id="7" idx="0"/>
-            <a:endCxn id="5" idx="2"/>
-          </p:cNvCxnSpPr>
-          <p:nvPr/>
-        </p:nvCxnSpPr>
-        <p:spPr>
-          <a:xfrm flipH="1" flipV="1">
-            <a:off x="5826919" y="2331244"/>
-            <a:ext cx="1" cy="624840"/>
-          </a:xfrm>
-          <a:prstGeom prst="straightConnector1">
-            <a:avLst/>
-          </a:prstGeom>
-          <a:ln>
-            <a:tailEnd type="triangle"/>
-          </a:ln>
-        </p:spPr>
-        <p:style>
-          <a:lnRef idx="1">
-            <a:schemeClr val="dk1"/>
-          </a:lnRef>
-          <a:fillRef idx="0">
-            <a:schemeClr val="dk1"/>
-          </a:fillRef>
-          <a:effectRef idx="0">
-            <a:schemeClr val="dk1"/>
-          </a:effectRef>
-          <a:fontRef idx="minor">
-            <a:schemeClr val="tx1"/>
-          </a:fontRef>
-        </p:style>
-      </p:cxnSp>
-      <p:cxnSp>
-        <p:nvCxnSpPr>
-          <p:cNvPr id="11" name="Straight Arrow Connector 10">
-            <a:extLst>
-              <a:ext uri="{FF2B5EF4-FFF2-40B4-BE49-F238E27FC236}">
-                <a16:creationId xmlns:a16="http://schemas.microsoft.com/office/drawing/2014/main" id="{86B77E62-139B-7478-1CAA-99FB4CE45115}"/>
-              </a:ext>
-            </a:extLst>
-          </p:cNvPr>
-          <p:cNvCxnSpPr>
-            <a:cxnSpLocks/>
-            <a:stCxn id="5" idx="3"/>
-            <a:endCxn id="6" idx="1"/>
-          </p:cNvCxnSpPr>
-          <p:nvPr/>
-        </p:nvCxnSpPr>
-        <p:spPr>
-          <a:xfrm>
-            <a:off x="6748462" y="1955721"/>
-            <a:ext cx="1471615" cy="7144"/>
-          </a:xfrm>
-          <a:prstGeom prst="straightConnector1">
-            <a:avLst/>
-          </a:prstGeom>
-          <a:ln>
-            <a:tailEnd type="triangle"/>
-          </a:ln>
-        </p:spPr>
-        <p:style>
-          <a:lnRef idx="1">
-            <a:schemeClr val="dk1"/>
-          </a:lnRef>
-          <a:fillRef idx="0">
-            <a:schemeClr val="dk1"/>
-          </a:fillRef>
-          <a:effectRef idx="0">
-            <a:schemeClr val="dk1"/>
-          </a:effectRef>
-          <a:fontRef idx="minor">
-            <a:schemeClr val="tx1"/>
-          </a:fontRef>
-        </p:style>
-      </p:cxnSp>
-      <p:cxnSp>
-        <p:nvCxnSpPr>
-          <p:cNvPr id="17" name="Connector: Elbow 16">
-            <a:extLst>
-              <a:ext uri="{FF2B5EF4-FFF2-40B4-BE49-F238E27FC236}">
-                <a16:creationId xmlns:a16="http://schemas.microsoft.com/office/drawing/2014/main" id="{17391B1F-634C-470E-A677-49B172CCEB2C}"/>
-              </a:ext>
-            </a:extLst>
-          </p:cNvPr>
-          <p:cNvCxnSpPr>
-            <a:stCxn id="7" idx="1"/>
-            <a:endCxn id="4" idx="2"/>
-          </p:cNvCxnSpPr>
-          <p:nvPr/>
-        </p:nvCxnSpPr>
-        <p:spPr>
-          <a:xfrm rot="10800000">
-            <a:off x="2450308" y="2338388"/>
-            <a:ext cx="2455068" cy="927974"/>
-          </a:xfrm>
-          <a:prstGeom prst="bentConnector2">
-            <a:avLst/>
-          </a:prstGeom>
-          <a:ln>
-            <a:prstDash val="dash"/>
-            <a:tailEnd type="triangle"/>
-          </a:ln>
-        </p:spPr>
-        <p:style>
-          <a:lnRef idx="1">
-            <a:schemeClr val="dk1"/>
-          </a:lnRef>
-          <a:fillRef idx="0">
-            <a:schemeClr val="dk1"/>
-          </a:fillRef>
-          <a:effectRef idx="0">
-            <a:schemeClr val="dk1"/>
-          </a:effectRef>
-          <a:fontRef idx="minor">
-            <a:schemeClr val="tx1"/>
-          </a:fontRef>
-        </p:style>
-      </p:cxnSp>
-      <p:sp>
-        <p:nvSpPr>
-          <p:cNvPr id="18" name="TextBox 17">
-            <a:extLst>
-              <a:ext uri="{FF2B5EF4-FFF2-40B4-BE49-F238E27FC236}">
-                <a16:creationId xmlns:a16="http://schemas.microsoft.com/office/drawing/2014/main" id="{BD00024F-0DB4-32E1-AA6E-F598B1674106}"/>
-              </a:ext>
-            </a:extLst>
-          </p:cNvPr>
-          <p:cNvSpPr txBox="1"/>
-          <p:nvPr/>
-        </p:nvSpPr>
-        <p:spPr>
-          <a:xfrm>
-            <a:off x="5795011" y="2380652"/>
-            <a:ext cx="1874519" cy="553998"/>
-          </a:xfrm>
-          <a:prstGeom prst="rect">
-            <a:avLst/>
-          </a:prstGeom>
-          <a:noFill/>
-        </p:spPr>
-        <p:txBody>
-          <a:bodyPr wrap="square" rtlCol="0">
-            <a:spAutoFit/>
-          </a:bodyPr>
-          <a:lstStyle/>
-          <a:p>
-            <a:r>
-              <a:rPr lang="en-US" sz="1000" dirty="0"/>
-              <a:t>Where we are: info shocks are tactically incorporated into decision making</a:t>
-            </a:r>
-            <a:endParaRPr lang="LID4096" sz="1000" dirty="0"/>
-          </a:p>
-        </p:txBody>
-      </p:sp>
-      <p:sp>
-        <p:nvSpPr>
-          <p:cNvPr id="19" name="TextBox 18">
-            <a:extLst>
-              <a:ext uri="{FF2B5EF4-FFF2-40B4-BE49-F238E27FC236}">
-                <a16:creationId xmlns:a16="http://schemas.microsoft.com/office/drawing/2014/main" id="{F6CF1537-554C-C1F0-1C41-3C8C2B18B242}"/>
-              </a:ext>
-            </a:extLst>
-          </p:cNvPr>
-          <p:cNvSpPr txBox="1"/>
-          <p:nvPr/>
-        </p:nvSpPr>
-        <p:spPr>
-          <a:xfrm>
-            <a:off x="2450307" y="2679085"/>
-            <a:ext cx="2071785" cy="553998"/>
-          </a:xfrm>
-          <a:prstGeom prst="rect">
-            <a:avLst/>
-          </a:prstGeom>
-          <a:noFill/>
-        </p:spPr>
-        <p:txBody>
-          <a:bodyPr wrap="square" rtlCol="0">
-            <a:spAutoFit/>
-          </a:bodyPr>
-          <a:lstStyle/>
-          <a:p>
-            <a:r>
-              <a:rPr lang="en-US" sz="1000" dirty="0"/>
-              <a:t>Where we want to be: Info Shocks are consistently incorporated into the strategy</a:t>
-            </a:r>
-            <a:endParaRPr lang="LID4096" sz="1000" dirty="0"/>
-          </a:p>
-        </p:txBody>
-      </p:sp>
-    </p:spTree>
-    <p:extLst>
-      <p:ext uri="{BB962C8B-B14F-4D97-AF65-F5344CB8AC3E}">
-        <p14:creationId xmlns:p14="http://schemas.microsoft.com/office/powerpoint/2010/main" val="3410717024"/>
-      </p:ext>
-    </p:extLst>
-  </p:cSld>
-  <p:clrMapOvr>
-    <a:masterClrMapping/>
-  </p:clrMapOvr>
-</p:sld>
-</file>
-
-<file path=ppt/slides/slide20.xml><?xml version="1.0" encoding="utf-8"?>
+<file path=ppt/slides/slide23.xml><?xml version="1.0" encoding="utf-8"?>
 <p:sld xmlns:a="http://schemas.openxmlformats.org/drawingml/2006/main" xmlns:r="http://schemas.openxmlformats.org/officeDocument/2006/relationships" xmlns:p="http://schemas.openxmlformats.org/presentationml/2006/main">
   <p:cSld>
     <p:spTree>
@@ -11838,6 +13904,60 @@
           </a:xfrm>
         </p:spPr>
       </p:pic>
+      <p:sp>
+        <p:nvSpPr>
+          <p:cNvPr id="6" name="TextBox 5">
+            <a:extLst>
+              <a:ext uri="{FF2B5EF4-FFF2-40B4-BE49-F238E27FC236}">
+                <a16:creationId xmlns:a16="http://schemas.microsoft.com/office/drawing/2014/main" id="{CDD10683-8E10-BF22-2624-58B0D3149A7F}"/>
+              </a:ext>
+            </a:extLst>
+          </p:cNvPr>
+          <p:cNvSpPr txBox="1"/>
+          <p:nvPr/>
+        </p:nvSpPr>
+        <p:spPr>
+          <a:xfrm>
+            <a:off x="7634639" y="6346714"/>
+            <a:ext cx="2926879" cy="246221"/>
+          </a:xfrm>
+          <a:prstGeom prst="rect">
+            <a:avLst/>
+          </a:prstGeom>
+          <a:noFill/>
+        </p:spPr>
+        <p:txBody>
+          <a:bodyPr wrap="square">
+            <a:spAutoFit/>
+          </a:bodyPr>
+          <a:lstStyle/>
+          <a:p>
+            <a:r>
+              <a:rPr lang="en-US" sz="1000" b="0" i="1" u="none" strike="noStrike" baseline="0" dirty="0">
+                <a:solidFill>
+                  <a:srgbClr val="000000"/>
+                </a:solidFill>
+                <a:latin typeface="AAAAAO+Calibri-Italic"/>
+              </a:rPr>
+              <a:t>Note. </a:t>
+            </a:r>
+            <a:r>
+              <a:rPr lang="en-US" sz="1000" b="0" i="0" u="none" strike="noStrike" baseline="0" dirty="0">
+                <a:solidFill>
+                  <a:srgbClr val="000000"/>
+                </a:solidFill>
+                <a:latin typeface="AAAAAG+Calibri"/>
+              </a:rPr>
+              <a:t>Original figures created for this study (2026). </a:t>
+            </a:r>
+            <a:endParaRPr lang="LID4096" sz="1000" dirty="0">
+              <a:highlight>
+                <a:srgbClr val="FFFF00"/>
+              </a:highlight>
+            </a:endParaRPr>
+          </a:p>
+        </p:txBody>
+      </p:sp>
     </p:spTree>
     <p:extLst>
       <p:ext uri="{BB962C8B-B14F-4D97-AF65-F5344CB8AC3E}">
@@ -11851,7 +13971,7 @@
 </p:sld>
 </file>
 
-<file path=ppt/slides/slide21.xml><?xml version="1.0" encoding="utf-8"?>
+<file path=ppt/slides/slide24.xml><?xml version="1.0" encoding="utf-8"?>
 <p:sld xmlns:a="http://schemas.openxmlformats.org/drawingml/2006/main" xmlns:r="http://schemas.openxmlformats.org/officeDocument/2006/relationships" xmlns:p="http://schemas.openxmlformats.org/presentationml/2006/main">
   <p:cSld>
     <p:spTree>
@@ -11870,97 +13990,6 @@
       </p:grpSpPr>
       <p:sp>
         <p:nvSpPr>
-          <p:cNvPr id="2" name="Title 1">
-            <a:extLst>
-              <a:ext uri="{FF2B5EF4-FFF2-40B4-BE49-F238E27FC236}">
-                <a16:creationId xmlns:a16="http://schemas.microsoft.com/office/drawing/2014/main" id="{A3074B05-256B-C455-1B9C-2B6D09A24EE1}"/>
-              </a:ext>
-            </a:extLst>
-          </p:cNvPr>
-          <p:cNvSpPr>
-            <a:spLocks noGrp="1"/>
-          </p:cNvSpPr>
-          <p:nvPr>
-            <p:ph type="title"/>
-          </p:nvPr>
-        </p:nvSpPr>
-        <p:spPr/>
-        <p:txBody>
-          <a:bodyPr/>
-          <a:lstStyle/>
-          <a:p>
-            <a:r>
-              <a:rPr lang="en-US" dirty="0"/>
-              <a:t>Appendix 6: Shock Score decomposition.</a:t>
-            </a:r>
-            <a:endParaRPr lang="LID4096" dirty="0"/>
-          </a:p>
-        </p:txBody>
-      </p:sp>
-      <p:pic>
-        <p:nvPicPr>
-          <p:cNvPr id="10" name="Content Placeholder 9">
-            <a:extLst>
-              <a:ext uri="{FF2B5EF4-FFF2-40B4-BE49-F238E27FC236}">
-                <a16:creationId xmlns:a16="http://schemas.microsoft.com/office/drawing/2014/main" id="{7895798D-59C9-8DBD-E082-9F52C81C1932}"/>
-              </a:ext>
-            </a:extLst>
-          </p:cNvPr>
-          <p:cNvPicPr>
-            <a:picLocks noGrp="1" noChangeAspect="1"/>
-          </p:cNvPicPr>
-          <p:nvPr>
-            <p:ph idx="1"/>
-          </p:nvPr>
-        </p:nvPicPr>
-        <p:blipFill>
-          <a:blip r:embed="rId2"/>
-          <a:stretch>
-            <a:fillRect/>
-          </a:stretch>
-        </p:blipFill>
-        <p:spPr>
-          <a:xfrm>
-            <a:off x="1596734" y="1284288"/>
-            <a:ext cx="8998531" cy="4892675"/>
-          </a:xfrm>
-          <a:prstGeom prst="rect">
-            <a:avLst/>
-          </a:prstGeom>
-        </p:spPr>
-      </p:pic>
-    </p:spTree>
-    <p:extLst>
-      <p:ext uri="{BB962C8B-B14F-4D97-AF65-F5344CB8AC3E}">
-        <p14:creationId xmlns:p14="http://schemas.microsoft.com/office/powerpoint/2010/main" val="145048705"/>
-      </p:ext>
-    </p:extLst>
-  </p:cSld>
-  <p:clrMapOvr>
-    <a:masterClrMapping/>
-  </p:clrMapOvr>
-</p:sld>
-</file>
-
-<file path=ppt/slides/slide22.xml><?xml version="1.0" encoding="utf-8"?>
-<p:sld xmlns:a="http://schemas.openxmlformats.org/drawingml/2006/main" xmlns:r="http://schemas.openxmlformats.org/officeDocument/2006/relationships" xmlns:p="http://schemas.openxmlformats.org/presentationml/2006/main">
-  <p:cSld>
-    <p:spTree>
-      <p:nvGrpSpPr>
-        <p:cNvPr id="1" name=""/>
-        <p:cNvGrpSpPr/>
-        <p:nvPr/>
-      </p:nvGrpSpPr>
-      <p:grpSpPr>
-        <a:xfrm>
-          <a:off x="0" y="0"/>
-          <a:ext cx="0" cy="0"/>
-          <a:chOff x="0" y="0"/>
-          <a:chExt cx="0" cy="0"/>
-        </a:xfrm>
-      </p:grpSpPr>
-      <p:sp>
-        <p:nvSpPr>
           <p:cNvPr id="2" name="Title 1"/>
           <p:cNvSpPr>
             <a:spLocks noGrp="1"/>
@@ -11980,7 +14009,7 @@
             </a:r>
             <a:r>
               <a:rPr lang="en-US" sz="3000" dirty="0"/>
-              <a:t>6: </a:t>
+              <a:t>5: </a:t>
             </a:r>
             <a:r>
               <a:rPr sz="3000" dirty="0"/>
@@ -12603,13 +14632,13 @@
         </p:nvSpPr>
         <p:spPr>
           <a:xfrm>
-            <a:off x="5852160" y="3310128"/>
-            <a:ext cx="502920" cy="457200"/>
+            <a:off x="6007887" y="3241548"/>
+            <a:ext cx="333017" cy="603504"/>
           </a:xfrm>
           <a:prstGeom prst="downArrow">
             <a:avLst>
               <a:gd name="adj1" fmla="val 8000"/>
-              <a:gd name="adj2" fmla="val 50000"/>
+              <a:gd name="adj2" fmla="val 84772"/>
             </a:avLst>
           </a:prstGeom>
           <a:solidFill>
@@ -12748,13 +14777,13 @@
         </p:nvSpPr>
         <p:spPr>
           <a:xfrm>
-            <a:off x="3813048" y="4224528"/>
-            <a:ext cx="777240" cy="457200"/>
+            <a:off x="3813048" y="4297360"/>
+            <a:ext cx="777240" cy="311535"/>
           </a:xfrm>
           <a:prstGeom prst="rightArrow">
             <a:avLst>
               <a:gd name="adj1" fmla="val 8000"/>
-              <a:gd name="adj2" fmla="val 50000"/>
+              <a:gd name="adj2" fmla="val 70961"/>
             </a:avLst>
           </a:prstGeom>
           <a:solidFill>
@@ -12893,13 +14922,13 @@
         </p:nvSpPr>
         <p:spPr>
           <a:xfrm>
-            <a:off x="7882128" y="4224528"/>
-            <a:ext cx="777240" cy="457200"/>
+            <a:off x="7872985" y="4285380"/>
+            <a:ext cx="777240" cy="335493"/>
           </a:xfrm>
           <a:prstGeom prst="rightArrow">
             <a:avLst>
               <a:gd name="adj1" fmla="val 8000"/>
-              <a:gd name="adj2" fmla="val 50000"/>
+              <a:gd name="adj2" fmla="val 71834"/>
             </a:avLst>
           </a:prstGeom>
           <a:solidFill>
@@ -13085,7 +15114,7 @@
 </p:sld>
 </file>
 
-<file path=ppt/slides/slide23.xml><?xml version="1.0" encoding="utf-8"?>
+<file path=ppt/slides/slide25.xml><?xml version="1.0" encoding="utf-8"?>
 <p:sld xmlns:a="http://schemas.openxmlformats.org/drawingml/2006/main" xmlns:r="http://schemas.openxmlformats.org/officeDocument/2006/relationships" xmlns:p="http://schemas.openxmlformats.org/presentationml/2006/main">
   <p:cSld>
     <p:spTree>
@@ -13104,6 +15133,151 @@
       </p:grpSpPr>
       <p:sp>
         <p:nvSpPr>
+          <p:cNvPr id="2" name="Title 1">
+            <a:extLst>
+              <a:ext uri="{FF2B5EF4-FFF2-40B4-BE49-F238E27FC236}">
+                <a16:creationId xmlns:a16="http://schemas.microsoft.com/office/drawing/2014/main" id="{A3074B05-256B-C455-1B9C-2B6D09A24EE1}"/>
+              </a:ext>
+            </a:extLst>
+          </p:cNvPr>
+          <p:cNvSpPr>
+            <a:spLocks noGrp="1"/>
+          </p:cNvSpPr>
+          <p:nvPr>
+            <p:ph type="title"/>
+          </p:nvPr>
+        </p:nvSpPr>
+        <p:spPr/>
+        <p:txBody>
+          <a:bodyPr/>
+          <a:lstStyle/>
+          <a:p>
+            <a:r>
+              <a:rPr lang="en-US" dirty="0"/>
+              <a:t>Appendix 7: Shock Score decomposition.</a:t>
+            </a:r>
+            <a:endParaRPr lang="LID4096" dirty="0"/>
+          </a:p>
+        </p:txBody>
+      </p:sp>
+      <p:pic>
+        <p:nvPicPr>
+          <p:cNvPr id="10" name="Content Placeholder 9">
+            <a:extLst>
+              <a:ext uri="{FF2B5EF4-FFF2-40B4-BE49-F238E27FC236}">
+                <a16:creationId xmlns:a16="http://schemas.microsoft.com/office/drawing/2014/main" id="{7895798D-59C9-8DBD-E082-9F52C81C1932}"/>
+              </a:ext>
+            </a:extLst>
+          </p:cNvPr>
+          <p:cNvPicPr>
+            <a:picLocks noGrp="1" noChangeAspect="1"/>
+          </p:cNvPicPr>
+          <p:nvPr>
+            <p:ph idx="1"/>
+          </p:nvPr>
+        </p:nvPicPr>
+        <p:blipFill>
+          <a:blip r:embed="rId2"/>
+          <a:stretch>
+            <a:fillRect/>
+          </a:stretch>
+        </p:blipFill>
+        <p:spPr>
+          <a:xfrm>
+            <a:off x="1596734" y="1284288"/>
+            <a:ext cx="8998531" cy="4892675"/>
+          </a:xfrm>
+          <a:prstGeom prst="rect">
+            <a:avLst/>
+          </a:prstGeom>
+        </p:spPr>
+      </p:pic>
+      <p:sp>
+        <p:nvSpPr>
+          <p:cNvPr id="5" name="TextBox 4">
+            <a:extLst>
+              <a:ext uri="{FF2B5EF4-FFF2-40B4-BE49-F238E27FC236}">
+                <a16:creationId xmlns:a16="http://schemas.microsoft.com/office/drawing/2014/main" id="{0F5BFC0D-1266-BAED-BA2C-E32BD1766F29}"/>
+              </a:ext>
+            </a:extLst>
+          </p:cNvPr>
+          <p:cNvSpPr txBox="1"/>
+          <p:nvPr/>
+        </p:nvSpPr>
+        <p:spPr>
+          <a:xfrm>
+            <a:off x="7668386" y="6358222"/>
+            <a:ext cx="2926879" cy="246221"/>
+          </a:xfrm>
+          <a:prstGeom prst="rect">
+            <a:avLst/>
+          </a:prstGeom>
+          <a:noFill/>
+        </p:spPr>
+        <p:txBody>
+          <a:bodyPr wrap="square">
+            <a:spAutoFit/>
+          </a:bodyPr>
+          <a:lstStyle/>
+          <a:p>
+            <a:r>
+              <a:rPr lang="en-US" sz="1000" b="0" i="1" u="none" strike="noStrike" baseline="0" dirty="0">
+                <a:solidFill>
+                  <a:srgbClr val="000000"/>
+                </a:solidFill>
+                <a:latin typeface="AAAAAO+Calibri-Italic"/>
+              </a:rPr>
+              <a:t>Note. </a:t>
+            </a:r>
+            <a:r>
+              <a:rPr lang="en-US" sz="1000" b="0" i="0" u="none" strike="noStrike" baseline="0" dirty="0">
+                <a:solidFill>
+                  <a:srgbClr val="000000"/>
+                </a:solidFill>
+                <a:latin typeface="AAAAAG+Calibri"/>
+              </a:rPr>
+              <a:t>Original figures created for this study (2026). </a:t>
+            </a:r>
+            <a:endParaRPr lang="LID4096" sz="1000" dirty="0">
+              <a:highlight>
+                <a:srgbClr val="FFFF00"/>
+              </a:highlight>
+            </a:endParaRPr>
+          </a:p>
+        </p:txBody>
+      </p:sp>
+    </p:spTree>
+    <p:extLst>
+      <p:ext uri="{BB962C8B-B14F-4D97-AF65-F5344CB8AC3E}">
+        <p14:creationId xmlns:p14="http://schemas.microsoft.com/office/powerpoint/2010/main" val="145048705"/>
+      </p:ext>
+    </p:extLst>
+  </p:cSld>
+  <p:clrMapOvr>
+    <a:masterClrMapping/>
+  </p:clrMapOvr>
+</p:sld>
+</file>
+
+<file path=ppt/slides/slide26.xml><?xml version="1.0" encoding="utf-8"?>
+<p:sld xmlns:a="http://schemas.openxmlformats.org/drawingml/2006/main" xmlns:r="http://schemas.openxmlformats.org/officeDocument/2006/relationships" xmlns:p="http://schemas.openxmlformats.org/presentationml/2006/main">
+  <p:cSld>
+    <p:spTree>
+      <p:nvGrpSpPr>
+        <p:cNvPr id="1" name=""/>
+        <p:cNvGrpSpPr/>
+        <p:nvPr/>
+      </p:nvGrpSpPr>
+      <p:grpSpPr>
+        <a:xfrm>
+          <a:off x="0" y="0"/>
+          <a:ext cx="0" cy="0"/>
+          <a:chOff x="0" y="0"/>
+          <a:chExt cx="0" cy="0"/>
+        </a:xfrm>
+      </p:grpSpPr>
+      <p:sp>
+        <p:nvSpPr>
           <p:cNvPr id="2" name="Title 1"/>
           <p:cNvSpPr>
             <a:spLocks noGrp="1"/>
@@ -13123,7 +15297,7 @@
             </a:r>
             <a:r>
               <a:rPr lang="en-US" sz="3000" dirty="0"/>
-              <a:t>7: </a:t>
+              <a:t>8: </a:t>
             </a:r>
             <a:r>
               <a:rPr sz="3000" dirty="0"/>
@@ -13145,8 +15319,8 @@
         </p:nvSpPr>
         <p:spPr>
           <a:xfrm>
-            <a:off x="566928" y="1517904"/>
-            <a:ext cx="11064240" cy="1078992"/>
+            <a:off x="1633062" y="1533316"/>
+            <a:ext cx="8121869" cy="867921"/>
           </a:xfrm>
           <a:prstGeom prst="roundRect">
             <a:avLst>
@@ -13192,8 +15366,8 @@
         </p:nvSpPr>
         <p:spPr>
           <a:xfrm>
-            <a:off x="859536" y="1517904"/>
-            <a:ext cx="3200400" cy="1078992"/>
+            <a:off x="1925670" y="1667194"/>
+            <a:ext cx="2349301" cy="600164"/>
           </a:xfrm>
           <a:prstGeom prst="rect">
             <a:avLst/>
@@ -13239,8 +15413,8 @@
         </p:nvSpPr>
         <p:spPr>
           <a:xfrm>
-            <a:off x="4224528" y="1517904"/>
-            <a:ext cx="7132320" cy="1078992"/>
+            <a:off x="4484073" y="1785932"/>
+            <a:ext cx="5235585" cy="292388"/>
           </a:xfrm>
           <a:prstGeom prst="rect">
             <a:avLst/>
@@ -13255,7 +15429,7 @@
           <a:p>
             <a:pPr algn="l"/>
             <a:r>
-              <a:rPr sz="1400" b="0" i="0">
+              <a:rPr sz="1400" b="0" i="0" dirty="0">
                 <a:solidFill>
                   <a:srgbClr val="FFFFFF"/>
                 </a:solidFill>
@@ -13274,8 +15448,8 @@
         </p:nvSpPr>
         <p:spPr>
           <a:xfrm>
-            <a:off x="566928" y="2743200"/>
-            <a:ext cx="11064240" cy="1078992"/>
+            <a:off x="1633062" y="2758612"/>
+            <a:ext cx="8121869" cy="867921"/>
           </a:xfrm>
           <a:prstGeom prst="roundRect">
             <a:avLst>
@@ -13321,8 +15495,8 @@
         </p:nvSpPr>
         <p:spPr>
           <a:xfrm>
-            <a:off x="859536" y="2743200"/>
-            <a:ext cx="3200400" cy="1078992"/>
+            <a:off x="1925670" y="2892490"/>
+            <a:ext cx="2349301" cy="600164"/>
           </a:xfrm>
           <a:prstGeom prst="rect">
             <a:avLst/>
@@ -13337,7 +15511,7 @@
           <a:p>
             <a:pPr algn="l"/>
             <a:r>
-              <a:rPr sz="2200" b="1" i="0">
+              <a:rPr sz="2200" b="1" i="0" dirty="0">
                 <a:solidFill>
                   <a:srgbClr val="FFFFFF"/>
                 </a:solidFill>
@@ -13349,7 +15523,7 @@
           <a:p>
             <a:pPr algn="l"/>
             <a:r>
-              <a:rPr sz="1200" b="0" i="0">
+              <a:rPr sz="1200" b="0" i="0" dirty="0">
                 <a:solidFill>
                   <a:srgbClr val="FFFFFF"/>
                 </a:solidFill>
@@ -13368,8 +15542,8 @@
         </p:nvSpPr>
         <p:spPr>
           <a:xfrm>
-            <a:off x="4224528" y="2743200"/>
-            <a:ext cx="7132320" cy="1078992"/>
+            <a:off x="4519346" y="3015850"/>
+            <a:ext cx="5235585" cy="292388"/>
           </a:xfrm>
           <a:prstGeom prst="rect">
             <a:avLst/>
@@ -13384,7 +15558,7 @@
           <a:p>
             <a:pPr algn="l"/>
             <a:r>
-              <a:rPr sz="1400" b="0" i="0">
+              <a:rPr sz="1400" b="0" i="0" dirty="0">
                 <a:solidFill>
                   <a:srgbClr val="FFFFFF"/>
                 </a:solidFill>
@@ -13403,8 +15577,8 @@
         </p:nvSpPr>
         <p:spPr>
           <a:xfrm>
-            <a:off x="566928" y="3968496"/>
-            <a:ext cx="11064240" cy="1078992"/>
+            <a:off x="1633062" y="3983908"/>
+            <a:ext cx="8121869" cy="867921"/>
           </a:xfrm>
           <a:prstGeom prst="roundRect">
             <a:avLst>
@@ -13450,8 +15624,8 @@
         </p:nvSpPr>
         <p:spPr>
           <a:xfrm>
-            <a:off x="859536" y="3968496"/>
-            <a:ext cx="3200400" cy="1078992"/>
+            <a:off x="1925670" y="4117786"/>
+            <a:ext cx="2349301" cy="600164"/>
           </a:xfrm>
           <a:prstGeom prst="rect">
             <a:avLst/>
@@ -13497,8 +15671,8 @@
         </p:nvSpPr>
         <p:spPr>
           <a:xfrm>
-            <a:off x="4224528" y="3968496"/>
-            <a:ext cx="7132320" cy="1078992"/>
+            <a:off x="4519346" y="4235737"/>
+            <a:ext cx="5235585" cy="292388"/>
           </a:xfrm>
           <a:prstGeom prst="rect">
             <a:avLst/>
@@ -13513,7 +15687,7 @@
           <a:p>
             <a:pPr algn="l"/>
             <a:r>
-              <a:rPr sz="1400" b="0" i="0">
+              <a:rPr sz="1400" b="0" i="0" dirty="0">
                 <a:solidFill>
                   <a:srgbClr val="FFFFFF"/>
                 </a:solidFill>
@@ -13579,7 +15753,7 @@
 </p:sld>
 </file>
 
-<file path=ppt/slides/slide24.xml><?xml version="1.0" encoding="utf-8"?>
+<file path=ppt/slides/slide27.xml><?xml version="1.0" encoding="utf-8"?>
 <p:sld xmlns:a="http://schemas.openxmlformats.org/drawingml/2006/main" xmlns:r="http://schemas.openxmlformats.org/officeDocument/2006/relationships" xmlns:p="http://schemas.openxmlformats.org/presentationml/2006/main">
   <p:cSld>
     <p:spTree>
@@ -13598,7 +15772,13 @@
       </p:grpSpPr>
       <p:sp>
         <p:nvSpPr>
-          <p:cNvPr id="2" name="Title 1"/>
+          <p:cNvPr id="2" name="Title 1">
+            <a:extLst>
+              <a:ext uri="{FF2B5EF4-FFF2-40B4-BE49-F238E27FC236}">
+                <a16:creationId xmlns:a16="http://schemas.microsoft.com/office/drawing/2014/main" id="{A41EB5C9-A83D-CF35-0B41-14C66E66B58A}"/>
+              </a:ext>
+            </a:extLst>
+          </p:cNvPr>
           <p:cNvSpPr>
             <a:spLocks noGrp="1"/>
           </p:cNvSpPr>
@@ -13606,44 +15786,382 @@
             <p:ph type="title"/>
           </p:nvPr>
         </p:nvSpPr>
-        <p:spPr/>
-        <p:txBody>
-          <a:bodyPr/>
-          <a:lstStyle/>
-          <a:p>
-            <a:r>
-              <a:rPr sz="3000" dirty="0"/>
-              <a:t>Appendix </a:t>
-            </a:r>
-            <a:r>
-              <a:rPr lang="en-US" sz="3000" dirty="0"/>
-              <a:t>8: </a:t>
-            </a:r>
-            <a:r>
-              <a:rPr sz="3000" dirty="0"/>
-              <a:t>Respondent Profile</a:t>
-            </a:r>
+        <p:spPr>
+          <a:xfrm>
+            <a:off x="838200" y="365125"/>
+            <a:ext cx="8346440" cy="823595"/>
+          </a:xfrm>
+        </p:spPr>
+        <p:txBody>
+          <a:bodyPr>
+            <a:normAutofit fontScale="90000"/>
+          </a:bodyPr>
+          <a:lstStyle/>
+          <a:p>
+            <a:r>
+              <a:rPr lang="en-US" dirty="0"/>
+              <a:t>Appendix 9: Paradigm --  How the Design Answers the Research Questions</a:t>
+            </a:r>
+            <a:endParaRPr lang="LID4096" dirty="0"/>
+          </a:p>
+        </p:txBody>
+      </p:sp>
+      <p:sp>
+        <p:nvSpPr>
+          <p:cNvPr id="4" name="Content Placeholder 3">
+            <a:extLst>
+              <a:ext uri="{FF2B5EF4-FFF2-40B4-BE49-F238E27FC236}">
+                <a16:creationId xmlns:a16="http://schemas.microsoft.com/office/drawing/2014/main" id="{094CDAF0-1A99-262F-5FB0-DFDE74EBA0B5}"/>
+              </a:ext>
+            </a:extLst>
+          </p:cNvPr>
+          <p:cNvSpPr>
+            <a:spLocks noGrp="1"/>
+          </p:cNvSpPr>
+          <p:nvPr>
+            <p:ph idx="1"/>
+          </p:nvPr>
+        </p:nvSpPr>
+        <p:spPr>
+          <a:xfrm>
+            <a:off x="838200" y="1284288"/>
+            <a:ext cx="10515600" cy="2449512"/>
+          </a:xfrm>
+        </p:spPr>
+        <p:txBody>
+          <a:bodyPr>
+            <a:normAutofit fontScale="47500" lnSpcReduction="20000"/>
+          </a:bodyPr>
+          <a:lstStyle/>
+          <a:p>
+            <a:pPr marL="0" indent="0">
+              <a:lnSpc>
+                <a:spcPct val="170000"/>
+              </a:lnSpc>
+              <a:buNone/>
+            </a:pPr>
+            <a:r>
+              <a:rPr lang="en-US" dirty="0"/>
+              <a:t>Research Paradigm – What each term means (Saunders et al., 2019):</a:t>
+            </a:r>
+          </a:p>
+          <a:p>
+            <a:pPr lvl="1">
+              <a:lnSpc>
+                <a:spcPct val="170000"/>
+              </a:lnSpc>
+            </a:pPr>
+            <a:r>
+              <a:rPr lang="en-US" dirty="0"/>
+              <a:t>Positivist — </a:t>
+            </a:r>
+            <a:r>
+              <a:rPr lang="en-US" b="1" dirty="0"/>
+              <a:t>knowledge comes only from observable</a:t>
+            </a:r>
+            <a:r>
+              <a:rPr lang="en-US" dirty="0"/>
+              <a:t>, measurable facts, independent of the researcher's beliefs. In this study: structured seven-point survey responses and market data — no interpretation of what managers "meant.“</a:t>
+            </a:r>
+          </a:p>
+          <a:p>
+            <a:pPr lvl="1">
+              <a:lnSpc>
+                <a:spcPct val="170000"/>
+              </a:lnSpc>
+            </a:pPr>
+            <a:r>
+              <a:rPr lang="en-US" dirty="0"/>
+              <a:t>Deductive — reasoning runs </a:t>
+            </a:r>
+            <a:r>
+              <a:rPr lang="en-US" b="1" dirty="0"/>
+              <a:t>from theory to data</a:t>
+            </a:r>
+            <a:r>
+              <a:rPr lang="en-US" dirty="0"/>
+              <a:t>, never the reverse: behavioral finance theory → testable hypotheses → measurement → statistical test. (Opposite: inductive — building theory out of observations.)</a:t>
+            </a:r>
+          </a:p>
+          <a:p>
+            <a:pPr lvl="1">
+              <a:lnSpc>
+                <a:spcPct val="170000"/>
+              </a:lnSpc>
+            </a:pPr>
+            <a:r>
+              <a:rPr lang="en-US" dirty="0"/>
+              <a:t>Theory-testing — the study does not create new theory from the data; it </a:t>
+            </a:r>
+            <a:r>
+              <a:rPr lang="en-US" b="1" dirty="0"/>
+              <a:t>checks whether predictions of existing theory hold</a:t>
+            </a:r>
+            <a:r>
+              <a:rPr lang="en-US" dirty="0"/>
+              <a:t> in a professional sample.</a:t>
+            </a:r>
+          </a:p>
+          <a:p>
+            <a:pPr lvl="1">
+              <a:lnSpc>
+                <a:spcPct val="170000"/>
+              </a:lnSpc>
+            </a:pPr>
+            <a:r>
+              <a:rPr lang="en-US" dirty="0"/>
+              <a:t>Falsification logic (Popper) — </a:t>
+            </a:r>
+            <a:r>
+              <a:rPr lang="en-US" b="1" dirty="0"/>
+              <a:t>hypotheses are stated as null statements</a:t>
+            </a:r>
+            <a:r>
+              <a:rPr lang="en-US" dirty="0"/>
+              <a:t> that data could reject. Nothing is ever "proven": a claim stands only while the evidence fails to reject it at the pre-set threshold (α = 0.05).</a:t>
+            </a:r>
+            <a:endParaRPr lang="LID4096" dirty="0"/>
+          </a:p>
+        </p:txBody>
+      </p:sp>
+      <p:sp>
+        <p:nvSpPr>
+          <p:cNvPr id="7" name="Content Placeholder 3">
+            <a:extLst>
+              <a:ext uri="{FF2B5EF4-FFF2-40B4-BE49-F238E27FC236}">
+                <a16:creationId xmlns:a16="http://schemas.microsoft.com/office/drawing/2014/main" id="{24323253-08C3-996B-CE7D-5FE2DF8B1AD5}"/>
+              </a:ext>
+            </a:extLst>
+          </p:cNvPr>
+          <p:cNvSpPr txBox="1">
+            <a:spLocks/>
+          </p:cNvSpPr>
+          <p:nvPr/>
+        </p:nvSpPr>
+        <p:spPr>
+          <a:xfrm>
+            <a:off x="995680" y="5853112"/>
+            <a:ext cx="10086657" cy="809625"/>
+          </a:xfrm>
+          <a:prstGeom prst="rect">
+            <a:avLst/>
+          </a:prstGeom>
+        </p:spPr>
+        <p:txBody>
+          <a:bodyPr vert="horz" lIns="91440" tIns="45720" rIns="91440" bIns="45720" rtlCol="0">
+            <a:normAutofit fontScale="55000" lnSpcReduction="20000"/>
+          </a:bodyPr>
+          <a:lstStyle>
+            <a:lvl1pPr marL="228600" indent="-228600" algn="l" defTabSz="914400" rtl="0" eaLnBrk="1" latinLnBrk="0" hangingPunct="1">
+              <a:lnSpc>
+                <a:spcPct val="90000"/>
+              </a:lnSpc>
+              <a:spcBef>
+                <a:spcPts val="1000"/>
+              </a:spcBef>
+              <a:buFont typeface="Arial" panose="020B0604020202020204" pitchFamily="34" charset="0"/>
+              <a:buChar char="•"/>
+              <a:defRPr sz="2800" kern="1200">
+                <a:solidFill>
+                  <a:schemeClr val="tx1"/>
+                </a:solidFill>
+                <a:latin typeface="+mn-lt"/>
+                <a:ea typeface="+mn-ea"/>
+                <a:cs typeface="+mn-cs"/>
+              </a:defRPr>
+            </a:lvl1pPr>
+            <a:lvl2pPr marL="685800" indent="-228600" algn="l" defTabSz="914400" rtl="0" eaLnBrk="1" latinLnBrk="0" hangingPunct="1">
+              <a:lnSpc>
+                <a:spcPct val="90000"/>
+              </a:lnSpc>
+              <a:spcBef>
+                <a:spcPts val="500"/>
+              </a:spcBef>
+              <a:buFont typeface="Arial" panose="020B0604020202020204" pitchFamily="34" charset="0"/>
+              <a:buChar char="•"/>
+              <a:defRPr sz="2400" kern="1200">
+                <a:solidFill>
+                  <a:schemeClr val="tx1"/>
+                </a:solidFill>
+                <a:latin typeface="+mn-lt"/>
+                <a:ea typeface="+mn-ea"/>
+                <a:cs typeface="+mn-cs"/>
+              </a:defRPr>
+            </a:lvl2pPr>
+            <a:lvl3pPr marL="1143000" indent="-228600" algn="l" defTabSz="914400" rtl="0" eaLnBrk="1" latinLnBrk="0" hangingPunct="1">
+              <a:lnSpc>
+                <a:spcPct val="90000"/>
+              </a:lnSpc>
+              <a:spcBef>
+                <a:spcPts val="500"/>
+              </a:spcBef>
+              <a:buFont typeface="Arial" panose="020B0604020202020204" pitchFamily="34" charset="0"/>
+              <a:buChar char="•"/>
+              <a:defRPr sz="2000" kern="1200">
+                <a:solidFill>
+                  <a:schemeClr val="tx1"/>
+                </a:solidFill>
+                <a:latin typeface="+mn-lt"/>
+                <a:ea typeface="+mn-ea"/>
+                <a:cs typeface="+mn-cs"/>
+              </a:defRPr>
+            </a:lvl3pPr>
+            <a:lvl4pPr marL="1600200" indent="-228600" algn="l" defTabSz="914400" rtl="0" eaLnBrk="1" latinLnBrk="0" hangingPunct="1">
+              <a:lnSpc>
+                <a:spcPct val="90000"/>
+              </a:lnSpc>
+              <a:spcBef>
+                <a:spcPts val="500"/>
+              </a:spcBef>
+              <a:buFont typeface="Arial" panose="020B0604020202020204" pitchFamily="34" charset="0"/>
+              <a:buChar char="•"/>
+              <a:defRPr sz="1800" kern="1200">
+                <a:solidFill>
+                  <a:schemeClr val="tx1"/>
+                </a:solidFill>
+                <a:latin typeface="+mn-lt"/>
+                <a:ea typeface="+mn-ea"/>
+                <a:cs typeface="+mn-cs"/>
+              </a:defRPr>
+            </a:lvl4pPr>
+            <a:lvl5pPr marL="2057400" indent="-228600" algn="l" defTabSz="914400" rtl="0" eaLnBrk="1" latinLnBrk="0" hangingPunct="1">
+              <a:lnSpc>
+                <a:spcPct val="90000"/>
+              </a:lnSpc>
+              <a:spcBef>
+                <a:spcPts val="500"/>
+              </a:spcBef>
+              <a:buFont typeface="Arial" panose="020B0604020202020204" pitchFamily="34" charset="0"/>
+              <a:buChar char="•"/>
+              <a:defRPr sz="1800" kern="1200">
+                <a:solidFill>
+                  <a:schemeClr val="tx1"/>
+                </a:solidFill>
+                <a:latin typeface="+mn-lt"/>
+                <a:ea typeface="+mn-ea"/>
+                <a:cs typeface="+mn-cs"/>
+              </a:defRPr>
+            </a:lvl5pPr>
+            <a:lvl6pPr marL="2514600" indent="-228600" algn="l" defTabSz="914400" rtl="0" eaLnBrk="1" latinLnBrk="0" hangingPunct="1">
+              <a:lnSpc>
+                <a:spcPct val="90000"/>
+              </a:lnSpc>
+              <a:spcBef>
+                <a:spcPts val="500"/>
+              </a:spcBef>
+              <a:buFont typeface="Arial" panose="020B0604020202020204" pitchFamily="34" charset="0"/>
+              <a:buChar char="•"/>
+              <a:defRPr sz="1800" kern="1200">
+                <a:solidFill>
+                  <a:schemeClr val="tx1"/>
+                </a:solidFill>
+                <a:latin typeface="+mn-lt"/>
+                <a:ea typeface="+mn-ea"/>
+                <a:cs typeface="+mn-cs"/>
+              </a:defRPr>
+            </a:lvl6pPr>
+            <a:lvl7pPr marL="2971800" indent="-228600" algn="l" defTabSz="914400" rtl="0" eaLnBrk="1" latinLnBrk="0" hangingPunct="1">
+              <a:lnSpc>
+                <a:spcPct val="90000"/>
+              </a:lnSpc>
+              <a:spcBef>
+                <a:spcPts val="500"/>
+              </a:spcBef>
+              <a:buFont typeface="Arial" panose="020B0604020202020204" pitchFamily="34" charset="0"/>
+              <a:buChar char="•"/>
+              <a:defRPr sz="1800" kern="1200">
+                <a:solidFill>
+                  <a:schemeClr val="tx1"/>
+                </a:solidFill>
+                <a:latin typeface="+mn-lt"/>
+                <a:ea typeface="+mn-ea"/>
+                <a:cs typeface="+mn-cs"/>
+              </a:defRPr>
+            </a:lvl7pPr>
+            <a:lvl8pPr marL="3429000" indent="-228600" algn="l" defTabSz="914400" rtl="0" eaLnBrk="1" latinLnBrk="0" hangingPunct="1">
+              <a:lnSpc>
+                <a:spcPct val="90000"/>
+              </a:lnSpc>
+              <a:spcBef>
+                <a:spcPts val="500"/>
+              </a:spcBef>
+              <a:buFont typeface="Arial" panose="020B0604020202020204" pitchFamily="34" charset="0"/>
+              <a:buChar char="•"/>
+              <a:defRPr sz="1800" kern="1200">
+                <a:solidFill>
+                  <a:schemeClr val="tx1"/>
+                </a:solidFill>
+                <a:latin typeface="+mn-lt"/>
+                <a:ea typeface="+mn-ea"/>
+                <a:cs typeface="+mn-cs"/>
+              </a:defRPr>
+            </a:lvl8pPr>
+            <a:lvl9pPr marL="3886200" indent="-228600" algn="l" defTabSz="914400" rtl="0" eaLnBrk="1" latinLnBrk="0" hangingPunct="1">
+              <a:lnSpc>
+                <a:spcPct val="90000"/>
+              </a:lnSpc>
+              <a:spcBef>
+                <a:spcPts val="500"/>
+              </a:spcBef>
+              <a:buFont typeface="Arial" panose="020B0604020202020204" pitchFamily="34" charset="0"/>
+              <a:buChar char="•"/>
+              <a:defRPr sz="1800" kern="1200">
+                <a:solidFill>
+                  <a:schemeClr val="tx1"/>
+                </a:solidFill>
+                <a:latin typeface="+mn-lt"/>
+                <a:ea typeface="+mn-ea"/>
+                <a:cs typeface="+mn-cs"/>
+              </a:defRPr>
+            </a:lvl9pPr>
+          </a:lstStyle>
+          <a:p>
+            <a:pPr marL="0" indent="0">
+              <a:lnSpc>
+                <a:spcPct val="170000"/>
+              </a:lnSpc>
+              <a:buNone/>
+            </a:pPr>
+            <a:r>
+              <a:rPr lang="en-US" dirty="0"/>
+              <a:t>Under </a:t>
+            </a:r>
+            <a:r>
+              <a:rPr lang="en-US" b="1" dirty="0"/>
+              <a:t>falsification logic</a:t>
+            </a:r>
+            <a:r>
+              <a:rPr lang="en-US" dirty="0"/>
+              <a:t>, a null result is a complete answer, not a failure: the research question is answered by running the test, not by the direction of its outcome. The H2 null is reported as informative and bounded by statistical power (§5.8.2).</a:t>
+            </a:r>
+            <a:endParaRPr lang="LID4096" dirty="0"/>
           </a:p>
         </p:txBody>
       </p:sp>
       <p:pic>
         <p:nvPicPr>
-          <p:cNvPr id="3" name="Picture 2" descr="fig_demo_1.png"/>
+          <p:cNvPr id="11" name="Picture 10">
+            <a:extLst>
+              <a:ext uri="{FF2B5EF4-FFF2-40B4-BE49-F238E27FC236}">
+                <a16:creationId xmlns:a16="http://schemas.microsoft.com/office/drawing/2014/main" id="{E05AAB0B-27A9-0644-015D-6F44103613D0}"/>
+              </a:ext>
+            </a:extLst>
+          </p:cNvPr>
           <p:cNvPicPr>
             <a:picLocks noChangeAspect="1"/>
           </p:cNvPicPr>
           <p:nvPr/>
         </p:nvPicPr>
         <p:blipFill>
-          <a:blip r:embed="rId2"/>
+          <a:blip r:embed="rId3"/>
           <a:stretch>
             <a:fillRect/>
           </a:stretch>
         </p:blipFill>
         <p:spPr>
           <a:xfrm>
-            <a:off x="606907" y="2116773"/>
-            <a:ext cx="11155680" cy="3398892"/>
+            <a:off x="2040429" y="3945876"/>
+            <a:ext cx="7377891" cy="1633481"/>
           </a:xfrm>
           <a:prstGeom prst="rect">
             <a:avLst/>
@@ -13651,6 +16169,11 @@
         </p:spPr>
       </p:pic>
     </p:spTree>
+    <p:extLst>
+      <p:ext uri="{BB962C8B-B14F-4D97-AF65-F5344CB8AC3E}">
+        <p14:creationId xmlns:p14="http://schemas.microsoft.com/office/powerpoint/2010/main" val="730449677"/>
+      </p:ext>
+    </p:extLst>
   </p:cSld>
   <p:clrMapOvr>
     <a:masterClrMapping/>
@@ -13658,7 +16181,7 @@
 </p:sld>
 </file>
 
-<file path=ppt/slides/slide25.xml><?xml version="1.0" encoding="utf-8"?>
+<file path=ppt/slides/slide28.xml><?xml version="1.0" encoding="utf-8"?>
 <p:sld xmlns:a="http://schemas.openxmlformats.org/drawingml/2006/main" xmlns:r="http://schemas.openxmlformats.org/officeDocument/2006/relationships" xmlns:p="http://schemas.openxmlformats.org/presentationml/2006/main">
   <p:cSld>
     <p:spTree>
@@ -13677,7 +16200,13 @@
       </p:grpSpPr>
       <p:sp>
         <p:nvSpPr>
-          <p:cNvPr id="2" name="Title 1"/>
+          <p:cNvPr id="2" name="Titel 1">
+            <a:extLst>
+              <a:ext uri="{FF2B5EF4-FFF2-40B4-BE49-F238E27FC236}">
+                <a16:creationId xmlns:a16="http://schemas.microsoft.com/office/drawing/2014/main" id="{090EAC2A-5706-C65F-88DE-7DA698789FBD}"/>
+              </a:ext>
+            </a:extLst>
+          </p:cNvPr>
           <p:cNvSpPr>
             <a:spLocks noGrp="1"/>
           </p:cNvSpPr>
@@ -13685,477 +16214,363 @@
             <p:ph type="title"/>
           </p:nvPr>
         </p:nvSpPr>
-        <p:spPr/>
-        <p:txBody>
-          <a:bodyPr/>
-          <a:lstStyle/>
-          <a:p>
-            <a:r>
-              <a:rPr sz="3000" dirty="0"/>
-              <a:t>Appendix </a:t>
-            </a:r>
-            <a:r>
-              <a:rPr lang="en-US" sz="3000" dirty="0"/>
-              <a:t>8 (cont.): </a:t>
-            </a:r>
-            <a:r>
-              <a:rPr sz="3000" dirty="0"/>
-              <a:t>Respondent Profile</a:t>
-            </a:r>
-          </a:p>
-        </p:txBody>
-      </p:sp>
-      <p:pic>
-        <p:nvPicPr>
-          <p:cNvPr id="3" name="Picture 2" descr="fig_demo_2.png"/>
-          <p:cNvPicPr>
-            <a:picLocks noChangeAspect="1"/>
-          </p:cNvPicPr>
-          <p:nvPr/>
-        </p:nvPicPr>
-        <p:blipFill>
-          <a:blip r:embed="rId2"/>
-          <a:stretch>
-            <a:fillRect/>
-          </a:stretch>
-        </p:blipFill>
         <p:spPr>
           <a:xfrm>
-            <a:off x="792327" y="1554480"/>
-            <a:ext cx="10607040" cy="4488899"/>
+            <a:off x="838200" y="365125"/>
+            <a:ext cx="8161800" cy="823595"/>
+          </a:xfrm>
+        </p:spPr>
+        <p:txBody>
+          <a:bodyPr/>
+          <a:lstStyle/>
+          <a:p>
+            <a:r>
+              <a:rPr lang="en-US" dirty="0"/>
+              <a:t>Appendix 10: Regulatory Context</a:t>
+            </a:r>
+          </a:p>
+        </p:txBody>
+      </p:sp>
+      <p:sp>
+        <p:nvSpPr>
+          <p:cNvPr id="5" name="TextBox 4">
+            <a:extLst>
+              <a:ext uri="{FF2B5EF4-FFF2-40B4-BE49-F238E27FC236}">
+                <a16:creationId xmlns:a16="http://schemas.microsoft.com/office/drawing/2014/main" id="{B5AF9FCE-1C4D-E903-5D85-78D2A28C319D}"/>
+              </a:ext>
+            </a:extLst>
+          </p:cNvPr>
+          <p:cNvSpPr txBox="1"/>
+          <p:nvPr/>
+        </p:nvSpPr>
+        <p:spPr>
+          <a:xfrm>
+            <a:off x="787400" y="1240554"/>
+            <a:ext cx="10246360" cy="4202497"/>
           </a:xfrm>
           <a:prstGeom prst="rect">
             <a:avLst/>
           </a:prstGeom>
+          <a:noFill/>
         </p:spPr>
-      </p:pic>
-    </p:spTree>
-  </p:cSld>
-  <p:clrMapOvr>
-    <a:masterClrMapping/>
-  </p:clrMapOvr>
-</p:sld>
-</file>
-
-<file path=ppt/slides/slide26.xml><?xml version="1.0" encoding="utf-8"?>
-<p:sld xmlns:a="http://schemas.openxmlformats.org/drawingml/2006/main" xmlns:r="http://schemas.openxmlformats.org/officeDocument/2006/relationships" xmlns:p="http://schemas.openxmlformats.org/presentationml/2006/main">
-  <p:cSld>
-    <p:spTree>
-      <p:nvGrpSpPr>
-        <p:cNvPr id="1" name=""/>
-        <p:cNvGrpSpPr/>
-        <p:nvPr/>
-      </p:nvGrpSpPr>
-      <p:grpSpPr>
-        <a:xfrm>
-          <a:off x="0" y="0"/>
-          <a:ext cx="0" cy="0"/>
-          <a:chOff x="0" y="0"/>
-          <a:chExt cx="0" cy="0"/>
-        </a:xfrm>
-      </p:grpSpPr>
-      <p:sp>
-        <p:nvSpPr>
-          <p:cNvPr id="2" name="Title 1">
-            <a:extLst>
-              <a:ext uri="{FF2B5EF4-FFF2-40B4-BE49-F238E27FC236}">
-                <a16:creationId xmlns:a16="http://schemas.microsoft.com/office/drawing/2014/main" id="{A41EB5C9-A83D-CF35-0B41-14C66E66B58A}"/>
-              </a:ext>
-            </a:extLst>
-          </p:cNvPr>
-          <p:cNvSpPr>
-            <a:spLocks noGrp="1"/>
-          </p:cNvSpPr>
-          <p:nvPr>
-            <p:ph type="title"/>
-          </p:nvPr>
+        <p:txBody>
+          <a:bodyPr wrap="square">
+            <a:spAutoFit/>
+          </a:bodyPr>
+          <a:lstStyle/>
+          <a:p>
+            <a:pPr>
+              <a:lnSpc>
+                <a:spcPct val="150000"/>
+              </a:lnSpc>
+            </a:pPr>
+            <a:r>
+              <a:rPr lang="LID4096" dirty="0"/>
+              <a:t>Regulatory position</a:t>
+            </a:r>
+            <a:r>
+              <a:rPr lang="en-US" dirty="0"/>
+              <a:t>:</a:t>
+            </a:r>
+          </a:p>
+          <a:p>
+            <a:pPr marL="285750" indent="-285750">
+              <a:lnSpc>
+                <a:spcPct val="150000"/>
+              </a:lnSpc>
+              <a:buFont typeface="Arial" panose="020B0604020202020204" pitchFamily="34" charset="0"/>
+              <a:buChar char="•"/>
+            </a:pPr>
+            <a:r>
+              <a:rPr lang="LID4096" sz="1600" dirty="0"/>
+              <a:t>EU AI Act emotion-recognition ban (Art. 5(1)(f)) — </a:t>
+            </a:r>
+            <a:r>
+              <a:rPr lang="LID4096" sz="1600" dirty="0">
+                <a:solidFill>
+                  <a:schemeClr val="accent6">
+                    <a:lumMod val="75000"/>
+                  </a:schemeClr>
+                </a:solidFill>
+              </a:rPr>
+              <a:t>not applicable</a:t>
+            </a:r>
+            <a:r>
+              <a:rPr lang="LID4096" sz="1600" dirty="0"/>
+              <a:t>: requires biometric data on natural persons; SC</a:t>
+            </a:r>
+            <a:r>
+              <a:rPr lang="en-US" sz="1600" dirty="0"/>
+              <a:t> </a:t>
+            </a:r>
+            <a:r>
+              <a:rPr lang="LID4096" sz="1600" dirty="0"/>
+              <a:t>scores events from news text and volume</a:t>
+            </a:r>
+            <a:endParaRPr lang="en-US" sz="1600" dirty="0"/>
+          </a:p>
+          <a:p>
+            <a:pPr marL="285750" indent="-285750">
+              <a:lnSpc>
+                <a:spcPct val="150000"/>
+              </a:lnSpc>
+              <a:buFont typeface="Arial" panose="020B0604020202020204" pitchFamily="34" charset="0"/>
+              <a:buChar char="•"/>
+            </a:pPr>
+            <a:r>
+              <a:rPr lang="LID4096" sz="1600" dirty="0"/>
+              <a:t>Social scoring (Art. 5(1)(c)) — </a:t>
+            </a:r>
+            <a:r>
+              <a:rPr lang="LID4096" sz="1600" dirty="0">
+                <a:solidFill>
+                  <a:schemeClr val="accent6">
+                    <a:lumMod val="75000"/>
+                  </a:schemeClr>
+                </a:solidFill>
+              </a:rPr>
+              <a:t>not applicable</a:t>
+            </a:r>
+            <a:r>
+              <a:rPr lang="LID4096" sz="1600" dirty="0"/>
+              <a:t>: no person is classified or ranked</a:t>
+            </a:r>
+            <a:endParaRPr lang="en-US" sz="1600" dirty="0"/>
+          </a:p>
+          <a:p>
+            <a:pPr marL="285750" indent="-285750">
+              <a:lnSpc>
+                <a:spcPct val="150000"/>
+              </a:lnSpc>
+              <a:buFont typeface="Arial" panose="020B0604020202020204" pitchFamily="34" charset="0"/>
+              <a:buChar char="•"/>
+            </a:pPr>
+            <a:r>
+              <a:rPr lang="LID4096" sz="1600" dirty="0"/>
+              <a:t>Research artefact </a:t>
+            </a:r>
+            <a:r>
+              <a:rPr lang="LID4096" sz="1600" dirty="0">
+                <a:solidFill>
+                  <a:schemeClr val="accent6">
+                    <a:lumMod val="75000"/>
+                  </a:schemeClr>
+                </a:solidFill>
+              </a:rPr>
+              <a:t>exempt</a:t>
+            </a:r>
+            <a:r>
+              <a:rPr lang="LID4096" sz="1600" dirty="0"/>
+              <a:t> under Art. 2(6) (scientific R&amp;D) </a:t>
+            </a:r>
+            <a:endParaRPr lang="en-US" sz="1600" dirty="0"/>
+          </a:p>
+          <a:p>
+            <a:pPr marL="285750" indent="-285750">
+              <a:lnSpc>
+                <a:spcPct val="150000"/>
+              </a:lnSpc>
+              <a:buFont typeface="Arial" panose="020B0604020202020204" pitchFamily="34" charset="0"/>
+              <a:buChar char="•"/>
+            </a:pPr>
+            <a:r>
+              <a:rPr lang="LID4096" sz="1600" dirty="0"/>
+              <a:t>If </a:t>
+            </a:r>
+            <a:r>
+              <a:rPr lang="en-US" sz="1600" dirty="0"/>
+              <a:t>method is </a:t>
+            </a:r>
+            <a:r>
+              <a:rPr lang="LID4096" sz="1600" dirty="0"/>
+              <a:t>deployed: </a:t>
+            </a:r>
+            <a:r>
+              <a:rPr lang="LID4096" sz="1600" dirty="0">
+                <a:solidFill>
+                  <a:schemeClr val="accent6">
+                    <a:lumMod val="75000"/>
+                  </a:schemeClr>
+                </a:solidFill>
+              </a:rPr>
+              <a:t>minimal-risk tier </a:t>
+            </a:r>
+            <a:r>
+              <a:rPr lang="LID4096" sz="1600" dirty="0"/>
+              <a:t>(not Annex III); Art. 4 AI-literacy duty applies</a:t>
+            </a:r>
+            <a:br>
+              <a:rPr lang="en-US" sz="1600" dirty="0"/>
+            </a:br>
+            <a:r>
+              <a:rPr lang="LID4096" sz="1600" dirty="0"/>
+              <a:t>GDPR / revFADP (2023) govern survey data — consent, minimisation, anonymised reporting</a:t>
+            </a:r>
+            <a:endParaRPr lang="en-US" sz="1600" dirty="0"/>
+          </a:p>
+          <a:p>
+            <a:pPr marL="285750" indent="-285750">
+              <a:lnSpc>
+                <a:spcPct val="150000"/>
+              </a:lnSpc>
+              <a:buFont typeface="Arial" panose="020B0604020202020204" pitchFamily="34" charset="0"/>
+              <a:buChar char="•"/>
+            </a:pPr>
+            <a:r>
+              <a:rPr lang="LID4096" sz="1600" dirty="0"/>
+              <a:t>Switzerland has </a:t>
+            </a:r>
+            <a:r>
+              <a:rPr lang="LID4096" sz="1600" dirty="0">
+                <a:solidFill>
+                  <a:schemeClr val="accent6">
+                    <a:lumMod val="75000"/>
+                  </a:schemeClr>
+                </a:solidFill>
+              </a:rPr>
+              <a:t>no AI act</a:t>
+            </a:r>
+            <a:r>
+              <a:rPr lang="LID4096" sz="1600" dirty="0"/>
+              <a:t>: sector-specific approach confirmed 12 Feb 2025; CoE Framework Convention ratification, consultation bill due end-2026 → FINMA Guidance 08/2024 is the operative standard</a:t>
+            </a:r>
+            <a:endParaRPr lang="en-US" sz="1600" dirty="0"/>
+          </a:p>
+          <a:p>
+            <a:pPr marL="285750" indent="-285750">
+              <a:lnSpc>
+                <a:spcPct val="150000"/>
+              </a:lnSpc>
+              <a:buFont typeface="Arial" panose="020B0604020202020204" pitchFamily="34" charset="0"/>
+              <a:buChar char="•"/>
+            </a:pPr>
+            <a:r>
+              <a:rPr lang="LID4096" sz="1600" dirty="0"/>
+              <a:t>Human-in-the-loop by design keeps the tool </a:t>
+            </a:r>
+            <a:r>
+              <a:rPr lang="LID4096" sz="1600" dirty="0">
+                <a:solidFill>
+                  <a:schemeClr val="accent6">
+                    <a:lumMod val="75000"/>
+                  </a:schemeClr>
+                </a:solidFill>
+              </a:rPr>
+              <a:t>outside MiFID </a:t>
+            </a:r>
+            <a:r>
+              <a:rPr lang="LID4096" sz="1600" dirty="0"/>
+              <a:t>II Art. 17 algorithmic trading</a:t>
+            </a:r>
+            <a:endParaRPr lang="en-US" sz="1400" dirty="0"/>
+          </a:p>
+          <a:p>
+            <a:pPr>
+              <a:lnSpc>
+                <a:spcPct val="150000"/>
+              </a:lnSpc>
+            </a:pPr>
+            <a:r>
+              <a:rPr lang="LID4096" dirty="0"/>
+              <a:t>⚠️ Line not crossed: profiling individual managers would trigger Annex III(4) high-risk</a:t>
+            </a:r>
+          </a:p>
+        </p:txBody>
+      </p:sp>
+      <p:sp>
+        <p:nvSpPr>
+          <p:cNvPr id="9" name="TextBox 8">
+            <a:extLst>
+              <a:ext uri="{FF2B5EF4-FFF2-40B4-BE49-F238E27FC236}">
+                <a16:creationId xmlns:a16="http://schemas.microsoft.com/office/drawing/2014/main" id="{E66968E0-6D96-2329-3E0E-278000D6E020}"/>
+              </a:ext>
+            </a:extLst>
+          </p:cNvPr>
+          <p:cNvSpPr txBox="1"/>
+          <p:nvPr/>
         </p:nvSpPr>
         <p:spPr>
           <a:xfrm>
-            <a:off x="838200" y="365125"/>
-            <a:ext cx="8346440" cy="823595"/>
-          </a:xfrm>
-        </p:spPr>
-        <p:txBody>
-          <a:bodyPr>
-            <a:normAutofit fontScale="90000"/>
-          </a:bodyPr>
-          <a:lstStyle/>
-          <a:p>
-            <a:r>
-              <a:rPr lang="en-US" dirty="0"/>
-              <a:t>Appendix 9: Paradigm --  How the Design Answers the Research Questions</a:t>
-            </a:r>
-            <a:endParaRPr lang="LID4096" dirty="0"/>
-          </a:p>
-        </p:txBody>
-      </p:sp>
-      <p:sp>
-        <p:nvSpPr>
-          <p:cNvPr id="4" name="Content Placeholder 3">
-            <a:extLst>
-              <a:ext uri="{FF2B5EF4-FFF2-40B4-BE49-F238E27FC236}">
-                <a16:creationId xmlns:a16="http://schemas.microsoft.com/office/drawing/2014/main" id="{094CDAF0-1A99-262F-5FB0-DFDE74EBA0B5}"/>
-              </a:ext>
-            </a:extLst>
-          </p:cNvPr>
-          <p:cNvSpPr>
-            <a:spLocks noGrp="1"/>
-          </p:cNvSpPr>
-          <p:nvPr>
-            <p:ph idx="1"/>
-          </p:nvPr>
-        </p:nvSpPr>
-        <p:spPr>
-          <a:xfrm>
-            <a:off x="838200" y="1284288"/>
-            <a:ext cx="10515600" cy="2449512"/>
-          </a:xfrm>
-        </p:spPr>
-        <p:txBody>
-          <a:bodyPr>
-            <a:normAutofit fontScale="47500" lnSpcReduction="20000"/>
-          </a:bodyPr>
-          <a:lstStyle/>
-          <a:p>
-            <a:pPr marL="0" indent="0">
-              <a:lnSpc>
-                <a:spcPct val="170000"/>
-              </a:lnSpc>
-              <a:buNone/>
-            </a:pPr>
-            <a:r>
-              <a:rPr lang="en-US" dirty="0"/>
-              <a:t>Research Paradigm – What each term means (Saunders et al., 2019):</a:t>
-            </a:r>
-          </a:p>
-          <a:p>
-            <a:pPr lvl="1">
-              <a:lnSpc>
-                <a:spcPct val="170000"/>
-              </a:lnSpc>
-            </a:pPr>
-            <a:r>
-              <a:rPr lang="en-US" dirty="0"/>
-              <a:t>Positivist — </a:t>
-            </a:r>
-            <a:r>
-              <a:rPr lang="en-US" b="1" dirty="0"/>
-              <a:t>knowledge comes only from observable</a:t>
-            </a:r>
-            <a:r>
-              <a:rPr lang="en-US" dirty="0"/>
-              <a:t>, measurable facts, independent of the researcher's beliefs. In this study: structured seven-point survey responses and market data — no interpretation of what managers "meant.“</a:t>
-            </a:r>
-          </a:p>
-          <a:p>
-            <a:pPr lvl="1">
-              <a:lnSpc>
-                <a:spcPct val="170000"/>
-              </a:lnSpc>
-            </a:pPr>
-            <a:r>
-              <a:rPr lang="en-US" dirty="0"/>
-              <a:t>Deductive — reasoning runs </a:t>
-            </a:r>
-            <a:r>
-              <a:rPr lang="en-US" b="1" dirty="0"/>
-              <a:t>from theory to data</a:t>
-            </a:r>
-            <a:r>
-              <a:rPr lang="en-US" dirty="0"/>
-              <a:t>, never the reverse: behavioral finance theory → testable hypotheses → measurement → statistical test. (Opposite: inductive — building theory out of observations.)</a:t>
-            </a:r>
-          </a:p>
-          <a:p>
-            <a:pPr lvl="1">
-              <a:lnSpc>
-                <a:spcPct val="170000"/>
-              </a:lnSpc>
-            </a:pPr>
-            <a:r>
-              <a:rPr lang="en-US" dirty="0"/>
-              <a:t>Theory-testing — the study does not create new theory from the data; it </a:t>
-            </a:r>
-            <a:r>
-              <a:rPr lang="en-US" b="1" dirty="0"/>
-              <a:t>checks whether predictions of existing theory hold</a:t>
-            </a:r>
-            <a:r>
-              <a:rPr lang="en-US" dirty="0"/>
-              <a:t> in a professional sample.</a:t>
-            </a:r>
-          </a:p>
-          <a:p>
-            <a:pPr lvl="1">
-              <a:lnSpc>
-                <a:spcPct val="170000"/>
-              </a:lnSpc>
-            </a:pPr>
-            <a:r>
-              <a:rPr lang="en-US" dirty="0"/>
-              <a:t>Falsification logic (Popper) — </a:t>
-            </a:r>
-            <a:r>
-              <a:rPr lang="en-US" b="1" dirty="0"/>
-              <a:t>hypotheses are stated as null statements</a:t>
-            </a:r>
-            <a:r>
-              <a:rPr lang="en-US" dirty="0"/>
-              <a:t> that data could reject. Nothing is ever "proven": a claim stands only while the evidence fails to reject it at the pre-set threshold (α = 0.05).</a:t>
-            </a:r>
-            <a:endParaRPr lang="LID4096" dirty="0"/>
-          </a:p>
-        </p:txBody>
-      </p:sp>
-      <p:sp>
-        <p:nvSpPr>
-          <p:cNvPr id="7" name="Content Placeholder 3">
-            <a:extLst>
-              <a:ext uri="{FF2B5EF4-FFF2-40B4-BE49-F238E27FC236}">
-                <a16:creationId xmlns:a16="http://schemas.microsoft.com/office/drawing/2014/main" id="{24323253-08C3-996B-CE7D-5FE2DF8B1AD5}"/>
-              </a:ext>
-            </a:extLst>
-          </p:cNvPr>
-          <p:cNvSpPr txBox="1">
-            <a:spLocks/>
-          </p:cNvSpPr>
-          <p:nvPr/>
-        </p:nvSpPr>
-        <p:spPr>
-          <a:xfrm>
-            <a:off x="995680" y="5853112"/>
-            <a:ext cx="10086657" cy="809625"/>
+            <a:off x="787400" y="5479614"/>
+            <a:ext cx="8397240" cy="1015663"/>
           </a:xfrm>
           <a:prstGeom prst="rect">
             <a:avLst/>
           </a:prstGeom>
+          <a:noFill/>
         </p:spPr>
         <p:txBody>
-          <a:bodyPr vert="horz" lIns="91440" tIns="45720" rIns="91440" bIns="45720" rtlCol="0">
-            <a:normAutofit fontScale="55000" lnSpcReduction="20000"/>
+          <a:bodyPr wrap="square">
+            <a:spAutoFit/>
           </a:bodyPr>
-          <a:lstStyle>
-            <a:lvl1pPr marL="228600" indent="-228600" algn="l" defTabSz="914400" rtl="0" eaLnBrk="1" latinLnBrk="0" hangingPunct="1">
-              <a:lnSpc>
-                <a:spcPct val="90000"/>
-              </a:lnSpc>
-              <a:spcBef>
-                <a:spcPts val="1000"/>
-              </a:spcBef>
-              <a:buFont typeface="Arial" panose="020B0604020202020204" pitchFamily="34" charset="0"/>
-              <a:buChar char="•"/>
-              <a:defRPr sz="2800" kern="1200">
-                <a:solidFill>
-                  <a:schemeClr val="tx1"/>
-                </a:solidFill>
-                <a:latin typeface="+mn-lt"/>
-                <a:ea typeface="+mn-ea"/>
-                <a:cs typeface="+mn-cs"/>
-              </a:defRPr>
-            </a:lvl1pPr>
-            <a:lvl2pPr marL="685800" indent="-228600" algn="l" defTabSz="914400" rtl="0" eaLnBrk="1" latinLnBrk="0" hangingPunct="1">
-              <a:lnSpc>
-                <a:spcPct val="90000"/>
-              </a:lnSpc>
-              <a:spcBef>
-                <a:spcPts val="500"/>
-              </a:spcBef>
-              <a:buFont typeface="Arial" panose="020B0604020202020204" pitchFamily="34" charset="0"/>
-              <a:buChar char="•"/>
-              <a:defRPr sz="2400" kern="1200">
-                <a:solidFill>
-                  <a:schemeClr val="tx1"/>
-                </a:solidFill>
-                <a:latin typeface="+mn-lt"/>
-                <a:ea typeface="+mn-ea"/>
-                <a:cs typeface="+mn-cs"/>
-              </a:defRPr>
-            </a:lvl2pPr>
-            <a:lvl3pPr marL="1143000" indent="-228600" algn="l" defTabSz="914400" rtl="0" eaLnBrk="1" latinLnBrk="0" hangingPunct="1">
-              <a:lnSpc>
-                <a:spcPct val="90000"/>
-              </a:lnSpc>
-              <a:spcBef>
-                <a:spcPts val="500"/>
-              </a:spcBef>
-              <a:buFont typeface="Arial" panose="020B0604020202020204" pitchFamily="34" charset="0"/>
-              <a:buChar char="•"/>
-              <a:defRPr sz="2000" kern="1200">
-                <a:solidFill>
-                  <a:schemeClr val="tx1"/>
-                </a:solidFill>
-                <a:latin typeface="+mn-lt"/>
-                <a:ea typeface="+mn-ea"/>
-                <a:cs typeface="+mn-cs"/>
-              </a:defRPr>
-            </a:lvl3pPr>
-            <a:lvl4pPr marL="1600200" indent="-228600" algn="l" defTabSz="914400" rtl="0" eaLnBrk="1" latinLnBrk="0" hangingPunct="1">
-              <a:lnSpc>
-                <a:spcPct val="90000"/>
-              </a:lnSpc>
-              <a:spcBef>
-                <a:spcPts val="500"/>
-              </a:spcBef>
-              <a:buFont typeface="Arial" panose="020B0604020202020204" pitchFamily="34" charset="0"/>
-              <a:buChar char="•"/>
-              <a:defRPr sz="1800" kern="1200">
-                <a:solidFill>
-                  <a:schemeClr val="tx1"/>
-                </a:solidFill>
-                <a:latin typeface="+mn-lt"/>
-                <a:ea typeface="+mn-ea"/>
-                <a:cs typeface="+mn-cs"/>
-              </a:defRPr>
-            </a:lvl4pPr>
-            <a:lvl5pPr marL="2057400" indent="-228600" algn="l" defTabSz="914400" rtl="0" eaLnBrk="1" latinLnBrk="0" hangingPunct="1">
-              <a:lnSpc>
-                <a:spcPct val="90000"/>
-              </a:lnSpc>
-              <a:spcBef>
-                <a:spcPts val="500"/>
-              </a:spcBef>
-              <a:buFont typeface="Arial" panose="020B0604020202020204" pitchFamily="34" charset="0"/>
-              <a:buChar char="•"/>
-              <a:defRPr sz="1800" kern="1200">
-                <a:solidFill>
-                  <a:schemeClr val="tx1"/>
-                </a:solidFill>
-                <a:latin typeface="+mn-lt"/>
-                <a:ea typeface="+mn-ea"/>
-                <a:cs typeface="+mn-cs"/>
-              </a:defRPr>
-            </a:lvl5pPr>
-            <a:lvl6pPr marL="2514600" indent="-228600" algn="l" defTabSz="914400" rtl="0" eaLnBrk="1" latinLnBrk="0" hangingPunct="1">
-              <a:lnSpc>
-                <a:spcPct val="90000"/>
-              </a:lnSpc>
-              <a:spcBef>
-                <a:spcPts val="500"/>
-              </a:spcBef>
-              <a:buFont typeface="Arial" panose="020B0604020202020204" pitchFamily="34" charset="0"/>
-              <a:buChar char="•"/>
-              <a:defRPr sz="1800" kern="1200">
-                <a:solidFill>
-                  <a:schemeClr val="tx1"/>
-                </a:solidFill>
-                <a:latin typeface="+mn-lt"/>
-                <a:ea typeface="+mn-ea"/>
-                <a:cs typeface="+mn-cs"/>
-              </a:defRPr>
-            </a:lvl6pPr>
-            <a:lvl7pPr marL="2971800" indent="-228600" algn="l" defTabSz="914400" rtl="0" eaLnBrk="1" latinLnBrk="0" hangingPunct="1">
-              <a:lnSpc>
-                <a:spcPct val="90000"/>
-              </a:lnSpc>
-              <a:spcBef>
-                <a:spcPts val="500"/>
-              </a:spcBef>
-              <a:buFont typeface="Arial" panose="020B0604020202020204" pitchFamily="34" charset="0"/>
-              <a:buChar char="•"/>
-              <a:defRPr sz="1800" kern="1200">
-                <a:solidFill>
-                  <a:schemeClr val="tx1"/>
-                </a:solidFill>
-                <a:latin typeface="+mn-lt"/>
-                <a:ea typeface="+mn-ea"/>
-                <a:cs typeface="+mn-cs"/>
-              </a:defRPr>
-            </a:lvl7pPr>
-            <a:lvl8pPr marL="3429000" indent="-228600" algn="l" defTabSz="914400" rtl="0" eaLnBrk="1" latinLnBrk="0" hangingPunct="1">
-              <a:lnSpc>
-                <a:spcPct val="90000"/>
-              </a:lnSpc>
-              <a:spcBef>
-                <a:spcPts val="500"/>
-              </a:spcBef>
-              <a:buFont typeface="Arial" panose="020B0604020202020204" pitchFamily="34" charset="0"/>
-              <a:buChar char="•"/>
-              <a:defRPr sz="1800" kern="1200">
-                <a:solidFill>
-                  <a:schemeClr val="tx1"/>
-                </a:solidFill>
-                <a:latin typeface="+mn-lt"/>
-                <a:ea typeface="+mn-ea"/>
-                <a:cs typeface="+mn-cs"/>
-              </a:defRPr>
-            </a:lvl8pPr>
-            <a:lvl9pPr marL="3886200" indent="-228600" algn="l" defTabSz="914400" rtl="0" eaLnBrk="1" latinLnBrk="0" hangingPunct="1">
-              <a:lnSpc>
-                <a:spcPct val="90000"/>
-              </a:lnSpc>
-              <a:spcBef>
-                <a:spcPts val="500"/>
-              </a:spcBef>
-              <a:buFont typeface="Arial" panose="020B0604020202020204" pitchFamily="34" charset="0"/>
-              <a:buChar char="•"/>
-              <a:defRPr sz="1800" kern="1200">
-                <a:solidFill>
-                  <a:schemeClr val="tx1"/>
-                </a:solidFill>
-                <a:latin typeface="+mn-lt"/>
-                <a:ea typeface="+mn-ea"/>
-                <a:cs typeface="+mn-cs"/>
-              </a:defRPr>
-            </a:lvl9pPr>
-          </a:lstStyle>
-          <a:p>
-            <a:pPr marL="0" indent="0">
-              <a:lnSpc>
-                <a:spcPct val="170000"/>
-              </a:lnSpc>
-              <a:buNone/>
+          <a:lstStyle/>
+          <a:p>
+            <a:r>
+              <a:rPr lang="LID4096" sz="1000" dirty="0"/>
+              <a:t>Sources:</a:t>
+            </a:r>
+            <a:endParaRPr lang="en-US" sz="1000" dirty="0"/>
+          </a:p>
+          <a:p>
+            <a:pPr marL="342900" indent="-342900">
+              <a:buFont typeface="+mj-lt"/>
+              <a:buAutoNum type="arabicPeriod"/>
             </a:pPr>
             <a:r>
-              <a:rPr lang="en-US" dirty="0"/>
-              <a:t>Under </a:t>
-            </a:r>
-            <a:r>
-              <a:rPr lang="en-US" b="1" dirty="0"/>
-              <a:t>falsification logic</a:t>
-            </a:r>
-            <a:r>
-              <a:rPr lang="en-US" dirty="0"/>
-              <a:t>, a null result is a complete answer, not a failure: the research question is answered by running the test, not by the direction of its outcome. The H2 null is reported as informative and bounded by statistical power (§5.8.2).</a:t>
-            </a:r>
-            <a:endParaRPr lang="LID4096" dirty="0"/>
-          </a:p>
-        </p:txBody>
-      </p:sp>
-      <p:pic>
-        <p:nvPicPr>
-          <p:cNvPr id="11" name="Picture 10">
-            <a:extLst>
-              <a:ext uri="{FF2B5EF4-FFF2-40B4-BE49-F238E27FC236}">
-                <a16:creationId xmlns:a16="http://schemas.microsoft.com/office/drawing/2014/main" id="{E05AAB0B-27A9-0644-015D-6F44103613D0}"/>
-              </a:ext>
-            </a:extLst>
-          </p:cNvPr>
-          <p:cNvPicPr>
-            <a:picLocks noChangeAspect="1"/>
-          </p:cNvPicPr>
-          <p:nvPr/>
-        </p:nvPicPr>
-        <p:blipFill>
-          <a:blip r:embed="rId3"/>
-          <a:stretch>
-            <a:fillRect/>
-          </a:stretch>
-        </p:blipFill>
-        <p:spPr>
-          <a:xfrm>
-            <a:off x="1553831" y="3838142"/>
-            <a:ext cx="7864490" cy="1741215"/>
-          </a:xfrm>
-          <a:prstGeom prst="rect">
-            <a:avLst/>
-          </a:prstGeom>
-        </p:spPr>
-      </p:pic>
+              <a:rPr lang="LID4096" sz="1000" dirty="0"/>
+              <a:t>Article 3: Definitions | EU Artificial Intelligence Act</a:t>
+            </a:r>
+            <a:endParaRPr lang="en-US" sz="1000" dirty="0"/>
+          </a:p>
+          <a:p>
+            <a:pPr marL="342900" indent="-342900">
+              <a:buFont typeface="+mj-lt"/>
+              <a:buAutoNum type="arabicPeriod"/>
+            </a:pPr>
+            <a:r>
+              <a:rPr lang="LID4096" sz="1000" dirty="0"/>
+              <a:t>Article 5: Prohibited AI Practices | EU Artificial Intelligence Act</a:t>
+            </a:r>
+            <a:endParaRPr lang="en-US" sz="1000" dirty="0"/>
+          </a:p>
+          <a:p>
+            <a:pPr marL="342900" indent="-342900">
+              <a:buFont typeface="+mj-lt"/>
+              <a:buAutoNum type="arabicPeriod"/>
+            </a:pPr>
+            <a:r>
+              <a:rPr lang="LID4096" sz="1000" dirty="0"/>
+              <a:t>Red Lines under EU AI Act: Unpacking the prohibition of emotion recognition in the workplace and education institutions (FPF)</a:t>
+            </a:r>
+            <a:endParaRPr lang="en-US" sz="1000" dirty="0"/>
+          </a:p>
+          <a:p>
+            <a:pPr marL="342900" indent="-342900">
+              <a:buFont typeface="+mj-lt"/>
+              <a:buAutoNum type="arabicPeriod"/>
+            </a:pPr>
+            <a:r>
+              <a:rPr lang="LID4096" sz="1000" dirty="0"/>
+              <a:t>AI regulation: Federal Council to ratify Council of Europe Convention (admin.ch)- Switzerland Sets Its Course on AI Legislation (Pestalozzi)</a:t>
+            </a:r>
+            <a:endParaRPr lang="en-US" sz="1000" dirty="0"/>
+          </a:p>
+          <a:p>
+            <a:pPr marL="342900" indent="-342900">
+              <a:buFont typeface="+mj-lt"/>
+              <a:buAutoNum type="arabicPeriod"/>
+            </a:pPr>
+            <a:r>
+              <a:rPr lang="LID4096" sz="1000" dirty="0"/>
+              <a:t>FINMA guidance on governance and risk management when using artificial intelligence</a:t>
+            </a:r>
+          </a:p>
+        </p:txBody>
+      </p:sp>
     </p:spTree>
     <p:extLst>
       <p:ext uri="{BB962C8B-B14F-4D97-AF65-F5344CB8AC3E}">
-        <p14:creationId xmlns:p14="http://schemas.microsoft.com/office/powerpoint/2010/main" val="730449677"/>
+        <p14:creationId xmlns:p14="http://schemas.microsoft.com/office/powerpoint/2010/main" val="3410717024"/>
       </p:ext>
     </p:extLst>
   </p:cSld>
@@ -14355,6 +16770,68 @@
       </p:grpSpPr>
       <p:sp>
         <p:nvSpPr>
+          <p:cNvPr id="150" name="Card 150"/>
+          <p:cNvSpPr/>
+          <p:nvPr/>
+        </p:nvSpPr>
+        <p:spPr>
+          <a:xfrm>
+            <a:off x="838200" y="3708400"/>
+            <a:ext cx="5080000" cy="2260600"/>
+          </a:xfrm>
+          <a:prstGeom prst="roundRect">
+            <a:avLst>
+              <a:gd name="adj" fmla="val 6000"/>
+            </a:avLst>
+          </a:prstGeom>
+          <a:solidFill>
+            <a:srgbClr val="F2F5F9"/>
+          </a:solidFill>
+          <a:ln w="12700">
+            <a:noFill/>
+          </a:ln>
+        </p:spPr>
+        <p:txBody>
+          <a:bodyPr/>
+          <a:lstStyle/>
+          <a:p>
+            <a:endParaRPr lang="en-US" sz="1400"/>
+          </a:p>
+        </p:txBody>
+      </p:sp>
+      <p:sp>
+        <p:nvSpPr>
+          <p:cNvPr id="151" name="Card 151"/>
+          <p:cNvSpPr/>
+          <p:nvPr/>
+        </p:nvSpPr>
+        <p:spPr>
+          <a:xfrm>
+            <a:off x="6273800" y="3708400"/>
+            <a:ext cx="5080000" cy="2260600"/>
+          </a:xfrm>
+          <a:prstGeom prst="roundRect">
+            <a:avLst>
+              <a:gd name="adj" fmla="val 6000"/>
+            </a:avLst>
+          </a:prstGeom>
+          <a:solidFill>
+            <a:srgbClr val="F2F5F9"/>
+          </a:solidFill>
+          <a:ln w="12700">
+            <a:noFill/>
+          </a:ln>
+        </p:spPr>
+        <p:txBody>
+          <a:bodyPr/>
+          <a:lstStyle/>
+          <a:p>
+            <a:endParaRPr lang="en-US" sz="1400"/>
+          </a:p>
+        </p:txBody>
+      </p:sp>
+      <p:sp>
+        <p:nvSpPr>
           <p:cNvPr id="2" name="Titel 1">
             <a:extLst>
               <a:ext uri="{FF2B5EF4-FFF2-40B4-BE49-F238E27FC236}">
@@ -14381,7 +16858,7 @@
           <a:p>
             <a:r>
               <a:rPr lang="en-US" dirty="0"/>
-              <a:t>Research Question and Hypotheses</a:t>
+              <a:t>Research Questions</a:t>
             </a:r>
           </a:p>
         </p:txBody>
@@ -14398,53 +16875,88 @@
           <p:cNvSpPr>
             <a:spLocks noGrp="1"/>
           </p:cNvSpPr>
-          <p:nvPr>
-            <p:ph idx="1"/>
-          </p:nvPr>
+          <p:nvPr/>
         </p:nvSpPr>
         <p:spPr>
           <a:xfrm>
-            <a:off x="838200" y="4092099"/>
-            <a:ext cx="10688320" cy="2084863"/>
+            <a:off x="1143000" y="3708400"/>
+            <a:ext cx="4470400" cy="2260600"/>
           </a:xfrm>
         </p:spPr>
         <p:txBody>
-          <a:bodyPr>
-            <a:normAutofit fontScale="92500"/>
+          <a:bodyPr wrap="square" lIns="0" tIns="0" rIns="0" bIns="0" anchor="ctr">
+            <a:noAutofit/>
           </a:bodyPr>
           <a:lstStyle/>
           <a:p>
-            <a:pPr marL="0" indent="0">
+            <a:pPr marL="0" indent="0" algn="l">
               <a:lnSpc>
-                <a:spcPct val="150000"/>
+                <a:spcPct val="105000"/>
               </a:lnSpc>
               <a:buNone/>
             </a:pPr>
             <a:r>
-              <a:rPr lang="en-US" sz="1800" dirty="0"/>
-              <a:t>Can a structured decision-support indicator moderate behavioral bias in professional equity portfolio management?</a:t>
-            </a:r>
-          </a:p>
-          <a:p>
-            <a:pPr>
+              <a:rPr lang="en-US" sz="1400" b="1" dirty="0">
+                <a:solidFill>
+                  <a:srgbClr val="ED7D31"/>
+                </a:solidFill>
+                <a:latin typeface="Calibri"/>
+              </a:rPr>
+              <a:t>RQ1</a:t>
+            </a:r>
+          </a:p>
+          <a:p>
+            <a:pPr marL="0" indent="0" algn="l">
               <a:lnSpc>
-                <a:spcPct val="150000"/>
+                <a:spcPct val="105000"/>
               </a:lnSpc>
+              <a:buNone/>
             </a:pPr>
             <a:r>
-              <a:rPr lang="en-US" sz="1800" dirty="0"/>
-              <a:t>H1: Shock Score intensity has a statistically significant effect on managers' Net Risk Stance.</a:t>
-            </a:r>
-          </a:p>
-          <a:p>
-            <a:pPr>
+              <a:rPr lang="en-US" sz="2000" dirty="0">
+                <a:solidFill>
+                  <a:schemeClr val="tx1">
+                    <a:lumMod val="65000"/>
+                    <a:lumOff val="35000"/>
+                  </a:schemeClr>
+                </a:solidFill>
+                <a:latin typeface="Calibri"/>
+              </a:rPr>
+              <a:t>Do bigger shocks move risk decisions?</a:t>
+            </a:r>
+          </a:p>
+          <a:p>
+            <a:pPr marL="0" indent="0" algn="l">
               <a:lnSpc>
-                <a:spcPct val="150000"/>
+                <a:spcPct val="105000"/>
               </a:lnSpc>
+              <a:buNone/>
             </a:pPr>
             <a:r>
-              <a:rPr lang="en-US" sz="1800" dirty="0"/>
-              <a:t>H2: Exposure to the Shock Score dashboard has a statistically significant effect on portfolio risk – return outcomes.</a:t>
+              <a:rPr lang="en-US" sz="1500" b="0" dirty="0">
+                <a:solidFill>
+                  <a:srgbClr val="404040"/>
+                </a:solidFill>
+                <a:latin typeface="Calibri"/>
+              </a:rPr>
+              <a:t>Is the intensity of external financial information shocks associated with statistically significant differences in managers’ immediate Net Risk Stance?</a:t>
+            </a:r>
+          </a:p>
+          <a:p>
+            <a:pPr marL="0" indent="0" algn="l">
+              <a:lnSpc>
+                <a:spcPct val="105000"/>
+              </a:lnSpc>
+              <a:buNone/>
+            </a:pPr>
+            <a:r>
+              <a:rPr lang="en-US" sz="1400" b="1" dirty="0">
+                <a:solidFill>
+                  <a:srgbClr val="595959"/>
+                </a:solidFill>
+                <a:latin typeface="Calibri"/>
+              </a:rPr>
+              <a:t>Tested as H1 — 424 scenario responses</a:t>
             </a:r>
           </a:p>
         </p:txBody>
@@ -14463,8 +16975,8 @@
         </p:nvSpPr>
         <p:spPr>
           <a:xfrm>
-            <a:off x="3154364" y="2014856"/>
-            <a:ext cx="1843087" cy="751046"/>
+            <a:off x="2413000" y="1752600"/>
+            <a:ext cx="2667000" cy="939800"/>
           </a:xfrm>
           <a:prstGeom prst="rect">
             <a:avLst/>
@@ -14498,10 +17010,13 @@
           <a:p>
             <a:pPr algn="ctr"/>
             <a:r>
-              <a:rPr lang="en-US" sz="1600" dirty="0"/>
+              <a:rPr lang="en-US" sz="1400" b="1" dirty="0">
+                <a:solidFill>
+                  <a:srgbClr val="FFFFFF"/>
+                </a:solidFill>
+              </a:rPr>
               <a:t>Info Shock</a:t>
             </a:r>
-            <a:endParaRPr lang="LID4096" sz="1600" dirty="0"/>
           </a:p>
         </p:txBody>
       </p:sp>
@@ -14519,8 +17034,8 @@
         </p:nvSpPr>
         <p:spPr>
           <a:xfrm>
-            <a:off x="6512244" y="2014856"/>
-            <a:ext cx="1843087" cy="751046"/>
+            <a:off x="7112000" y="1752600"/>
+            <a:ext cx="2667000" cy="939800"/>
           </a:xfrm>
           <a:prstGeom prst="rect">
             <a:avLst/>
@@ -14554,10 +17069,13 @@
           <a:p>
             <a:pPr algn="ctr"/>
             <a:r>
-              <a:rPr lang="en-US" sz="1600" dirty="0"/>
-              <a:t>Excess Decision</a:t>
-            </a:r>
-            <a:endParaRPr lang="LID4096" sz="1600" dirty="0"/>
+              <a:rPr lang="en-US" sz="1400" b="1" dirty="0">
+                <a:solidFill>
+                  <a:srgbClr val="FFFFFF"/>
+                </a:solidFill>
+              </a:rPr>
+              <a:t>Biased Decision</a:t>
+            </a:r>
           </a:p>
         </p:txBody>
       </p:sp>
@@ -14579,8 +17097,8 @@
         </p:nvCxnSpPr>
         <p:spPr>
           <a:xfrm>
-            <a:off x="4997451" y="2390379"/>
-            <a:ext cx="1514793" cy="0"/>
+            <a:off x="5080000" y="2222500"/>
+            <a:ext cx="2032000" cy="0"/>
           </a:xfrm>
           <a:prstGeom prst="straightConnector1">
             <a:avLst/>
@@ -14618,8 +17136,8 @@
         </p:nvSpPr>
         <p:spPr>
           <a:xfrm>
-            <a:off x="4781939" y="1430081"/>
-            <a:ext cx="2071785" cy="584775"/>
+            <a:off x="4445000" y="1168400"/>
+            <a:ext cx="3302000" cy="431800"/>
           </a:xfrm>
           <a:prstGeom prst="rect">
             <a:avLst/>
@@ -14634,18 +17152,21 @@
           <a:p>
             <a:pPr algn="ctr"/>
             <a:r>
-              <a:rPr lang="en-US" sz="1600" dirty="0"/>
+              <a:rPr lang="en-US" sz="1400" b="1" dirty="0">
+                <a:solidFill>
+                  <a:srgbClr val="ED7D31"/>
+                </a:solidFill>
+              </a:rPr>
               <a:t>Goal 1: </a:t>
             </a:r>
             <a:r>
-              <a:rPr lang="en-US" sz="1600" b="1" dirty="0"/>
-              <a:t>predict and measure </a:t>
-            </a:r>
-            <a:r>
-              <a:rPr lang="en-US" sz="1600" dirty="0"/>
-              <a:t>the bias</a:t>
-            </a:r>
-            <a:endParaRPr lang="LID4096" sz="1600" dirty="0"/>
+              <a:rPr lang="en-US" sz="1400" dirty="0">
+                <a:solidFill>
+                  <a:srgbClr val="404040"/>
+                </a:solidFill>
+              </a:rPr>
+              <a:t>predict &amp; measure the bias</a:t>
+            </a:r>
           </a:p>
         </p:txBody>
       </p:sp>
@@ -14663,8 +17184,8 @@
         </p:nvSpPr>
         <p:spPr>
           <a:xfrm>
-            <a:off x="4781940" y="3064264"/>
-            <a:ext cx="2071785" cy="584775"/>
+            <a:off x="4225447" y="2816620"/>
+            <a:ext cx="3521553" cy="307777"/>
           </a:xfrm>
           <a:prstGeom prst="rect">
             <a:avLst/>
@@ -14679,21 +17200,21 @@
           <a:p>
             <a:pPr algn="ctr"/>
             <a:r>
-              <a:rPr lang="en-US" sz="1600" dirty="0"/>
+              <a:rPr lang="en-US" sz="1400" b="1" dirty="0">
+                <a:solidFill>
+                  <a:srgbClr val="ED7D31"/>
+                </a:solidFill>
+              </a:rPr>
               <a:t>Goal 2: </a:t>
             </a:r>
-          </a:p>
-          <a:p>
-            <a:pPr algn="ctr"/>
-            <a:r>
-              <a:rPr lang="en-US" sz="1600" b="1" dirty="0"/>
-              <a:t>remove</a:t>
-            </a:r>
-            <a:r>
-              <a:rPr lang="en-US" sz="1600" dirty="0"/>
-              <a:t> the bias</a:t>
-            </a:r>
-            <a:endParaRPr lang="LID4096" sz="1600" dirty="0"/>
+            <a:r>
+              <a:rPr lang="en-US" sz="1400" dirty="0">
+                <a:solidFill>
+                  <a:srgbClr val="404040"/>
+                </a:solidFill>
+              </a:rPr>
+              <a:t>remove the bias</a:t>
+            </a:r>
           </a:p>
         </p:txBody>
       </p:sp>
@@ -14710,9 +17231,9 @@
           <p:nvPr/>
         </p:nvSpPr>
         <p:spPr>
-          <a:xfrm rot="2975074">
-            <a:off x="5615147" y="2249266"/>
-            <a:ext cx="279400" cy="269686"/>
+          <a:xfrm rot="2625274">
+            <a:off x="5918200" y="2044700"/>
+            <a:ext cx="355600" cy="355600"/>
           </a:xfrm>
           <a:prstGeom prst="plus">
             <a:avLst>
@@ -14743,10 +17264,104 @@
           </a:p>
         </p:txBody>
       </p:sp>
+      <p:sp>
+        <p:nvSpPr>
+          <p:cNvPr id="200" name="RQ2 Text"/>
+          <p:cNvSpPr txBox="1"/>
+          <p:nvPr/>
+        </p:nvSpPr>
+        <p:spPr>
+          <a:xfrm>
+            <a:off x="6578600" y="3708400"/>
+            <a:ext cx="4470400" cy="2260600"/>
+          </a:xfrm>
+          <a:prstGeom prst="rect">
+            <a:avLst/>
+          </a:prstGeom>
+          <a:noFill/>
+        </p:spPr>
+        <p:txBody>
+          <a:bodyPr wrap="square" lIns="0" tIns="0" rIns="0" bIns="0" anchor="ctr">
+            <a:noAutofit/>
+          </a:bodyPr>
+          <a:lstStyle/>
+          <a:p>
+            <a:pPr marL="0" indent="0" algn="l">
+              <a:lnSpc>
+                <a:spcPct val="105000"/>
+              </a:lnSpc>
+              <a:buNone/>
+            </a:pPr>
+            <a:r>
+              <a:rPr lang="en-US" sz="1400" b="1" dirty="0">
+                <a:solidFill>
+                  <a:srgbClr val="ED7D31"/>
+                </a:solidFill>
+                <a:latin typeface="Calibri"/>
+              </a:rPr>
+              <a:t>RQ2</a:t>
+            </a:r>
+          </a:p>
+          <a:p>
+            <a:pPr marL="0" indent="0" algn="l">
+              <a:lnSpc>
+                <a:spcPct val="105000"/>
+              </a:lnSpc>
+              <a:buNone/>
+            </a:pPr>
+            <a:r>
+              <a:rPr lang="en-US" sz="2000" dirty="0">
+                <a:solidFill>
+                  <a:schemeClr val="tx1">
+                    <a:lumMod val="65000"/>
+                    <a:lumOff val="35000"/>
+                  </a:schemeClr>
+                </a:solidFill>
+                <a:latin typeface="Calibri"/>
+              </a:rPr>
+              <a:t>Does the Shock Score change decisions?</a:t>
+            </a:r>
+          </a:p>
+          <a:p>
+            <a:pPr marL="0" indent="0" algn="l">
+              <a:lnSpc>
+                <a:spcPct val="105000"/>
+              </a:lnSpc>
+              <a:buNone/>
+            </a:pPr>
+            <a:r>
+              <a:rPr lang="en-US" sz="1500" b="0" dirty="0">
+                <a:solidFill>
+                  <a:srgbClr val="404040"/>
+                </a:solidFill>
+                <a:latin typeface="Calibri"/>
+              </a:rPr>
+              <a:t>Is providing the Shock Score associated with changes in Net Risk Stance and, through them, in portfolio risk–return outcomes, versus no score?</a:t>
+            </a:r>
+          </a:p>
+          <a:p>
+            <a:pPr marL="0" indent="0" algn="l">
+              <a:lnSpc>
+                <a:spcPct val="105000"/>
+              </a:lnSpc>
+              <a:buNone/>
+            </a:pPr>
+            <a:r>
+              <a:rPr lang="en-US" sz="1400" b="1" dirty="0">
+                <a:solidFill>
+                  <a:srgbClr val="595959"/>
+                </a:solidFill>
+                <a:latin typeface="Calibri"/>
+              </a:rPr>
+              <a:t>Tested as H2 — within-subject design</a:t>
+            </a:r>
+          </a:p>
+        </p:txBody>
+      </p:sp>
     </p:spTree>
     <p:extLst>
       <p:ext uri="{BB962C8B-B14F-4D97-AF65-F5344CB8AC3E}">
-        <p14:creationId xmlns:p14="http://schemas.microsoft.com/office/powerpoint/2010/main" val="3410717024"/>
+        <p14:creationId xmlns:p14="http://schemas.microsoft.com/office/powerpoint/2010/main" val="1003491513"/>
       </p:ext>
     </p:extLst>
   </p:cSld>
@@ -15015,7 +17630,7 @@
                   </a:schemeClr>
                 </a:solidFill>
               </a:rPr>
-              <a:t>Secondary: information-shock scenarios for US Equities</a:t>
+              <a:t>Secondary: information-shock scenarios for US Equities.</a:t>
             </a:r>
           </a:p>
         </p:txBody>
@@ -15028,8 +17643,8 @@
         </p:nvSpPr>
         <p:spPr>
           <a:xfrm>
-            <a:off x="6197600" y="1524000"/>
-            <a:ext cx="2476500" cy="2540000"/>
+            <a:off x="6618850" y="1579902"/>
+            <a:ext cx="2324100" cy="2540000"/>
           </a:xfrm>
           <a:prstGeom prst="roundRect">
             <a:avLst>
@@ -15412,7 +18027,7 @@
         </p:blipFill>
         <p:spPr>
           <a:xfrm>
-            <a:off x="6350000" y="1910080"/>
+            <a:off x="6777500" y="1889760"/>
             <a:ext cx="508000" cy="508000"/>
           </a:xfrm>
           <a:prstGeom prst="rect">
@@ -15482,6 +18097,257 @@
       </p:grpSpPr>
       <p:sp>
         <p:nvSpPr>
+          <p:cNvPr id="2" name="Title 1"/>
+          <p:cNvSpPr>
+            <a:spLocks noGrp="1"/>
+          </p:cNvSpPr>
+          <p:nvPr>
+            <p:ph type="title"/>
+          </p:nvPr>
+        </p:nvSpPr>
+        <p:spPr/>
+        <p:txBody>
+          <a:bodyPr/>
+          <a:lstStyle/>
+          <a:p>
+            <a:r>
+              <a:rPr sz="3000" dirty="0"/>
+              <a:t>Respondent Profile</a:t>
+            </a:r>
+          </a:p>
+        </p:txBody>
+      </p:sp>
+      <p:pic>
+        <p:nvPicPr>
+          <p:cNvPr id="3" name="Picture 2" descr="fig_demo_1.png"/>
+          <p:cNvPicPr>
+            <a:picLocks noChangeAspect="1"/>
+          </p:cNvPicPr>
+          <p:nvPr/>
+        </p:nvPicPr>
+        <p:blipFill>
+          <a:blip r:embed="rId2"/>
+          <a:stretch>
+            <a:fillRect/>
+          </a:stretch>
+        </p:blipFill>
+        <p:spPr>
+          <a:xfrm>
+            <a:off x="606907" y="2116773"/>
+            <a:ext cx="11155680" cy="3398892"/>
+          </a:xfrm>
+          <a:prstGeom prst="rect">
+            <a:avLst/>
+          </a:prstGeom>
+        </p:spPr>
+      </p:pic>
+      <p:sp>
+        <p:nvSpPr>
+          <p:cNvPr id="4" name="TextBox 3">
+            <a:extLst>
+              <a:ext uri="{FF2B5EF4-FFF2-40B4-BE49-F238E27FC236}">
+                <a16:creationId xmlns:a16="http://schemas.microsoft.com/office/drawing/2014/main" id="{33EC0955-2D58-12B5-09B4-68172D090EF8}"/>
+              </a:ext>
+            </a:extLst>
+          </p:cNvPr>
+          <p:cNvSpPr txBox="1"/>
+          <p:nvPr/>
+        </p:nvSpPr>
+        <p:spPr>
+          <a:xfrm>
+            <a:off x="8736711" y="6246654"/>
+            <a:ext cx="2926879" cy="246221"/>
+          </a:xfrm>
+          <a:prstGeom prst="rect">
+            <a:avLst/>
+          </a:prstGeom>
+          <a:noFill/>
+        </p:spPr>
+        <p:txBody>
+          <a:bodyPr wrap="square">
+            <a:spAutoFit/>
+          </a:bodyPr>
+          <a:lstStyle/>
+          <a:p>
+            <a:r>
+              <a:rPr lang="en-US" sz="1000" b="0" i="1" u="none" strike="noStrike" baseline="0" dirty="0">
+                <a:solidFill>
+                  <a:srgbClr val="000000"/>
+                </a:solidFill>
+                <a:latin typeface="AAAAAO+Calibri-Italic"/>
+              </a:rPr>
+              <a:t>Note. </a:t>
+            </a:r>
+            <a:r>
+              <a:rPr lang="en-US" sz="1000" b="0" i="0" u="none" strike="noStrike" baseline="0" dirty="0">
+                <a:solidFill>
+                  <a:srgbClr val="000000"/>
+                </a:solidFill>
+                <a:latin typeface="AAAAAG+Calibri"/>
+              </a:rPr>
+              <a:t>Original figures created for this study (2026). </a:t>
+            </a:r>
+            <a:endParaRPr lang="LID4096" sz="1000" dirty="0">
+              <a:highlight>
+                <a:srgbClr val="FFFF00"/>
+              </a:highlight>
+            </a:endParaRPr>
+          </a:p>
+        </p:txBody>
+      </p:sp>
+    </p:spTree>
+  </p:cSld>
+  <p:clrMapOvr>
+    <a:masterClrMapping/>
+  </p:clrMapOvr>
+</p:sld>
+</file>
+
+<file path=ppt/slides/slide7.xml><?xml version="1.0" encoding="utf-8"?>
+<p:sld xmlns:a="http://schemas.openxmlformats.org/drawingml/2006/main" xmlns:r="http://schemas.openxmlformats.org/officeDocument/2006/relationships" xmlns:p="http://schemas.openxmlformats.org/presentationml/2006/main">
+  <p:cSld>
+    <p:spTree>
+      <p:nvGrpSpPr>
+        <p:cNvPr id="1" name=""/>
+        <p:cNvGrpSpPr/>
+        <p:nvPr/>
+      </p:nvGrpSpPr>
+      <p:grpSpPr>
+        <a:xfrm>
+          <a:off x="0" y="0"/>
+          <a:ext cx="0" cy="0"/>
+          <a:chOff x="0" y="0"/>
+          <a:chExt cx="0" cy="0"/>
+        </a:xfrm>
+      </p:grpSpPr>
+      <p:sp>
+        <p:nvSpPr>
+          <p:cNvPr id="2" name="Title 1"/>
+          <p:cNvSpPr>
+            <a:spLocks noGrp="1"/>
+          </p:cNvSpPr>
+          <p:nvPr>
+            <p:ph type="title"/>
+          </p:nvPr>
+        </p:nvSpPr>
+        <p:spPr/>
+        <p:txBody>
+          <a:bodyPr/>
+          <a:lstStyle/>
+          <a:p>
+            <a:r>
+              <a:rPr lang="en-US" sz="3000" dirty="0"/>
+              <a:t>Respondent Profile(cont.)</a:t>
+            </a:r>
+            <a:endParaRPr sz="3000" dirty="0"/>
+          </a:p>
+        </p:txBody>
+      </p:sp>
+      <p:pic>
+        <p:nvPicPr>
+          <p:cNvPr id="3" name="Picture 2" descr="fig_demo_2.png"/>
+          <p:cNvPicPr>
+            <a:picLocks noChangeAspect="1"/>
+          </p:cNvPicPr>
+          <p:nvPr/>
+        </p:nvPicPr>
+        <p:blipFill>
+          <a:blip r:embed="rId2"/>
+          <a:stretch>
+            <a:fillRect/>
+          </a:stretch>
+        </p:blipFill>
+        <p:spPr>
+          <a:xfrm>
+            <a:off x="792327" y="1554480"/>
+            <a:ext cx="10607040" cy="4488899"/>
+          </a:xfrm>
+          <a:prstGeom prst="rect">
+            <a:avLst/>
+          </a:prstGeom>
+        </p:spPr>
+      </p:pic>
+      <p:sp>
+        <p:nvSpPr>
+          <p:cNvPr id="4" name="TextBox 3">
+            <a:extLst>
+              <a:ext uri="{FF2B5EF4-FFF2-40B4-BE49-F238E27FC236}">
+                <a16:creationId xmlns:a16="http://schemas.microsoft.com/office/drawing/2014/main" id="{1E82E37A-D89F-D190-864B-30C9A7D60878}"/>
+              </a:ext>
+            </a:extLst>
+          </p:cNvPr>
+          <p:cNvSpPr txBox="1"/>
+          <p:nvPr/>
+        </p:nvSpPr>
+        <p:spPr>
+          <a:xfrm>
+            <a:off x="7550787" y="6286028"/>
+            <a:ext cx="2926879" cy="246221"/>
+          </a:xfrm>
+          <a:prstGeom prst="rect">
+            <a:avLst/>
+          </a:prstGeom>
+          <a:noFill/>
+        </p:spPr>
+        <p:txBody>
+          <a:bodyPr wrap="square">
+            <a:spAutoFit/>
+          </a:bodyPr>
+          <a:lstStyle/>
+          <a:p>
+            <a:r>
+              <a:rPr lang="en-US" sz="1000" b="0" i="1" u="none" strike="noStrike" baseline="0" dirty="0">
+                <a:solidFill>
+                  <a:srgbClr val="000000"/>
+                </a:solidFill>
+                <a:latin typeface="AAAAAO+Calibri-Italic"/>
+              </a:rPr>
+              <a:t>Note. </a:t>
+            </a:r>
+            <a:r>
+              <a:rPr lang="en-US" sz="1000" b="0" i="0" u="none" strike="noStrike" baseline="0" dirty="0">
+                <a:solidFill>
+                  <a:srgbClr val="000000"/>
+                </a:solidFill>
+                <a:latin typeface="AAAAAG+Calibri"/>
+              </a:rPr>
+              <a:t>Original figures created for this study (2026). </a:t>
+            </a:r>
+            <a:endParaRPr lang="LID4096" sz="1000" dirty="0">
+              <a:highlight>
+                <a:srgbClr val="FFFF00"/>
+              </a:highlight>
+            </a:endParaRPr>
+          </a:p>
+        </p:txBody>
+      </p:sp>
+    </p:spTree>
+  </p:cSld>
+  <p:clrMapOvr>
+    <a:masterClrMapping/>
+  </p:clrMapOvr>
+</p:sld>
+</file>
+
+<file path=ppt/slides/slide8.xml><?xml version="1.0" encoding="utf-8"?>
+<p:sld xmlns:a="http://schemas.openxmlformats.org/drawingml/2006/main" xmlns:r="http://schemas.openxmlformats.org/officeDocument/2006/relationships" xmlns:p="http://schemas.openxmlformats.org/presentationml/2006/main">
+  <p:cSld>
+    <p:spTree>
+      <p:nvGrpSpPr>
+        <p:cNvPr id="1" name=""/>
+        <p:cNvGrpSpPr/>
+        <p:nvPr/>
+      </p:nvGrpSpPr>
+      <p:grpSpPr>
+        <a:xfrm>
+          <a:off x="0" y="0"/>
+          <a:ext cx="0" cy="0"/>
+          <a:chOff x="0" y="0"/>
+          <a:chExt cx="0" cy="0"/>
+        </a:xfrm>
+      </p:grpSpPr>
+      <p:sp>
+        <p:nvSpPr>
           <p:cNvPr id="2" name="Title 1">
             <a:extLst>
               <a:ext uri="{FF2B5EF4-FFF2-40B4-BE49-F238E27FC236}">
@@ -15544,6 +18410,60 @@
           </a:xfrm>
         </p:spPr>
       </p:pic>
+      <p:sp>
+        <p:nvSpPr>
+          <p:cNvPr id="4" name="TextBox 3">
+            <a:extLst>
+              <a:ext uri="{FF2B5EF4-FFF2-40B4-BE49-F238E27FC236}">
+                <a16:creationId xmlns:a16="http://schemas.microsoft.com/office/drawing/2014/main" id="{0EE7BF99-EDD1-1E6A-3B82-249C3FC7D16A}"/>
+              </a:ext>
+            </a:extLst>
+          </p:cNvPr>
+          <p:cNvSpPr txBox="1"/>
+          <p:nvPr/>
+        </p:nvSpPr>
+        <p:spPr>
+          <a:xfrm>
+            <a:off x="6927876" y="6463559"/>
+            <a:ext cx="2926879" cy="246221"/>
+          </a:xfrm>
+          <a:prstGeom prst="rect">
+            <a:avLst/>
+          </a:prstGeom>
+          <a:noFill/>
+        </p:spPr>
+        <p:txBody>
+          <a:bodyPr wrap="square">
+            <a:spAutoFit/>
+          </a:bodyPr>
+          <a:lstStyle/>
+          <a:p>
+            <a:r>
+              <a:rPr lang="en-US" sz="1000" b="0" i="1" u="none" strike="noStrike" baseline="0" dirty="0">
+                <a:solidFill>
+                  <a:srgbClr val="000000"/>
+                </a:solidFill>
+                <a:latin typeface="AAAAAO+Calibri-Italic"/>
+              </a:rPr>
+              <a:t>Note. </a:t>
+            </a:r>
+            <a:r>
+              <a:rPr lang="en-US" sz="1000" b="0" i="0" u="none" strike="noStrike" baseline="0" dirty="0">
+                <a:solidFill>
+                  <a:srgbClr val="000000"/>
+                </a:solidFill>
+                <a:latin typeface="AAAAAG+Calibri"/>
+              </a:rPr>
+              <a:t>Original figures created for this study (2026). </a:t>
+            </a:r>
+            <a:endParaRPr lang="LID4096" sz="1000" dirty="0">
+              <a:highlight>
+                <a:srgbClr val="FFFF00"/>
+              </a:highlight>
+            </a:endParaRPr>
+          </a:p>
+        </p:txBody>
+      </p:sp>
     </p:spTree>
     <p:extLst>
       <p:ext uri="{BB962C8B-B14F-4D97-AF65-F5344CB8AC3E}">
@@ -15557,7 +18477,7 @@
 </p:sld>
 </file>
 
-<file path=ppt/slides/slide7.xml><?xml version="1.0" encoding="utf-8"?>
+<file path=ppt/slides/slide9.xml><?xml version="1.0" encoding="utf-8"?>
 <p:sld xmlns:a="http://schemas.openxmlformats.org/drawingml/2006/main" xmlns:r="http://schemas.openxmlformats.org/officeDocument/2006/relationships" xmlns:p="http://schemas.openxmlformats.org/presentationml/2006/main">
   <p:cSld>
     <p:bg>
@@ -15619,86 +18539,6 @@
           </a:p>
         </p:txBody>
       </p:sp>
-      <p:pic>
-        <p:nvPicPr>
-          <p:cNvPr id="9" name="Content Placeholder 8">
-            <a:extLst>
-              <a:ext uri="{FF2B5EF4-FFF2-40B4-BE49-F238E27FC236}">
-                <a16:creationId xmlns:a16="http://schemas.microsoft.com/office/drawing/2014/main" id="{5BB514F8-B97E-94B9-136B-BFB4CAFC9A8E}"/>
-              </a:ext>
-            </a:extLst>
-          </p:cNvPr>
-          <p:cNvPicPr>
-            <a:picLocks noGrp="1" noChangeAspect="1"/>
-          </p:cNvPicPr>
-          <p:nvPr>
-            <p:ph idx="1"/>
-          </p:nvPr>
-        </p:nvPicPr>
-        <p:blipFill>
-          <a:blip r:embed="rId2"/>
-          <a:srcRect r="-1088" b="46808"/>
-          <a:stretch/>
-        </p:blipFill>
-        <p:spPr>
-          <a:xfrm>
-            <a:off x="1383931" y="1508438"/>
-            <a:ext cx="3983407" cy="4011300"/>
-          </a:xfrm>
-          <a:prstGeom prst="rect">
-            <a:avLst/>
-          </a:prstGeom>
-          <a:ln>
-            <a:noFill/>
-          </a:ln>
-          <a:effectLst>
-            <a:outerShdw blurRad="292100" dist="139700" dir="2700000" algn="tl" rotWithShape="0">
-              <a:srgbClr val="333333">
-                <a:alpha val="65000"/>
-              </a:srgbClr>
-            </a:outerShdw>
-          </a:effectLst>
-        </p:spPr>
-      </p:pic>
-      <p:pic>
-        <p:nvPicPr>
-          <p:cNvPr id="10" name="Content Placeholder 8">
-            <a:extLst>
-              <a:ext uri="{FF2B5EF4-FFF2-40B4-BE49-F238E27FC236}">
-                <a16:creationId xmlns:a16="http://schemas.microsoft.com/office/drawing/2014/main" id="{007F835B-730E-57B2-EC0A-3172FF98220A}"/>
-              </a:ext>
-            </a:extLst>
-          </p:cNvPr>
-          <p:cNvPicPr>
-            <a:picLocks noChangeAspect="1"/>
-          </p:cNvPicPr>
-          <p:nvPr/>
-        </p:nvPicPr>
-        <p:blipFill>
-          <a:blip r:embed="rId2"/>
-          <a:srcRect t="54806" r="1076" b="13557"/>
-          <a:stretch/>
-        </p:blipFill>
-        <p:spPr>
-          <a:xfrm>
-            <a:off x="6824664" y="1691318"/>
-            <a:ext cx="3655376" cy="2237195"/>
-          </a:xfrm>
-          <a:prstGeom prst="rect">
-            <a:avLst/>
-          </a:prstGeom>
-          <a:ln>
-            <a:noFill/>
-          </a:ln>
-          <a:effectLst>
-            <a:outerShdw blurRad="292100" dist="139700" dir="2700000" algn="tl" rotWithShape="0">
-              <a:srgbClr val="333333">
-                <a:alpha val="65000"/>
-              </a:srgbClr>
-            </a:outerShdw>
-          </a:effectLst>
-        </p:spPr>
-      </p:pic>
       <p:sp>
         <p:nvSpPr>
           <p:cNvPr id="3" name="Inhaltsplatzhalter 2">
@@ -15715,7 +18555,7 @@
         </p:nvSpPr>
         <p:spPr>
           <a:xfrm>
-            <a:off x="1341120" y="5740400"/>
+            <a:off x="5027295" y="1179892"/>
             <a:ext cx="3881120" cy="970280"/>
           </a:xfrm>
           <a:prstGeom prst="rect">
@@ -15942,7 +18782,7 @@
         </p:nvSpPr>
         <p:spPr>
           <a:xfrm>
-            <a:off x="6854376" y="4239882"/>
+            <a:off x="4919100" y="4183630"/>
             <a:ext cx="3881120" cy="1048397"/>
           </a:xfrm>
           <a:prstGeom prst="rect">
@@ -16134,321 +18974,300 @@
               <a:t>Interviewer gets Shock Score decomposed into main components together with Treatment Protocol.</a:t>
             </a:r>
           </a:p>
-        </p:txBody>
-      </p:sp>
-    </p:spTree>
-    <p:extLst>
-      <p:ext uri="{BB962C8B-B14F-4D97-AF65-F5344CB8AC3E}">
-        <p14:creationId xmlns:p14="http://schemas.microsoft.com/office/powerpoint/2010/main" val="3410717024"/>
-      </p:ext>
-    </p:extLst>
-  </p:cSld>
-  <p:clrMapOvr>
-    <a:masterClrMapping/>
-  </p:clrMapOvr>
-</p:sld>
-</file>
-
-<file path=ppt/slides/slide8.xml><?xml version="1.0" encoding="utf-8"?>
-<p:sld xmlns:a="http://schemas.openxmlformats.org/drawingml/2006/main" xmlns:r="http://schemas.openxmlformats.org/officeDocument/2006/relationships" xmlns:p="http://schemas.openxmlformats.org/presentationml/2006/main">
-  <p:cSld>
-    <p:spTree>
-      <p:nvGrpSpPr>
-        <p:cNvPr id="1" name=""/>
-        <p:cNvGrpSpPr/>
-        <p:nvPr/>
-      </p:nvGrpSpPr>
-      <p:grpSpPr>
-        <a:xfrm>
-          <a:off x="0" y="0"/>
-          <a:ext cx="0" cy="0"/>
-          <a:chOff x="0" y="0"/>
-          <a:chExt cx="0" cy="0"/>
-        </a:xfrm>
-      </p:grpSpPr>
-      <p:sp>
-        <p:nvSpPr>
-          <p:cNvPr id="2" name="Titel 1">
-            <a:extLst>
-              <a:ext uri="{FF2B5EF4-FFF2-40B4-BE49-F238E27FC236}">
-                <a16:creationId xmlns:a16="http://schemas.microsoft.com/office/drawing/2014/main" id="{090EAC2A-5706-C65F-88DE-7DA698789FBD}"/>
-              </a:ext>
-            </a:extLst>
-          </p:cNvPr>
-          <p:cNvSpPr>
-            <a:spLocks noGrp="1"/>
-          </p:cNvSpPr>
-          <p:nvPr>
-            <p:ph type="title"/>
-          </p:nvPr>
-        </p:nvSpPr>
-        <p:spPr>
-          <a:xfrm>
-            <a:off x="838200" y="365125"/>
-            <a:ext cx="8161800" cy="823595"/>
-          </a:xfrm>
-        </p:spPr>
-        <p:txBody>
-          <a:bodyPr/>
-          <a:lstStyle/>
-          <a:p>
-            <a:r>
-              <a:rPr lang="en-US" dirty="0"/>
-              <a:t>Hypothesis H1: Supported</a:t>
-            </a:r>
-          </a:p>
-        </p:txBody>
-      </p:sp>
-      <p:sp>
-        <p:nvSpPr>
-          <p:cNvPr id="3" name="Inhaltsplatzhalter 2">
-            <a:extLst>
-              <a:ext uri="{FF2B5EF4-FFF2-40B4-BE49-F238E27FC236}">
-                <a16:creationId xmlns:a16="http://schemas.microsoft.com/office/drawing/2014/main" id="{395D3EC4-46A1-A411-92FC-D6D6575EFB2C}"/>
-              </a:ext>
-            </a:extLst>
-          </p:cNvPr>
-          <p:cNvSpPr>
-            <a:spLocks noGrp="1"/>
-          </p:cNvSpPr>
-          <p:nvPr>
-            <p:ph idx="1"/>
-          </p:nvPr>
-        </p:nvSpPr>
-        <p:spPr>
-          <a:xfrm>
-            <a:off x="838200" y="1691639"/>
-            <a:ext cx="10515600" cy="4485323"/>
-          </a:xfrm>
-        </p:spPr>
-        <p:txBody>
-          <a:bodyPr>
-            <a:normAutofit fontScale="85000" lnSpcReduction="10000"/>
-          </a:bodyPr>
-          <a:lstStyle/>
-          <a:p>
-            <a:pPr marL="0" indent="0" algn="ctr">
-              <a:lnSpc>
-                <a:spcPct val="150000"/>
-              </a:lnSpc>
-              <a:buNone/>
-            </a:pPr>
-            <a:r>
-              <a:rPr lang="en-US" sz="2600" dirty="0"/>
-              <a:t>Shock Score -&gt; Net Risk Stance</a:t>
-            </a:r>
-          </a:p>
-          <a:p>
-            <a:pPr marL="0" indent="0" algn="ctr">
-              <a:lnSpc>
-                <a:spcPct val="150000"/>
-              </a:lnSpc>
-              <a:buNone/>
-            </a:pPr>
-            <a:endParaRPr lang="en-US" sz="2600" dirty="0"/>
-          </a:p>
           <a:p>
             <a:pPr marL="0" indent="0">
               <a:lnSpc>
                 <a:spcPct val="150000"/>
               </a:lnSpc>
+              <a:buFont typeface="Arial" panose="020B0604020202020204" pitchFamily="34" charset="0"/>
               <a:buNone/>
             </a:pPr>
-            <a:r>
-              <a:rPr lang="en-US" sz="2600" dirty="0"/>
-              <a:t>The Null H1 is rejected at the 5 percent significance level.</a:t>
-            </a:r>
-          </a:p>
-          <a:p>
-            <a:pPr>
-              <a:lnSpc>
-                <a:spcPct val="150000"/>
-              </a:lnSpc>
-            </a:pPr>
-            <a:r>
-              <a:rPr lang="en-US" sz="2600" dirty="0"/>
-              <a:t>Shock Score coefficient = -0.4874 (p = 0.0015), a statistically significant negative effect.</a:t>
-            </a:r>
-          </a:p>
-          <a:p>
-            <a:pPr>
-              <a:lnSpc>
-                <a:spcPct val="150000"/>
-              </a:lnSpc>
-            </a:pPr>
-            <a:r>
-              <a:rPr lang="en-US" sz="2600" dirty="0"/>
-              <a:t>Higher shock intensity is systematically associated with a risk-reducing shift in Net Risk Stance.</a:t>
-            </a:r>
-          </a:p>
-          <a:p>
-            <a:pPr>
-              <a:lnSpc>
-                <a:spcPct val="150000"/>
-              </a:lnSpc>
-            </a:pPr>
-            <a:r>
-              <a:rPr lang="en-US" sz="2600" dirty="0"/>
-              <a:t>The result is consistent with behavioral finance theory.</a:t>
-            </a:r>
-          </a:p>
-        </p:txBody>
-      </p:sp>
-    </p:spTree>
-    <p:extLst>
-      <p:ext uri="{BB962C8B-B14F-4D97-AF65-F5344CB8AC3E}">
-        <p14:creationId xmlns:p14="http://schemas.microsoft.com/office/powerpoint/2010/main" val="3410717024"/>
-      </p:ext>
-    </p:extLst>
-  </p:cSld>
-  <p:clrMapOvr>
-    <a:masterClrMapping/>
-  </p:clrMapOvr>
-</p:sld>
-</file>
-
-<file path=ppt/slides/slide9.xml><?xml version="1.0" encoding="utf-8"?>
-<p:sld xmlns:a="http://schemas.openxmlformats.org/drawingml/2006/main" xmlns:r="http://schemas.openxmlformats.org/officeDocument/2006/relationships" xmlns:p="http://schemas.openxmlformats.org/presentationml/2006/main">
-  <p:cSld>
-    <p:spTree>
-      <p:nvGrpSpPr>
-        <p:cNvPr id="1" name=""/>
-        <p:cNvGrpSpPr/>
-        <p:nvPr/>
-      </p:nvGrpSpPr>
-      <p:grpSpPr>
-        <a:xfrm>
-          <a:off x="0" y="0"/>
-          <a:ext cx="0" cy="0"/>
-          <a:chOff x="0" y="0"/>
-          <a:chExt cx="0" cy="0"/>
-        </a:xfrm>
-      </p:grpSpPr>
-      <p:sp>
-        <p:nvSpPr>
-          <p:cNvPr id="2" name="Titel 1">
-            <a:extLst>
-              <a:ext uri="{FF2B5EF4-FFF2-40B4-BE49-F238E27FC236}">
-                <a16:creationId xmlns:a16="http://schemas.microsoft.com/office/drawing/2014/main" id="{090EAC2A-5706-C65F-88DE-7DA698789FBD}"/>
-              </a:ext>
-            </a:extLst>
-          </p:cNvPr>
-          <p:cNvSpPr>
-            <a:spLocks noGrp="1"/>
-          </p:cNvSpPr>
-          <p:nvPr>
-            <p:ph type="title"/>
-          </p:nvPr>
-        </p:nvSpPr>
-        <p:spPr>
-          <a:xfrm>
-            <a:off x="838200" y="365125"/>
-            <a:ext cx="8161800" cy="823595"/>
-          </a:xfrm>
-        </p:spPr>
-        <p:txBody>
-          <a:bodyPr/>
-          <a:lstStyle/>
-          <a:p>
-            <a:r>
-              <a:rPr lang="en-US" dirty="0"/>
-              <a:t>Finding 2: H2 Not Supported</a:t>
-            </a:r>
-          </a:p>
-        </p:txBody>
-      </p:sp>
-      <p:sp>
-        <p:nvSpPr>
-          <p:cNvPr id="3" name="Inhaltsplatzhalter 2">
-            <a:extLst>
-              <a:ext uri="{FF2B5EF4-FFF2-40B4-BE49-F238E27FC236}">
-                <a16:creationId xmlns:a16="http://schemas.microsoft.com/office/drawing/2014/main" id="{395D3EC4-46A1-A411-92FC-D6D6575EFB2C}"/>
-              </a:ext>
-            </a:extLst>
-          </p:cNvPr>
-          <p:cNvSpPr>
-            <a:spLocks noGrp="1"/>
-          </p:cNvSpPr>
-          <p:nvPr>
-            <p:ph idx="1"/>
-          </p:nvPr>
-        </p:nvSpPr>
-        <p:spPr>
-          <a:xfrm>
-            <a:off x="838200" y="1722120"/>
-            <a:ext cx="10515600" cy="4363402"/>
-          </a:xfrm>
-        </p:spPr>
-        <p:txBody>
-          <a:bodyPr>
-            <a:normAutofit fontScale="85000" lnSpcReduction="10000"/>
-          </a:bodyPr>
-          <a:lstStyle/>
-          <a:p>
-            <a:pPr marL="0" indent="0" algn="ctr">
-              <a:lnSpc>
-                <a:spcPct val="150000"/>
-              </a:lnSpc>
-              <a:buNone/>
-            </a:pPr>
-            <a:r>
-              <a:rPr lang="en-US" sz="2600" dirty="0"/>
-              <a:t>Treatment -&gt; Portfolio Return</a:t>
-            </a:r>
+            <a:endParaRPr lang="en-US" sz="1000" dirty="0">
+              <a:solidFill>
+                <a:schemeClr val="bg1"/>
+              </a:solidFill>
+            </a:endParaRPr>
           </a:p>
           <a:p>
             <a:pPr marL="0" indent="0">
               <a:lnSpc>
                 <a:spcPct val="150000"/>
               </a:lnSpc>
+              <a:buFont typeface="Arial" panose="020B0604020202020204" pitchFamily="34" charset="0"/>
               <a:buNone/>
             </a:pPr>
-            <a:endParaRPr lang="en-US" sz="2600" dirty="0"/>
-          </a:p>
+            <a:endParaRPr lang="en-US" sz="1000" dirty="0">
+              <a:solidFill>
+                <a:schemeClr val="bg1"/>
+              </a:solidFill>
+            </a:endParaRPr>
+          </a:p>
+        </p:txBody>
+      </p:sp>
+      <p:pic>
+        <p:nvPicPr>
+          <p:cNvPr id="11" name="Content Placeholder 10">
+            <a:extLst>
+              <a:ext uri="{FF2B5EF4-FFF2-40B4-BE49-F238E27FC236}">
+                <a16:creationId xmlns:a16="http://schemas.microsoft.com/office/drawing/2014/main" id="{05FAD41C-F53F-E150-3D29-2598295F5D6E}"/>
+              </a:ext>
+            </a:extLst>
+          </p:cNvPr>
+          <p:cNvPicPr>
+            <a:picLocks noGrp="1" noChangeAspect="1"/>
+          </p:cNvPicPr>
+          <p:nvPr>
+            <p:ph idx="1"/>
+          </p:nvPr>
+        </p:nvPicPr>
+        <p:blipFill>
+          <a:blip r:embed="rId2"/>
+          <a:stretch>
+            <a:fillRect/>
+          </a:stretch>
+        </p:blipFill>
+        <p:spPr>
+          <a:xfrm>
+            <a:off x="1784006" y="1106149"/>
+            <a:ext cx="3073744" cy="5455598"/>
+          </a:xfrm>
+        </p:spPr>
+      </p:pic>
+      <p:sp>
+        <p:nvSpPr>
+          <p:cNvPr id="7" name="Inhaltsplatzhalter 2">
+            <a:extLst>
+              <a:ext uri="{FF2B5EF4-FFF2-40B4-BE49-F238E27FC236}">
+                <a16:creationId xmlns:a16="http://schemas.microsoft.com/office/drawing/2014/main" id="{75F87BF3-6194-F21B-AFD3-1046D24CFB3E}"/>
+              </a:ext>
+            </a:extLst>
+          </p:cNvPr>
+          <p:cNvSpPr txBox="1">
+            <a:spLocks/>
+          </p:cNvSpPr>
+          <p:nvPr/>
+        </p:nvSpPr>
+        <p:spPr>
+          <a:xfrm>
+            <a:off x="5198745" y="5762113"/>
+            <a:ext cx="3881120" cy="1048397"/>
+          </a:xfrm>
+          <a:prstGeom prst="rect">
+            <a:avLst/>
+          </a:prstGeom>
+        </p:spPr>
+        <p:txBody>
+          <a:bodyPr vert="horz" lIns="91440" tIns="45720" rIns="91440" bIns="45720" rtlCol="0">
+            <a:normAutofit/>
+          </a:bodyPr>
+          <a:lstStyle>
+            <a:lvl1pPr marL="228600" indent="-228600" algn="l" defTabSz="914400" rtl="0" eaLnBrk="1" latinLnBrk="0" hangingPunct="1">
+              <a:lnSpc>
+                <a:spcPct val="90000"/>
+              </a:lnSpc>
+              <a:spcBef>
+                <a:spcPts val="1000"/>
+              </a:spcBef>
+              <a:buFont typeface="Arial" panose="020B0604020202020204" pitchFamily="34" charset="0"/>
+              <a:buChar char="•"/>
+              <a:defRPr sz="2800" kern="1200">
+                <a:solidFill>
+                  <a:schemeClr val="tx1"/>
+                </a:solidFill>
+                <a:latin typeface="+mn-lt"/>
+                <a:ea typeface="+mn-ea"/>
+                <a:cs typeface="+mn-cs"/>
+              </a:defRPr>
+            </a:lvl1pPr>
+            <a:lvl2pPr marL="685800" indent="-228600" algn="l" defTabSz="914400" rtl="0" eaLnBrk="1" latinLnBrk="0" hangingPunct="1">
+              <a:lnSpc>
+                <a:spcPct val="90000"/>
+              </a:lnSpc>
+              <a:spcBef>
+                <a:spcPts val="500"/>
+              </a:spcBef>
+              <a:buFont typeface="Arial" panose="020B0604020202020204" pitchFamily="34" charset="0"/>
+              <a:buChar char="•"/>
+              <a:defRPr sz="2400" kern="1200">
+                <a:solidFill>
+                  <a:schemeClr val="tx1"/>
+                </a:solidFill>
+                <a:latin typeface="+mn-lt"/>
+                <a:ea typeface="+mn-ea"/>
+                <a:cs typeface="+mn-cs"/>
+              </a:defRPr>
+            </a:lvl2pPr>
+            <a:lvl3pPr marL="1143000" indent="-228600" algn="l" defTabSz="914400" rtl="0" eaLnBrk="1" latinLnBrk="0" hangingPunct="1">
+              <a:lnSpc>
+                <a:spcPct val="90000"/>
+              </a:lnSpc>
+              <a:spcBef>
+                <a:spcPts val="500"/>
+              </a:spcBef>
+              <a:buFont typeface="Arial" panose="020B0604020202020204" pitchFamily="34" charset="0"/>
+              <a:buChar char="•"/>
+              <a:defRPr sz="2000" kern="1200">
+                <a:solidFill>
+                  <a:schemeClr val="tx1"/>
+                </a:solidFill>
+                <a:latin typeface="+mn-lt"/>
+                <a:ea typeface="+mn-ea"/>
+                <a:cs typeface="+mn-cs"/>
+              </a:defRPr>
+            </a:lvl3pPr>
+            <a:lvl4pPr marL="1600200" indent="-228600" algn="l" defTabSz="914400" rtl="0" eaLnBrk="1" latinLnBrk="0" hangingPunct="1">
+              <a:lnSpc>
+                <a:spcPct val="90000"/>
+              </a:lnSpc>
+              <a:spcBef>
+                <a:spcPts val="500"/>
+              </a:spcBef>
+              <a:buFont typeface="Arial" panose="020B0604020202020204" pitchFamily="34" charset="0"/>
+              <a:buChar char="•"/>
+              <a:defRPr sz="1800" kern="1200">
+                <a:solidFill>
+                  <a:schemeClr val="tx1"/>
+                </a:solidFill>
+                <a:latin typeface="+mn-lt"/>
+                <a:ea typeface="+mn-ea"/>
+                <a:cs typeface="+mn-cs"/>
+              </a:defRPr>
+            </a:lvl4pPr>
+            <a:lvl5pPr marL="2057400" indent="-228600" algn="l" defTabSz="914400" rtl="0" eaLnBrk="1" latinLnBrk="0" hangingPunct="1">
+              <a:lnSpc>
+                <a:spcPct val="90000"/>
+              </a:lnSpc>
+              <a:spcBef>
+                <a:spcPts val="500"/>
+              </a:spcBef>
+              <a:buFont typeface="Arial" panose="020B0604020202020204" pitchFamily="34" charset="0"/>
+              <a:buChar char="•"/>
+              <a:defRPr sz="1800" kern="1200">
+                <a:solidFill>
+                  <a:schemeClr val="tx1"/>
+                </a:solidFill>
+                <a:latin typeface="+mn-lt"/>
+                <a:ea typeface="+mn-ea"/>
+                <a:cs typeface="+mn-cs"/>
+              </a:defRPr>
+            </a:lvl5pPr>
+            <a:lvl6pPr marL="2514600" indent="-228600" algn="l" defTabSz="914400" rtl="0" eaLnBrk="1" latinLnBrk="0" hangingPunct="1">
+              <a:lnSpc>
+                <a:spcPct val="90000"/>
+              </a:lnSpc>
+              <a:spcBef>
+                <a:spcPts val="500"/>
+              </a:spcBef>
+              <a:buFont typeface="Arial" panose="020B0604020202020204" pitchFamily="34" charset="0"/>
+              <a:buChar char="•"/>
+              <a:defRPr sz="1800" kern="1200">
+                <a:solidFill>
+                  <a:schemeClr val="tx1"/>
+                </a:solidFill>
+                <a:latin typeface="+mn-lt"/>
+                <a:ea typeface="+mn-ea"/>
+                <a:cs typeface="+mn-cs"/>
+              </a:defRPr>
+            </a:lvl6pPr>
+            <a:lvl7pPr marL="2971800" indent="-228600" algn="l" defTabSz="914400" rtl="0" eaLnBrk="1" latinLnBrk="0" hangingPunct="1">
+              <a:lnSpc>
+                <a:spcPct val="90000"/>
+              </a:lnSpc>
+              <a:spcBef>
+                <a:spcPts val="500"/>
+              </a:spcBef>
+              <a:buFont typeface="Arial" panose="020B0604020202020204" pitchFamily="34" charset="0"/>
+              <a:buChar char="•"/>
+              <a:defRPr sz="1800" kern="1200">
+                <a:solidFill>
+                  <a:schemeClr val="tx1"/>
+                </a:solidFill>
+                <a:latin typeface="+mn-lt"/>
+                <a:ea typeface="+mn-ea"/>
+                <a:cs typeface="+mn-cs"/>
+              </a:defRPr>
+            </a:lvl7pPr>
+            <a:lvl8pPr marL="3429000" indent="-228600" algn="l" defTabSz="914400" rtl="0" eaLnBrk="1" latinLnBrk="0" hangingPunct="1">
+              <a:lnSpc>
+                <a:spcPct val="90000"/>
+              </a:lnSpc>
+              <a:spcBef>
+                <a:spcPts val="500"/>
+              </a:spcBef>
+              <a:buFont typeface="Arial" panose="020B0604020202020204" pitchFamily="34" charset="0"/>
+              <a:buChar char="•"/>
+              <a:defRPr sz="1800" kern="1200">
+                <a:solidFill>
+                  <a:schemeClr val="tx1"/>
+                </a:solidFill>
+                <a:latin typeface="+mn-lt"/>
+                <a:ea typeface="+mn-ea"/>
+                <a:cs typeface="+mn-cs"/>
+              </a:defRPr>
+            </a:lvl8pPr>
+            <a:lvl9pPr marL="3886200" indent="-228600" algn="l" defTabSz="914400" rtl="0" eaLnBrk="1" latinLnBrk="0" hangingPunct="1">
+              <a:lnSpc>
+                <a:spcPct val="90000"/>
+              </a:lnSpc>
+              <a:spcBef>
+                <a:spcPts val="500"/>
+              </a:spcBef>
+              <a:buFont typeface="Arial" panose="020B0604020202020204" pitchFamily="34" charset="0"/>
+              <a:buChar char="•"/>
+              <a:defRPr sz="1800" kern="1200">
+                <a:solidFill>
+                  <a:schemeClr val="tx1"/>
+                </a:solidFill>
+                <a:latin typeface="+mn-lt"/>
+                <a:ea typeface="+mn-ea"/>
+                <a:cs typeface="+mn-cs"/>
+              </a:defRPr>
+            </a:lvl9pPr>
+          </a:lstStyle>
           <a:p>
             <a:pPr marL="0" indent="0">
               <a:lnSpc>
                 <a:spcPct val="150000"/>
               </a:lnSpc>
+              <a:buFont typeface="Arial" panose="020B0604020202020204" pitchFamily="34" charset="0"/>
               <a:buNone/>
             </a:pPr>
             <a:r>
-              <a:rPr lang="en-US" sz="2600" dirty="0"/>
-              <a:t>The null H2 is not rejected:</a:t>
-            </a:r>
-          </a:p>
-          <a:p>
-            <a:pPr>
+              <a:rPr lang="en-US" sz="1000" dirty="0">
+                <a:solidFill>
+                  <a:schemeClr val="bg1"/>
+                </a:solidFill>
+              </a:rPr>
+              <a:t>Response section proposes options to change portfolio weights. </a:t>
+            </a:r>
+          </a:p>
+          <a:p>
+            <a:pPr marL="0" indent="0">
               <a:lnSpc>
                 <a:spcPct val="150000"/>
               </a:lnSpc>
+              <a:buFont typeface="Arial" panose="020B0604020202020204" pitchFamily="34" charset="0"/>
+              <a:buNone/>
             </a:pPr>
-            <a:r>
-              <a:rPr lang="en-US" sz="2600" dirty="0"/>
-              <a:t>Dashboard treatment effect = -0.1584 (p = 0.7428), not statistically significant.</a:t>
-            </a:r>
-          </a:p>
-          <a:p>
-            <a:pPr>
+            <a:endParaRPr lang="en-US" sz="1000" dirty="0">
+              <a:solidFill>
+                <a:schemeClr val="bg1"/>
+              </a:solidFill>
+            </a:endParaRPr>
+          </a:p>
+          <a:p>
+            <a:pPr marL="0" indent="0">
               <a:lnSpc>
                 <a:spcPct val="150000"/>
               </a:lnSpc>
+              <a:buFont typeface="Arial" panose="020B0604020202020204" pitchFamily="34" charset="0"/>
+              <a:buNone/>
             </a:pPr>
-            <a:r>
-              <a:rPr lang="en-US" sz="2600" dirty="0"/>
-              <a:t>The estimate is directionally consistent with the expected moderation mechanism.</a:t>
-            </a:r>
-          </a:p>
-          <a:p>
-            <a:pPr>
-              <a:lnSpc>
-                <a:spcPct val="150000"/>
-              </a:lnSpc>
-            </a:pPr>
-            <a:r>
-              <a:rPr lang="en-US" sz="2600" dirty="0"/>
-              <a:t>The non-significant result is attributed primarily to limited statistical power, not to an absence of effect.</a:t>
-            </a:r>
+            <a:endParaRPr lang="en-US" sz="1000" dirty="0">
+              <a:solidFill>
+                <a:schemeClr val="bg1"/>
+              </a:solidFill>
+            </a:endParaRPr>
           </a:p>
         </p:txBody>
       </p:sp>
@@ -17372,7 +20191,7 @@
 
 <file path=ppt/webextensions/taskpanes.xml><?xml version="1.0" encoding="utf-8"?>
 <wetp:taskpanes xmlns:wetp="http://schemas.microsoft.com/office/webextensions/taskpanes/2010/11">
-  <wetp:taskpane dockstate="right" visibility="0" width="626" row="1">
+  <wetp:taskpane dockstate="right" visibility="0" width="438" row="0">
     <wetp:webextensionref xmlns:r="http://schemas.openxmlformats.org/officeDocument/2006/relationships" r:id="rId1"/>
   </wetp:taskpane>
 </wetp:taskpanes>
